--- a/slides/flsg/6-sampling-flsg.pptx
+++ b/slides/flsg/6-sampling-flsg.pptx
@@ -593,7 +593,7 @@
           <a:p>
             <a:fld id="{8CF15C98-C603-7C4D-997E-2B4A9996FEBD}" type="datetimeFigureOut">
               <a:rPr lang="en-US" smtClean="0"/>
-              <a:t>5/8/26</a:t>
+              <a:t>5/15/26</a:t>
             </a:fld>
             <a:endParaRPr lang="en-US"/>
           </a:p>
@@ -1106,10 +1106,7 @@
           <a:bodyPr/>
           <a:lstStyle/>
           <a:p>
-            <a:r>
-              <a:rPr lang="en-US" dirty="0"/>
-              <a:t>For this we need to discuss neural networks</a:t>
-            </a:r>
+            <a:endParaRPr lang="en-US" dirty="0"/>
           </a:p>
         </p:txBody>
       </p:sp>
@@ -1130,7 +1127,7 @@
           <a:p>
             <a:fld id="{AC8802D9-2461-2B4C-ADAF-E58436D37475}" type="slidenum">
               <a:rPr lang="en-US" smtClean="0"/>
-              <a:t>4</a:t>
+              <a:t>2</a:t>
             </a:fld>
             <a:endParaRPr lang="en-US"/>
           </a:p>
@@ -1139,7 +1136,7 @@
     </p:spTree>
     <p:extLst>
       <p:ext uri="{BB962C8B-B14F-4D97-AF65-F5344CB8AC3E}">
-        <p14:creationId xmlns:p14="http://schemas.microsoft.com/office/powerpoint/2010/main" val="3938706200"/>
+        <p14:creationId xmlns:p14="http://schemas.microsoft.com/office/powerpoint/2010/main" val="2260516039"/>
       </p:ext>
     </p:extLst>
   </p:cSld>
@@ -1194,88 +1191,9 @@
           <a:lstStyle/>
           <a:p>
             <a:r>
-              <a:rPr lang="en-GB" sz="1200" b="0" i="0" kern="1200" dirty="0">
-                <a:solidFill>
-                  <a:schemeClr val="tx1"/>
-                </a:solidFill>
-                <a:effectLst/>
-                <a:latin typeface="+mn-lt"/>
-                <a:ea typeface="+mn-ea"/>
-                <a:cs typeface="+mn-cs"/>
-              </a:rPr>
-              <a:t>The Pile is a large, open-source text dataset created by </a:t>
-            </a:r>
-            <a:r>
-              <a:rPr lang="en-GB" sz="1200" b="0" i="0" kern="1200" dirty="0" err="1">
-                <a:solidFill>
-                  <a:schemeClr val="tx1"/>
-                </a:solidFill>
-                <a:effectLst/>
-                <a:latin typeface="+mn-lt"/>
-                <a:ea typeface="+mn-ea"/>
-                <a:cs typeface="+mn-cs"/>
-              </a:rPr>
-              <a:t>EleutherAI</a:t>
-            </a:r>
-            <a:r>
-              <a:rPr lang="en-GB" sz="1200" b="0" i="0" kern="1200" dirty="0">
-                <a:solidFill>
-                  <a:schemeClr val="tx1"/>
-                </a:solidFill>
-                <a:effectLst/>
-                <a:latin typeface="+mn-lt"/>
-                <a:ea typeface="+mn-ea"/>
-                <a:cs typeface="+mn-cs"/>
-              </a:rPr>
-              <a:t>, designed specifically for training large language models.</a:t>
-            </a:r>
-          </a:p>
-          <a:p>
-            <a:endParaRPr lang="en-GB" sz="1200" b="0" i="0" kern="1200" dirty="0">
-              <a:solidFill>
-                <a:schemeClr val="tx1"/>
-              </a:solidFill>
-              <a:effectLst/>
-              <a:latin typeface="+mn-lt"/>
-              <a:ea typeface="+mn-ea"/>
-              <a:cs typeface="+mn-cs"/>
-            </a:endParaRPr>
-          </a:p>
-          <a:p>
-            <a:r>
-              <a:rPr lang="en-GB" sz="1200" b="0" i="0" kern="1200" dirty="0">
-                <a:solidFill>
-                  <a:schemeClr val="tx1"/>
-                </a:solidFill>
-                <a:effectLst/>
-                <a:latin typeface="+mn-lt"/>
-                <a:ea typeface="+mn-ea"/>
-                <a:cs typeface="+mn-cs"/>
-              </a:rPr>
-              <a:t>Llama 3 ranges from 8B, 70B to 405B</a:t>
-            </a:r>
-          </a:p>
-          <a:p>
-            <a:endParaRPr lang="en-GB" sz="1200" b="0" i="0" kern="1200" dirty="0">
-              <a:solidFill>
-                <a:schemeClr val="tx1"/>
-              </a:solidFill>
-              <a:effectLst/>
-              <a:latin typeface="+mn-lt"/>
-              <a:ea typeface="+mn-ea"/>
-              <a:cs typeface="+mn-cs"/>
-            </a:endParaRPr>
-          </a:p>
-          <a:p>
-            <a:endParaRPr lang="en-GB" sz="1200" b="0" i="0" kern="1200" dirty="0">
-              <a:solidFill>
-                <a:schemeClr val="tx1"/>
-              </a:solidFill>
-              <a:effectLst/>
-              <a:latin typeface="+mn-lt"/>
-              <a:ea typeface="+mn-ea"/>
-              <a:cs typeface="+mn-cs"/>
-            </a:endParaRPr>
+              <a:rPr lang="en-US" dirty="0"/>
+              <a:t>For this we need to discuss neural networks</a:t>
+            </a:r>
           </a:p>
         </p:txBody>
       </p:sp>
@@ -1296,6 +1214,256 @@
           <a:p>
             <a:fld id="{AC8802D9-2461-2B4C-ADAF-E58436D37475}" type="slidenum">
               <a:rPr lang="en-US" smtClean="0"/>
+              <a:t>4</a:t>
+            </a:fld>
+            <a:endParaRPr lang="en-US"/>
+          </a:p>
+        </p:txBody>
+      </p:sp>
+    </p:spTree>
+    <p:extLst>
+      <p:ext uri="{BB962C8B-B14F-4D97-AF65-F5344CB8AC3E}">
+        <p14:creationId xmlns:p14="http://schemas.microsoft.com/office/powerpoint/2010/main" val="3938706200"/>
+      </p:ext>
+    </p:extLst>
+  </p:cSld>
+  <p:clrMapOvr>
+    <a:masterClrMapping/>
+  </p:clrMapOvr>
+</p:notes>
+</file>
+
+<file path=ppt/notesSlides/notesSlide4.xml><?xml version="1.0" encoding="utf-8"?>
+<p:notes xmlns:a="http://schemas.openxmlformats.org/drawingml/2006/main" xmlns:r="http://schemas.openxmlformats.org/officeDocument/2006/relationships" xmlns:p="http://schemas.openxmlformats.org/presentationml/2006/main">
+  <p:cSld>
+    <p:spTree>
+      <p:nvGrpSpPr>
+        <p:cNvPr id="1" name=""/>
+        <p:cNvGrpSpPr/>
+        <p:nvPr/>
+      </p:nvGrpSpPr>
+      <p:grpSpPr>
+        <a:xfrm>
+          <a:off x="0" y="0"/>
+          <a:ext cx="0" cy="0"/>
+          <a:chOff x="0" y="0"/>
+          <a:chExt cx="0" cy="0"/>
+        </a:xfrm>
+      </p:grpSpPr>
+      <p:sp>
+        <p:nvSpPr>
+          <p:cNvPr id="2" name="Slide Image Placeholder 1"/>
+          <p:cNvSpPr>
+            <a:spLocks noGrp="1" noRot="1" noChangeAspect="1"/>
+          </p:cNvSpPr>
+          <p:nvPr>
+            <p:ph type="sldImg"/>
+          </p:nvPr>
+        </p:nvSpPr>
+        <p:spPr/>
+      </p:sp>
+      <p:sp>
+        <p:nvSpPr>
+          <p:cNvPr id="3" name="Notes Placeholder 2"/>
+          <p:cNvSpPr>
+            <a:spLocks noGrp="1"/>
+          </p:cNvSpPr>
+          <p:nvPr>
+            <p:ph type="body" idx="1"/>
+          </p:nvPr>
+        </p:nvSpPr>
+        <p:spPr/>
+        <p:txBody>
+          <a:bodyPr/>
+          <a:lstStyle/>
+          <a:p>
+            <a:endParaRPr lang="en-US" dirty="0"/>
+          </a:p>
+        </p:txBody>
+      </p:sp>
+      <p:sp>
+        <p:nvSpPr>
+          <p:cNvPr id="4" name="Slide Number Placeholder 3"/>
+          <p:cNvSpPr>
+            <a:spLocks noGrp="1"/>
+          </p:cNvSpPr>
+          <p:nvPr>
+            <p:ph type="sldNum" sz="quarter" idx="5"/>
+          </p:nvPr>
+        </p:nvSpPr>
+        <p:spPr/>
+        <p:txBody>
+          <a:bodyPr/>
+          <a:lstStyle/>
+          <a:p>
+            <a:fld id="{AC8802D9-2461-2B4C-ADAF-E58436D37475}" type="slidenum">
+              <a:rPr lang="en-US" smtClean="0"/>
+              <a:t>15</a:t>
+            </a:fld>
+            <a:endParaRPr lang="en-US"/>
+          </a:p>
+        </p:txBody>
+      </p:sp>
+    </p:spTree>
+    <p:extLst>
+      <p:ext uri="{BB962C8B-B14F-4D97-AF65-F5344CB8AC3E}">
+        <p14:creationId xmlns:p14="http://schemas.microsoft.com/office/powerpoint/2010/main" val="1985649777"/>
+      </p:ext>
+    </p:extLst>
+  </p:cSld>
+  <p:clrMapOvr>
+    <a:masterClrMapping/>
+  </p:clrMapOvr>
+</p:notes>
+</file>
+
+<file path=ppt/notesSlides/notesSlide5.xml><?xml version="1.0" encoding="utf-8"?>
+<p:notes xmlns:a="http://schemas.openxmlformats.org/drawingml/2006/main" xmlns:r="http://schemas.openxmlformats.org/officeDocument/2006/relationships" xmlns:p="http://schemas.openxmlformats.org/presentationml/2006/main">
+  <p:cSld>
+    <p:spTree>
+      <p:nvGrpSpPr>
+        <p:cNvPr id="1" name=""/>
+        <p:cNvGrpSpPr/>
+        <p:nvPr/>
+      </p:nvGrpSpPr>
+      <p:grpSpPr>
+        <a:xfrm>
+          <a:off x="0" y="0"/>
+          <a:ext cx="0" cy="0"/>
+          <a:chOff x="0" y="0"/>
+          <a:chExt cx="0" cy="0"/>
+        </a:xfrm>
+      </p:grpSpPr>
+      <p:sp>
+        <p:nvSpPr>
+          <p:cNvPr id="2" name="Slide Image Placeholder 1"/>
+          <p:cNvSpPr>
+            <a:spLocks noGrp="1" noRot="1" noChangeAspect="1"/>
+          </p:cNvSpPr>
+          <p:nvPr>
+            <p:ph type="sldImg"/>
+          </p:nvPr>
+        </p:nvSpPr>
+        <p:spPr/>
+      </p:sp>
+      <p:sp>
+        <p:nvSpPr>
+          <p:cNvPr id="3" name="Notes Placeholder 2"/>
+          <p:cNvSpPr>
+            <a:spLocks noGrp="1"/>
+          </p:cNvSpPr>
+          <p:nvPr>
+            <p:ph type="body" idx="1"/>
+          </p:nvPr>
+        </p:nvSpPr>
+        <p:spPr/>
+        <p:txBody>
+          <a:bodyPr/>
+          <a:lstStyle/>
+          <a:p>
+            <a:r>
+              <a:rPr lang="en-GB" sz="1200" b="0" i="0" kern="1200" dirty="0">
+                <a:solidFill>
+                  <a:schemeClr val="tx1"/>
+                </a:solidFill>
+                <a:effectLst/>
+                <a:latin typeface="+mn-lt"/>
+                <a:ea typeface="+mn-ea"/>
+                <a:cs typeface="+mn-cs"/>
+              </a:rPr>
+              <a:t>The Pile is a large, open-source text dataset created by </a:t>
+            </a:r>
+            <a:r>
+              <a:rPr lang="en-GB" sz="1200" b="0" i="0" kern="1200" dirty="0" err="1">
+                <a:solidFill>
+                  <a:schemeClr val="tx1"/>
+                </a:solidFill>
+                <a:effectLst/>
+                <a:latin typeface="+mn-lt"/>
+                <a:ea typeface="+mn-ea"/>
+                <a:cs typeface="+mn-cs"/>
+              </a:rPr>
+              <a:t>EleutherAI</a:t>
+            </a:r>
+            <a:r>
+              <a:rPr lang="en-GB" sz="1200" b="0" i="0" kern="1200" dirty="0">
+                <a:solidFill>
+                  <a:schemeClr val="tx1"/>
+                </a:solidFill>
+                <a:effectLst/>
+                <a:latin typeface="+mn-lt"/>
+                <a:ea typeface="+mn-ea"/>
+                <a:cs typeface="+mn-cs"/>
+              </a:rPr>
+              <a:t>, designed specifically for training large language models.</a:t>
+            </a:r>
+          </a:p>
+          <a:p>
+            <a:endParaRPr lang="en-GB" sz="1200" b="0" i="0" kern="1200" dirty="0">
+              <a:solidFill>
+                <a:schemeClr val="tx1"/>
+              </a:solidFill>
+              <a:effectLst/>
+              <a:latin typeface="+mn-lt"/>
+              <a:ea typeface="+mn-ea"/>
+              <a:cs typeface="+mn-cs"/>
+            </a:endParaRPr>
+          </a:p>
+          <a:p>
+            <a:r>
+              <a:rPr lang="en-GB" sz="1200" b="0" i="0" kern="1200" dirty="0">
+                <a:solidFill>
+                  <a:schemeClr val="tx1"/>
+                </a:solidFill>
+                <a:effectLst/>
+                <a:latin typeface="+mn-lt"/>
+                <a:ea typeface="+mn-ea"/>
+                <a:cs typeface="+mn-cs"/>
+              </a:rPr>
+              <a:t>Llama 3 ranges from 8B, 70B to 405B</a:t>
+            </a:r>
+          </a:p>
+          <a:p>
+            <a:endParaRPr lang="en-GB" sz="1200" b="0" i="0" kern="1200" dirty="0">
+              <a:solidFill>
+                <a:schemeClr val="tx1"/>
+              </a:solidFill>
+              <a:effectLst/>
+              <a:latin typeface="+mn-lt"/>
+              <a:ea typeface="+mn-ea"/>
+              <a:cs typeface="+mn-cs"/>
+            </a:endParaRPr>
+          </a:p>
+          <a:p>
+            <a:endParaRPr lang="en-GB" sz="1200" b="0" i="0" kern="1200" dirty="0">
+              <a:solidFill>
+                <a:schemeClr val="tx1"/>
+              </a:solidFill>
+              <a:effectLst/>
+              <a:latin typeface="+mn-lt"/>
+              <a:ea typeface="+mn-ea"/>
+              <a:cs typeface="+mn-cs"/>
+            </a:endParaRPr>
+          </a:p>
+        </p:txBody>
+      </p:sp>
+      <p:sp>
+        <p:nvSpPr>
+          <p:cNvPr id="4" name="Slide Number Placeholder 3"/>
+          <p:cNvSpPr>
+            <a:spLocks noGrp="1"/>
+          </p:cNvSpPr>
+          <p:nvPr>
+            <p:ph type="sldNum" sz="quarter" idx="5"/>
+          </p:nvPr>
+        </p:nvSpPr>
+        <p:spPr/>
+        <p:txBody>
+          <a:bodyPr/>
+          <a:lstStyle/>
+          <a:p>
+            <a:fld id="{AC8802D9-2461-2B4C-ADAF-E58436D37475}" type="slidenum">
+              <a:rPr lang="en-US" smtClean="0"/>
               <a:t>25</a:t>
             </a:fld>
             <a:endParaRPr lang="en-US"/>
@@ -1315,7 +1483,7 @@
 </p:notes>
 </file>
 
-<file path=ppt/notesSlides/notesSlide4.xml><?xml version="1.0" encoding="utf-8"?>
+<file path=ppt/notesSlides/notesSlide6.xml><?xml version="1.0" encoding="utf-8"?>
 <p:notes xmlns:a="http://schemas.openxmlformats.org/drawingml/2006/main" xmlns:r="http://schemas.openxmlformats.org/officeDocument/2006/relationships" xmlns:p="http://schemas.openxmlformats.org/presentationml/2006/main">
   <p:cSld>
     <p:spTree>
@@ -1581,7 +1749,7 @@
           <a:p>
             <a:fld id="{846CE7D5-CF57-46EF-B807-FDD0502418D4}" type="datetimeFigureOut">
               <a:rPr lang="en-GB" smtClean="0"/>
-              <a:t>08/05/2026</a:t>
+              <a:t>15/05/2026</a:t>
             </a:fld>
             <a:endParaRPr lang="en-GB"/>
           </a:p>
@@ -1751,7 +1919,7 @@
           <a:p>
             <a:fld id="{846CE7D5-CF57-46EF-B807-FDD0502418D4}" type="datetimeFigureOut">
               <a:rPr lang="en-GB" smtClean="0"/>
-              <a:t>08/05/2026</a:t>
+              <a:t>15/05/2026</a:t>
             </a:fld>
             <a:endParaRPr lang="en-GB"/>
           </a:p>
@@ -1931,7 +2099,7 @@
           <a:p>
             <a:fld id="{846CE7D5-CF57-46EF-B807-FDD0502418D4}" type="datetimeFigureOut">
               <a:rPr lang="en-GB" smtClean="0"/>
-              <a:t>08/05/2026</a:t>
+              <a:t>15/05/2026</a:t>
             </a:fld>
             <a:endParaRPr lang="en-GB"/>
           </a:p>
@@ -2101,7 +2269,7 @@
           <a:p>
             <a:fld id="{846CE7D5-CF57-46EF-B807-FDD0502418D4}" type="datetimeFigureOut">
               <a:rPr lang="en-GB" smtClean="0"/>
-              <a:t>08/05/2026</a:t>
+              <a:t>15/05/2026</a:t>
             </a:fld>
             <a:endParaRPr lang="en-GB"/>
           </a:p>
@@ -2347,7 +2515,7 @@
           <a:p>
             <a:fld id="{846CE7D5-CF57-46EF-B807-FDD0502418D4}" type="datetimeFigureOut">
               <a:rPr lang="en-GB" smtClean="0"/>
-              <a:t>08/05/2026</a:t>
+              <a:t>15/05/2026</a:t>
             </a:fld>
             <a:endParaRPr lang="en-GB"/>
           </a:p>
@@ -2579,7 +2747,7 @@
           <a:p>
             <a:fld id="{846CE7D5-CF57-46EF-B807-FDD0502418D4}" type="datetimeFigureOut">
               <a:rPr lang="en-GB" smtClean="0"/>
-              <a:t>08/05/2026</a:t>
+              <a:t>15/05/2026</a:t>
             </a:fld>
             <a:endParaRPr lang="en-GB"/>
           </a:p>
@@ -2946,7 +3114,7 @@
           <a:p>
             <a:fld id="{846CE7D5-CF57-46EF-B807-FDD0502418D4}" type="datetimeFigureOut">
               <a:rPr lang="en-GB" smtClean="0"/>
-              <a:t>08/05/2026</a:t>
+              <a:t>15/05/2026</a:t>
             </a:fld>
             <a:endParaRPr lang="en-GB"/>
           </a:p>
@@ -3064,7 +3232,7 @@
           <a:p>
             <a:fld id="{846CE7D5-CF57-46EF-B807-FDD0502418D4}" type="datetimeFigureOut">
               <a:rPr lang="en-GB" smtClean="0"/>
-              <a:t>08/05/2026</a:t>
+              <a:t>15/05/2026</a:t>
             </a:fld>
             <a:endParaRPr lang="en-GB"/>
           </a:p>
@@ -3159,7 +3327,7 @@
           <a:p>
             <a:fld id="{846CE7D5-CF57-46EF-B807-FDD0502418D4}" type="datetimeFigureOut">
               <a:rPr lang="en-GB" smtClean="0"/>
-              <a:t>08/05/2026</a:t>
+              <a:t>15/05/2026</a:t>
             </a:fld>
             <a:endParaRPr lang="en-GB"/>
           </a:p>
@@ -3436,7 +3604,7 @@
           <a:p>
             <a:fld id="{846CE7D5-CF57-46EF-B807-FDD0502418D4}" type="datetimeFigureOut">
               <a:rPr lang="en-GB" smtClean="0"/>
-              <a:t>08/05/2026</a:t>
+              <a:t>15/05/2026</a:t>
             </a:fld>
             <a:endParaRPr lang="en-GB"/>
           </a:p>
@@ -3693,7 +3861,7 @@
           <a:p>
             <a:fld id="{846CE7D5-CF57-46EF-B807-FDD0502418D4}" type="datetimeFigureOut">
               <a:rPr lang="en-GB" smtClean="0"/>
-              <a:t>08/05/2026</a:t>
+              <a:t>15/05/2026</a:t>
             </a:fld>
             <a:endParaRPr lang="en-GB"/>
           </a:p>
@@ -3758,9 +3926,18 @@
 <p:sldMaster xmlns:a="http://schemas.openxmlformats.org/drawingml/2006/main" xmlns:r="http://schemas.openxmlformats.org/officeDocument/2006/relationships" xmlns:p="http://schemas.openxmlformats.org/presentationml/2006/main">
   <p:cSld>
     <p:bg>
-      <p:bgRef idx="1001">
-        <a:schemeClr val="bg1"/>
-      </p:bgRef>
+      <p:bgPr>
+        <a:blipFill dpi="0" rotWithShape="1">
+          <a:blip r:embed="rId13">
+            <a:lum/>
+          </a:blip>
+          <a:srcRect/>
+          <a:stretch>
+            <a:fillRect/>
+          </a:stretch>
+        </a:blipFill>
+        <a:effectLst/>
+      </p:bgPr>
     </p:bg>
     <p:spTree>
       <p:nvGrpSpPr>
@@ -3906,7 +4083,7 @@
           <a:p>
             <a:fld id="{846CE7D5-CF57-46EF-B807-FDD0502418D4}" type="datetimeFigureOut">
               <a:rPr lang="en-GB" smtClean="0"/>
-              <a:t>08/05/2026</a:t>
+              <a:t>15/05/2026</a:t>
             </a:fld>
             <a:endParaRPr lang="en-GB"/>
           </a:p>
@@ -4297,14 +4474,6 @@
 <file path=ppt/slides/slide1.xml><?xml version="1.0" encoding="utf-8"?>
 <p:sld xmlns:a="http://schemas.openxmlformats.org/drawingml/2006/main" xmlns:r="http://schemas.openxmlformats.org/officeDocument/2006/relationships" xmlns:p="http://schemas.openxmlformats.org/presentationml/2006/main">
   <p:cSld>
-    <p:bg>
-      <p:bgPr>
-        <a:solidFill>
-          <a:schemeClr val="bg1"/>
-        </a:solidFill>
-        <a:effectLst/>
-      </p:bgPr>
-    </p:bg>
     <p:spTree>
       <p:nvGrpSpPr>
         <p:cNvPr id="1" name=""/>
@@ -4335,14 +4504,15 @@
         </p:nvPicPr>
         <p:blipFill>
           <a:blip r:embed="rId3"/>
+          <a:srcRect b="20207"/>
           <a:stretch>
             <a:fillRect/>
           </a:stretch>
         </p:blipFill>
         <p:spPr>
           <a:xfrm>
-            <a:off x="2057400" y="1942942"/>
-            <a:ext cx="8077200" cy="4058793"/>
+            <a:off x="2057400" y="1942943"/>
+            <a:ext cx="8077200" cy="3238658"/>
           </a:xfrm>
           <a:prstGeom prst="rect">
             <a:avLst/>
@@ -4471,8 +4641,8 @@
         </p:nvSpPr>
         <p:spPr>
           <a:xfrm>
-            <a:off x="0" y="3828407"/>
-            <a:ext cx="12191999" cy="3029594"/>
+            <a:off x="0" y="3828406"/>
+            <a:ext cx="12191999" cy="2375748"/>
           </a:xfrm>
           <a:prstGeom prst="rect">
             <a:avLst/>
@@ -4526,7 +4696,7 @@
         </p:nvSpPr>
         <p:spPr>
           <a:xfrm>
-            <a:off x="101600" y="6309267"/>
+            <a:off x="72103" y="5713869"/>
             <a:ext cx="6096000" cy="338554"/>
           </a:xfrm>
           <a:prstGeom prst="rect">
@@ -4547,6 +4717,9 @@
                     <a:lumMod val="75000"/>
                   </a:schemeClr>
                 </a:solidFill>
+                <a:latin typeface="CMU Serif Roman" panose="02000603000000000000" pitchFamily="2" charset="0"/>
+                <a:ea typeface="CMU Serif Roman" panose="02000603000000000000" pitchFamily="2" charset="0"/>
+                <a:cs typeface="CMU Serif Roman" panose="02000603000000000000" pitchFamily="2" charset="0"/>
               </a:rPr>
               <a:t>www.incompleteideas.net</a:t>
             </a:r>
@@ -4557,6 +4730,9 @@
                     <a:lumMod val="75000"/>
                   </a:schemeClr>
                 </a:solidFill>
+                <a:latin typeface="CMU Serif Roman" panose="02000603000000000000" pitchFamily="2" charset="0"/>
+                <a:ea typeface="CMU Serif Roman" panose="02000603000000000000" pitchFamily="2" charset="0"/>
+                <a:cs typeface="CMU Serif Roman" panose="02000603000000000000" pitchFamily="2" charset="0"/>
               </a:rPr>
               <a:t>/</a:t>
             </a:r>
@@ -4567,6 +4743,9 @@
                     <a:lumMod val="75000"/>
                   </a:schemeClr>
                 </a:solidFill>
+                <a:latin typeface="CMU Serif Roman" panose="02000603000000000000" pitchFamily="2" charset="0"/>
+                <a:ea typeface="CMU Serif Roman" panose="02000603000000000000" pitchFamily="2" charset="0"/>
+                <a:cs typeface="CMU Serif Roman" panose="02000603000000000000" pitchFamily="2" charset="0"/>
               </a:rPr>
               <a:t>IncIdeas</a:t>
             </a:r>
@@ -4577,6 +4756,9 @@
                     <a:lumMod val="75000"/>
                   </a:schemeClr>
                 </a:solidFill>
+                <a:latin typeface="CMU Serif Roman" panose="02000603000000000000" pitchFamily="2" charset="0"/>
+                <a:ea typeface="CMU Serif Roman" panose="02000603000000000000" pitchFamily="2" charset="0"/>
+                <a:cs typeface="CMU Serif Roman" panose="02000603000000000000" pitchFamily="2" charset="0"/>
               </a:rPr>
               <a:t>/</a:t>
             </a:r>
@@ -4587,6 +4769,9 @@
                     <a:lumMod val="75000"/>
                   </a:schemeClr>
                 </a:solidFill>
+                <a:latin typeface="CMU Serif Roman" panose="02000603000000000000" pitchFamily="2" charset="0"/>
+                <a:ea typeface="CMU Serif Roman" panose="02000603000000000000" pitchFamily="2" charset="0"/>
+                <a:cs typeface="CMU Serif Roman" panose="02000603000000000000" pitchFamily="2" charset="0"/>
               </a:rPr>
               <a:t>BitterLesson.html</a:t>
             </a:r>
@@ -4596,6 +4781,9 @@
                   <a:lumMod val="75000"/>
                 </a:schemeClr>
               </a:solidFill>
+              <a:latin typeface="CMU Serif Roman" panose="02000603000000000000" pitchFamily="2" charset="0"/>
+              <a:ea typeface="CMU Serif Roman" panose="02000603000000000000" pitchFamily="2" charset="0"/>
+              <a:cs typeface="CMU Serif Roman" panose="02000603000000000000" pitchFamily="2" charset="0"/>
             </a:endParaRPr>
           </a:p>
         </p:txBody>
@@ -4686,8 +4874,12 @@
           <a:lstStyle/>
           <a:p>
             <a:r>
-              <a:rPr lang="en-GB"/>
-              <a:t>The language model</a:t>
+              <a:rPr lang="en-GB" dirty="0">
+                <a:latin typeface="CMU Serif Roman" panose="02000603000000000000" pitchFamily="2" charset="0"/>
+                <a:ea typeface="CMU Serif Roman" panose="02000603000000000000" pitchFamily="2" charset="0"/>
+                <a:cs typeface="CMU Serif Roman" panose="02000603000000000000" pitchFamily="2" charset="0"/>
+              </a:rPr>
+              <a:t>The Language Model</a:t>
             </a:r>
           </a:p>
         </p:txBody>
@@ -4716,24 +4908,40 @@
           <a:lstStyle/>
           <a:p>
             <a:r>
-              <a:rPr lang="en-GB" dirty="0"/>
+              <a:rPr lang="en-GB" dirty="0">
+                <a:latin typeface="CMU Serif Roman" panose="02000603000000000000" pitchFamily="2" charset="0"/>
+                <a:ea typeface="CMU Serif Roman" panose="02000603000000000000" pitchFamily="2" charset="0"/>
+                <a:cs typeface="CMU Serif Roman" panose="02000603000000000000" pitchFamily="2" charset="0"/>
+              </a:rPr>
               <a:t>During training, it is inefficient to do this on a per token basis</a:t>
             </a:r>
           </a:p>
           <a:p>
             <a:r>
-              <a:rPr lang="en-GB" dirty="0"/>
+              <a:rPr lang="en-GB" dirty="0">
+                <a:latin typeface="CMU Serif Roman" panose="02000603000000000000" pitchFamily="2" charset="0"/>
+                <a:ea typeface="CMU Serif Roman" panose="02000603000000000000" pitchFamily="2" charset="0"/>
+                <a:cs typeface="CMU Serif Roman" panose="02000603000000000000" pitchFamily="2" charset="0"/>
+              </a:rPr>
               <a:t>Subsequent prefixes are stuffed into the model at the same time</a:t>
             </a:r>
           </a:p>
           <a:p>
-            <a:endParaRPr lang="en-GB" dirty="0"/>
+            <a:endParaRPr lang="en-GB" dirty="0">
+              <a:latin typeface="CMU Serif Roman" panose="02000603000000000000" pitchFamily="2" charset="0"/>
+              <a:ea typeface="CMU Serif Roman" panose="02000603000000000000" pitchFamily="2" charset="0"/>
+              <a:cs typeface="CMU Serif Roman" panose="02000603000000000000" pitchFamily="2" charset="0"/>
+            </a:endParaRPr>
           </a:p>
           <a:p>
             <a:pPr marL="0" indent="0">
               <a:buNone/>
             </a:pPr>
-            <a:endParaRPr lang="en-GB" dirty="0"/>
+            <a:endParaRPr lang="en-GB" dirty="0">
+              <a:latin typeface="CMU Serif Roman" panose="02000603000000000000" pitchFamily="2" charset="0"/>
+              <a:ea typeface="CMU Serif Roman" panose="02000603000000000000" pitchFamily="2" charset="0"/>
+              <a:cs typeface="CMU Serif Roman" panose="02000603000000000000" pitchFamily="2" charset="0"/>
+            </a:endParaRPr>
           </a:p>
         </p:txBody>
       </p:sp>
@@ -4752,14 +4960,14 @@
           <p:nvPr>
             <p:extLst>
               <p:ext uri="{D42A27DB-BD31-4B8C-83A1-F6EECF244321}">
-                <p14:modId xmlns:p14="http://schemas.microsoft.com/office/powerpoint/2010/main" val="98587952"/>
+                <p14:modId xmlns:p14="http://schemas.microsoft.com/office/powerpoint/2010/main" val="393197773"/>
               </p:ext>
             </p:extLst>
           </p:nvPr>
         </p:nvGraphicFramePr>
         <p:xfrm>
           <a:off x="4000723" y="3067611"/>
-          <a:ext cx="4187856" cy="3469688"/>
+          <a:ext cx="4187856" cy="2903696"/>
         </p:xfrm>
         <a:graphic>
           <a:graphicData uri="http://schemas.openxmlformats.org/drawingml/2006/table">
@@ -4825,7 +5033,7 @@
                   </a:extLst>
                 </a:gridCol>
               </a:tblGrid>
-              <a:tr h="433711">
+              <a:tr h="362962">
                 <a:tc>
                   <a:txBody>
                     <a:bodyPr/>
@@ -5011,7 +5219,7 @@
                   </a:ext>
                 </a:extLst>
               </a:tr>
-              <a:tr h="433711">
+              <a:tr h="362962">
                 <a:tc>
                   <a:txBody>
                     <a:bodyPr/>
@@ -5063,7 +5271,7 @@
                     <a:p>
                       <a:pPr algn="ctr"/>
                       <a:r>
-                        <a:rPr lang="en-GB" sz="1000"/>
+                        <a:rPr lang="en-GB" sz="1000" dirty="0"/>
                         <a:t>the</a:t>
                       </a:r>
                     </a:p>
@@ -5132,7 +5340,7 @@
                   </a:ext>
                 </a:extLst>
               </a:tr>
-              <a:tr h="433711">
+              <a:tr h="362962">
                 <a:tc>
                   <a:txBody>
                     <a:bodyPr/>
@@ -5253,7 +5461,7 @@
                   </a:ext>
                 </a:extLst>
               </a:tr>
-              <a:tr h="433711">
+              <a:tr h="362962">
                 <a:tc>
                   <a:txBody>
                     <a:bodyPr/>
@@ -5374,7 +5582,7 @@
                   </a:ext>
                 </a:extLst>
               </a:tr>
-              <a:tr h="433711">
+              <a:tr h="362962">
                 <a:tc>
                   <a:txBody>
                     <a:bodyPr/>
@@ -5495,7 +5703,7 @@
                   </a:ext>
                 </a:extLst>
               </a:tr>
-              <a:tr h="433711">
+              <a:tr h="362962">
                 <a:tc>
                   <a:txBody>
                     <a:bodyPr/>
@@ -5575,7 +5783,7 @@
                     <a:p>
                       <a:pPr algn="ctr"/>
                       <a:r>
-                        <a:rPr lang="en-GB" sz="1000"/>
+                        <a:rPr lang="en-GB" sz="1000" dirty="0"/>
                         <a:t>0</a:t>
                       </a:r>
                     </a:p>
@@ -5616,7 +5824,7 @@
                   </a:ext>
                 </a:extLst>
               </a:tr>
-              <a:tr h="433711">
+              <a:tr h="362962">
                 <a:tc>
                   <a:txBody>
                     <a:bodyPr/>
@@ -5737,7 +5945,7 @@
                   </a:ext>
                 </a:extLst>
               </a:tr>
-              <a:tr h="433711">
+              <a:tr h="362962">
                 <a:tc>
                   <a:txBody>
                     <a:bodyPr/>
@@ -5851,7 +6059,7 @@
                     <a:p>
                       <a:pPr algn="ctr"/>
                       <a:r>
-                        <a:rPr lang="en-GB" sz="1000"/>
+                        <a:rPr lang="en-GB" sz="1000" dirty="0"/>
                         <a:t>0</a:t>
                       </a:r>
                     </a:p>
@@ -5995,8 +6203,12 @@
           <a:lstStyle/>
           <a:p>
             <a:r>
-              <a:rPr lang="en-GB"/>
-              <a:t>The final prediction</a:t>
+              <a:rPr lang="en-GB" dirty="0">
+                <a:latin typeface="CMU Serif Roman" panose="02000603000000000000" pitchFamily="2" charset="0"/>
+                <a:ea typeface="CMU Serif Roman" panose="02000603000000000000" pitchFamily="2" charset="0"/>
+                <a:cs typeface="CMU Serif Roman" panose="02000603000000000000" pitchFamily="2" charset="0"/>
+              </a:rPr>
+              <a:t>The Final Prediction</a:t>
             </a:r>
           </a:p>
         </p:txBody>
@@ -6017,7 +6229,12 @@
             <p:ph idx="1"/>
           </p:nvPr>
         </p:nvSpPr>
-        <p:spPr/>
+        <p:spPr>
+          <a:xfrm>
+            <a:off x="838200" y="1562389"/>
+            <a:ext cx="10515600" cy="4351338"/>
+          </a:xfrm>
+        </p:spPr>
         <p:txBody>
           <a:bodyPr vert="horz" lIns="91440" tIns="45720" rIns="91440" bIns="45720" rtlCol="0" anchor="t">
             <a:noAutofit/>
@@ -6028,7 +6245,11 @@
               <a:buNone/>
             </a:pPr>
             <a:r>
-              <a:rPr lang="en-GB" sz="2000" dirty="0"/>
+              <a:rPr lang="en-GB" sz="2000" dirty="0">
+                <a:latin typeface="CMU Serif Roman" panose="02000603000000000000" pitchFamily="2" charset="0"/>
+                <a:ea typeface="CMU Serif Roman" panose="02000603000000000000" pitchFamily="2" charset="0"/>
+                <a:cs typeface="CMU Serif Roman" panose="02000603000000000000" pitchFamily="2" charset="0"/>
+              </a:rPr>
               <a:t>The output to attention told us how to modify the initial embedding:</a:t>
             </a:r>
           </a:p>
@@ -6040,9 +6261,9 @@
               <a:solidFill>
                 <a:srgbClr val="000000"/>
               </a:solidFill>
-              <a:latin typeface="Aptos"/>
-              <a:ea typeface="+mn-lt"/>
-              <a:cs typeface="+mn-lt"/>
+              <a:latin typeface="CMU Serif Roman" panose="02000603000000000000" pitchFamily="2" charset="0"/>
+              <a:ea typeface="CMU Serif Roman" panose="02000603000000000000" pitchFamily="2" charset="0"/>
+              <a:cs typeface="CMU Serif Roman" panose="02000603000000000000" pitchFamily="2" charset="0"/>
             </a:endParaRPr>
           </a:p>
           <a:p>
@@ -6134,18 +6355,20 @@
             </a:pPr>
             <a:r>
               <a:rPr lang="en-GB" sz="2000" dirty="0">
-                <a:ea typeface="+mn-lt"/>
-                <a:cs typeface="+mn-lt"/>
+                <a:latin typeface="CMU Serif Roman" panose="02000603000000000000" pitchFamily="2" charset="0"/>
+                <a:ea typeface="CMU Serif Roman" panose="02000603000000000000" pitchFamily="2" charset="0"/>
+                <a:cs typeface="CMU Serif Roman" panose="02000603000000000000" pitchFamily="2" charset="0"/>
               </a:rPr>
               <a:t>And our goal is to predict the </a:t>
             </a:r>
             <a:r>
               <a:rPr lang="en-GB" sz="2000" i="1" dirty="0">
                 <a:solidFill>
-                  <a:srgbClr val="C00000"/>
+                  <a:srgbClr val="1B55EB"/>
                 </a:solidFill>
-                <a:ea typeface="+mn-lt"/>
-                <a:cs typeface="+mn-lt"/>
+                <a:latin typeface="CMU SERIF ROMAN" panose="02000603000000000000" pitchFamily="2" charset="0"/>
+                <a:ea typeface="CMU SERIF ROMAN" panose="02000603000000000000" pitchFamily="2" charset="0"/>
+                <a:cs typeface="CMU SERIF ROMAN" panose="02000603000000000000" pitchFamily="2" charset="0"/>
               </a:rPr>
               <a:t>[?]</a:t>
             </a:r>
@@ -6165,39 +6388,58 @@
             </a:pPr>
             <a:r>
               <a:rPr lang="en-GB" sz="2000" i="1" dirty="0">
-                <a:ea typeface="+mn-lt"/>
-                <a:cs typeface="+mn-lt"/>
+                <a:latin typeface="CMU SERIF ROMAN" panose="02000603000000000000" pitchFamily="2" charset="0"/>
+                <a:ea typeface="CMU SERIF ROMAN" panose="02000603000000000000" pitchFamily="2" charset="0"/>
+                <a:cs typeface="CMU SERIF ROMAN" panose="02000603000000000000" pitchFamily="2" charset="0"/>
               </a:rPr>
               <a:t>”</a:t>
+            </a:r>
+            <a:r>
+              <a:rPr lang="en-GB" sz="2000" i="1" dirty="0">
+                <a:solidFill>
+                  <a:srgbClr val="7030A0"/>
+                </a:solidFill>
+                <a:latin typeface="CMU SERIF ROMAN" panose="02000603000000000000" pitchFamily="2" charset="0"/>
+                <a:ea typeface="CMU SERIF ROMAN" panose="02000603000000000000" pitchFamily="2" charset="0"/>
+                <a:cs typeface="CMU SERIF ROMAN" panose="02000603000000000000" pitchFamily="2" charset="0"/>
+              </a:rPr>
+              <a:t>a juvenile cat is called a</a:t>
             </a:r>
             <a:r>
               <a:rPr lang="en-GB" sz="2000" i="1" dirty="0">
                 <a:solidFill>
                   <a:schemeClr val="accent5"/>
                 </a:solidFill>
-                <a:ea typeface="+mn-lt"/>
-                <a:cs typeface="+mn-lt"/>
+                <a:latin typeface="CMU SERIF ROMAN" panose="02000603000000000000" pitchFamily="2" charset="0"/>
+                <a:ea typeface="CMU SERIF ROMAN" panose="02000603000000000000" pitchFamily="2" charset="0"/>
+                <a:cs typeface="CMU SERIF ROMAN" panose="02000603000000000000" pitchFamily="2" charset="0"/>
               </a:rPr>
-              <a:t>a juvenile cat is called a </a:t>
+              <a:t> </a:t>
             </a:r>
             <a:r>
               <a:rPr lang="en-GB" sz="2000" i="1" dirty="0">
                 <a:solidFill>
-                  <a:srgbClr val="C00000"/>
+                  <a:srgbClr val="1B55EB"/>
                 </a:solidFill>
-                <a:ea typeface="+mn-lt"/>
-                <a:cs typeface="+mn-lt"/>
+                <a:latin typeface="CMU SERIF ROMAN" panose="02000603000000000000" pitchFamily="2" charset="0"/>
+                <a:ea typeface="CMU SERIF ROMAN" panose="02000603000000000000" pitchFamily="2" charset="0"/>
+                <a:cs typeface="CMU SERIF ROMAN" panose="02000603000000000000" pitchFamily="2" charset="0"/>
               </a:rPr>
               <a:t>[?]</a:t>
             </a:r>
             <a:r>
               <a:rPr lang="en-GB" sz="2000" i="1" dirty="0">
-                <a:ea typeface="+mn-lt"/>
-                <a:cs typeface="+mn-lt"/>
+                <a:latin typeface="CMU SERIF ROMAN" panose="02000603000000000000" pitchFamily="2" charset="0"/>
+                <a:ea typeface="CMU SERIF ROMAN" panose="02000603000000000000" pitchFamily="2" charset="0"/>
+                <a:cs typeface="CMU SERIF ROMAN" panose="02000603000000000000" pitchFamily="2" charset="0"/>
               </a:rPr>
               <a:t>"</a:t>
             </a:r>
-            <a:endParaRPr lang="en-GB" sz="2000" dirty="0"/>
+            <a:endParaRPr lang="en-GB" sz="2000" dirty="0">
+              <a:latin typeface="CMU Serif Roman" panose="02000603000000000000" pitchFamily="2" charset="0"/>
+              <a:ea typeface="CMU Serif Roman" panose="02000603000000000000" pitchFamily="2" charset="0"/>
+              <a:cs typeface="CMU Serif Roman" panose="02000603000000000000" pitchFamily="2" charset="0"/>
+            </a:endParaRPr>
           </a:p>
           <a:p>
             <a:pPr marL="0" indent="0">
@@ -6214,14 +6456,15 @@
             </a:pPr>
             <a:r>
               <a:rPr lang="en-GB" sz="2000" dirty="0">
-                <a:ea typeface="+mn-lt"/>
-                <a:cs typeface="+mn-lt"/>
+                <a:latin typeface="CMU Serif Roman" panose="02000603000000000000" pitchFamily="2" charset="0"/>
+                <a:ea typeface="CMU Serif Roman" panose="02000603000000000000" pitchFamily="2" charset="0"/>
+                <a:cs typeface="CMU Serif Roman" panose="02000603000000000000" pitchFamily="2" charset="0"/>
               </a:rPr>
               <a:t>So, we need a distribution over tokens:</a:t>
             </a:r>
           </a:p>
           <a:p>
-            <a:pPr marL="0" indent="0" algn="ctr">
+            <a:pPr marL="0" indent="0">
               <a:buNone/>
             </a:pPr>
             <a:endParaRPr lang="en-GB" sz="2000" dirty="0">
@@ -6693,8 +6936,8 @@
         </p:blipFill>
         <p:spPr>
           <a:xfrm>
-            <a:off x="3864428" y="2328863"/>
-            <a:ext cx="4463144" cy="4257675"/>
+            <a:off x="4363686" y="2564390"/>
+            <a:ext cx="3464627" cy="3305127"/>
           </a:xfrm>
           <a:prstGeom prst="rect">
             <a:avLst/>
@@ -6723,9 +6966,18 @@
           <a:lstStyle/>
           <a:p>
             <a:r>
-              <a:rPr lang="en-GB" dirty="0"/>
-              <a:t>The final operation</a:t>
-            </a:r>
+              <a:rPr lang="en-GB" dirty="0">
+                <a:latin typeface="CMU Serif Roman" panose="02000603000000000000" pitchFamily="2" charset="0"/>
+                <a:ea typeface="CMU Serif Roman" panose="02000603000000000000" pitchFamily="2" charset="0"/>
+                <a:cs typeface="CMU Serif Roman" panose="02000603000000000000" pitchFamily="2" charset="0"/>
+              </a:rPr>
+              <a:t>The Final Operation</a:t>
+            </a:r>
+            <a:endParaRPr lang="en-GB" dirty="0">
+              <a:latin typeface="CMU Serif Roman" panose="02000603000000000000" pitchFamily="2" charset="0"/>
+              <a:ea typeface="CMU Serif Roman" panose="02000603000000000000" pitchFamily="2" charset="0"/>
+              <a:cs typeface="CMU Serif Roman" panose="02000603000000000000" pitchFamily="2" charset="0"/>
+            </a:endParaRPr>
           </a:p>
         </p:txBody>
       </p:sp>
@@ -6965,9 +7217,18 @@
           <a:lstStyle/>
           <a:p>
             <a:r>
-              <a:rPr lang="en-GB"/>
+              <a:rPr lang="en-GB" dirty="0" err="1">
+                <a:latin typeface="CMU Serif Roman" panose="02000603000000000000" pitchFamily="2" charset="0"/>
+                <a:ea typeface="CMU Serif Roman" panose="02000603000000000000" pitchFamily="2" charset="0"/>
+                <a:cs typeface="CMU Serif Roman" panose="02000603000000000000" pitchFamily="2" charset="0"/>
+              </a:rPr>
               <a:t>Softmax</a:t>
             </a:r>
+            <a:endParaRPr lang="en-GB" dirty="0">
+              <a:latin typeface="CMU Serif Roman" panose="02000603000000000000" pitchFamily="2" charset="0"/>
+              <a:ea typeface="CMU Serif Roman" panose="02000603000000000000" pitchFamily="2" charset="0"/>
+              <a:cs typeface="CMU Serif Roman" panose="02000603000000000000" pitchFamily="2" charset="0"/>
+            </a:endParaRPr>
           </a:p>
         </p:txBody>
       </p:sp>
@@ -6995,19 +7256,35 @@
           <a:lstStyle/>
           <a:p>
             <a:r>
-              <a:rPr lang="en-GB"/>
+              <a:rPr lang="en-GB">
+                <a:latin typeface="CMU Serif Roman" panose="02000603000000000000" pitchFamily="2" charset="0"/>
+                <a:ea typeface="CMU Serif Roman" panose="02000603000000000000" pitchFamily="2" charset="0"/>
+                <a:cs typeface="CMU Serif Roman" panose="02000603000000000000" pitchFamily="2" charset="0"/>
+              </a:rPr>
               <a:t>Here is an equation:</a:t>
             </a:r>
-            <a:endParaRPr lang="en-US"/>
-          </a:p>
-          <a:p>
-            <a:endParaRPr lang="en-GB"/>
+            <a:endParaRPr lang="en-US">
+              <a:latin typeface="CMU Serif Roman" panose="02000603000000000000" pitchFamily="2" charset="0"/>
+              <a:ea typeface="CMU Serif Roman" panose="02000603000000000000" pitchFamily="2" charset="0"/>
+              <a:cs typeface="CMU Serif Roman" panose="02000603000000000000" pitchFamily="2" charset="0"/>
+            </a:endParaRPr>
+          </a:p>
+          <a:p>
+            <a:endParaRPr lang="en-GB">
+              <a:latin typeface="CMU Serif Roman" panose="02000603000000000000" pitchFamily="2" charset="0"/>
+              <a:ea typeface="CMU Serif Roman" panose="02000603000000000000" pitchFamily="2" charset="0"/>
+              <a:cs typeface="CMU Serif Roman" panose="02000603000000000000" pitchFamily="2" charset="0"/>
+            </a:endParaRPr>
           </a:p>
           <a:p>
             <a:pPr marL="0" indent="0">
               <a:buNone/>
             </a:pPr>
-            <a:endParaRPr lang="en-GB"/>
+            <a:endParaRPr lang="en-GB">
+              <a:latin typeface="CMU Serif Roman" panose="02000603000000000000" pitchFamily="2" charset="0"/>
+              <a:ea typeface="CMU Serif Roman" panose="02000603000000000000" pitchFamily="2" charset="0"/>
+              <a:cs typeface="CMU Serif Roman" panose="02000603000000000000" pitchFamily="2" charset="0"/>
+            </a:endParaRPr>
           </a:p>
         </p:txBody>
       </p:sp>
@@ -7168,7 +7445,11 @@
           <a:lstStyle/>
           <a:p>
             <a:r>
-              <a:rPr lang="en-GB" err="1"/>
+              <a:rPr lang="en-GB" err="1">
+                <a:latin typeface="CMU Serif Roman" panose="02000603000000000000" pitchFamily="2" charset="0"/>
+                <a:ea typeface="CMU Serif Roman" panose="02000603000000000000" pitchFamily="2" charset="0"/>
+                <a:cs typeface="CMU Serif Roman" panose="02000603000000000000" pitchFamily="2" charset="0"/>
+              </a:rPr>
               <a:t>Softmax</a:t>
             </a:r>
           </a:p>
@@ -7201,7 +7482,11 @@
               <a:buNone/>
             </a:pPr>
             <a:r>
-              <a:rPr lang="en-GB"/>
+              <a:rPr lang="en-GB" dirty="0">
+                <a:latin typeface="CMU Serif Roman" panose="02000603000000000000" pitchFamily="2" charset="0"/>
+                <a:ea typeface="CMU Serif Roman" panose="02000603000000000000" pitchFamily="2" charset="0"/>
+                <a:cs typeface="CMU Serif Roman" panose="02000603000000000000" pitchFamily="2" charset="0"/>
+              </a:rPr>
               <a:t>"the cat sat on the _____"</a:t>
             </a:r>
           </a:p>
@@ -7222,14 +7507,14 @@
           <p:nvPr>
             <p:extLst>
               <p:ext uri="{D42A27DB-BD31-4B8C-83A1-F6EECF244321}">
-                <p14:modId xmlns:p14="http://schemas.microsoft.com/office/powerpoint/2010/main" val="3674542651"/>
+                <p14:modId xmlns:p14="http://schemas.microsoft.com/office/powerpoint/2010/main" val="4000811799"/>
               </p:ext>
             </p:extLst>
           </p:nvPr>
         </p:nvGraphicFramePr>
         <p:xfrm>
           <a:off x="1411489" y="2761610"/>
-          <a:ext cx="2122992" cy="3419172"/>
+          <a:ext cx="2122992" cy="3181992"/>
         </p:xfrm>
         <a:graphic>
           <a:graphicData uri="http://schemas.openxmlformats.org/drawingml/2006/table">
@@ -7253,7 +7538,7 @@
                   </a:extLst>
                 </a:gridCol>
               </a:tblGrid>
-              <a:tr h="569862">
+              <a:tr h="530332">
                 <a:tc>
                   <a:txBody>
                     <a:bodyPr/>
@@ -7290,7 +7575,7 @@
                   </a:ext>
                 </a:extLst>
               </a:tr>
-              <a:tr h="569862">
+              <a:tr h="530332">
                 <a:tc>
                   <a:txBody>
                     <a:bodyPr/>
@@ -7327,7 +7612,7 @@
                   </a:ext>
                 </a:extLst>
               </a:tr>
-              <a:tr h="569862">
+              <a:tr h="530332">
                 <a:tc>
                   <a:txBody>
                     <a:bodyPr/>
@@ -7364,7 +7649,7 @@
                   </a:ext>
                 </a:extLst>
               </a:tr>
-              <a:tr h="569862">
+              <a:tr h="530332">
                 <a:tc>
                   <a:txBody>
                     <a:bodyPr/>
@@ -7401,7 +7686,7 @@
                   </a:ext>
                 </a:extLst>
               </a:tr>
-              <a:tr h="569862">
+              <a:tr h="530332">
                 <a:tc>
                   <a:txBody>
                     <a:bodyPr/>
@@ -7438,7 +7723,7 @@
                   </a:ext>
                 </a:extLst>
               </a:tr>
-              <a:tr h="569862">
+              <a:tr h="530332">
                 <a:tc>
                   <a:txBody>
                     <a:bodyPr/>
@@ -7493,12 +7778,18 @@
         </p:nvSpPr>
         <p:spPr>
           <a:xfrm>
-            <a:off x="4272521" y="4127194"/>
+            <a:off x="4107770" y="3959385"/>
             <a:ext cx="1574588" cy="683035"/>
           </a:xfrm>
           <a:prstGeom prst="rightArrow">
             <a:avLst/>
           </a:prstGeom>
+          <a:solidFill>
+            <a:srgbClr val="1B55EB"/>
+          </a:solidFill>
+          <a:ln>
+            <a:noFill/>
+          </a:ln>
         </p:spPr>
         <p:style>
           <a:lnRef idx="2">
@@ -7547,7 +7838,7 @@
         </p:blipFill>
         <p:spPr>
           <a:xfrm>
-            <a:off x="6096001" y="2146788"/>
+            <a:off x="6096000" y="1805269"/>
             <a:ext cx="5744308" cy="4308231"/>
           </a:xfrm>
           <a:prstGeom prst="rect">
@@ -7813,7 +8104,11 @@
           <a:lstStyle/>
           <a:p>
             <a:r>
-              <a:rPr lang="en-GB" err="1"/>
+              <a:rPr lang="en-GB" err="1">
+                <a:latin typeface="CMU Serif Roman" panose="02000603000000000000" pitchFamily="2" charset="0"/>
+                <a:ea typeface="CMU Serif Roman" panose="02000603000000000000" pitchFamily="2" charset="0"/>
+                <a:cs typeface="CMU Serif Roman" panose="02000603000000000000" pitchFamily="2" charset="0"/>
+              </a:rPr>
               <a:t>Softmax</a:t>
             </a:r>
           </a:p>
@@ -7846,7 +8141,11 @@
               <a:buNone/>
             </a:pPr>
             <a:r>
-              <a:rPr lang="en-GB"/>
+              <a:rPr lang="en-GB">
+                <a:latin typeface="CMU Serif Roman" panose="02000603000000000000" pitchFamily="2" charset="0"/>
+                <a:ea typeface="CMU Serif Roman" panose="02000603000000000000" pitchFamily="2" charset="0"/>
+                <a:cs typeface="CMU Serif Roman" panose="02000603000000000000" pitchFamily="2" charset="0"/>
+              </a:rPr>
               <a:t>"the cat sat on the _____"</a:t>
             </a:r>
           </a:p>
@@ -7867,7 +8166,7 @@
           <p:nvPr/>
         </p:nvPicPr>
         <p:blipFill>
-          <a:blip r:embed="rId2"/>
+          <a:blip r:embed="rId3"/>
           <a:stretch>
             <a:fillRect/>
           </a:stretch>
@@ -7897,14 +8196,14 @@
           <p:nvPr/>
         </p:nvPicPr>
         <p:blipFill>
-          <a:blip r:embed="rId3"/>
+          <a:blip r:embed="rId4"/>
           <a:stretch>
             <a:fillRect/>
           </a:stretch>
         </p:blipFill>
         <p:spPr>
           <a:xfrm>
-            <a:off x="1" y="2667001"/>
+            <a:off x="0" y="2453043"/>
             <a:ext cx="4967655" cy="3729404"/>
           </a:xfrm>
           <a:prstGeom prst="rect">
@@ -7927,14 +8226,14 @@
           <p:nvPr/>
         </p:nvPicPr>
         <p:blipFill>
-          <a:blip r:embed="rId4"/>
+          <a:blip r:embed="rId5"/>
           <a:stretch>
             <a:fillRect/>
           </a:stretch>
         </p:blipFill>
         <p:spPr>
           <a:xfrm>
-            <a:off x="6909290" y="2659672"/>
+            <a:off x="6909290" y="2440231"/>
             <a:ext cx="5121519" cy="3736732"/>
           </a:xfrm>
           <a:prstGeom prst="rect">
@@ -8102,7 +8401,11 @@
           <a:lstStyle/>
           <a:p>
             <a:r>
-              <a:rPr lang="en-GB"/>
+              <a:rPr lang="en-GB">
+                <a:latin typeface="CMU Serif Roman" panose="02000603000000000000" pitchFamily="2" charset="0"/>
+                <a:ea typeface="CMU Serif Roman" panose="02000603000000000000" pitchFamily="2" charset="0"/>
+                <a:cs typeface="CMU Serif Roman" panose="02000603000000000000" pitchFamily="2" charset="0"/>
+              </a:rPr>
               <a:t>Softmax</a:t>
             </a:r>
           </a:p>
@@ -8132,19 +8435,35 @@
           <a:lstStyle/>
           <a:p>
             <a:r>
-              <a:rPr lang="en-GB"/>
+              <a:rPr lang="en-GB" dirty="0">
+                <a:latin typeface="CMU Serif Roman" panose="02000603000000000000" pitchFamily="2" charset="0"/>
+                <a:ea typeface="CMU Serif Roman" panose="02000603000000000000" pitchFamily="2" charset="0"/>
+                <a:cs typeface="CMU Serif Roman" panose="02000603000000000000" pitchFamily="2" charset="0"/>
+              </a:rPr>
               <a:t>What does T do?</a:t>
             </a:r>
-            <a:endParaRPr lang="en-US"/>
-          </a:p>
-          <a:p>
-            <a:endParaRPr lang="en-GB"/>
+            <a:endParaRPr lang="en-US" dirty="0">
+              <a:latin typeface="CMU Serif Roman" panose="02000603000000000000" pitchFamily="2" charset="0"/>
+              <a:ea typeface="CMU Serif Roman" panose="02000603000000000000" pitchFamily="2" charset="0"/>
+              <a:cs typeface="CMU Serif Roman" panose="02000603000000000000" pitchFamily="2" charset="0"/>
+            </a:endParaRPr>
+          </a:p>
+          <a:p>
+            <a:endParaRPr lang="en-GB" dirty="0">
+              <a:latin typeface="CMU Serif Roman" panose="02000603000000000000" pitchFamily="2" charset="0"/>
+              <a:ea typeface="CMU Serif Roman" panose="02000603000000000000" pitchFamily="2" charset="0"/>
+              <a:cs typeface="CMU Serif Roman" panose="02000603000000000000" pitchFamily="2" charset="0"/>
+            </a:endParaRPr>
           </a:p>
           <a:p>
             <a:pPr marL="0" indent="0">
               <a:buNone/>
             </a:pPr>
-            <a:endParaRPr lang="en-GB"/>
+            <a:endParaRPr lang="en-GB" dirty="0">
+              <a:latin typeface="CMU Serif Roman" panose="02000603000000000000" pitchFamily="2" charset="0"/>
+              <a:ea typeface="CMU Serif Roman" panose="02000603000000000000" pitchFamily="2" charset="0"/>
+              <a:cs typeface="CMU Serif Roman" panose="02000603000000000000" pitchFamily="2" charset="0"/>
+            </a:endParaRPr>
           </a:p>
         </p:txBody>
       </p:sp>
@@ -8569,8 +8888,12 @@
           <a:p>
             <a:pPr algn="l"/>
             <a:r>
-              <a:rPr lang="en-GB" b="1"/>
-              <a:t>temperature</a:t>
+              <a:rPr lang="en-GB" b="1" dirty="0">
+                <a:latin typeface="CMU SERIF ROMAN" panose="02000603000000000000" pitchFamily="2" charset="0"/>
+                <a:ea typeface="CMU SERIF ROMAN" panose="02000603000000000000" pitchFamily="2" charset="0"/>
+                <a:cs typeface="CMU SERIF ROMAN" panose="02000603000000000000" pitchFamily="2" charset="0"/>
+              </a:rPr>
+              <a:t>Temperature</a:t>
             </a:r>
           </a:p>
         </p:txBody>
@@ -8907,7 +9230,11 @@
           <a:lstStyle/>
           <a:p>
             <a:r>
-              <a:rPr lang="en-GB" err="1"/>
+              <a:rPr lang="en-GB" err="1">
+                <a:latin typeface="CMU Serif Roman" panose="02000603000000000000" pitchFamily="2" charset="0"/>
+                <a:ea typeface="CMU Serif Roman" panose="02000603000000000000" pitchFamily="2" charset="0"/>
+                <a:cs typeface="CMU Serif Roman" panose="02000603000000000000" pitchFamily="2" charset="0"/>
+              </a:rPr>
               <a:t>Softmax</a:t>
             </a:r>
           </a:p>
@@ -8940,7 +9267,11 @@
               <a:buNone/>
             </a:pPr>
             <a:r>
-              <a:rPr lang="en-GB"/>
+              <a:rPr lang="en-GB" dirty="0">
+                <a:latin typeface="CMU Serif Roman" panose="02000603000000000000" pitchFamily="2" charset="0"/>
+                <a:ea typeface="CMU Serif Roman" panose="02000603000000000000" pitchFamily="2" charset="0"/>
+                <a:cs typeface="CMU Serif Roman" panose="02000603000000000000" pitchFamily="2" charset="0"/>
+              </a:rPr>
               <a:t>"the cat sat on the _____"</a:t>
             </a:r>
           </a:p>
@@ -8984,12 +9315,12 @@
           <a:p>
             <a:pPr algn="ctr"/>
             <a:r>
-              <a:rPr lang="en-GB" sz="3200" i="1">
+              <a:rPr lang="en-GB" sz="3200" i="1" dirty="0">
                 <a:latin typeface="Palatino Linotype"/>
               </a:rPr>
               <a:t>T = 1.0</a:t>
             </a:r>
-            <a:endParaRPr lang="en-US"/>
+            <a:endParaRPr lang="en-US" dirty="0"/>
           </a:p>
         </p:txBody>
       </p:sp>
@@ -9015,7 +9346,7 @@
         </p:blipFill>
         <p:spPr>
           <a:xfrm>
-            <a:off x="6718790" y="2674326"/>
+            <a:off x="6718603" y="2470820"/>
             <a:ext cx="5128846" cy="3722078"/>
           </a:xfrm>
           <a:prstGeom prst="rect">
@@ -9045,7 +9376,7 @@
         </p:blipFill>
         <p:spPr>
           <a:xfrm>
-            <a:off x="1" y="2667001"/>
+            <a:off x="1179" y="2451222"/>
             <a:ext cx="4967655" cy="3729404"/>
           </a:xfrm>
           <a:prstGeom prst="rect">
@@ -9141,7 +9472,11 @@
           <a:lstStyle/>
           <a:p>
             <a:r>
-              <a:rPr lang="en-GB" err="1"/>
+              <a:rPr lang="en-GB" err="1">
+                <a:latin typeface="CMU Serif Roman" panose="02000603000000000000" pitchFamily="2" charset="0"/>
+                <a:ea typeface="CMU Serif Roman" panose="02000603000000000000" pitchFamily="2" charset="0"/>
+                <a:cs typeface="CMU Serif Roman" panose="02000603000000000000" pitchFamily="2" charset="0"/>
+              </a:rPr>
               <a:t>Softmax</a:t>
             </a:r>
           </a:p>
@@ -9174,7 +9509,11 @@
               <a:buNone/>
             </a:pPr>
             <a:r>
-              <a:rPr lang="en-GB"/>
+              <a:rPr lang="en-GB" dirty="0">
+                <a:latin typeface="CMU Serif Roman" panose="02000603000000000000" pitchFamily="2" charset="0"/>
+                <a:ea typeface="CMU Serif Roman" panose="02000603000000000000" pitchFamily="2" charset="0"/>
+                <a:cs typeface="CMU Serif Roman" panose="02000603000000000000" pitchFamily="2" charset="0"/>
+              </a:rPr>
               <a:t>"the cat sat on the _____"</a:t>
             </a:r>
           </a:p>
@@ -9279,7 +9618,7 @@
         </p:blipFill>
         <p:spPr>
           <a:xfrm>
-            <a:off x="1" y="2667001"/>
+            <a:off x="1179" y="2447559"/>
             <a:ext cx="4967655" cy="3729404"/>
           </a:xfrm>
           <a:prstGeom prst="rect">
@@ -9309,7 +9648,7 @@
         </p:blipFill>
         <p:spPr>
           <a:xfrm>
-            <a:off x="6814038" y="2674327"/>
+            <a:off x="6817516" y="2454885"/>
             <a:ext cx="4931020" cy="3722078"/>
           </a:xfrm>
           <a:prstGeom prst="rect">
@@ -9375,7 +9714,11 @@
           <a:lstStyle/>
           <a:p>
             <a:r>
-              <a:rPr lang="en-GB" err="1"/>
+              <a:rPr lang="en-GB" err="1">
+                <a:latin typeface="CMU Serif Roman" panose="02000603000000000000" pitchFamily="2" charset="0"/>
+                <a:ea typeface="CMU Serif Roman" panose="02000603000000000000" pitchFamily="2" charset="0"/>
+                <a:cs typeface="CMU Serif Roman" panose="02000603000000000000" pitchFamily="2" charset="0"/>
+              </a:rPr>
               <a:t>Softmax</a:t>
             </a:r>
           </a:p>
@@ -9408,7 +9751,11 @@
               <a:buNone/>
             </a:pPr>
             <a:r>
-              <a:rPr lang="en-GB"/>
+              <a:rPr lang="en-GB" dirty="0">
+                <a:latin typeface="CMU Serif Roman" panose="02000603000000000000" pitchFamily="2" charset="0"/>
+                <a:ea typeface="CMU Serif Roman" panose="02000603000000000000" pitchFamily="2" charset="0"/>
+                <a:cs typeface="CMU Serif Roman" panose="02000603000000000000" pitchFamily="2" charset="0"/>
+              </a:rPr>
               <a:t>"the cat sat on the _____"</a:t>
             </a:r>
           </a:p>
@@ -9513,7 +9860,7 @@
         </p:blipFill>
         <p:spPr>
           <a:xfrm>
-            <a:off x="1" y="2667001"/>
+            <a:off x="1179" y="2447559"/>
             <a:ext cx="4967655" cy="3729404"/>
           </a:xfrm>
           <a:prstGeom prst="rect">
@@ -9543,7 +9890,7 @@
         </p:blipFill>
         <p:spPr>
           <a:xfrm>
-            <a:off x="6799384" y="2667000"/>
+            <a:off x="6799199" y="2454886"/>
             <a:ext cx="4967654" cy="3722077"/>
           </a:xfrm>
           <a:prstGeom prst="rect">
@@ -9581,30 +9928,6 @@
           <a:chExt cx="0" cy="0"/>
         </a:xfrm>
       </p:grpSpPr>
-      <p:sp>
-        <p:nvSpPr>
-          <p:cNvPr id="2" name="Title 1"/>
-          <p:cNvSpPr>
-            <a:spLocks noGrp="1"/>
-          </p:cNvSpPr>
-          <p:nvPr>
-            <p:ph type="ctrTitle"/>
-          </p:nvPr>
-        </p:nvSpPr>
-        <p:spPr/>
-        <p:txBody>
-          <a:bodyPr/>
-          <a:lstStyle/>
-          <a:p>
-            <a:pPr algn="l"/>
-            <a:r>
-              <a:rPr lang="en-GB" dirty="0"/>
-              <a:t>Output &amp; Pre-training</a:t>
-            </a:r>
-            <a:endParaRPr lang="en-US" dirty="0"/>
-          </a:p>
-        </p:txBody>
-      </p:sp>
       <p:pic>
         <p:nvPicPr>
           <p:cNvPr id="24" name="Picture 23" descr="Generated image">
@@ -9620,14 +9943,14 @@
           <p:nvPr/>
         </p:nvPicPr>
         <p:blipFill>
-          <a:blip r:embed="rId2"/>
+          <a:blip r:embed="rId3"/>
           <a:stretch>
             <a:fillRect/>
           </a:stretch>
         </p:blipFill>
         <p:spPr>
           <a:xfrm>
-            <a:off x="7959584" y="3549409"/>
+            <a:off x="8035525" y="2204549"/>
             <a:ext cx="2018744" cy="3084347"/>
           </a:xfrm>
           <a:prstGeom prst="rect">
@@ -9649,13 +9972,16 @@
         </p:nvCxnSpPr>
         <p:spPr>
           <a:xfrm>
-            <a:off x="8296135" y="4524350"/>
+            <a:off x="8414692" y="3177330"/>
             <a:ext cx="201130" cy="434500"/>
           </a:xfrm>
           <a:prstGeom prst="curvedConnector3">
             <a:avLst/>
           </a:prstGeom>
           <a:ln w="28575">
+            <a:solidFill>
+              <a:srgbClr val="1B55EB"/>
+            </a:solidFill>
             <a:tailEnd type="triangle"/>
           </a:ln>
         </p:spPr>
@@ -9690,13 +10016,16 @@
         </p:nvCxnSpPr>
         <p:spPr>
           <a:xfrm>
-            <a:off x="8757408" y="4965486"/>
+            <a:off x="8875965" y="3618466"/>
             <a:ext cx="220353" cy="455139"/>
           </a:xfrm>
           <a:prstGeom prst="curvedConnector3">
             <a:avLst/>
           </a:prstGeom>
           <a:ln w="28575">
+            <a:solidFill>
+              <a:srgbClr val="1B55EB"/>
+            </a:solidFill>
             <a:tailEnd type="triangle"/>
           </a:ln>
         </p:spPr>
@@ -9731,13 +10060,16 @@
         </p:nvCxnSpPr>
         <p:spPr>
           <a:xfrm>
-            <a:off x="9207219" y="5417079"/>
+            <a:off x="9325776" y="4070059"/>
             <a:ext cx="360945" cy="8660"/>
           </a:xfrm>
           <a:prstGeom prst="curvedConnector3">
             <a:avLst/>
           </a:prstGeom>
           <a:ln w="28575">
+            <a:solidFill>
+              <a:srgbClr val="1B55EB"/>
+            </a:solidFill>
             <a:tailEnd type="triangle"/>
           </a:ln>
         </p:spPr>
@@ -9770,7 +10102,7 @@
         </p:nvSpPr>
         <p:spPr>
           <a:xfrm>
-            <a:off x="7959541" y="6227026"/>
+            <a:off x="8078098" y="4880006"/>
             <a:ext cx="221952" cy="237294"/>
           </a:xfrm>
           <a:custGeom>
@@ -9862,6 +10194,9 @@
             </a:pathLst>
           </a:custGeom>
           <a:ln w="28575">
+            <a:solidFill>
+              <a:srgbClr val="1B55EB"/>
+            </a:solidFill>
             <a:extLst>
               <a:ext uri="{C807C97D-BFC1-408E-A445-0C87EB9F89A2}">
                 <ask:lineSketchStyleProps xmlns:ask="http://schemas.microsoft.com/office/drawing/2018/sketchyshapes" sd="3499211612">
@@ -10010,7 +10345,7 @@
         </p:nvSpPr>
         <p:spPr>
           <a:xfrm>
-            <a:off x="10384897" y="4584259"/>
+            <a:off x="10503454" y="3237239"/>
             <a:ext cx="1351719" cy="338554"/>
           </a:xfrm>
           <a:custGeom>
@@ -10132,558 +10467,8 @@
             </a:pathLst>
           </a:custGeom>
           <a:ln w="28575">
-            <a:extLst>
-              <a:ext uri="{C807C97D-BFC1-408E-A445-0C87EB9F89A2}">
-                <ask:lineSketchStyleProps xmlns:ask="http://schemas.microsoft.com/office/drawing/2018/sketchyshapes" sd="283741067">
-                  <a:prstGeom prst="rect">
-                    <a:avLst/>
-                  </a:prstGeom>
-                  <ask:type>
-                    <ask:lineSketchFreehand/>
-                  </ask:type>
-                </ask:lineSketchStyleProps>
-              </a:ext>
-            </a:extLst>
-          </a:ln>
-        </p:spPr>
-        <p:style>
-          <a:lnRef idx="2">
-            <a:schemeClr val="accent5"/>
-          </a:lnRef>
-          <a:fillRef idx="1">
-            <a:schemeClr val="lt1"/>
-          </a:fillRef>
-          <a:effectRef idx="0">
-            <a:schemeClr val="accent5"/>
-          </a:effectRef>
-          <a:fontRef idx="minor">
-            <a:schemeClr val="dk1"/>
-          </a:fontRef>
-        </p:style>
-        <p:txBody>
-          <a:bodyPr rot="0" spcFirstLastPara="0" vert="horz" wrap="square" lIns="91440" tIns="45720" rIns="91440" bIns="45720" numCol="1" spcCol="0" rtlCol="0" fromWordArt="0" anchor="t" anchorCtr="0" forceAA="0" compatLnSpc="1">
-            <a:prstTxWarp prst="textNoShape">
-              <a:avLst/>
-            </a:prstTxWarp>
-            <a:spAutoFit/>
-          </a:bodyPr>
-          <a:lstStyle>
-            <a:defPPr>
-              <a:defRPr lang="en-US"/>
-            </a:defPPr>
-            <a:lvl1pPr marL="0" algn="l" defTabSz="914400" rtl="0" eaLnBrk="1" latinLnBrk="0" hangingPunct="1">
-              <a:defRPr sz="1800" kern="1200">
-                <a:solidFill>
-                  <a:schemeClr val="dk1"/>
-                </a:solidFill>
-                <a:latin typeface="+mn-lt"/>
-                <a:ea typeface="+mn-ea"/>
-                <a:cs typeface="+mn-cs"/>
-              </a:defRPr>
-            </a:lvl1pPr>
-            <a:lvl2pPr marL="457200" algn="l" defTabSz="914400" rtl="0" eaLnBrk="1" latinLnBrk="0" hangingPunct="1">
-              <a:defRPr sz="1800" kern="1200">
-                <a:solidFill>
-                  <a:schemeClr val="dk1"/>
-                </a:solidFill>
-                <a:latin typeface="+mn-lt"/>
-                <a:ea typeface="+mn-ea"/>
-                <a:cs typeface="+mn-cs"/>
-              </a:defRPr>
-            </a:lvl2pPr>
-            <a:lvl3pPr marL="914400" algn="l" defTabSz="914400" rtl="0" eaLnBrk="1" latinLnBrk="0" hangingPunct="1">
-              <a:defRPr sz="1800" kern="1200">
-                <a:solidFill>
-                  <a:schemeClr val="dk1"/>
-                </a:solidFill>
-                <a:latin typeface="+mn-lt"/>
-                <a:ea typeface="+mn-ea"/>
-                <a:cs typeface="+mn-cs"/>
-              </a:defRPr>
-            </a:lvl3pPr>
-            <a:lvl4pPr marL="1371600" algn="l" defTabSz="914400" rtl="0" eaLnBrk="1" latinLnBrk="0" hangingPunct="1">
-              <a:defRPr sz="1800" kern="1200">
-                <a:solidFill>
-                  <a:schemeClr val="dk1"/>
-                </a:solidFill>
-                <a:latin typeface="+mn-lt"/>
-                <a:ea typeface="+mn-ea"/>
-                <a:cs typeface="+mn-cs"/>
-              </a:defRPr>
-            </a:lvl4pPr>
-            <a:lvl5pPr marL="1828800" algn="l" defTabSz="914400" rtl="0" eaLnBrk="1" latinLnBrk="0" hangingPunct="1">
-              <a:defRPr sz="1800" kern="1200">
-                <a:solidFill>
-                  <a:schemeClr val="dk1"/>
-                </a:solidFill>
-                <a:latin typeface="+mn-lt"/>
-                <a:ea typeface="+mn-ea"/>
-                <a:cs typeface="+mn-cs"/>
-              </a:defRPr>
-            </a:lvl5pPr>
-            <a:lvl6pPr marL="2286000" algn="l" defTabSz="914400" rtl="0" eaLnBrk="1" latinLnBrk="0" hangingPunct="1">
-              <a:defRPr sz="1800" kern="1200">
-                <a:solidFill>
-                  <a:schemeClr val="dk1"/>
-                </a:solidFill>
-                <a:latin typeface="+mn-lt"/>
-                <a:ea typeface="+mn-ea"/>
-                <a:cs typeface="+mn-cs"/>
-              </a:defRPr>
-            </a:lvl6pPr>
-            <a:lvl7pPr marL="2743200" algn="l" defTabSz="914400" rtl="0" eaLnBrk="1" latinLnBrk="0" hangingPunct="1">
-              <a:defRPr sz="1800" kern="1200">
-                <a:solidFill>
-                  <a:schemeClr val="dk1"/>
-                </a:solidFill>
-                <a:latin typeface="+mn-lt"/>
-                <a:ea typeface="+mn-ea"/>
-                <a:cs typeface="+mn-cs"/>
-              </a:defRPr>
-            </a:lvl7pPr>
-            <a:lvl8pPr marL="3200400" algn="l" defTabSz="914400" rtl="0" eaLnBrk="1" latinLnBrk="0" hangingPunct="1">
-              <a:defRPr sz="1800" kern="1200">
-                <a:solidFill>
-                  <a:schemeClr val="dk1"/>
-                </a:solidFill>
-                <a:latin typeface="+mn-lt"/>
-                <a:ea typeface="+mn-ea"/>
-                <a:cs typeface="+mn-cs"/>
-              </a:defRPr>
-            </a:lvl8pPr>
-            <a:lvl9pPr marL="3657600" algn="l" defTabSz="914400" rtl="0" eaLnBrk="1" latinLnBrk="0" hangingPunct="1">
-              <a:defRPr sz="1800" kern="1200">
-                <a:solidFill>
-                  <a:schemeClr val="dk1"/>
-                </a:solidFill>
-                <a:latin typeface="+mn-lt"/>
-                <a:ea typeface="+mn-ea"/>
-                <a:cs typeface="+mn-cs"/>
-              </a:defRPr>
-            </a:lvl9pPr>
-          </a:lstStyle>
-          <a:p>
-            <a:pPr algn="l"/>
-            <a:r>
-              <a:rPr lang="en-US" sz="1600"/>
-              <a:t>Tokenization</a:t>
-            </a:r>
-          </a:p>
-        </p:txBody>
-      </p:sp>
-      <p:sp>
-        <p:nvSpPr>
-          <p:cNvPr id="30" name="TextBox 34">
-            <a:extLst>
-              <a:ext uri="{FF2B5EF4-FFF2-40B4-BE49-F238E27FC236}">
-                <a16:creationId xmlns:a16="http://schemas.microsoft.com/office/drawing/2014/main" id="{F565E465-14D7-AC96-4BB8-C8E857DBA7A2}"/>
-              </a:ext>
-            </a:extLst>
-          </p:cNvPr>
-          <p:cNvSpPr txBox="1"/>
-          <p:nvPr/>
-        </p:nvSpPr>
-        <p:spPr>
-          <a:xfrm>
-            <a:off x="10384896" y="5104070"/>
-            <a:ext cx="1346605" cy="338554"/>
-          </a:xfrm>
-          <a:custGeom>
-            <a:avLst/>
-            <a:gdLst>
-              <a:gd name="csX0" fmla="*/ 0 w 1346605"/>
-              <a:gd name="csY0" fmla="*/ 0 h 338554"/>
-              <a:gd name="csX1" fmla="*/ 632904 w 1346605"/>
-              <a:gd name="csY1" fmla="*/ 0 h 338554"/>
-              <a:gd name="csX2" fmla="*/ 1346605 w 1346605"/>
-              <a:gd name="csY2" fmla="*/ 0 h 338554"/>
-              <a:gd name="csX3" fmla="*/ 1346605 w 1346605"/>
-              <a:gd name="csY3" fmla="*/ 338554 h 338554"/>
-              <a:gd name="csX4" fmla="*/ 646370 w 1346605"/>
-              <a:gd name="csY4" fmla="*/ 338554 h 338554"/>
-              <a:gd name="csX5" fmla="*/ 0 w 1346605"/>
-              <a:gd name="csY5" fmla="*/ 338554 h 338554"/>
-              <a:gd name="csX6" fmla="*/ 0 w 1346605"/>
-              <a:gd name="csY6" fmla="*/ 0 h 338554"/>
-            </a:gdLst>
-            <a:ahLst/>
-            <a:cxnLst>
-              <a:cxn ang="0">
-                <a:pos x="csX0" y="csY0"/>
-              </a:cxn>
-              <a:cxn ang="0">
-                <a:pos x="csX1" y="csY1"/>
-              </a:cxn>
-              <a:cxn ang="0">
-                <a:pos x="csX2" y="csY2"/>
-              </a:cxn>
-              <a:cxn ang="0">
-                <a:pos x="csX3" y="csY3"/>
-              </a:cxn>
-              <a:cxn ang="0">
-                <a:pos x="csX4" y="csY4"/>
-              </a:cxn>
-              <a:cxn ang="0">
-                <a:pos x="csX5" y="csY5"/>
-              </a:cxn>
-              <a:cxn ang="0">
-                <a:pos x="csX6" y="csY6"/>
-              </a:cxn>
-            </a:cxnLst>
-            <a:rect l="l" t="t" r="r" b="b"/>
-            <a:pathLst>
-              <a:path w="1346605" h="338554" fill="none" extrusionOk="0">
-                <a:moveTo>
-                  <a:pt x="0" y="0"/>
-                </a:moveTo>
-                <a:cubicBezTo>
-                  <a:pt x="253654" y="29217"/>
-                  <a:pt x="356173" y="4834"/>
-                  <a:pt x="632904" y="0"/>
-                </a:cubicBezTo>
-                <a:cubicBezTo>
-                  <a:pt x="909635" y="-4834"/>
-                  <a:pt x="1121379" y="26169"/>
-                  <a:pt x="1346605" y="0"/>
-                </a:cubicBezTo>
-                <a:cubicBezTo>
-                  <a:pt x="1349418" y="77488"/>
-                  <a:pt x="1346269" y="251748"/>
-                  <a:pt x="1346605" y="338554"/>
-                </a:cubicBezTo>
-                <a:cubicBezTo>
-                  <a:pt x="1156298" y="318515"/>
-                  <a:pt x="891539" y="357030"/>
-                  <a:pt x="646370" y="338554"/>
-                </a:cubicBezTo>
-                <a:cubicBezTo>
-                  <a:pt x="401201" y="320078"/>
-                  <a:pt x="140549" y="357089"/>
-                  <a:pt x="0" y="338554"/>
-                </a:cubicBezTo>
-                <a:cubicBezTo>
-                  <a:pt x="-4482" y="202414"/>
-                  <a:pt x="1032" y="167563"/>
-                  <a:pt x="0" y="0"/>
-                </a:cubicBezTo>
-                <a:close/>
-              </a:path>
-              <a:path w="1346605" h="338554" stroke="0" extrusionOk="0">
-                <a:moveTo>
-                  <a:pt x="0" y="0"/>
-                </a:moveTo>
-                <a:cubicBezTo>
-                  <a:pt x="133781" y="28092"/>
-                  <a:pt x="482181" y="-20522"/>
-                  <a:pt x="646370" y="0"/>
-                </a:cubicBezTo>
-                <a:cubicBezTo>
-                  <a:pt x="810559" y="20522"/>
-                  <a:pt x="1153150" y="29368"/>
-                  <a:pt x="1346605" y="0"/>
-                </a:cubicBezTo>
-                <a:cubicBezTo>
-                  <a:pt x="1361590" y="126099"/>
-                  <a:pt x="1362397" y="215826"/>
-                  <a:pt x="1346605" y="338554"/>
-                </a:cubicBezTo>
-                <a:cubicBezTo>
-                  <a:pt x="1190988" y="358096"/>
-                  <a:pt x="883384" y="335404"/>
-                  <a:pt x="659836" y="338554"/>
-                </a:cubicBezTo>
-                <a:cubicBezTo>
-                  <a:pt x="436288" y="341704"/>
-                  <a:pt x="243431" y="341210"/>
-                  <a:pt x="0" y="338554"/>
-                </a:cubicBezTo>
-                <a:cubicBezTo>
-                  <a:pt x="5968" y="234824"/>
-                  <a:pt x="-14161" y="139561"/>
-                  <a:pt x="0" y="0"/>
-                </a:cubicBezTo>
-                <a:close/>
-              </a:path>
-            </a:pathLst>
-          </a:custGeom>
-          <a:ln w="28575">
-            <a:extLst>
-              <a:ext uri="{C807C97D-BFC1-408E-A445-0C87EB9F89A2}">
-                <ask:lineSketchStyleProps xmlns:ask="http://schemas.microsoft.com/office/drawing/2018/sketchyshapes" sd="283741067">
-                  <a:prstGeom prst="rect">
-                    <a:avLst/>
-                  </a:prstGeom>
-                  <ask:type>
-                    <ask:lineSketchFreehand/>
-                  </ask:type>
-                </ask:lineSketchStyleProps>
-              </a:ext>
-            </a:extLst>
-          </a:ln>
-        </p:spPr>
-        <p:style>
-          <a:lnRef idx="2">
-            <a:schemeClr val="accent5"/>
-          </a:lnRef>
-          <a:fillRef idx="1">
-            <a:schemeClr val="lt1"/>
-          </a:fillRef>
-          <a:effectRef idx="0">
-            <a:schemeClr val="accent5"/>
-          </a:effectRef>
-          <a:fontRef idx="minor">
-            <a:schemeClr val="dk1"/>
-          </a:fontRef>
-        </p:style>
-        <p:txBody>
-          <a:bodyPr rot="0" spcFirstLastPara="0" vert="horz" wrap="square" lIns="91440" tIns="45720" rIns="91440" bIns="45720" numCol="1" spcCol="0" rtlCol="0" fromWordArt="0" anchor="t" anchorCtr="0" forceAA="0" compatLnSpc="1">
-            <a:prstTxWarp prst="textNoShape">
-              <a:avLst/>
-            </a:prstTxWarp>
-            <a:spAutoFit/>
-          </a:bodyPr>
-          <a:lstStyle>
-            <a:defPPr>
-              <a:defRPr lang="en-US"/>
-            </a:defPPr>
-            <a:lvl1pPr marL="0" algn="l" defTabSz="914400" rtl="0" eaLnBrk="1" latinLnBrk="0" hangingPunct="1">
-              <a:defRPr sz="1800" kern="1200">
-                <a:solidFill>
-                  <a:schemeClr val="dk1"/>
-                </a:solidFill>
-                <a:latin typeface="+mn-lt"/>
-                <a:ea typeface="+mn-ea"/>
-                <a:cs typeface="+mn-cs"/>
-              </a:defRPr>
-            </a:lvl1pPr>
-            <a:lvl2pPr marL="457200" algn="l" defTabSz="914400" rtl="0" eaLnBrk="1" latinLnBrk="0" hangingPunct="1">
-              <a:defRPr sz="1800" kern="1200">
-                <a:solidFill>
-                  <a:schemeClr val="dk1"/>
-                </a:solidFill>
-                <a:latin typeface="+mn-lt"/>
-                <a:ea typeface="+mn-ea"/>
-                <a:cs typeface="+mn-cs"/>
-              </a:defRPr>
-            </a:lvl2pPr>
-            <a:lvl3pPr marL="914400" algn="l" defTabSz="914400" rtl="0" eaLnBrk="1" latinLnBrk="0" hangingPunct="1">
-              <a:defRPr sz="1800" kern="1200">
-                <a:solidFill>
-                  <a:schemeClr val="dk1"/>
-                </a:solidFill>
-                <a:latin typeface="+mn-lt"/>
-                <a:ea typeface="+mn-ea"/>
-                <a:cs typeface="+mn-cs"/>
-              </a:defRPr>
-            </a:lvl3pPr>
-            <a:lvl4pPr marL="1371600" algn="l" defTabSz="914400" rtl="0" eaLnBrk="1" latinLnBrk="0" hangingPunct="1">
-              <a:defRPr sz="1800" kern="1200">
-                <a:solidFill>
-                  <a:schemeClr val="dk1"/>
-                </a:solidFill>
-                <a:latin typeface="+mn-lt"/>
-                <a:ea typeface="+mn-ea"/>
-                <a:cs typeface="+mn-cs"/>
-              </a:defRPr>
-            </a:lvl4pPr>
-            <a:lvl5pPr marL="1828800" algn="l" defTabSz="914400" rtl="0" eaLnBrk="1" latinLnBrk="0" hangingPunct="1">
-              <a:defRPr sz="1800" kern="1200">
-                <a:solidFill>
-                  <a:schemeClr val="dk1"/>
-                </a:solidFill>
-                <a:latin typeface="+mn-lt"/>
-                <a:ea typeface="+mn-ea"/>
-                <a:cs typeface="+mn-cs"/>
-              </a:defRPr>
-            </a:lvl5pPr>
-            <a:lvl6pPr marL="2286000" algn="l" defTabSz="914400" rtl="0" eaLnBrk="1" latinLnBrk="0" hangingPunct="1">
-              <a:defRPr sz="1800" kern="1200">
-                <a:solidFill>
-                  <a:schemeClr val="dk1"/>
-                </a:solidFill>
-                <a:latin typeface="+mn-lt"/>
-                <a:ea typeface="+mn-ea"/>
-                <a:cs typeface="+mn-cs"/>
-              </a:defRPr>
-            </a:lvl6pPr>
-            <a:lvl7pPr marL="2743200" algn="l" defTabSz="914400" rtl="0" eaLnBrk="1" latinLnBrk="0" hangingPunct="1">
-              <a:defRPr sz="1800" kern="1200">
-                <a:solidFill>
-                  <a:schemeClr val="dk1"/>
-                </a:solidFill>
-                <a:latin typeface="+mn-lt"/>
-                <a:ea typeface="+mn-ea"/>
-                <a:cs typeface="+mn-cs"/>
-              </a:defRPr>
-            </a:lvl7pPr>
-            <a:lvl8pPr marL="3200400" algn="l" defTabSz="914400" rtl="0" eaLnBrk="1" latinLnBrk="0" hangingPunct="1">
-              <a:defRPr sz="1800" kern="1200">
-                <a:solidFill>
-                  <a:schemeClr val="dk1"/>
-                </a:solidFill>
-                <a:latin typeface="+mn-lt"/>
-                <a:ea typeface="+mn-ea"/>
-                <a:cs typeface="+mn-cs"/>
-              </a:defRPr>
-            </a:lvl8pPr>
-            <a:lvl9pPr marL="3657600" algn="l" defTabSz="914400" rtl="0" eaLnBrk="1" latinLnBrk="0" hangingPunct="1">
-              <a:defRPr sz="1800" kern="1200">
-                <a:solidFill>
-                  <a:schemeClr val="dk1"/>
-                </a:solidFill>
-                <a:latin typeface="+mn-lt"/>
-                <a:ea typeface="+mn-ea"/>
-                <a:cs typeface="+mn-cs"/>
-              </a:defRPr>
-            </a:lvl9pPr>
-          </a:lstStyle>
-          <a:p>
-            <a:pPr algn="l"/>
-            <a:r>
-              <a:rPr lang="en-US" sz="1600"/>
-              <a:t>Embeddings</a:t>
-            </a:r>
-          </a:p>
-        </p:txBody>
-      </p:sp>
-      <p:sp>
-        <p:nvSpPr>
-          <p:cNvPr id="31" name="TextBox 35">
-            <a:extLst>
-              <a:ext uri="{FF2B5EF4-FFF2-40B4-BE49-F238E27FC236}">
-                <a16:creationId xmlns:a16="http://schemas.microsoft.com/office/drawing/2014/main" id="{C21CB81B-840D-ED4E-DF15-D302248C1FB2}"/>
-              </a:ext>
-            </a:extLst>
-          </p:cNvPr>
-          <p:cNvSpPr txBox="1"/>
-          <p:nvPr/>
-        </p:nvSpPr>
-        <p:spPr>
-          <a:xfrm>
-            <a:off x="10390010" y="6145520"/>
-            <a:ext cx="1341491" cy="338554"/>
-          </a:xfrm>
-          <a:custGeom>
-            <a:avLst/>
-            <a:gdLst>
-              <a:gd name="csX0" fmla="*/ 0 w 1341491"/>
-              <a:gd name="csY0" fmla="*/ 0 h 338554"/>
-              <a:gd name="csX1" fmla="*/ 630501 w 1341491"/>
-              <a:gd name="csY1" fmla="*/ 0 h 338554"/>
-              <a:gd name="csX2" fmla="*/ 1341491 w 1341491"/>
-              <a:gd name="csY2" fmla="*/ 0 h 338554"/>
-              <a:gd name="csX3" fmla="*/ 1341491 w 1341491"/>
-              <a:gd name="csY3" fmla="*/ 338554 h 338554"/>
-              <a:gd name="csX4" fmla="*/ 643916 w 1341491"/>
-              <a:gd name="csY4" fmla="*/ 338554 h 338554"/>
-              <a:gd name="csX5" fmla="*/ 0 w 1341491"/>
-              <a:gd name="csY5" fmla="*/ 338554 h 338554"/>
-              <a:gd name="csX6" fmla="*/ 0 w 1341491"/>
-              <a:gd name="csY6" fmla="*/ 0 h 338554"/>
-            </a:gdLst>
-            <a:ahLst/>
-            <a:cxnLst>
-              <a:cxn ang="0">
-                <a:pos x="csX0" y="csY0"/>
-              </a:cxn>
-              <a:cxn ang="0">
-                <a:pos x="csX1" y="csY1"/>
-              </a:cxn>
-              <a:cxn ang="0">
-                <a:pos x="csX2" y="csY2"/>
-              </a:cxn>
-              <a:cxn ang="0">
-                <a:pos x="csX3" y="csY3"/>
-              </a:cxn>
-              <a:cxn ang="0">
-                <a:pos x="csX4" y="csY4"/>
-              </a:cxn>
-              <a:cxn ang="0">
-                <a:pos x="csX5" y="csY5"/>
-              </a:cxn>
-              <a:cxn ang="0">
-                <a:pos x="csX6" y="csY6"/>
-              </a:cxn>
-            </a:cxnLst>
-            <a:rect l="l" t="t" r="r" b="b"/>
-            <a:pathLst>
-              <a:path w="1341491" h="338554" fill="none" extrusionOk="0">
-                <a:moveTo>
-                  <a:pt x="0" y="0"/>
-                </a:moveTo>
-                <a:cubicBezTo>
-                  <a:pt x="201971" y="22649"/>
-                  <a:pt x="355596" y="-14105"/>
-                  <a:pt x="630501" y="0"/>
-                </a:cubicBezTo>
-                <a:cubicBezTo>
-                  <a:pt x="905406" y="14105"/>
-                  <a:pt x="1018929" y="-31432"/>
-                  <a:pt x="1341491" y="0"/>
-                </a:cubicBezTo>
-                <a:cubicBezTo>
-                  <a:pt x="1344304" y="77488"/>
-                  <a:pt x="1341155" y="251748"/>
-                  <a:pt x="1341491" y="338554"/>
-                </a:cubicBezTo>
-                <a:cubicBezTo>
-                  <a:pt x="1071780" y="305917"/>
-                  <a:pt x="941141" y="314440"/>
-                  <a:pt x="643916" y="338554"/>
-                </a:cubicBezTo>
-                <a:cubicBezTo>
-                  <a:pt x="346691" y="362668"/>
-                  <a:pt x="302681" y="339446"/>
-                  <a:pt x="0" y="338554"/>
-                </a:cubicBezTo>
-                <a:cubicBezTo>
-                  <a:pt x="-4482" y="202414"/>
-                  <a:pt x="1032" y="167563"/>
-                  <a:pt x="0" y="0"/>
-                </a:cubicBezTo>
-                <a:close/>
-              </a:path>
-              <a:path w="1341491" h="338554" stroke="0" extrusionOk="0">
-                <a:moveTo>
-                  <a:pt x="0" y="0"/>
-                </a:moveTo>
-                <a:cubicBezTo>
-                  <a:pt x="313537" y="7450"/>
-                  <a:pt x="392150" y="-21928"/>
-                  <a:pt x="643916" y="0"/>
-                </a:cubicBezTo>
-                <a:cubicBezTo>
-                  <a:pt x="895682" y="21928"/>
-                  <a:pt x="1009220" y="5527"/>
-                  <a:pt x="1341491" y="0"/>
-                </a:cubicBezTo>
-                <a:cubicBezTo>
-                  <a:pt x="1356476" y="126099"/>
-                  <a:pt x="1357283" y="215826"/>
-                  <a:pt x="1341491" y="338554"/>
-                </a:cubicBezTo>
-                <a:cubicBezTo>
-                  <a:pt x="1092623" y="306327"/>
-                  <a:pt x="858267" y="323813"/>
-                  <a:pt x="657331" y="338554"/>
-                </a:cubicBezTo>
-                <a:cubicBezTo>
-                  <a:pt x="456395" y="353295"/>
-                  <a:pt x="296557" y="312489"/>
-                  <a:pt x="0" y="338554"/>
-                </a:cubicBezTo>
-                <a:cubicBezTo>
-                  <a:pt x="5968" y="234824"/>
-                  <a:pt x="-14161" y="139561"/>
-                  <a:pt x="0" y="0"/>
-                </a:cubicBezTo>
-                <a:close/>
-              </a:path>
-            </a:pathLst>
-          </a:custGeom>
-          <a:ln w="28575">
             <a:solidFill>
-              <a:srgbClr val="FF0000"/>
+              <a:srgbClr val="1B55EB"/>
             </a:solidFill>
             <a:extLst>
               <a:ext uri="{C807C97D-BFC1-408E-A445-0C87EB9F89A2}">
@@ -10819,17 +10604,17 @@
             <a:pPr algn="l"/>
             <a:r>
               <a:rPr lang="en-US" sz="1600"/>
-              <a:t>Output</a:t>
+              <a:t>Tokenization</a:t>
             </a:r>
           </a:p>
         </p:txBody>
       </p:sp>
       <p:sp>
         <p:nvSpPr>
-          <p:cNvPr id="32" name="TextBox 36">
+          <p:cNvPr id="30" name="TextBox 34">
             <a:extLst>
               <a:ext uri="{FF2B5EF4-FFF2-40B4-BE49-F238E27FC236}">
-                <a16:creationId xmlns:a16="http://schemas.microsoft.com/office/drawing/2014/main" id="{54ED427E-7866-13F9-59C0-BC0D7F989A8A}"/>
+                <a16:creationId xmlns:a16="http://schemas.microsoft.com/office/drawing/2014/main" id="{F565E465-14D7-AC96-4BB8-C8E857DBA7A2}"/>
               </a:ext>
             </a:extLst>
           </p:cNvPr>
@@ -10838,25 +10623,25 @@
         </p:nvSpPr>
         <p:spPr>
           <a:xfrm>
-            <a:off x="10384896" y="5616987"/>
-            <a:ext cx="1351720" cy="338554"/>
+            <a:off x="10503453" y="3757050"/>
+            <a:ext cx="1346605" cy="338554"/>
           </a:xfrm>
           <a:custGeom>
             <a:avLst/>
             <a:gdLst>
-              <a:gd name="csX0" fmla="*/ 0 w 1351720"/>
+              <a:gd name="csX0" fmla="*/ 0 w 1346605"/>
               <a:gd name="csY0" fmla="*/ 0 h 338554"/>
-              <a:gd name="csX1" fmla="*/ 635308 w 1351720"/>
+              <a:gd name="csX1" fmla="*/ 632904 w 1346605"/>
               <a:gd name="csY1" fmla="*/ 0 h 338554"/>
-              <a:gd name="csX2" fmla="*/ 1351720 w 1351720"/>
+              <a:gd name="csX2" fmla="*/ 1346605 w 1346605"/>
               <a:gd name="csY2" fmla="*/ 0 h 338554"/>
-              <a:gd name="csX3" fmla="*/ 1351720 w 1351720"/>
+              <a:gd name="csX3" fmla="*/ 1346605 w 1346605"/>
               <a:gd name="csY3" fmla="*/ 338554 h 338554"/>
-              <a:gd name="csX4" fmla="*/ 648826 w 1351720"/>
+              <a:gd name="csX4" fmla="*/ 646370 w 1346605"/>
               <a:gd name="csY4" fmla="*/ 338554 h 338554"/>
-              <a:gd name="csX5" fmla="*/ 0 w 1351720"/>
+              <a:gd name="csX5" fmla="*/ 0 w 1346605"/>
               <a:gd name="csY5" fmla="*/ 338554 h 338554"/>
-              <a:gd name="csX6" fmla="*/ 0 w 1351720"/>
+              <a:gd name="csX6" fmla="*/ 0 w 1346605"/>
               <a:gd name="csY6" fmla="*/ 0 h 338554"/>
             </a:gdLst>
             <a:ahLst/>
@@ -10885,33 +10670,33 @@
             </a:cxnLst>
             <a:rect l="l" t="t" r="r" b="b"/>
             <a:pathLst>
-              <a:path w="1351720" h="338554" fill="none" extrusionOk="0">
+              <a:path w="1346605" h="338554" fill="none" extrusionOk="0">
                 <a:moveTo>
                   <a:pt x="0" y="0"/>
                 </a:moveTo>
                 <a:cubicBezTo>
-                  <a:pt x="143396" y="-25832"/>
-                  <a:pt x="453550" y="4788"/>
-                  <a:pt x="635308" y="0"/>
+                  <a:pt x="253654" y="29217"/>
+                  <a:pt x="356173" y="4834"/>
+                  <a:pt x="632904" y="0"/>
                 </a:cubicBezTo>
                 <a:cubicBezTo>
-                  <a:pt x="817066" y="-4788"/>
-                  <a:pt x="1054450" y="34900"/>
-                  <a:pt x="1351720" y="0"/>
+                  <a:pt x="909635" y="-4834"/>
+                  <a:pt x="1121379" y="26169"/>
+                  <a:pt x="1346605" y="0"/>
                 </a:cubicBezTo>
                 <a:cubicBezTo>
-                  <a:pt x="1354533" y="77488"/>
-                  <a:pt x="1351384" y="251748"/>
-                  <a:pt x="1351720" y="338554"/>
+                  <a:pt x="1349418" y="77488"/>
+                  <a:pt x="1346269" y="251748"/>
+                  <a:pt x="1346605" y="338554"/>
                 </a:cubicBezTo>
                 <a:cubicBezTo>
-                  <a:pt x="1126929" y="310424"/>
-                  <a:pt x="985853" y="342082"/>
-                  <a:pt x="648826" y="338554"/>
+                  <a:pt x="1156298" y="318515"/>
+                  <a:pt x="891539" y="357030"/>
+                  <a:pt x="646370" y="338554"/>
                 </a:cubicBezTo>
                 <a:cubicBezTo>
-                  <a:pt x="311799" y="335026"/>
-                  <a:pt x="271547" y="361133"/>
+                  <a:pt x="401201" y="320078"/>
+                  <a:pt x="140549" y="357089"/>
                   <a:pt x="0" y="338554"/>
                 </a:cubicBezTo>
                 <a:cubicBezTo>
@@ -10921,33 +10706,33 @@
                 </a:cubicBezTo>
                 <a:close/>
               </a:path>
-              <a:path w="1351720" h="338554" stroke="0" extrusionOk="0">
+              <a:path w="1346605" h="338554" stroke="0" extrusionOk="0">
                 <a:moveTo>
                   <a:pt x="0" y="0"/>
                 </a:moveTo>
                 <a:cubicBezTo>
-                  <a:pt x="159052" y="28615"/>
-                  <a:pt x="432890" y="8531"/>
-                  <a:pt x="648826" y="0"/>
+                  <a:pt x="133781" y="28092"/>
+                  <a:pt x="482181" y="-20522"/>
+                  <a:pt x="646370" y="0"/>
                 </a:cubicBezTo>
                 <a:cubicBezTo>
-                  <a:pt x="864762" y="-8531"/>
-                  <a:pt x="1171553" y="-28184"/>
-                  <a:pt x="1351720" y="0"/>
+                  <a:pt x="810559" y="20522"/>
+                  <a:pt x="1153150" y="29368"/>
+                  <a:pt x="1346605" y="0"/>
                 </a:cubicBezTo>
                 <a:cubicBezTo>
-                  <a:pt x="1366705" y="126099"/>
-                  <a:pt x="1367512" y="215826"/>
-                  <a:pt x="1351720" y="338554"/>
+                  <a:pt x="1361590" y="126099"/>
+                  <a:pt x="1362397" y="215826"/>
+                  <a:pt x="1346605" y="338554"/>
                 </a:cubicBezTo>
                 <a:cubicBezTo>
-                  <a:pt x="1031548" y="314607"/>
-                  <a:pt x="1003532" y="318399"/>
-                  <a:pt x="662343" y="338554"/>
+                  <a:pt x="1190988" y="358096"/>
+                  <a:pt x="883384" y="335404"/>
+                  <a:pt x="659836" y="338554"/>
                 </a:cubicBezTo>
                 <a:cubicBezTo>
-                  <a:pt x="321154" y="358709"/>
-                  <a:pt x="166031" y="362599"/>
+                  <a:pt x="436288" y="341704"/>
+                  <a:pt x="243431" y="341210"/>
                   <a:pt x="0" y="338554"/>
                 </a:cubicBezTo>
                 <a:cubicBezTo>
@@ -10960,6 +10745,9 @@
             </a:pathLst>
           </a:custGeom>
           <a:ln w="28575">
+            <a:solidFill>
+              <a:srgbClr val="1B55EB"/>
+            </a:solidFill>
             <a:extLst>
               <a:ext uri="{C807C97D-BFC1-408E-A445-0C87EB9F89A2}">
                 <ask:lineSketchStyleProps xmlns:ask="http://schemas.microsoft.com/office/drawing/2018/sketchyshapes" sd="283741067">
@@ -11094,17 +10882,17 @@
             <a:pPr algn="l"/>
             <a:r>
               <a:rPr lang="en-US" sz="1600"/>
-              <a:t>Attention</a:t>
+              <a:t>Embeddings</a:t>
             </a:r>
           </a:p>
         </p:txBody>
       </p:sp>
       <p:sp>
         <p:nvSpPr>
-          <p:cNvPr id="33" name="TextBox 7">
+          <p:cNvPr id="31" name="TextBox 35">
             <a:extLst>
               <a:ext uri="{FF2B5EF4-FFF2-40B4-BE49-F238E27FC236}">
-                <a16:creationId xmlns:a16="http://schemas.microsoft.com/office/drawing/2014/main" id="{BCC5FE95-2FF8-7809-29D7-EE6C05FB86AD}"/>
+                <a16:creationId xmlns:a16="http://schemas.microsoft.com/office/drawing/2014/main" id="{C21CB81B-840D-ED4E-DF15-D302248C1FB2}"/>
               </a:ext>
             </a:extLst>
           </p:cNvPr>
@@ -11113,25 +10901,25 @@
         </p:nvSpPr>
         <p:spPr>
           <a:xfrm>
-            <a:off x="10387618" y="4070685"/>
-            <a:ext cx="1351720" cy="338554"/>
+            <a:off x="10508567" y="4798500"/>
+            <a:ext cx="1341491" cy="338554"/>
           </a:xfrm>
           <a:custGeom>
             <a:avLst/>
             <a:gdLst>
-              <a:gd name="csX0" fmla="*/ 0 w 1351720"/>
+              <a:gd name="csX0" fmla="*/ 0 w 1341491"/>
               <a:gd name="csY0" fmla="*/ 0 h 338554"/>
-              <a:gd name="csX1" fmla="*/ 635308 w 1351720"/>
+              <a:gd name="csX1" fmla="*/ 630501 w 1341491"/>
               <a:gd name="csY1" fmla="*/ 0 h 338554"/>
-              <a:gd name="csX2" fmla="*/ 1351720 w 1351720"/>
+              <a:gd name="csX2" fmla="*/ 1341491 w 1341491"/>
               <a:gd name="csY2" fmla="*/ 0 h 338554"/>
-              <a:gd name="csX3" fmla="*/ 1351720 w 1351720"/>
+              <a:gd name="csX3" fmla="*/ 1341491 w 1341491"/>
               <a:gd name="csY3" fmla="*/ 338554 h 338554"/>
-              <a:gd name="csX4" fmla="*/ 648826 w 1351720"/>
+              <a:gd name="csX4" fmla="*/ 643916 w 1341491"/>
               <a:gd name="csY4" fmla="*/ 338554 h 338554"/>
-              <a:gd name="csX5" fmla="*/ 0 w 1351720"/>
+              <a:gd name="csX5" fmla="*/ 0 w 1341491"/>
               <a:gd name="csY5" fmla="*/ 338554 h 338554"/>
-              <a:gd name="csX6" fmla="*/ 0 w 1351720"/>
+              <a:gd name="csX6" fmla="*/ 0 w 1341491"/>
               <a:gd name="csY6" fmla="*/ 0 h 338554"/>
             </a:gdLst>
             <a:ahLst/>
@@ -11160,33 +10948,33 @@
             </a:cxnLst>
             <a:rect l="l" t="t" r="r" b="b"/>
             <a:pathLst>
-              <a:path w="1351720" h="338554" fill="none" extrusionOk="0">
+              <a:path w="1341491" h="338554" fill="none" extrusionOk="0">
                 <a:moveTo>
                   <a:pt x="0" y="0"/>
                 </a:moveTo>
                 <a:cubicBezTo>
-                  <a:pt x="143396" y="-25832"/>
-                  <a:pt x="453550" y="4788"/>
-                  <a:pt x="635308" y="0"/>
+                  <a:pt x="201971" y="22649"/>
+                  <a:pt x="355596" y="-14105"/>
+                  <a:pt x="630501" y="0"/>
                 </a:cubicBezTo>
                 <a:cubicBezTo>
-                  <a:pt x="817066" y="-4788"/>
-                  <a:pt x="1054450" y="34900"/>
-                  <a:pt x="1351720" y="0"/>
+                  <a:pt x="905406" y="14105"/>
+                  <a:pt x="1018929" y="-31432"/>
+                  <a:pt x="1341491" y="0"/>
                 </a:cubicBezTo>
                 <a:cubicBezTo>
-                  <a:pt x="1354533" y="77488"/>
-                  <a:pt x="1351384" y="251748"/>
-                  <a:pt x="1351720" y="338554"/>
+                  <a:pt x="1344304" y="77488"/>
+                  <a:pt x="1341155" y="251748"/>
+                  <a:pt x="1341491" y="338554"/>
                 </a:cubicBezTo>
                 <a:cubicBezTo>
-                  <a:pt x="1126929" y="310424"/>
-                  <a:pt x="985853" y="342082"/>
-                  <a:pt x="648826" y="338554"/>
+                  <a:pt x="1071780" y="305917"/>
+                  <a:pt x="941141" y="314440"/>
+                  <a:pt x="643916" y="338554"/>
                 </a:cubicBezTo>
                 <a:cubicBezTo>
-                  <a:pt x="311799" y="335026"/>
-                  <a:pt x="271547" y="361133"/>
+                  <a:pt x="346691" y="362668"/>
+                  <a:pt x="302681" y="339446"/>
                   <a:pt x="0" y="338554"/>
                 </a:cubicBezTo>
                 <a:cubicBezTo>
@@ -11196,33 +10984,33 @@
                 </a:cubicBezTo>
                 <a:close/>
               </a:path>
-              <a:path w="1351720" h="338554" stroke="0" extrusionOk="0">
+              <a:path w="1341491" h="338554" stroke="0" extrusionOk="0">
                 <a:moveTo>
                   <a:pt x="0" y="0"/>
                 </a:moveTo>
                 <a:cubicBezTo>
-                  <a:pt x="159052" y="28615"/>
-                  <a:pt x="432890" y="8531"/>
-                  <a:pt x="648826" y="0"/>
+                  <a:pt x="313537" y="7450"/>
+                  <a:pt x="392150" y="-21928"/>
+                  <a:pt x="643916" y="0"/>
                 </a:cubicBezTo>
                 <a:cubicBezTo>
-                  <a:pt x="864762" y="-8531"/>
-                  <a:pt x="1171553" y="-28184"/>
-                  <a:pt x="1351720" y="0"/>
+                  <a:pt x="895682" y="21928"/>
+                  <a:pt x="1009220" y="5527"/>
+                  <a:pt x="1341491" y="0"/>
                 </a:cubicBezTo>
                 <a:cubicBezTo>
-                  <a:pt x="1366705" y="126099"/>
-                  <a:pt x="1367512" y="215826"/>
-                  <a:pt x="1351720" y="338554"/>
+                  <a:pt x="1356476" y="126099"/>
+                  <a:pt x="1357283" y="215826"/>
+                  <a:pt x="1341491" y="338554"/>
                 </a:cubicBezTo>
                 <a:cubicBezTo>
-                  <a:pt x="1031548" y="314607"/>
-                  <a:pt x="1003532" y="318399"/>
-                  <a:pt x="662343" y="338554"/>
+                  <a:pt x="1092623" y="306327"/>
+                  <a:pt x="858267" y="323813"/>
+                  <a:pt x="657331" y="338554"/>
                 </a:cubicBezTo>
                 <a:cubicBezTo>
-                  <a:pt x="321154" y="358709"/>
-                  <a:pt x="166031" y="362599"/>
+                  <a:pt x="456395" y="353295"/>
+                  <a:pt x="296557" y="312489"/>
                   <a:pt x="0" y="338554"/>
                 </a:cubicBezTo>
                 <a:cubicBezTo>
@@ -11235,6 +11023,9 @@
             </a:pathLst>
           </a:custGeom>
           <a:ln w="28575">
+            <a:solidFill>
+              <a:srgbClr val="1B55EB"/>
+            </a:solidFill>
             <a:extLst>
               <a:ext uri="{C807C97D-BFC1-408E-A445-0C87EB9F89A2}">
                 <ask:lineSketchStyleProps xmlns:ask="http://schemas.microsoft.com/office/drawing/2018/sketchyshapes" sd="283741067">
@@ -11369,41 +11160,45 @@
             <a:pPr algn="l"/>
             <a:r>
               <a:rPr lang="en-US" sz="1600"/>
-              <a:t>Hardware</a:t>
+              <a:t>Output</a:t>
             </a:r>
           </a:p>
         </p:txBody>
       </p:sp>
       <p:sp>
         <p:nvSpPr>
-          <p:cNvPr id="34" name="Flowchart: Connector 33">
+          <p:cNvPr id="32" name="TextBox 36">
             <a:extLst>
               <a:ext uri="{FF2B5EF4-FFF2-40B4-BE49-F238E27FC236}">
-                <a16:creationId xmlns:a16="http://schemas.microsoft.com/office/drawing/2014/main" id="{3B67FE26-BA0B-EB7C-E6DF-06FE55609F80}"/>
+                <a16:creationId xmlns:a16="http://schemas.microsoft.com/office/drawing/2014/main" id="{54ED427E-7866-13F9-59C0-BC0D7F989A8A}"/>
               </a:ext>
             </a:extLst>
           </p:cNvPr>
-          <p:cNvSpPr/>
+          <p:cNvSpPr txBox="1"/>
           <p:nvPr/>
         </p:nvSpPr>
         <p:spPr>
           <a:xfrm>
-            <a:off x="8072051" y="4431979"/>
-            <a:ext cx="221952" cy="237294"/>
+            <a:off x="10503453" y="4269967"/>
+            <a:ext cx="1351720" cy="338554"/>
           </a:xfrm>
           <a:custGeom>
             <a:avLst/>
             <a:gdLst>
-              <a:gd name="csX0" fmla="*/ 0 w 221952"/>
-              <a:gd name="csY0" fmla="*/ 118647 h 237294"/>
-              <a:gd name="csX1" fmla="*/ 110976 w 221952"/>
-              <a:gd name="csY1" fmla="*/ 0 h 237294"/>
-              <a:gd name="csX2" fmla="*/ 221952 w 221952"/>
-              <a:gd name="csY2" fmla="*/ 118647 h 237294"/>
-              <a:gd name="csX3" fmla="*/ 110976 w 221952"/>
-              <a:gd name="csY3" fmla="*/ 237294 h 237294"/>
-              <a:gd name="csX4" fmla="*/ 0 w 221952"/>
-              <a:gd name="csY4" fmla="*/ 118647 h 237294"/>
+              <a:gd name="csX0" fmla="*/ 0 w 1351720"/>
+              <a:gd name="csY0" fmla="*/ 0 h 338554"/>
+              <a:gd name="csX1" fmla="*/ 635308 w 1351720"/>
+              <a:gd name="csY1" fmla="*/ 0 h 338554"/>
+              <a:gd name="csX2" fmla="*/ 1351720 w 1351720"/>
+              <a:gd name="csY2" fmla="*/ 0 h 338554"/>
+              <a:gd name="csX3" fmla="*/ 1351720 w 1351720"/>
+              <a:gd name="csY3" fmla="*/ 338554 h 338554"/>
+              <a:gd name="csX4" fmla="*/ 648826 w 1351720"/>
+              <a:gd name="csY4" fmla="*/ 338554 h 338554"/>
+              <a:gd name="csX5" fmla="*/ 0 w 1351720"/>
+              <a:gd name="csY5" fmla="*/ 338554 h 338554"/>
+              <a:gd name="csX6" fmla="*/ 0 w 1351720"/>
+              <a:gd name="csY6" fmla="*/ 0 h 338554"/>
             </a:gdLst>
             <a:ahLst/>
             <a:cxnLst>
@@ -11422,68 +11217,97 @@
               <a:cxn ang="0">
                 <a:pos x="csX4" y="csY4"/>
               </a:cxn>
+              <a:cxn ang="0">
+                <a:pos x="csX5" y="csY5"/>
+              </a:cxn>
+              <a:cxn ang="0">
+                <a:pos x="csX6" y="csY6"/>
+              </a:cxn>
             </a:cxnLst>
             <a:rect l="l" t="t" r="r" b="b"/>
             <a:pathLst>
-              <a:path w="221952" h="237294" fill="none" extrusionOk="0">
+              <a:path w="1351720" h="338554" fill="none" extrusionOk="0">
                 <a:moveTo>
-                  <a:pt x="0" y="118647"/>
+                  <a:pt x="0" y="0"/>
                 </a:moveTo>
                 <a:cubicBezTo>
-                  <a:pt x="-1073" y="51741"/>
-                  <a:pt x="45286" y="-3941"/>
-                  <a:pt x="110976" y="0"/>
+                  <a:pt x="143396" y="-25832"/>
+                  <a:pt x="453550" y="4788"/>
+                  <a:pt x="635308" y="0"/>
                 </a:cubicBezTo>
                 <a:cubicBezTo>
-                  <a:pt x="181556" y="-10600"/>
-                  <a:pt x="228892" y="60792"/>
-                  <a:pt x="221952" y="118647"/>
+                  <a:pt x="817066" y="-4788"/>
+                  <a:pt x="1054450" y="34900"/>
+                  <a:pt x="1351720" y="0"/>
                 </a:cubicBezTo>
                 <a:cubicBezTo>
-                  <a:pt x="210669" y="188861"/>
-                  <a:pt x="176239" y="229372"/>
-                  <a:pt x="110976" y="237294"/>
+                  <a:pt x="1354533" y="77488"/>
+                  <a:pt x="1351384" y="251748"/>
+                  <a:pt x="1351720" y="338554"/>
                 </a:cubicBezTo>
                 <a:cubicBezTo>
-                  <a:pt x="55130" y="237772"/>
-                  <a:pt x="-374" y="186746"/>
-                  <a:pt x="0" y="118647"/>
+                  <a:pt x="1126929" y="310424"/>
+                  <a:pt x="985853" y="342082"/>
+                  <a:pt x="648826" y="338554"/>
+                </a:cubicBezTo>
+                <a:cubicBezTo>
+                  <a:pt x="311799" y="335026"/>
+                  <a:pt x="271547" y="361133"/>
+                  <a:pt x="0" y="338554"/>
+                </a:cubicBezTo>
+                <a:cubicBezTo>
+                  <a:pt x="-4482" y="202414"/>
+                  <a:pt x="1032" y="167563"/>
+                  <a:pt x="0" y="0"/>
                 </a:cubicBezTo>
                 <a:close/>
               </a:path>
-              <a:path w="221952" h="237294" stroke="0" extrusionOk="0">
+              <a:path w="1351720" h="338554" stroke="0" extrusionOk="0">
                 <a:moveTo>
-                  <a:pt x="0" y="118647"/>
+                  <a:pt x="0" y="0"/>
                 </a:moveTo>
                 <a:cubicBezTo>
-                  <a:pt x="-2353" y="45735"/>
-                  <a:pt x="36539" y="1132"/>
-                  <a:pt x="110976" y="0"/>
+                  <a:pt x="159052" y="28615"/>
+                  <a:pt x="432890" y="8531"/>
+                  <a:pt x="648826" y="0"/>
                 </a:cubicBezTo>
                 <a:cubicBezTo>
-                  <a:pt x="171325" y="1311"/>
-                  <a:pt x="220694" y="51798"/>
-                  <a:pt x="221952" y="118647"/>
+                  <a:pt x="864762" y="-8531"/>
+                  <a:pt x="1171553" y="-28184"/>
+                  <a:pt x="1351720" y="0"/>
                 </a:cubicBezTo>
                 <a:cubicBezTo>
-                  <a:pt x="226735" y="192259"/>
-                  <a:pt x="180310" y="239462"/>
-                  <a:pt x="110976" y="237294"/>
+                  <a:pt x="1366705" y="126099"/>
+                  <a:pt x="1367512" y="215826"/>
+                  <a:pt x="1351720" y="338554"/>
                 </a:cubicBezTo>
                 <a:cubicBezTo>
-                  <a:pt x="47513" y="238802"/>
-                  <a:pt x="-5168" y="179523"/>
-                  <a:pt x="0" y="118647"/>
+                  <a:pt x="1031548" y="314607"/>
+                  <a:pt x="1003532" y="318399"/>
+                  <a:pt x="662343" y="338554"/>
+                </a:cubicBezTo>
+                <a:cubicBezTo>
+                  <a:pt x="321154" y="358709"/>
+                  <a:pt x="166031" y="362599"/>
+                  <a:pt x="0" y="338554"/>
+                </a:cubicBezTo>
+                <a:cubicBezTo>
+                  <a:pt x="5968" y="234824"/>
+                  <a:pt x="-14161" y="139561"/>
+                  <a:pt x="0" y="0"/>
                 </a:cubicBezTo>
                 <a:close/>
               </a:path>
             </a:pathLst>
           </a:custGeom>
           <a:ln w="28575">
+            <a:solidFill>
+              <a:srgbClr val="1B55EB"/>
+            </a:solidFill>
             <a:extLst>
               <a:ext uri="{C807C97D-BFC1-408E-A445-0C87EB9F89A2}">
-                <ask:lineSketchStyleProps xmlns:ask="http://schemas.microsoft.com/office/drawing/2018/sketchyshapes" sd="3499211612">
-                  <a:prstGeom prst="flowChartConnector">
+                <ask:lineSketchStyleProps xmlns:ask="http://schemas.microsoft.com/office/drawing/2018/sketchyshapes" sd="283741067">
+                  <a:prstGeom prst="rect">
                     <a:avLst/>
                   </a:prstGeom>
                   <ask:type>
@@ -11509,7 +11333,12 @@
           </a:fontRef>
         </p:style>
         <p:txBody>
-          <a:bodyPr lIns="91440" tIns="45720" rIns="91440" bIns="45720" rtlCol="0" anchor="ctr"/>
+          <a:bodyPr rot="0" spcFirstLastPara="0" vert="horz" wrap="square" lIns="91440" tIns="45720" rIns="91440" bIns="45720" numCol="1" spcCol="0" rtlCol="0" fromWordArt="0" anchor="t" anchorCtr="0" forceAA="0" compatLnSpc="1">
+            <a:prstTxWarp prst="textNoShape">
+              <a:avLst/>
+            </a:prstTxWarp>
+            <a:spAutoFit/>
+          </a:bodyPr>
           <a:lstStyle>
             <a:defPPr>
               <a:defRPr lang="en-US"/>
@@ -11606,44 +11435,48 @@
             </a:lvl9pPr>
           </a:lstStyle>
           <a:p>
-            <a:pPr algn="ctr"/>
+            <a:pPr algn="l"/>
             <a:r>
               <a:rPr lang="en-US" sz="1600"/>
-              <a:t>1</a:t>
+              <a:t>Attention</a:t>
             </a:r>
           </a:p>
         </p:txBody>
       </p:sp>
       <p:sp>
         <p:nvSpPr>
-          <p:cNvPr id="35" name="Flowchart: Connector 34">
+          <p:cNvPr id="33" name="TextBox 7">
             <a:extLst>
               <a:ext uri="{FF2B5EF4-FFF2-40B4-BE49-F238E27FC236}">
-                <a16:creationId xmlns:a16="http://schemas.microsoft.com/office/drawing/2014/main" id="{F29CDA69-8DBD-3E29-B51F-E7AF0A971805}"/>
+                <a16:creationId xmlns:a16="http://schemas.microsoft.com/office/drawing/2014/main" id="{BCC5FE95-2FF8-7809-29D7-EE6C05FB86AD}"/>
               </a:ext>
             </a:extLst>
           </p:cNvPr>
-          <p:cNvSpPr/>
+          <p:cNvSpPr txBox="1"/>
           <p:nvPr/>
         </p:nvSpPr>
         <p:spPr>
           <a:xfrm>
-            <a:off x="8972132" y="5306489"/>
-            <a:ext cx="221952" cy="237294"/>
+            <a:off x="10506175" y="2723665"/>
+            <a:ext cx="1351720" cy="338554"/>
           </a:xfrm>
           <a:custGeom>
             <a:avLst/>
             <a:gdLst>
-              <a:gd name="csX0" fmla="*/ 0 w 221952"/>
-              <a:gd name="csY0" fmla="*/ 118647 h 237294"/>
-              <a:gd name="csX1" fmla="*/ 110976 w 221952"/>
-              <a:gd name="csY1" fmla="*/ 0 h 237294"/>
-              <a:gd name="csX2" fmla="*/ 221952 w 221952"/>
-              <a:gd name="csY2" fmla="*/ 118647 h 237294"/>
-              <a:gd name="csX3" fmla="*/ 110976 w 221952"/>
-              <a:gd name="csY3" fmla="*/ 237294 h 237294"/>
-              <a:gd name="csX4" fmla="*/ 0 w 221952"/>
-              <a:gd name="csY4" fmla="*/ 118647 h 237294"/>
+              <a:gd name="csX0" fmla="*/ 0 w 1351720"/>
+              <a:gd name="csY0" fmla="*/ 0 h 338554"/>
+              <a:gd name="csX1" fmla="*/ 635308 w 1351720"/>
+              <a:gd name="csY1" fmla="*/ 0 h 338554"/>
+              <a:gd name="csX2" fmla="*/ 1351720 w 1351720"/>
+              <a:gd name="csY2" fmla="*/ 0 h 338554"/>
+              <a:gd name="csX3" fmla="*/ 1351720 w 1351720"/>
+              <a:gd name="csY3" fmla="*/ 338554 h 338554"/>
+              <a:gd name="csX4" fmla="*/ 648826 w 1351720"/>
+              <a:gd name="csY4" fmla="*/ 338554 h 338554"/>
+              <a:gd name="csX5" fmla="*/ 0 w 1351720"/>
+              <a:gd name="csY5" fmla="*/ 338554 h 338554"/>
+              <a:gd name="csX6" fmla="*/ 0 w 1351720"/>
+              <a:gd name="csY6" fmla="*/ 0 h 338554"/>
             </a:gdLst>
             <a:ahLst/>
             <a:cxnLst>
@@ -11662,68 +11495,97 @@
               <a:cxn ang="0">
                 <a:pos x="csX4" y="csY4"/>
               </a:cxn>
+              <a:cxn ang="0">
+                <a:pos x="csX5" y="csY5"/>
+              </a:cxn>
+              <a:cxn ang="0">
+                <a:pos x="csX6" y="csY6"/>
+              </a:cxn>
             </a:cxnLst>
             <a:rect l="l" t="t" r="r" b="b"/>
             <a:pathLst>
-              <a:path w="221952" h="237294" fill="none" extrusionOk="0">
+              <a:path w="1351720" h="338554" fill="none" extrusionOk="0">
                 <a:moveTo>
-                  <a:pt x="0" y="118647"/>
+                  <a:pt x="0" y="0"/>
                 </a:moveTo>
                 <a:cubicBezTo>
-                  <a:pt x="-1073" y="51741"/>
-                  <a:pt x="45286" y="-3941"/>
-                  <a:pt x="110976" y="0"/>
+                  <a:pt x="143396" y="-25832"/>
+                  <a:pt x="453550" y="4788"/>
+                  <a:pt x="635308" y="0"/>
                 </a:cubicBezTo>
                 <a:cubicBezTo>
-                  <a:pt x="181556" y="-10600"/>
-                  <a:pt x="228892" y="60792"/>
-                  <a:pt x="221952" y="118647"/>
+                  <a:pt x="817066" y="-4788"/>
+                  <a:pt x="1054450" y="34900"/>
+                  <a:pt x="1351720" y="0"/>
                 </a:cubicBezTo>
                 <a:cubicBezTo>
-                  <a:pt x="210669" y="188861"/>
-                  <a:pt x="176239" y="229372"/>
-                  <a:pt x="110976" y="237294"/>
+                  <a:pt x="1354533" y="77488"/>
+                  <a:pt x="1351384" y="251748"/>
+                  <a:pt x="1351720" y="338554"/>
                 </a:cubicBezTo>
                 <a:cubicBezTo>
-                  <a:pt x="55130" y="237772"/>
-                  <a:pt x="-374" y="186746"/>
-                  <a:pt x="0" y="118647"/>
+                  <a:pt x="1126929" y="310424"/>
+                  <a:pt x="985853" y="342082"/>
+                  <a:pt x="648826" y="338554"/>
+                </a:cubicBezTo>
+                <a:cubicBezTo>
+                  <a:pt x="311799" y="335026"/>
+                  <a:pt x="271547" y="361133"/>
+                  <a:pt x="0" y="338554"/>
+                </a:cubicBezTo>
+                <a:cubicBezTo>
+                  <a:pt x="-4482" y="202414"/>
+                  <a:pt x="1032" y="167563"/>
+                  <a:pt x="0" y="0"/>
                 </a:cubicBezTo>
                 <a:close/>
               </a:path>
-              <a:path w="221952" h="237294" stroke="0" extrusionOk="0">
+              <a:path w="1351720" h="338554" stroke="0" extrusionOk="0">
                 <a:moveTo>
-                  <a:pt x="0" y="118647"/>
+                  <a:pt x="0" y="0"/>
                 </a:moveTo>
                 <a:cubicBezTo>
-                  <a:pt x="-2353" y="45735"/>
-                  <a:pt x="36539" y="1132"/>
-                  <a:pt x="110976" y="0"/>
+                  <a:pt x="159052" y="28615"/>
+                  <a:pt x="432890" y="8531"/>
+                  <a:pt x="648826" y="0"/>
                 </a:cubicBezTo>
                 <a:cubicBezTo>
-                  <a:pt x="171325" y="1311"/>
-                  <a:pt x="220694" y="51798"/>
-                  <a:pt x="221952" y="118647"/>
+                  <a:pt x="864762" y="-8531"/>
+                  <a:pt x="1171553" y="-28184"/>
+                  <a:pt x="1351720" y="0"/>
                 </a:cubicBezTo>
                 <a:cubicBezTo>
-                  <a:pt x="226735" y="192259"/>
-                  <a:pt x="180310" y="239462"/>
-                  <a:pt x="110976" y="237294"/>
+                  <a:pt x="1366705" y="126099"/>
+                  <a:pt x="1367512" y="215826"/>
+                  <a:pt x="1351720" y="338554"/>
                 </a:cubicBezTo>
                 <a:cubicBezTo>
-                  <a:pt x="47513" y="238802"/>
-                  <a:pt x="-5168" y="179523"/>
-                  <a:pt x="0" y="118647"/>
+                  <a:pt x="1031548" y="314607"/>
+                  <a:pt x="1003532" y="318399"/>
+                  <a:pt x="662343" y="338554"/>
+                </a:cubicBezTo>
+                <a:cubicBezTo>
+                  <a:pt x="321154" y="358709"/>
+                  <a:pt x="166031" y="362599"/>
+                  <a:pt x="0" y="338554"/>
+                </a:cubicBezTo>
+                <a:cubicBezTo>
+                  <a:pt x="5968" y="234824"/>
+                  <a:pt x="-14161" y="139561"/>
+                  <a:pt x="0" y="0"/>
                 </a:cubicBezTo>
                 <a:close/>
               </a:path>
             </a:pathLst>
           </a:custGeom>
           <a:ln w="28575">
+            <a:solidFill>
+              <a:srgbClr val="1B55EB"/>
+            </a:solidFill>
             <a:extLst>
               <a:ext uri="{C807C97D-BFC1-408E-A445-0C87EB9F89A2}">
-                <ask:lineSketchStyleProps xmlns:ask="http://schemas.microsoft.com/office/drawing/2018/sketchyshapes" sd="3499211612">
-                  <a:prstGeom prst="flowChartConnector">
+                <ask:lineSketchStyleProps xmlns:ask="http://schemas.microsoft.com/office/drawing/2018/sketchyshapes" sd="283741067">
+                  <a:prstGeom prst="rect">
                     <a:avLst/>
                   </a:prstGeom>
                   <ask:type>
@@ -11749,7 +11611,12 @@
           </a:fontRef>
         </p:style>
         <p:txBody>
-          <a:bodyPr lIns="91440" tIns="45720" rIns="91440" bIns="45720" rtlCol="0" anchor="ctr"/>
+          <a:bodyPr rot="0" spcFirstLastPara="0" vert="horz" wrap="square" lIns="91440" tIns="45720" rIns="91440" bIns="45720" numCol="1" spcCol="0" rtlCol="0" fromWordArt="0" anchor="t" anchorCtr="0" forceAA="0" compatLnSpc="1">
+            <a:prstTxWarp prst="textNoShape">
+              <a:avLst/>
+            </a:prstTxWarp>
+            <a:spAutoFit/>
+          </a:bodyPr>
           <a:lstStyle>
             <a:defPPr>
               <a:defRPr lang="en-US"/>
@@ -11846,20 +11713,20 @@
             </a:lvl9pPr>
           </a:lstStyle>
           <a:p>
-            <a:pPr algn="ctr"/>
+            <a:pPr algn="l"/>
             <a:r>
               <a:rPr lang="en-US" sz="1600"/>
-              <a:t>3</a:t>
+              <a:t>Hardware</a:t>
             </a:r>
           </a:p>
         </p:txBody>
       </p:sp>
       <p:sp>
         <p:nvSpPr>
-          <p:cNvPr id="36" name="Flowchart: Connector 35">
+          <p:cNvPr id="34" name="Flowchart: Connector 33">
             <a:extLst>
               <a:ext uri="{FF2B5EF4-FFF2-40B4-BE49-F238E27FC236}">
-                <a16:creationId xmlns:a16="http://schemas.microsoft.com/office/drawing/2014/main" id="{FED7BF59-DE51-30E0-FC68-64D6D83590FA}"/>
+                <a16:creationId xmlns:a16="http://schemas.microsoft.com/office/drawing/2014/main" id="{3B67FE26-BA0B-EB7C-E6DF-06FE55609F80}"/>
               </a:ext>
             </a:extLst>
           </p:cNvPr>
@@ -11868,7 +11735,7 @@
         </p:nvSpPr>
         <p:spPr>
           <a:xfrm>
-            <a:off x="9575594" y="5306488"/>
+            <a:off x="8190608" y="3084959"/>
             <a:ext cx="221952" cy="237294"/>
           </a:xfrm>
           <a:custGeom>
@@ -11961,7 +11828,7 @@
           </a:custGeom>
           <a:ln w="28575">
             <a:solidFill>
-              <a:srgbClr val="FF0000"/>
+              <a:srgbClr val="1B55EB"/>
             </a:solidFill>
             <a:extLst>
               <a:ext uri="{C807C97D-BFC1-408E-A445-0C87EB9F89A2}">
@@ -12092,17 +11959,17 @@
             <a:pPr algn="ctr"/>
             <a:r>
               <a:rPr lang="en-US" sz="1600"/>
-              <a:t>4</a:t>
+              <a:t>1</a:t>
             </a:r>
           </a:p>
         </p:txBody>
       </p:sp>
       <p:sp>
         <p:nvSpPr>
-          <p:cNvPr id="37" name="Flowchart: Connector 36">
+          <p:cNvPr id="35" name="Flowchart: Connector 34">
             <a:extLst>
               <a:ext uri="{FF2B5EF4-FFF2-40B4-BE49-F238E27FC236}">
-                <a16:creationId xmlns:a16="http://schemas.microsoft.com/office/drawing/2014/main" id="{B3483E34-C09F-DF87-AF53-2A6AFB5409B4}"/>
+                <a16:creationId xmlns:a16="http://schemas.microsoft.com/office/drawing/2014/main" id="{F29CDA69-8DBD-3E29-B51F-E7AF0A971805}"/>
               </a:ext>
             </a:extLst>
           </p:cNvPr>
@@ -12111,727 +11978,7 @@
         </p:nvSpPr>
         <p:spPr>
           <a:xfrm>
-            <a:off x="8511863" y="4856449"/>
-            <a:ext cx="221952" cy="237294"/>
-          </a:xfrm>
-          <a:custGeom>
-            <a:avLst/>
-            <a:gdLst>
-              <a:gd name="csX0" fmla="*/ 0 w 221952"/>
-              <a:gd name="csY0" fmla="*/ 118647 h 237294"/>
-              <a:gd name="csX1" fmla="*/ 110976 w 221952"/>
-              <a:gd name="csY1" fmla="*/ 0 h 237294"/>
-              <a:gd name="csX2" fmla="*/ 221952 w 221952"/>
-              <a:gd name="csY2" fmla="*/ 118647 h 237294"/>
-              <a:gd name="csX3" fmla="*/ 110976 w 221952"/>
-              <a:gd name="csY3" fmla="*/ 237294 h 237294"/>
-              <a:gd name="csX4" fmla="*/ 0 w 221952"/>
-              <a:gd name="csY4" fmla="*/ 118647 h 237294"/>
-            </a:gdLst>
-            <a:ahLst/>
-            <a:cxnLst>
-              <a:cxn ang="0">
-                <a:pos x="csX0" y="csY0"/>
-              </a:cxn>
-              <a:cxn ang="0">
-                <a:pos x="csX1" y="csY1"/>
-              </a:cxn>
-              <a:cxn ang="0">
-                <a:pos x="csX2" y="csY2"/>
-              </a:cxn>
-              <a:cxn ang="0">
-                <a:pos x="csX3" y="csY3"/>
-              </a:cxn>
-              <a:cxn ang="0">
-                <a:pos x="csX4" y="csY4"/>
-              </a:cxn>
-            </a:cxnLst>
-            <a:rect l="l" t="t" r="r" b="b"/>
-            <a:pathLst>
-              <a:path w="221952" h="237294" fill="none" extrusionOk="0">
-                <a:moveTo>
-                  <a:pt x="0" y="118647"/>
-                </a:moveTo>
-                <a:cubicBezTo>
-                  <a:pt x="-1073" y="51741"/>
-                  <a:pt x="45286" y="-3941"/>
-                  <a:pt x="110976" y="0"/>
-                </a:cubicBezTo>
-                <a:cubicBezTo>
-                  <a:pt x="181556" y="-10600"/>
-                  <a:pt x="228892" y="60792"/>
-                  <a:pt x="221952" y="118647"/>
-                </a:cubicBezTo>
-                <a:cubicBezTo>
-                  <a:pt x="210669" y="188861"/>
-                  <a:pt x="176239" y="229372"/>
-                  <a:pt x="110976" y="237294"/>
-                </a:cubicBezTo>
-                <a:cubicBezTo>
-                  <a:pt x="55130" y="237772"/>
-                  <a:pt x="-374" y="186746"/>
-                  <a:pt x="0" y="118647"/>
-                </a:cubicBezTo>
-                <a:close/>
-              </a:path>
-              <a:path w="221952" h="237294" stroke="0" extrusionOk="0">
-                <a:moveTo>
-                  <a:pt x="0" y="118647"/>
-                </a:moveTo>
-                <a:cubicBezTo>
-                  <a:pt x="-2353" y="45735"/>
-                  <a:pt x="36539" y="1132"/>
-                  <a:pt x="110976" y="0"/>
-                </a:cubicBezTo>
-                <a:cubicBezTo>
-                  <a:pt x="171325" y="1311"/>
-                  <a:pt x="220694" y="51798"/>
-                  <a:pt x="221952" y="118647"/>
-                </a:cubicBezTo>
-                <a:cubicBezTo>
-                  <a:pt x="226735" y="192259"/>
-                  <a:pt x="180310" y="239462"/>
-                  <a:pt x="110976" y="237294"/>
-                </a:cubicBezTo>
-                <a:cubicBezTo>
-                  <a:pt x="47513" y="238802"/>
-                  <a:pt x="-5168" y="179523"/>
-                  <a:pt x="0" y="118647"/>
-                </a:cubicBezTo>
-                <a:close/>
-              </a:path>
-            </a:pathLst>
-          </a:custGeom>
-          <a:ln w="28575">
-            <a:extLst>
-              <a:ext uri="{C807C97D-BFC1-408E-A445-0C87EB9F89A2}">
-                <ask:lineSketchStyleProps xmlns:ask="http://schemas.microsoft.com/office/drawing/2018/sketchyshapes" sd="3499211612">
-                  <a:prstGeom prst="flowChartConnector">
-                    <a:avLst/>
-                  </a:prstGeom>
-                  <ask:type>
-                    <ask:lineSketchFreehand/>
-                  </ask:type>
-                </ask:lineSketchStyleProps>
-              </a:ext>
-            </a:extLst>
-          </a:ln>
-        </p:spPr>
-        <p:style>
-          <a:lnRef idx="2">
-            <a:schemeClr val="accent5"/>
-          </a:lnRef>
-          <a:fillRef idx="1">
-            <a:schemeClr val="lt1"/>
-          </a:fillRef>
-          <a:effectRef idx="0">
-            <a:schemeClr val="accent5"/>
-          </a:effectRef>
-          <a:fontRef idx="minor">
-            <a:schemeClr val="dk1"/>
-          </a:fontRef>
-        </p:style>
-        <p:txBody>
-          <a:bodyPr lIns="91440" tIns="45720" rIns="91440" bIns="45720" rtlCol="0" anchor="ctr"/>
-          <a:lstStyle>
-            <a:defPPr>
-              <a:defRPr lang="en-US"/>
-            </a:defPPr>
-            <a:lvl1pPr marL="0" algn="l" defTabSz="914400" rtl="0" eaLnBrk="1" latinLnBrk="0" hangingPunct="1">
-              <a:defRPr sz="1800" kern="1200">
-                <a:solidFill>
-                  <a:schemeClr val="dk1"/>
-                </a:solidFill>
-                <a:latin typeface="+mn-lt"/>
-                <a:ea typeface="+mn-ea"/>
-                <a:cs typeface="+mn-cs"/>
-              </a:defRPr>
-            </a:lvl1pPr>
-            <a:lvl2pPr marL="457200" algn="l" defTabSz="914400" rtl="0" eaLnBrk="1" latinLnBrk="0" hangingPunct="1">
-              <a:defRPr sz="1800" kern="1200">
-                <a:solidFill>
-                  <a:schemeClr val="dk1"/>
-                </a:solidFill>
-                <a:latin typeface="+mn-lt"/>
-                <a:ea typeface="+mn-ea"/>
-                <a:cs typeface="+mn-cs"/>
-              </a:defRPr>
-            </a:lvl2pPr>
-            <a:lvl3pPr marL="914400" algn="l" defTabSz="914400" rtl="0" eaLnBrk="1" latinLnBrk="0" hangingPunct="1">
-              <a:defRPr sz="1800" kern="1200">
-                <a:solidFill>
-                  <a:schemeClr val="dk1"/>
-                </a:solidFill>
-                <a:latin typeface="+mn-lt"/>
-                <a:ea typeface="+mn-ea"/>
-                <a:cs typeface="+mn-cs"/>
-              </a:defRPr>
-            </a:lvl3pPr>
-            <a:lvl4pPr marL="1371600" algn="l" defTabSz="914400" rtl="0" eaLnBrk="1" latinLnBrk="0" hangingPunct="1">
-              <a:defRPr sz="1800" kern="1200">
-                <a:solidFill>
-                  <a:schemeClr val="dk1"/>
-                </a:solidFill>
-                <a:latin typeface="+mn-lt"/>
-                <a:ea typeface="+mn-ea"/>
-                <a:cs typeface="+mn-cs"/>
-              </a:defRPr>
-            </a:lvl4pPr>
-            <a:lvl5pPr marL="1828800" algn="l" defTabSz="914400" rtl="0" eaLnBrk="1" latinLnBrk="0" hangingPunct="1">
-              <a:defRPr sz="1800" kern="1200">
-                <a:solidFill>
-                  <a:schemeClr val="dk1"/>
-                </a:solidFill>
-                <a:latin typeface="+mn-lt"/>
-                <a:ea typeface="+mn-ea"/>
-                <a:cs typeface="+mn-cs"/>
-              </a:defRPr>
-            </a:lvl5pPr>
-            <a:lvl6pPr marL="2286000" algn="l" defTabSz="914400" rtl="0" eaLnBrk="1" latinLnBrk="0" hangingPunct="1">
-              <a:defRPr sz="1800" kern="1200">
-                <a:solidFill>
-                  <a:schemeClr val="dk1"/>
-                </a:solidFill>
-                <a:latin typeface="+mn-lt"/>
-                <a:ea typeface="+mn-ea"/>
-                <a:cs typeface="+mn-cs"/>
-              </a:defRPr>
-            </a:lvl6pPr>
-            <a:lvl7pPr marL="2743200" algn="l" defTabSz="914400" rtl="0" eaLnBrk="1" latinLnBrk="0" hangingPunct="1">
-              <a:defRPr sz="1800" kern="1200">
-                <a:solidFill>
-                  <a:schemeClr val="dk1"/>
-                </a:solidFill>
-                <a:latin typeface="+mn-lt"/>
-                <a:ea typeface="+mn-ea"/>
-                <a:cs typeface="+mn-cs"/>
-              </a:defRPr>
-            </a:lvl7pPr>
-            <a:lvl8pPr marL="3200400" algn="l" defTabSz="914400" rtl="0" eaLnBrk="1" latinLnBrk="0" hangingPunct="1">
-              <a:defRPr sz="1800" kern="1200">
-                <a:solidFill>
-                  <a:schemeClr val="dk1"/>
-                </a:solidFill>
-                <a:latin typeface="+mn-lt"/>
-                <a:ea typeface="+mn-ea"/>
-                <a:cs typeface="+mn-cs"/>
-              </a:defRPr>
-            </a:lvl8pPr>
-            <a:lvl9pPr marL="3657600" algn="l" defTabSz="914400" rtl="0" eaLnBrk="1" latinLnBrk="0" hangingPunct="1">
-              <a:defRPr sz="1800" kern="1200">
-                <a:solidFill>
-                  <a:schemeClr val="dk1"/>
-                </a:solidFill>
-                <a:latin typeface="+mn-lt"/>
-                <a:ea typeface="+mn-ea"/>
-                <a:cs typeface="+mn-cs"/>
-              </a:defRPr>
-            </a:lvl9pPr>
-          </a:lstStyle>
-          <a:p>
-            <a:pPr algn="ctr"/>
-            <a:r>
-              <a:rPr lang="en-US" sz="1600"/>
-              <a:t>2</a:t>
-            </a:r>
-          </a:p>
-        </p:txBody>
-      </p:sp>
-      <p:sp>
-        <p:nvSpPr>
-          <p:cNvPr id="38" name="Flowchart: Connector 37">
-            <a:extLst>
-              <a:ext uri="{FF2B5EF4-FFF2-40B4-BE49-F238E27FC236}">
-                <a16:creationId xmlns:a16="http://schemas.microsoft.com/office/drawing/2014/main" id="{A23D6165-3F28-EF25-0D10-05FC78F18519}"/>
-              </a:ext>
-            </a:extLst>
-          </p:cNvPr>
-          <p:cNvSpPr/>
-          <p:nvPr/>
-        </p:nvSpPr>
-        <p:spPr>
-          <a:xfrm>
-            <a:off x="10015407" y="4109790"/>
-            <a:ext cx="221952" cy="237294"/>
-          </a:xfrm>
-          <a:custGeom>
-            <a:avLst/>
-            <a:gdLst>
-              <a:gd name="csX0" fmla="*/ 0 w 221952"/>
-              <a:gd name="csY0" fmla="*/ 118647 h 237294"/>
-              <a:gd name="csX1" fmla="*/ 110976 w 221952"/>
-              <a:gd name="csY1" fmla="*/ 0 h 237294"/>
-              <a:gd name="csX2" fmla="*/ 221952 w 221952"/>
-              <a:gd name="csY2" fmla="*/ 118647 h 237294"/>
-              <a:gd name="csX3" fmla="*/ 110976 w 221952"/>
-              <a:gd name="csY3" fmla="*/ 237294 h 237294"/>
-              <a:gd name="csX4" fmla="*/ 0 w 221952"/>
-              <a:gd name="csY4" fmla="*/ 118647 h 237294"/>
-            </a:gdLst>
-            <a:ahLst/>
-            <a:cxnLst>
-              <a:cxn ang="0">
-                <a:pos x="csX0" y="csY0"/>
-              </a:cxn>
-              <a:cxn ang="0">
-                <a:pos x="csX1" y="csY1"/>
-              </a:cxn>
-              <a:cxn ang="0">
-                <a:pos x="csX2" y="csY2"/>
-              </a:cxn>
-              <a:cxn ang="0">
-                <a:pos x="csX3" y="csY3"/>
-              </a:cxn>
-              <a:cxn ang="0">
-                <a:pos x="csX4" y="csY4"/>
-              </a:cxn>
-            </a:cxnLst>
-            <a:rect l="l" t="t" r="r" b="b"/>
-            <a:pathLst>
-              <a:path w="221952" h="237294" fill="none" extrusionOk="0">
-                <a:moveTo>
-                  <a:pt x="0" y="118647"/>
-                </a:moveTo>
-                <a:cubicBezTo>
-                  <a:pt x="-1073" y="51741"/>
-                  <a:pt x="45286" y="-3941"/>
-                  <a:pt x="110976" y="0"/>
-                </a:cubicBezTo>
-                <a:cubicBezTo>
-                  <a:pt x="181556" y="-10600"/>
-                  <a:pt x="228892" y="60792"/>
-                  <a:pt x="221952" y="118647"/>
-                </a:cubicBezTo>
-                <a:cubicBezTo>
-                  <a:pt x="210669" y="188861"/>
-                  <a:pt x="176239" y="229372"/>
-                  <a:pt x="110976" y="237294"/>
-                </a:cubicBezTo>
-                <a:cubicBezTo>
-                  <a:pt x="55130" y="237772"/>
-                  <a:pt x="-374" y="186746"/>
-                  <a:pt x="0" y="118647"/>
-                </a:cubicBezTo>
-                <a:close/>
-              </a:path>
-              <a:path w="221952" h="237294" stroke="0" extrusionOk="0">
-                <a:moveTo>
-                  <a:pt x="0" y="118647"/>
-                </a:moveTo>
-                <a:cubicBezTo>
-                  <a:pt x="-2353" y="45735"/>
-                  <a:pt x="36539" y="1132"/>
-                  <a:pt x="110976" y="0"/>
-                </a:cubicBezTo>
-                <a:cubicBezTo>
-                  <a:pt x="171325" y="1311"/>
-                  <a:pt x="220694" y="51798"/>
-                  <a:pt x="221952" y="118647"/>
-                </a:cubicBezTo>
-                <a:cubicBezTo>
-                  <a:pt x="226735" y="192259"/>
-                  <a:pt x="180310" y="239462"/>
-                  <a:pt x="110976" y="237294"/>
-                </a:cubicBezTo>
-                <a:cubicBezTo>
-                  <a:pt x="47513" y="238802"/>
-                  <a:pt x="-5168" y="179523"/>
-                  <a:pt x="0" y="118647"/>
-                </a:cubicBezTo>
-                <a:close/>
-              </a:path>
-            </a:pathLst>
-          </a:custGeom>
-          <a:ln w="28575">
-            <a:extLst>
-              <a:ext uri="{C807C97D-BFC1-408E-A445-0C87EB9F89A2}">
-                <ask:lineSketchStyleProps xmlns:ask="http://schemas.microsoft.com/office/drawing/2018/sketchyshapes" sd="3499211612">
-                  <a:prstGeom prst="flowChartConnector">
-                    <a:avLst/>
-                  </a:prstGeom>
-                  <ask:type>
-                    <ask:lineSketchFreehand/>
-                  </ask:type>
-                </ask:lineSketchStyleProps>
-              </a:ext>
-            </a:extLst>
-          </a:ln>
-        </p:spPr>
-        <p:style>
-          <a:lnRef idx="2">
-            <a:schemeClr val="accent5"/>
-          </a:lnRef>
-          <a:fillRef idx="1">
-            <a:schemeClr val="lt1"/>
-          </a:fillRef>
-          <a:effectRef idx="0">
-            <a:schemeClr val="accent5"/>
-          </a:effectRef>
-          <a:fontRef idx="minor">
-            <a:schemeClr val="dk1"/>
-          </a:fontRef>
-        </p:style>
-        <p:txBody>
-          <a:bodyPr lIns="91440" tIns="45720" rIns="91440" bIns="45720" rtlCol="0" anchor="ctr"/>
-          <a:lstStyle>
-            <a:defPPr>
-              <a:defRPr lang="en-US"/>
-            </a:defPPr>
-            <a:lvl1pPr marL="0" algn="l" defTabSz="914400" rtl="0" eaLnBrk="1" latinLnBrk="0" hangingPunct="1">
-              <a:defRPr sz="1800" kern="1200">
-                <a:solidFill>
-                  <a:schemeClr val="dk1"/>
-                </a:solidFill>
-                <a:latin typeface="+mn-lt"/>
-                <a:ea typeface="+mn-ea"/>
-                <a:cs typeface="+mn-cs"/>
-              </a:defRPr>
-            </a:lvl1pPr>
-            <a:lvl2pPr marL="457200" algn="l" defTabSz="914400" rtl="0" eaLnBrk="1" latinLnBrk="0" hangingPunct="1">
-              <a:defRPr sz="1800" kern="1200">
-                <a:solidFill>
-                  <a:schemeClr val="dk1"/>
-                </a:solidFill>
-                <a:latin typeface="+mn-lt"/>
-                <a:ea typeface="+mn-ea"/>
-                <a:cs typeface="+mn-cs"/>
-              </a:defRPr>
-            </a:lvl2pPr>
-            <a:lvl3pPr marL="914400" algn="l" defTabSz="914400" rtl="0" eaLnBrk="1" latinLnBrk="0" hangingPunct="1">
-              <a:defRPr sz="1800" kern="1200">
-                <a:solidFill>
-                  <a:schemeClr val="dk1"/>
-                </a:solidFill>
-                <a:latin typeface="+mn-lt"/>
-                <a:ea typeface="+mn-ea"/>
-                <a:cs typeface="+mn-cs"/>
-              </a:defRPr>
-            </a:lvl3pPr>
-            <a:lvl4pPr marL="1371600" algn="l" defTabSz="914400" rtl="0" eaLnBrk="1" latinLnBrk="0" hangingPunct="1">
-              <a:defRPr sz="1800" kern="1200">
-                <a:solidFill>
-                  <a:schemeClr val="dk1"/>
-                </a:solidFill>
-                <a:latin typeface="+mn-lt"/>
-                <a:ea typeface="+mn-ea"/>
-                <a:cs typeface="+mn-cs"/>
-              </a:defRPr>
-            </a:lvl4pPr>
-            <a:lvl5pPr marL="1828800" algn="l" defTabSz="914400" rtl="0" eaLnBrk="1" latinLnBrk="0" hangingPunct="1">
-              <a:defRPr sz="1800" kern="1200">
-                <a:solidFill>
-                  <a:schemeClr val="dk1"/>
-                </a:solidFill>
-                <a:latin typeface="+mn-lt"/>
-                <a:ea typeface="+mn-ea"/>
-                <a:cs typeface="+mn-cs"/>
-              </a:defRPr>
-            </a:lvl5pPr>
-            <a:lvl6pPr marL="2286000" algn="l" defTabSz="914400" rtl="0" eaLnBrk="1" latinLnBrk="0" hangingPunct="1">
-              <a:defRPr sz="1800" kern="1200">
-                <a:solidFill>
-                  <a:schemeClr val="dk1"/>
-                </a:solidFill>
-                <a:latin typeface="+mn-lt"/>
-                <a:ea typeface="+mn-ea"/>
-                <a:cs typeface="+mn-cs"/>
-              </a:defRPr>
-            </a:lvl6pPr>
-            <a:lvl7pPr marL="2743200" algn="l" defTabSz="914400" rtl="0" eaLnBrk="1" latinLnBrk="0" hangingPunct="1">
-              <a:defRPr sz="1800" kern="1200">
-                <a:solidFill>
-                  <a:schemeClr val="dk1"/>
-                </a:solidFill>
-                <a:latin typeface="+mn-lt"/>
-                <a:ea typeface="+mn-ea"/>
-                <a:cs typeface="+mn-cs"/>
-              </a:defRPr>
-            </a:lvl7pPr>
-            <a:lvl8pPr marL="3200400" algn="l" defTabSz="914400" rtl="0" eaLnBrk="1" latinLnBrk="0" hangingPunct="1">
-              <a:defRPr sz="1800" kern="1200">
-                <a:solidFill>
-                  <a:schemeClr val="dk1"/>
-                </a:solidFill>
-                <a:latin typeface="+mn-lt"/>
-                <a:ea typeface="+mn-ea"/>
-                <a:cs typeface="+mn-cs"/>
-              </a:defRPr>
-            </a:lvl8pPr>
-            <a:lvl9pPr marL="3657600" algn="l" defTabSz="914400" rtl="0" eaLnBrk="1" latinLnBrk="0" hangingPunct="1">
-              <a:defRPr sz="1800" kern="1200">
-                <a:solidFill>
-                  <a:schemeClr val="dk1"/>
-                </a:solidFill>
-                <a:latin typeface="+mn-lt"/>
-                <a:ea typeface="+mn-ea"/>
-                <a:cs typeface="+mn-cs"/>
-              </a:defRPr>
-            </a:lvl9pPr>
-          </a:lstStyle>
-          <a:p>
-            <a:pPr algn="ctr"/>
-            <a:r>
-              <a:rPr lang="en-US" sz="1600"/>
-              <a:t>0</a:t>
-            </a:r>
-          </a:p>
-        </p:txBody>
-      </p:sp>
-      <p:sp>
-        <p:nvSpPr>
-          <p:cNvPr id="39" name="Flowchart: Connector 38">
-            <a:extLst>
-              <a:ext uri="{FF2B5EF4-FFF2-40B4-BE49-F238E27FC236}">
-                <a16:creationId xmlns:a16="http://schemas.microsoft.com/office/drawing/2014/main" id="{071CFCA2-49B3-8FF2-8AFB-2051C9ABDC0B}"/>
-              </a:ext>
-            </a:extLst>
-          </p:cNvPr>
-          <p:cNvSpPr/>
-          <p:nvPr/>
-        </p:nvSpPr>
-        <p:spPr>
-          <a:xfrm>
-            <a:off x="10015406" y="4636542"/>
-            <a:ext cx="221952" cy="237294"/>
-          </a:xfrm>
-          <a:custGeom>
-            <a:avLst/>
-            <a:gdLst>
-              <a:gd name="csX0" fmla="*/ 0 w 221952"/>
-              <a:gd name="csY0" fmla="*/ 118647 h 237294"/>
-              <a:gd name="csX1" fmla="*/ 110976 w 221952"/>
-              <a:gd name="csY1" fmla="*/ 0 h 237294"/>
-              <a:gd name="csX2" fmla="*/ 221952 w 221952"/>
-              <a:gd name="csY2" fmla="*/ 118647 h 237294"/>
-              <a:gd name="csX3" fmla="*/ 110976 w 221952"/>
-              <a:gd name="csY3" fmla="*/ 237294 h 237294"/>
-              <a:gd name="csX4" fmla="*/ 0 w 221952"/>
-              <a:gd name="csY4" fmla="*/ 118647 h 237294"/>
-            </a:gdLst>
-            <a:ahLst/>
-            <a:cxnLst>
-              <a:cxn ang="0">
-                <a:pos x="csX0" y="csY0"/>
-              </a:cxn>
-              <a:cxn ang="0">
-                <a:pos x="csX1" y="csY1"/>
-              </a:cxn>
-              <a:cxn ang="0">
-                <a:pos x="csX2" y="csY2"/>
-              </a:cxn>
-              <a:cxn ang="0">
-                <a:pos x="csX3" y="csY3"/>
-              </a:cxn>
-              <a:cxn ang="0">
-                <a:pos x="csX4" y="csY4"/>
-              </a:cxn>
-            </a:cxnLst>
-            <a:rect l="l" t="t" r="r" b="b"/>
-            <a:pathLst>
-              <a:path w="221952" h="237294" fill="none" extrusionOk="0">
-                <a:moveTo>
-                  <a:pt x="0" y="118647"/>
-                </a:moveTo>
-                <a:cubicBezTo>
-                  <a:pt x="-1073" y="51741"/>
-                  <a:pt x="45286" y="-3941"/>
-                  <a:pt x="110976" y="0"/>
-                </a:cubicBezTo>
-                <a:cubicBezTo>
-                  <a:pt x="181556" y="-10600"/>
-                  <a:pt x="228892" y="60792"/>
-                  <a:pt x="221952" y="118647"/>
-                </a:cubicBezTo>
-                <a:cubicBezTo>
-                  <a:pt x="210669" y="188861"/>
-                  <a:pt x="176239" y="229372"/>
-                  <a:pt x="110976" y="237294"/>
-                </a:cubicBezTo>
-                <a:cubicBezTo>
-                  <a:pt x="55130" y="237772"/>
-                  <a:pt x="-374" y="186746"/>
-                  <a:pt x="0" y="118647"/>
-                </a:cubicBezTo>
-                <a:close/>
-              </a:path>
-              <a:path w="221952" h="237294" stroke="0" extrusionOk="0">
-                <a:moveTo>
-                  <a:pt x="0" y="118647"/>
-                </a:moveTo>
-                <a:cubicBezTo>
-                  <a:pt x="-2353" y="45735"/>
-                  <a:pt x="36539" y="1132"/>
-                  <a:pt x="110976" y="0"/>
-                </a:cubicBezTo>
-                <a:cubicBezTo>
-                  <a:pt x="171325" y="1311"/>
-                  <a:pt x="220694" y="51798"/>
-                  <a:pt x="221952" y="118647"/>
-                </a:cubicBezTo>
-                <a:cubicBezTo>
-                  <a:pt x="226735" y="192259"/>
-                  <a:pt x="180310" y="239462"/>
-                  <a:pt x="110976" y="237294"/>
-                </a:cubicBezTo>
-                <a:cubicBezTo>
-                  <a:pt x="47513" y="238802"/>
-                  <a:pt x="-5168" y="179523"/>
-                  <a:pt x="0" y="118647"/>
-                </a:cubicBezTo>
-                <a:close/>
-              </a:path>
-            </a:pathLst>
-          </a:custGeom>
-          <a:ln w="28575">
-            <a:extLst>
-              <a:ext uri="{C807C97D-BFC1-408E-A445-0C87EB9F89A2}">
-                <ask:lineSketchStyleProps xmlns:ask="http://schemas.microsoft.com/office/drawing/2018/sketchyshapes" sd="3499211612">
-                  <a:prstGeom prst="flowChartConnector">
-                    <a:avLst/>
-                  </a:prstGeom>
-                  <ask:type>
-                    <ask:lineSketchFreehand/>
-                  </ask:type>
-                </ask:lineSketchStyleProps>
-              </a:ext>
-            </a:extLst>
-          </a:ln>
-        </p:spPr>
-        <p:style>
-          <a:lnRef idx="2">
-            <a:schemeClr val="accent5"/>
-          </a:lnRef>
-          <a:fillRef idx="1">
-            <a:schemeClr val="lt1"/>
-          </a:fillRef>
-          <a:effectRef idx="0">
-            <a:schemeClr val="accent5"/>
-          </a:effectRef>
-          <a:fontRef idx="minor">
-            <a:schemeClr val="dk1"/>
-          </a:fontRef>
-        </p:style>
-        <p:txBody>
-          <a:bodyPr lIns="91440" tIns="45720" rIns="91440" bIns="45720" rtlCol="0" anchor="ctr"/>
-          <a:lstStyle>
-            <a:defPPr>
-              <a:defRPr lang="en-US"/>
-            </a:defPPr>
-            <a:lvl1pPr marL="0" algn="l" defTabSz="914400" rtl="0" eaLnBrk="1" latinLnBrk="0" hangingPunct="1">
-              <a:defRPr sz="1800" kern="1200">
-                <a:solidFill>
-                  <a:schemeClr val="dk1"/>
-                </a:solidFill>
-                <a:latin typeface="+mn-lt"/>
-                <a:ea typeface="+mn-ea"/>
-                <a:cs typeface="+mn-cs"/>
-              </a:defRPr>
-            </a:lvl1pPr>
-            <a:lvl2pPr marL="457200" algn="l" defTabSz="914400" rtl="0" eaLnBrk="1" latinLnBrk="0" hangingPunct="1">
-              <a:defRPr sz="1800" kern="1200">
-                <a:solidFill>
-                  <a:schemeClr val="dk1"/>
-                </a:solidFill>
-                <a:latin typeface="+mn-lt"/>
-                <a:ea typeface="+mn-ea"/>
-                <a:cs typeface="+mn-cs"/>
-              </a:defRPr>
-            </a:lvl2pPr>
-            <a:lvl3pPr marL="914400" algn="l" defTabSz="914400" rtl="0" eaLnBrk="1" latinLnBrk="0" hangingPunct="1">
-              <a:defRPr sz="1800" kern="1200">
-                <a:solidFill>
-                  <a:schemeClr val="dk1"/>
-                </a:solidFill>
-                <a:latin typeface="+mn-lt"/>
-                <a:ea typeface="+mn-ea"/>
-                <a:cs typeface="+mn-cs"/>
-              </a:defRPr>
-            </a:lvl3pPr>
-            <a:lvl4pPr marL="1371600" algn="l" defTabSz="914400" rtl="0" eaLnBrk="1" latinLnBrk="0" hangingPunct="1">
-              <a:defRPr sz="1800" kern="1200">
-                <a:solidFill>
-                  <a:schemeClr val="dk1"/>
-                </a:solidFill>
-                <a:latin typeface="+mn-lt"/>
-                <a:ea typeface="+mn-ea"/>
-                <a:cs typeface="+mn-cs"/>
-              </a:defRPr>
-            </a:lvl4pPr>
-            <a:lvl5pPr marL="1828800" algn="l" defTabSz="914400" rtl="0" eaLnBrk="1" latinLnBrk="0" hangingPunct="1">
-              <a:defRPr sz="1800" kern="1200">
-                <a:solidFill>
-                  <a:schemeClr val="dk1"/>
-                </a:solidFill>
-                <a:latin typeface="+mn-lt"/>
-                <a:ea typeface="+mn-ea"/>
-                <a:cs typeface="+mn-cs"/>
-              </a:defRPr>
-            </a:lvl5pPr>
-            <a:lvl6pPr marL="2286000" algn="l" defTabSz="914400" rtl="0" eaLnBrk="1" latinLnBrk="0" hangingPunct="1">
-              <a:defRPr sz="1800" kern="1200">
-                <a:solidFill>
-                  <a:schemeClr val="dk1"/>
-                </a:solidFill>
-                <a:latin typeface="+mn-lt"/>
-                <a:ea typeface="+mn-ea"/>
-                <a:cs typeface="+mn-cs"/>
-              </a:defRPr>
-            </a:lvl6pPr>
-            <a:lvl7pPr marL="2743200" algn="l" defTabSz="914400" rtl="0" eaLnBrk="1" latinLnBrk="0" hangingPunct="1">
-              <a:defRPr sz="1800" kern="1200">
-                <a:solidFill>
-                  <a:schemeClr val="dk1"/>
-                </a:solidFill>
-                <a:latin typeface="+mn-lt"/>
-                <a:ea typeface="+mn-ea"/>
-                <a:cs typeface="+mn-cs"/>
-              </a:defRPr>
-            </a:lvl7pPr>
-            <a:lvl8pPr marL="3200400" algn="l" defTabSz="914400" rtl="0" eaLnBrk="1" latinLnBrk="0" hangingPunct="1">
-              <a:defRPr sz="1800" kern="1200">
-                <a:solidFill>
-                  <a:schemeClr val="dk1"/>
-                </a:solidFill>
-                <a:latin typeface="+mn-lt"/>
-                <a:ea typeface="+mn-ea"/>
-                <a:cs typeface="+mn-cs"/>
-              </a:defRPr>
-            </a:lvl8pPr>
-            <a:lvl9pPr marL="3657600" algn="l" defTabSz="914400" rtl="0" eaLnBrk="1" latinLnBrk="0" hangingPunct="1">
-              <a:defRPr sz="1800" kern="1200">
-                <a:solidFill>
-                  <a:schemeClr val="dk1"/>
-                </a:solidFill>
-                <a:latin typeface="+mn-lt"/>
-                <a:ea typeface="+mn-ea"/>
-                <a:cs typeface="+mn-cs"/>
-              </a:defRPr>
-            </a:lvl9pPr>
-          </a:lstStyle>
-          <a:p>
-            <a:pPr algn="ctr"/>
-            <a:r>
-              <a:rPr lang="en-US" sz="1600"/>
-              <a:t>1</a:t>
-            </a:r>
-          </a:p>
-        </p:txBody>
-      </p:sp>
-      <p:sp>
-        <p:nvSpPr>
-          <p:cNvPr id="40" name="Flowchart: Connector 39">
-            <a:extLst>
-              <a:ext uri="{FF2B5EF4-FFF2-40B4-BE49-F238E27FC236}">
-                <a16:creationId xmlns:a16="http://schemas.microsoft.com/office/drawing/2014/main" id="{718A2B7E-3A80-360E-83EF-2F6EA0A422D5}"/>
-              </a:ext>
-            </a:extLst>
-          </p:cNvPr>
-          <p:cNvSpPr/>
-          <p:nvPr/>
-        </p:nvSpPr>
-        <p:spPr>
-          <a:xfrm>
-            <a:off x="10015407" y="6196341"/>
+            <a:off x="9090689" y="3959469"/>
             <a:ext cx="221952" cy="237294"/>
           </a:xfrm>
           <a:custGeom>
@@ -12924,7 +12071,7 @@
           </a:custGeom>
           <a:ln w="28575">
             <a:solidFill>
-              <a:srgbClr val="FF0000"/>
+              <a:srgbClr val="1B55EB"/>
             </a:solidFill>
             <a:extLst>
               <a:ext uri="{C807C97D-BFC1-408E-A445-0C87EB9F89A2}">
@@ -13055,17 +12202,17 @@
             <a:pPr algn="ctr"/>
             <a:r>
               <a:rPr lang="en-US" sz="1600"/>
-              <a:t>4</a:t>
+              <a:t>3</a:t>
             </a:r>
           </a:p>
         </p:txBody>
       </p:sp>
       <p:sp>
         <p:nvSpPr>
-          <p:cNvPr id="41" name="Flowchart: Connector 40">
+          <p:cNvPr id="36" name="Flowchart: Connector 35">
             <a:extLst>
               <a:ext uri="{FF2B5EF4-FFF2-40B4-BE49-F238E27FC236}">
-                <a16:creationId xmlns:a16="http://schemas.microsoft.com/office/drawing/2014/main" id="{8B4F6DD6-AF0F-8D7A-4EC5-7049183C79FA}"/>
+                <a16:creationId xmlns:a16="http://schemas.microsoft.com/office/drawing/2014/main" id="{FED7BF59-DE51-30E0-FC68-64D6D83590FA}"/>
               </a:ext>
             </a:extLst>
           </p:cNvPr>
@@ -13074,7 +12221,7 @@
         </p:nvSpPr>
         <p:spPr>
           <a:xfrm>
-            <a:off x="10015406" y="5669589"/>
+            <a:off x="9694151" y="3959468"/>
             <a:ext cx="221952" cy="237294"/>
           </a:xfrm>
           <a:custGeom>
@@ -13166,6 +12313,9 @@
             </a:pathLst>
           </a:custGeom>
           <a:ln w="28575">
+            <a:solidFill>
+              <a:srgbClr val="1B55EB"/>
+            </a:solidFill>
             <a:extLst>
               <a:ext uri="{C807C97D-BFC1-408E-A445-0C87EB9F89A2}">
                 <ask:lineSketchStyleProps xmlns:ask="http://schemas.microsoft.com/office/drawing/2018/sketchyshapes" sd="3499211612">
@@ -13295,17 +12445,17 @@
             <a:pPr algn="ctr"/>
             <a:r>
               <a:rPr lang="en-US" sz="1600"/>
-              <a:t>3</a:t>
+              <a:t>4</a:t>
             </a:r>
           </a:p>
         </p:txBody>
       </p:sp>
       <p:sp>
         <p:nvSpPr>
-          <p:cNvPr id="42" name="Flowchart: Connector 41">
+          <p:cNvPr id="37" name="Flowchart: Connector 36">
             <a:extLst>
               <a:ext uri="{FF2B5EF4-FFF2-40B4-BE49-F238E27FC236}">
-                <a16:creationId xmlns:a16="http://schemas.microsoft.com/office/drawing/2014/main" id="{924D63B4-71D9-DAC8-54D5-0543F2073663}"/>
+                <a16:creationId xmlns:a16="http://schemas.microsoft.com/office/drawing/2014/main" id="{B3483E34-C09F-DF87-AF53-2A6AFB5409B4}"/>
               </a:ext>
             </a:extLst>
           </p:cNvPr>
@@ -13314,7 +12464,7 @@
         </p:nvSpPr>
         <p:spPr>
           <a:xfrm>
-            <a:off x="10015407" y="5153065"/>
+            <a:off x="8630420" y="3509429"/>
             <a:ext cx="221952" cy="237294"/>
           </a:xfrm>
           <a:custGeom>
@@ -13406,6 +12556,9 @@
             </a:pathLst>
           </a:custGeom>
           <a:ln w="28575">
+            <a:solidFill>
+              <a:srgbClr val="1B55EB"/>
+            </a:solidFill>
             <a:extLst>
               <a:ext uri="{C807C97D-BFC1-408E-A445-0C87EB9F89A2}">
                 <ask:lineSketchStyleProps xmlns:ask="http://schemas.microsoft.com/office/drawing/2018/sketchyshapes" sd="3499211612">
@@ -13540,6 +12693,1260 @@
           </a:p>
         </p:txBody>
       </p:sp>
+      <p:sp>
+        <p:nvSpPr>
+          <p:cNvPr id="38" name="Flowchart: Connector 37">
+            <a:extLst>
+              <a:ext uri="{FF2B5EF4-FFF2-40B4-BE49-F238E27FC236}">
+                <a16:creationId xmlns:a16="http://schemas.microsoft.com/office/drawing/2014/main" id="{A23D6165-3F28-EF25-0D10-05FC78F18519}"/>
+              </a:ext>
+            </a:extLst>
+          </p:cNvPr>
+          <p:cNvSpPr/>
+          <p:nvPr/>
+        </p:nvSpPr>
+        <p:spPr>
+          <a:xfrm>
+            <a:off x="10133964" y="2762770"/>
+            <a:ext cx="221952" cy="237294"/>
+          </a:xfrm>
+          <a:custGeom>
+            <a:avLst/>
+            <a:gdLst>
+              <a:gd name="csX0" fmla="*/ 0 w 221952"/>
+              <a:gd name="csY0" fmla="*/ 118647 h 237294"/>
+              <a:gd name="csX1" fmla="*/ 110976 w 221952"/>
+              <a:gd name="csY1" fmla="*/ 0 h 237294"/>
+              <a:gd name="csX2" fmla="*/ 221952 w 221952"/>
+              <a:gd name="csY2" fmla="*/ 118647 h 237294"/>
+              <a:gd name="csX3" fmla="*/ 110976 w 221952"/>
+              <a:gd name="csY3" fmla="*/ 237294 h 237294"/>
+              <a:gd name="csX4" fmla="*/ 0 w 221952"/>
+              <a:gd name="csY4" fmla="*/ 118647 h 237294"/>
+            </a:gdLst>
+            <a:ahLst/>
+            <a:cxnLst>
+              <a:cxn ang="0">
+                <a:pos x="csX0" y="csY0"/>
+              </a:cxn>
+              <a:cxn ang="0">
+                <a:pos x="csX1" y="csY1"/>
+              </a:cxn>
+              <a:cxn ang="0">
+                <a:pos x="csX2" y="csY2"/>
+              </a:cxn>
+              <a:cxn ang="0">
+                <a:pos x="csX3" y="csY3"/>
+              </a:cxn>
+              <a:cxn ang="0">
+                <a:pos x="csX4" y="csY4"/>
+              </a:cxn>
+            </a:cxnLst>
+            <a:rect l="l" t="t" r="r" b="b"/>
+            <a:pathLst>
+              <a:path w="221952" h="237294" fill="none" extrusionOk="0">
+                <a:moveTo>
+                  <a:pt x="0" y="118647"/>
+                </a:moveTo>
+                <a:cubicBezTo>
+                  <a:pt x="-1073" y="51741"/>
+                  <a:pt x="45286" y="-3941"/>
+                  <a:pt x="110976" y="0"/>
+                </a:cubicBezTo>
+                <a:cubicBezTo>
+                  <a:pt x="181556" y="-10600"/>
+                  <a:pt x="228892" y="60792"/>
+                  <a:pt x="221952" y="118647"/>
+                </a:cubicBezTo>
+                <a:cubicBezTo>
+                  <a:pt x="210669" y="188861"/>
+                  <a:pt x="176239" y="229372"/>
+                  <a:pt x="110976" y="237294"/>
+                </a:cubicBezTo>
+                <a:cubicBezTo>
+                  <a:pt x="55130" y="237772"/>
+                  <a:pt x="-374" y="186746"/>
+                  <a:pt x="0" y="118647"/>
+                </a:cubicBezTo>
+                <a:close/>
+              </a:path>
+              <a:path w="221952" h="237294" stroke="0" extrusionOk="0">
+                <a:moveTo>
+                  <a:pt x="0" y="118647"/>
+                </a:moveTo>
+                <a:cubicBezTo>
+                  <a:pt x="-2353" y="45735"/>
+                  <a:pt x="36539" y="1132"/>
+                  <a:pt x="110976" y="0"/>
+                </a:cubicBezTo>
+                <a:cubicBezTo>
+                  <a:pt x="171325" y="1311"/>
+                  <a:pt x="220694" y="51798"/>
+                  <a:pt x="221952" y="118647"/>
+                </a:cubicBezTo>
+                <a:cubicBezTo>
+                  <a:pt x="226735" y="192259"/>
+                  <a:pt x="180310" y="239462"/>
+                  <a:pt x="110976" y="237294"/>
+                </a:cubicBezTo>
+                <a:cubicBezTo>
+                  <a:pt x="47513" y="238802"/>
+                  <a:pt x="-5168" y="179523"/>
+                  <a:pt x="0" y="118647"/>
+                </a:cubicBezTo>
+                <a:close/>
+              </a:path>
+            </a:pathLst>
+          </a:custGeom>
+          <a:ln w="28575">
+            <a:solidFill>
+              <a:srgbClr val="1B55EB"/>
+            </a:solidFill>
+            <a:extLst>
+              <a:ext uri="{C807C97D-BFC1-408E-A445-0C87EB9F89A2}">
+                <ask:lineSketchStyleProps xmlns:ask="http://schemas.microsoft.com/office/drawing/2018/sketchyshapes" sd="3499211612">
+                  <a:prstGeom prst="flowChartConnector">
+                    <a:avLst/>
+                  </a:prstGeom>
+                  <ask:type>
+                    <ask:lineSketchFreehand/>
+                  </ask:type>
+                </ask:lineSketchStyleProps>
+              </a:ext>
+            </a:extLst>
+          </a:ln>
+        </p:spPr>
+        <p:style>
+          <a:lnRef idx="2">
+            <a:schemeClr val="accent5"/>
+          </a:lnRef>
+          <a:fillRef idx="1">
+            <a:schemeClr val="lt1"/>
+          </a:fillRef>
+          <a:effectRef idx="0">
+            <a:schemeClr val="accent5"/>
+          </a:effectRef>
+          <a:fontRef idx="minor">
+            <a:schemeClr val="dk1"/>
+          </a:fontRef>
+        </p:style>
+        <p:txBody>
+          <a:bodyPr lIns="91440" tIns="45720" rIns="91440" bIns="45720" rtlCol="0" anchor="ctr"/>
+          <a:lstStyle>
+            <a:defPPr>
+              <a:defRPr lang="en-US"/>
+            </a:defPPr>
+            <a:lvl1pPr marL="0" algn="l" defTabSz="914400" rtl="0" eaLnBrk="1" latinLnBrk="0" hangingPunct="1">
+              <a:defRPr sz="1800" kern="1200">
+                <a:solidFill>
+                  <a:schemeClr val="dk1"/>
+                </a:solidFill>
+                <a:latin typeface="+mn-lt"/>
+                <a:ea typeface="+mn-ea"/>
+                <a:cs typeface="+mn-cs"/>
+              </a:defRPr>
+            </a:lvl1pPr>
+            <a:lvl2pPr marL="457200" algn="l" defTabSz="914400" rtl="0" eaLnBrk="1" latinLnBrk="0" hangingPunct="1">
+              <a:defRPr sz="1800" kern="1200">
+                <a:solidFill>
+                  <a:schemeClr val="dk1"/>
+                </a:solidFill>
+                <a:latin typeface="+mn-lt"/>
+                <a:ea typeface="+mn-ea"/>
+                <a:cs typeface="+mn-cs"/>
+              </a:defRPr>
+            </a:lvl2pPr>
+            <a:lvl3pPr marL="914400" algn="l" defTabSz="914400" rtl="0" eaLnBrk="1" latinLnBrk="0" hangingPunct="1">
+              <a:defRPr sz="1800" kern="1200">
+                <a:solidFill>
+                  <a:schemeClr val="dk1"/>
+                </a:solidFill>
+                <a:latin typeface="+mn-lt"/>
+                <a:ea typeface="+mn-ea"/>
+                <a:cs typeface="+mn-cs"/>
+              </a:defRPr>
+            </a:lvl3pPr>
+            <a:lvl4pPr marL="1371600" algn="l" defTabSz="914400" rtl="0" eaLnBrk="1" latinLnBrk="0" hangingPunct="1">
+              <a:defRPr sz="1800" kern="1200">
+                <a:solidFill>
+                  <a:schemeClr val="dk1"/>
+                </a:solidFill>
+                <a:latin typeface="+mn-lt"/>
+                <a:ea typeface="+mn-ea"/>
+                <a:cs typeface="+mn-cs"/>
+              </a:defRPr>
+            </a:lvl4pPr>
+            <a:lvl5pPr marL="1828800" algn="l" defTabSz="914400" rtl="0" eaLnBrk="1" latinLnBrk="0" hangingPunct="1">
+              <a:defRPr sz="1800" kern="1200">
+                <a:solidFill>
+                  <a:schemeClr val="dk1"/>
+                </a:solidFill>
+                <a:latin typeface="+mn-lt"/>
+                <a:ea typeface="+mn-ea"/>
+                <a:cs typeface="+mn-cs"/>
+              </a:defRPr>
+            </a:lvl5pPr>
+            <a:lvl6pPr marL="2286000" algn="l" defTabSz="914400" rtl="0" eaLnBrk="1" latinLnBrk="0" hangingPunct="1">
+              <a:defRPr sz="1800" kern="1200">
+                <a:solidFill>
+                  <a:schemeClr val="dk1"/>
+                </a:solidFill>
+                <a:latin typeface="+mn-lt"/>
+                <a:ea typeface="+mn-ea"/>
+                <a:cs typeface="+mn-cs"/>
+              </a:defRPr>
+            </a:lvl6pPr>
+            <a:lvl7pPr marL="2743200" algn="l" defTabSz="914400" rtl="0" eaLnBrk="1" latinLnBrk="0" hangingPunct="1">
+              <a:defRPr sz="1800" kern="1200">
+                <a:solidFill>
+                  <a:schemeClr val="dk1"/>
+                </a:solidFill>
+                <a:latin typeface="+mn-lt"/>
+                <a:ea typeface="+mn-ea"/>
+                <a:cs typeface="+mn-cs"/>
+              </a:defRPr>
+            </a:lvl7pPr>
+            <a:lvl8pPr marL="3200400" algn="l" defTabSz="914400" rtl="0" eaLnBrk="1" latinLnBrk="0" hangingPunct="1">
+              <a:defRPr sz="1800" kern="1200">
+                <a:solidFill>
+                  <a:schemeClr val="dk1"/>
+                </a:solidFill>
+                <a:latin typeface="+mn-lt"/>
+                <a:ea typeface="+mn-ea"/>
+                <a:cs typeface="+mn-cs"/>
+              </a:defRPr>
+            </a:lvl8pPr>
+            <a:lvl9pPr marL="3657600" algn="l" defTabSz="914400" rtl="0" eaLnBrk="1" latinLnBrk="0" hangingPunct="1">
+              <a:defRPr sz="1800" kern="1200">
+                <a:solidFill>
+                  <a:schemeClr val="dk1"/>
+                </a:solidFill>
+                <a:latin typeface="+mn-lt"/>
+                <a:ea typeface="+mn-ea"/>
+                <a:cs typeface="+mn-cs"/>
+              </a:defRPr>
+            </a:lvl9pPr>
+          </a:lstStyle>
+          <a:p>
+            <a:pPr algn="ctr"/>
+            <a:r>
+              <a:rPr lang="en-US" sz="1600"/>
+              <a:t>0</a:t>
+            </a:r>
+          </a:p>
+        </p:txBody>
+      </p:sp>
+      <p:sp>
+        <p:nvSpPr>
+          <p:cNvPr id="39" name="Flowchart: Connector 38">
+            <a:extLst>
+              <a:ext uri="{FF2B5EF4-FFF2-40B4-BE49-F238E27FC236}">
+                <a16:creationId xmlns:a16="http://schemas.microsoft.com/office/drawing/2014/main" id="{071CFCA2-49B3-8FF2-8AFB-2051C9ABDC0B}"/>
+              </a:ext>
+            </a:extLst>
+          </p:cNvPr>
+          <p:cNvSpPr/>
+          <p:nvPr/>
+        </p:nvSpPr>
+        <p:spPr>
+          <a:xfrm>
+            <a:off x="10133963" y="3289522"/>
+            <a:ext cx="221952" cy="237294"/>
+          </a:xfrm>
+          <a:custGeom>
+            <a:avLst/>
+            <a:gdLst>
+              <a:gd name="csX0" fmla="*/ 0 w 221952"/>
+              <a:gd name="csY0" fmla="*/ 118647 h 237294"/>
+              <a:gd name="csX1" fmla="*/ 110976 w 221952"/>
+              <a:gd name="csY1" fmla="*/ 0 h 237294"/>
+              <a:gd name="csX2" fmla="*/ 221952 w 221952"/>
+              <a:gd name="csY2" fmla="*/ 118647 h 237294"/>
+              <a:gd name="csX3" fmla="*/ 110976 w 221952"/>
+              <a:gd name="csY3" fmla="*/ 237294 h 237294"/>
+              <a:gd name="csX4" fmla="*/ 0 w 221952"/>
+              <a:gd name="csY4" fmla="*/ 118647 h 237294"/>
+            </a:gdLst>
+            <a:ahLst/>
+            <a:cxnLst>
+              <a:cxn ang="0">
+                <a:pos x="csX0" y="csY0"/>
+              </a:cxn>
+              <a:cxn ang="0">
+                <a:pos x="csX1" y="csY1"/>
+              </a:cxn>
+              <a:cxn ang="0">
+                <a:pos x="csX2" y="csY2"/>
+              </a:cxn>
+              <a:cxn ang="0">
+                <a:pos x="csX3" y="csY3"/>
+              </a:cxn>
+              <a:cxn ang="0">
+                <a:pos x="csX4" y="csY4"/>
+              </a:cxn>
+            </a:cxnLst>
+            <a:rect l="l" t="t" r="r" b="b"/>
+            <a:pathLst>
+              <a:path w="221952" h="237294" fill="none" extrusionOk="0">
+                <a:moveTo>
+                  <a:pt x="0" y="118647"/>
+                </a:moveTo>
+                <a:cubicBezTo>
+                  <a:pt x="-1073" y="51741"/>
+                  <a:pt x="45286" y="-3941"/>
+                  <a:pt x="110976" y="0"/>
+                </a:cubicBezTo>
+                <a:cubicBezTo>
+                  <a:pt x="181556" y="-10600"/>
+                  <a:pt x="228892" y="60792"/>
+                  <a:pt x="221952" y="118647"/>
+                </a:cubicBezTo>
+                <a:cubicBezTo>
+                  <a:pt x="210669" y="188861"/>
+                  <a:pt x="176239" y="229372"/>
+                  <a:pt x="110976" y="237294"/>
+                </a:cubicBezTo>
+                <a:cubicBezTo>
+                  <a:pt x="55130" y="237772"/>
+                  <a:pt x="-374" y="186746"/>
+                  <a:pt x="0" y="118647"/>
+                </a:cubicBezTo>
+                <a:close/>
+              </a:path>
+              <a:path w="221952" h="237294" stroke="0" extrusionOk="0">
+                <a:moveTo>
+                  <a:pt x="0" y="118647"/>
+                </a:moveTo>
+                <a:cubicBezTo>
+                  <a:pt x="-2353" y="45735"/>
+                  <a:pt x="36539" y="1132"/>
+                  <a:pt x="110976" y="0"/>
+                </a:cubicBezTo>
+                <a:cubicBezTo>
+                  <a:pt x="171325" y="1311"/>
+                  <a:pt x="220694" y="51798"/>
+                  <a:pt x="221952" y="118647"/>
+                </a:cubicBezTo>
+                <a:cubicBezTo>
+                  <a:pt x="226735" y="192259"/>
+                  <a:pt x="180310" y="239462"/>
+                  <a:pt x="110976" y="237294"/>
+                </a:cubicBezTo>
+                <a:cubicBezTo>
+                  <a:pt x="47513" y="238802"/>
+                  <a:pt x="-5168" y="179523"/>
+                  <a:pt x="0" y="118647"/>
+                </a:cubicBezTo>
+                <a:close/>
+              </a:path>
+            </a:pathLst>
+          </a:custGeom>
+          <a:ln w="28575">
+            <a:solidFill>
+              <a:srgbClr val="1B55EB"/>
+            </a:solidFill>
+            <a:extLst>
+              <a:ext uri="{C807C97D-BFC1-408E-A445-0C87EB9F89A2}">
+                <ask:lineSketchStyleProps xmlns:ask="http://schemas.microsoft.com/office/drawing/2018/sketchyshapes" sd="3499211612">
+                  <a:prstGeom prst="flowChartConnector">
+                    <a:avLst/>
+                  </a:prstGeom>
+                  <ask:type>
+                    <ask:lineSketchFreehand/>
+                  </ask:type>
+                </ask:lineSketchStyleProps>
+              </a:ext>
+            </a:extLst>
+          </a:ln>
+        </p:spPr>
+        <p:style>
+          <a:lnRef idx="2">
+            <a:schemeClr val="accent5"/>
+          </a:lnRef>
+          <a:fillRef idx="1">
+            <a:schemeClr val="lt1"/>
+          </a:fillRef>
+          <a:effectRef idx="0">
+            <a:schemeClr val="accent5"/>
+          </a:effectRef>
+          <a:fontRef idx="minor">
+            <a:schemeClr val="dk1"/>
+          </a:fontRef>
+        </p:style>
+        <p:txBody>
+          <a:bodyPr lIns="91440" tIns="45720" rIns="91440" bIns="45720" rtlCol="0" anchor="ctr"/>
+          <a:lstStyle>
+            <a:defPPr>
+              <a:defRPr lang="en-US"/>
+            </a:defPPr>
+            <a:lvl1pPr marL="0" algn="l" defTabSz="914400" rtl="0" eaLnBrk="1" latinLnBrk="0" hangingPunct="1">
+              <a:defRPr sz="1800" kern="1200">
+                <a:solidFill>
+                  <a:schemeClr val="dk1"/>
+                </a:solidFill>
+                <a:latin typeface="+mn-lt"/>
+                <a:ea typeface="+mn-ea"/>
+                <a:cs typeface="+mn-cs"/>
+              </a:defRPr>
+            </a:lvl1pPr>
+            <a:lvl2pPr marL="457200" algn="l" defTabSz="914400" rtl="0" eaLnBrk="1" latinLnBrk="0" hangingPunct="1">
+              <a:defRPr sz="1800" kern="1200">
+                <a:solidFill>
+                  <a:schemeClr val="dk1"/>
+                </a:solidFill>
+                <a:latin typeface="+mn-lt"/>
+                <a:ea typeface="+mn-ea"/>
+                <a:cs typeface="+mn-cs"/>
+              </a:defRPr>
+            </a:lvl2pPr>
+            <a:lvl3pPr marL="914400" algn="l" defTabSz="914400" rtl="0" eaLnBrk="1" latinLnBrk="0" hangingPunct="1">
+              <a:defRPr sz="1800" kern="1200">
+                <a:solidFill>
+                  <a:schemeClr val="dk1"/>
+                </a:solidFill>
+                <a:latin typeface="+mn-lt"/>
+                <a:ea typeface="+mn-ea"/>
+                <a:cs typeface="+mn-cs"/>
+              </a:defRPr>
+            </a:lvl3pPr>
+            <a:lvl4pPr marL="1371600" algn="l" defTabSz="914400" rtl="0" eaLnBrk="1" latinLnBrk="0" hangingPunct="1">
+              <a:defRPr sz="1800" kern="1200">
+                <a:solidFill>
+                  <a:schemeClr val="dk1"/>
+                </a:solidFill>
+                <a:latin typeface="+mn-lt"/>
+                <a:ea typeface="+mn-ea"/>
+                <a:cs typeface="+mn-cs"/>
+              </a:defRPr>
+            </a:lvl4pPr>
+            <a:lvl5pPr marL="1828800" algn="l" defTabSz="914400" rtl="0" eaLnBrk="1" latinLnBrk="0" hangingPunct="1">
+              <a:defRPr sz="1800" kern="1200">
+                <a:solidFill>
+                  <a:schemeClr val="dk1"/>
+                </a:solidFill>
+                <a:latin typeface="+mn-lt"/>
+                <a:ea typeface="+mn-ea"/>
+                <a:cs typeface="+mn-cs"/>
+              </a:defRPr>
+            </a:lvl5pPr>
+            <a:lvl6pPr marL="2286000" algn="l" defTabSz="914400" rtl="0" eaLnBrk="1" latinLnBrk="0" hangingPunct="1">
+              <a:defRPr sz="1800" kern="1200">
+                <a:solidFill>
+                  <a:schemeClr val="dk1"/>
+                </a:solidFill>
+                <a:latin typeface="+mn-lt"/>
+                <a:ea typeface="+mn-ea"/>
+                <a:cs typeface="+mn-cs"/>
+              </a:defRPr>
+            </a:lvl6pPr>
+            <a:lvl7pPr marL="2743200" algn="l" defTabSz="914400" rtl="0" eaLnBrk="1" latinLnBrk="0" hangingPunct="1">
+              <a:defRPr sz="1800" kern="1200">
+                <a:solidFill>
+                  <a:schemeClr val="dk1"/>
+                </a:solidFill>
+                <a:latin typeface="+mn-lt"/>
+                <a:ea typeface="+mn-ea"/>
+                <a:cs typeface="+mn-cs"/>
+              </a:defRPr>
+            </a:lvl7pPr>
+            <a:lvl8pPr marL="3200400" algn="l" defTabSz="914400" rtl="0" eaLnBrk="1" latinLnBrk="0" hangingPunct="1">
+              <a:defRPr sz="1800" kern="1200">
+                <a:solidFill>
+                  <a:schemeClr val="dk1"/>
+                </a:solidFill>
+                <a:latin typeface="+mn-lt"/>
+                <a:ea typeface="+mn-ea"/>
+                <a:cs typeface="+mn-cs"/>
+              </a:defRPr>
+            </a:lvl8pPr>
+            <a:lvl9pPr marL="3657600" algn="l" defTabSz="914400" rtl="0" eaLnBrk="1" latinLnBrk="0" hangingPunct="1">
+              <a:defRPr sz="1800" kern="1200">
+                <a:solidFill>
+                  <a:schemeClr val="dk1"/>
+                </a:solidFill>
+                <a:latin typeface="+mn-lt"/>
+                <a:ea typeface="+mn-ea"/>
+                <a:cs typeface="+mn-cs"/>
+              </a:defRPr>
+            </a:lvl9pPr>
+          </a:lstStyle>
+          <a:p>
+            <a:pPr algn="ctr"/>
+            <a:r>
+              <a:rPr lang="en-US" sz="1600"/>
+              <a:t>1</a:t>
+            </a:r>
+          </a:p>
+        </p:txBody>
+      </p:sp>
+      <p:sp>
+        <p:nvSpPr>
+          <p:cNvPr id="40" name="Flowchart: Connector 39">
+            <a:extLst>
+              <a:ext uri="{FF2B5EF4-FFF2-40B4-BE49-F238E27FC236}">
+                <a16:creationId xmlns:a16="http://schemas.microsoft.com/office/drawing/2014/main" id="{718A2B7E-3A80-360E-83EF-2F6EA0A422D5}"/>
+              </a:ext>
+            </a:extLst>
+          </p:cNvPr>
+          <p:cNvSpPr/>
+          <p:nvPr/>
+        </p:nvSpPr>
+        <p:spPr>
+          <a:xfrm>
+            <a:off x="10133964" y="4849321"/>
+            <a:ext cx="221952" cy="237294"/>
+          </a:xfrm>
+          <a:custGeom>
+            <a:avLst/>
+            <a:gdLst>
+              <a:gd name="csX0" fmla="*/ 0 w 221952"/>
+              <a:gd name="csY0" fmla="*/ 118647 h 237294"/>
+              <a:gd name="csX1" fmla="*/ 110976 w 221952"/>
+              <a:gd name="csY1" fmla="*/ 0 h 237294"/>
+              <a:gd name="csX2" fmla="*/ 221952 w 221952"/>
+              <a:gd name="csY2" fmla="*/ 118647 h 237294"/>
+              <a:gd name="csX3" fmla="*/ 110976 w 221952"/>
+              <a:gd name="csY3" fmla="*/ 237294 h 237294"/>
+              <a:gd name="csX4" fmla="*/ 0 w 221952"/>
+              <a:gd name="csY4" fmla="*/ 118647 h 237294"/>
+            </a:gdLst>
+            <a:ahLst/>
+            <a:cxnLst>
+              <a:cxn ang="0">
+                <a:pos x="csX0" y="csY0"/>
+              </a:cxn>
+              <a:cxn ang="0">
+                <a:pos x="csX1" y="csY1"/>
+              </a:cxn>
+              <a:cxn ang="0">
+                <a:pos x="csX2" y="csY2"/>
+              </a:cxn>
+              <a:cxn ang="0">
+                <a:pos x="csX3" y="csY3"/>
+              </a:cxn>
+              <a:cxn ang="0">
+                <a:pos x="csX4" y="csY4"/>
+              </a:cxn>
+            </a:cxnLst>
+            <a:rect l="l" t="t" r="r" b="b"/>
+            <a:pathLst>
+              <a:path w="221952" h="237294" fill="none" extrusionOk="0">
+                <a:moveTo>
+                  <a:pt x="0" y="118647"/>
+                </a:moveTo>
+                <a:cubicBezTo>
+                  <a:pt x="-1073" y="51741"/>
+                  <a:pt x="45286" y="-3941"/>
+                  <a:pt x="110976" y="0"/>
+                </a:cubicBezTo>
+                <a:cubicBezTo>
+                  <a:pt x="181556" y="-10600"/>
+                  <a:pt x="228892" y="60792"/>
+                  <a:pt x="221952" y="118647"/>
+                </a:cubicBezTo>
+                <a:cubicBezTo>
+                  <a:pt x="210669" y="188861"/>
+                  <a:pt x="176239" y="229372"/>
+                  <a:pt x="110976" y="237294"/>
+                </a:cubicBezTo>
+                <a:cubicBezTo>
+                  <a:pt x="55130" y="237772"/>
+                  <a:pt x="-374" y="186746"/>
+                  <a:pt x="0" y="118647"/>
+                </a:cubicBezTo>
+                <a:close/>
+              </a:path>
+              <a:path w="221952" h="237294" stroke="0" extrusionOk="0">
+                <a:moveTo>
+                  <a:pt x="0" y="118647"/>
+                </a:moveTo>
+                <a:cubicBezTo>
+                  <a:pt x="-2353" y="45735"/>
+                  <a:pt x="36539" y="1132"/>
+                  <a:pt x="110976" y="0"/>
+                </a:cubicBezTo>
+                <a:cubicBezTo>
+                  <a:pt x="171325" y="1311"/>
+                  <a:pt x="220694" y="51798"/>
+                  <a:pt x="221952" y="118647"/>
+                </a:cubicBezTo>
+                <a:cubicBezTo>
+                  <a:pt x="226735" y="192259"/>
+                  <a:pt x="180310" y="239462"/>
+                  <a:pt x="110976" y="237294"/>
+                </a:cubicBezTo>
+                <a:cubicBezTo>
+                  <a:pt x="47513" y="238802"/>
+                  <a:pt x="-5168" y="179523"/>
+                  <a:pt x="0" y="118647"/>
+                </a:cubicBezTo>
+                <a:close/>
+              </a:path>
+            </a:pathLst>
+          </a:custGeom>
+          <a:ln w="28575">
+            <a:solidFill>
+              <a:srgbClr val="1B55EB"/>
+            </a:solidFill>
+            <a:extLst>
+              <a:ext uri="{C807C97D-BFC1-408E-A445-0C87EB9F89A2}">
+                <ask:lineSketchStyleProps xmlns:ask="http://schemas.microsoft.com/office/drawing/2018/sketchyshapes" sd="3499211612">
+                  <a:prstGeom prst="flowChartConnector">
+                    <a:avLst/>
+                  </a:prstGeom>
+                  <ask:type>
+                    <ask:lineSketchFreehand/>
+                  </ask:type>
+                </ask:lineSketchStyleProps>
+              </a:ext>
+            </a:extLst>
+          </a:ln>
+        </p:spPr>
+        <p:style>
+          <a:lnRef idx="2">
+            <a:schemeClr val="accent5"/>
+          </a:lnRef>
+          <a:fillRef idx="1">
+            <a:schemeClr val="lt1"/>
+          </a:fillRef>
+          <a:effectRef idx="0">
+            <a:schemeClr val="accent5"/>
+          </a:effectRef>
+          <a:fontRef idx="minor">
+            <a:schemeClr val="dk1"/>
+          </a:fontRef>
+        </p:style>
+        <p:txBody>
+          <a:bodyPr lIns="91440" tIns="45720" rIns="91440" bIns="45720" rtlCol="0" anchor="ctr"/>
+          <a:lstStyle>
+            <a:defPPr>
+              <a:defRPr lang="en-US"/>
+            </a:defPPr>
+            <a:lvl1pPr marL="0" algn="l" defTabSz="914400" rtl="0" eaLnBrk="1" latinLnBrk="0" hangingPunct="1">
+              <a:defRPr sz="1800" kern="1200">
+                <a:solidFill>
+                  <a:schemeClr val="dk1"/>
+                </a:solidFill>
+                <a:latin typeface="+mn-lt"/>
+                <a:ea typeface="+mn-ea"/>
+                <a:cs typeface="+mn-cs"/>
+              </a:defRPr>
+            </a:lvl1pPr>
+            <a:lvl2pPr marL="457200" algn="l" defTabSz="914400" rtl="0" eaLnBrk="1" latinLnBrk="0" hangingPunct="1">
+              <a:defRPr sz="1800" kern="1200">
+                <a:solidFill>
+                  <a:schemeClr val="dk1"/>
+                </a:solidFill>
+                <a:latin typeface="+mn-lt"/>
+                <a:ea typeface="+mn-ea"/>
+                <a:cs typeface="+mn-cs"/>
+              </a:defRPr>
+            </a:lvl2pPr>
+            <a:lvl3pPr marL="914400" algn="l" defTabSz="914400" rtl="0" eaLnBrk="1" latinLnBrk="0" hangingPunct="1">
+              <a:defRPr sz="1800" kern="1200">
+                <a:solidFill>
+                  <a:schemeClr val="dk1"/>
+                </a:solidFill>
+                <a:latin typeface="+mn-lt"/>
+                <a:ea typeface="+mn-ea"/>
+                <a:cs typeface="+mn-cs"/>
+              </a:defRPr>
+            </a:lvl3pPr>
+            <a:lvl4pPr marL="1371600" algn="l" defTabSz="914400" rtl="0" eaLnBrk="1" latinLnBrk="0" hangingPunct="1">
+              <a:defRPr sz="1800" kern="1200">
+                <a:solidFill>
+                  <a:schemeClr val="dk1"/>
+                </a:solidFill>
+                <a:latin typeface="+mn-lt"/>
+                <a:ea typeface="+mn-ea"/>
+                <a:cs typeface="+mn-cs"/>
+              </a:defRPr>
+            </a:lvl4pPr>
+            <a:lvl5pPr marL="1828800" algn="l" defTabSz="914400" rtl="0" eaLnBrk="1" latinLnBrk="0" hangingPunct="1">
+              <a:defRPr sz="1800" kern="1200">
+                <a:solidFill>
+                  <a:schemeClr val="dk1"/>
+                </a:solidFill>
+                <a:latin typeface="+mn-lt"/>
+                <a:ea typeface="+mn-ea"/>
+                <a:cs typeface="+mn-cs"/>
+              </a:defRPr>
+            </a:lvl5pPr>
+            <a:lvl6pPr marL="2286000" algn="l" defTabSz="914400" rtl="0" eaLnBrk="1" latinLnBrk="0" hangingPunct="1">
+              <a:defRPr sz="1800" kern="1200">
+                <a:solidFill>
+                  <a:schemeClr val="dk1"/>
+                </a:solidFill>
+                <a:latin typeface="+mn-lt"/>
+                <a:ea typeface="+mn-ea"/>
+                <a:cs typeface="+mn-cs"/>
+              </a:defRPr>
+            </a:lvl6pPr>
+            <a:lvl7pPr marL="2743200" algn="l" defTabSz="914400" rtl="0" eaLnBrk="1" latinLnBrk="0" hangingPunct="1">
+              <a:defRPr sz="1800" kern="1200">
+                <a:solidFill>
+                  <a:schemeClr val="dk1"/>
+                </a:solidFill>
+                <a:latin typeface="+mn-lt"/>
+                <a:ea typeface="+mn-ea"/>
+                <a:cs typeface="+mn-cs"/>
+              </a:defRPr>
+            </a:lvl7pPr>
+            <a:lvl8pPr marL="3200400" algn="l" defTabSz="914400" rtl="0" eaLnBrk="1" latinLnBrk="0" hangingPunct="1">
+              <a:defRPr sz="1800" kern="1200">
+                <a:solidFill>
+                  <a:schemeClr val="dk1"/>
+                </a:solidFill>
+                <a:latin typeface="+mn-lt"/>
+                <a:ea typeface="+mn-ea"/>
+                <a:cs typeface="+mn-cs"/>
+              </a:defRPr>
+            </a:lvl8pPr>
+            <a:lvl9pPr marL="3657600" algn="l" defTabSz="914400" rtl="0" eaLnBrk="1" latinLnBrk="0" hangingPunct="1">
+              <a:defRPr sz="1800" kern="1200">
+                <a:solidFill>
+                  <a:schemeClr val="dk1"/>
+                </a:solidFill>
+                <a:latin typeface="+mn-lt"/>
+                <a:ea typeface="+mn-ea"/>
+                <a:cs typeface="+mn-cs"/>
+              </a:defRPr>
+            </a:lvl9pPr>
+          </a:lstStyle>
+          <a:p>
+            <a:pPr algn="ctr"/>
+            <a:r>
+              <a:rPr lang="en-US" sz="1600"/>
+              <a:t>4</a:t>
+            </a:r>
+          </a:p>
+        </p:txBody>
+      </p:sp>
+      <p:sp>
+        <p:nvSpPr>
+          <p:cNvPr id="41" name="Flowchart: Connector 40">
+            <a:extLst>
+              <a:ext uri="{FF2B5EF4-FFF2-40B4-BE49-F238E27FC236}">
+                <a16:creationId xmlns:a16="http://schemas.microsoft.com/office/drawing/2014/main" id="{8B4F6DD6-AF0F-8D7A-4EC5-7049183C79FA}"/>
+              </a:ext>
+            </a:extLst>
+          </p:cNvPr>
+          <p:cNvSpPr/>
+          <p:nvPr/>
+        </p:nvSpPr>
+        <p:spPr>
+          <a:xfrm>
+            <a:off x="10133963" y="4322569"/>
+            <a:ext cx="221952" cy="237294"/>
+          </a:xfrm>
+          <a:custGeom>
+            <a:avLst/>
+            <a:gdLst>
+              <a:gd name="csX0" fmla="*/ 0 w 221952"/>
+              <a:gd name="csY0" fmla="*/ 118647 h 237294"/>
+              <a:gd name="csX1" fmla="*/ 110976 w 221952"/>
+              <a:gd name="csY1" fmla="*/ 0 h 237294"/>
+              <a:gd name="csX2" fmla="*/ 221952 w 221952"/>
+              <a:gd name="csY2" fmla="*/ 118647 h 237294"/>
+              <a:gd name="csX3" fmla="*/ 110976 w 221952"/>
+              <a:gd name="csY3" fmla="*/ 237294 h 237294"/>
+              <a:gd name="csX4" fmla="*/ 0 w 221952"/>
+              <a:gd name="csY4" fmla="*/ 118647 h 237294"/>
+            </a:gdLst>
+            <a:ahLst/>
+            <a:cxnLst>
+              <a:cxn ang="0">
+                <a:pos x="csX0" y="csY0"/>
+              </a:cxn>
+              <a:cxn ang="0">
+                <a:pos x="csX1" y="csY1"/>
+              </a:cxn>
+              <a:cxn ang="0">
+                <a:pos x="csX2" y="csY2"/>
+              </a:cxn>
+              <a:cxn ang="0">
+                <a:pos x="csX3" y="csY3"/>
+              </a:cxn>
+              <a:cxn ang="0">
+                <a:pos x="csX4" y="csY4"/>
+              </a:cxn>
+            </a:cxnLst>
+            <a:rect l="l" t="t" r="r" b="b"/>
+            <a:pathLst>
+              <a:path w="221952" h="237294" fill="none" extrusionOk="0">
+                <a:moveTo>
+                  <a:pt x="0" y="118647"/>
+                </a:moveTo>
+                <a:cubicBezTo>
+                  <a:pt x="-1073" y="51741"/>
+                  <a:pt x="45286" y="-3941"/>
+                  <a:pt x="110976" y="0"/>
+                </a:cubicBezTo>
+                <a:cubicBezTo>
+                  <a:pt x="181556" y="-10600"/>
+                  <a:pt x="228892" y="60792"/>
+                  <a:pt x="221952" y="118647"/>
+                </a:cubicBezTo>
+                <a:cubicBezTo>
+                  <a:pt x="210669" y="188861"/>
+                  <a:pt x="176239" y="229372"/>
+                  <a:pt x="110976" y="237294"/>
+                </a:cubicBezTo>
+                <a:cubicBezTo>
+                  <a:pt x="55130" y="237772"/>
+                  <a:pt x="-374" y="186746"/>
+                  <a:pt x="0" y="118647"/>
+                </a:cubicBezTo>
+                <a:close/>
+              </a:path>
+              <a:path w="221952" h="237294" stroke="0" extrusionOk="0">
+                <a:moveTo>
+                  <a:pt x="0" y="118647"/>
+                </a:moveTo>
+                <a:cubicBezTo>
+                  <a:pt x="-2353" y="45735"/>
+                  <a:pt x="36539" y="1132"/>
+                  <a:pt x="110976" y="0"/>
+                </a:cubicBezTo>
+                <a:cubicBezTo>
+                  <a:pt x="171325" y="1311"/>
+                  <a:pt x="220694" y="51798"/>
+                  <a:pt x="221952" y="118647"/>
+                </a:cubicBezTo>
+                <a:cubicBezTo>
+                  <a:pt x="226735" y="192259"/>
+                  <a:pt x="180310" y="239462"/>
+                  <a:pt x="110976" y="237294"/>
+                </a:cubicBezTo>
+                <a:cubicBezTo>
+                  <a:pt x="47513" y="238802"/>
+                  <a:pt x="-5168" y="179523"/>
+                  <a:pt x="0" y="118647"/>
+                </a:cubicBezTo>
+                <a:close/>
+              </a:path>
+            </a:pathLst>
+          </a:custGeom>
+          <a:ln w="28575">
+            <a:solidFill>
+              <a:srgbClr val="1B55EB"/>
+            </a:solidFill>
+            <a:extLst>
+              <a:ext uri="{C807C97D-BFC1-408E-A445-0C87EB9F89A2}">
+                <ask:lineSketchStyleProps xmlns:ask="http://schemas.microsoft.com/office/drawing/2018/sketchyshapes" sd="3499211612">
+                  <a:prstGeom prst="flowChartConnector">
+                    <a:avLst/>
+                  </a:prstGeom>
+                  <ask:type>
+                    <ask:lineSketchFreehand/>
+                  </ask:type>
+                </ask:lineSketchStyleProps>
+              </a:ext>
+            </a:extLst>
+          </a:ln>
+        </p:spPr>
+        <p:style>
+          <a:lnRef idx="2">
+            <a:schemeClr val="accent5"/>
+          </a:lnRef>
+          <a:fillRef idx="1">
+            <a:schemeClr val="lt1"/>
+          </a:fillRef>
+          <a:effectRef idx="0">
+            <a:schemeClr val="accent5"/>
+          </a:effectRef>
+          <a:fontRef idx="minor">
+            <a:schemeClr val="dk1"/>
+          </a:fontRef>
+        </p:style>
+        <p:txBody>
+          <a:bodyPr lIns="91440" tIns="45720" rIns="91440" bIns="45720" rtlCol="0" anchor="ctr"/>
+          <a:lstStyle>
+            <a:defPPr>
+              <a:defRPr lang="en-US"/>
+            </a:defPPr>
+            <a:lvl1pPr marL="0" algn="l" defTabSz="914400" rtl="0" eaLnBrk="1" latinLnBrk="0" hangingPunct="1">
+              <a:defRPr sz="1800" kern="1200">
+                <a:solidFill>
+                  <a:schemeClr val="dk1"/>
+                </a:solidFill>
+                <a:latin typeface="+mn-lt"/>
+                <a:ea typeface="+mn-ea"/>
+                <a:cs typeface="+mn-cs"/>
+              </a:defRPr>
+            </a:lvl1pPr>
+            <a:lvl2pPr marL="457200" algn="l" defTabSz="914400" rtl="0" eaLnBrk="1" latinLnBrk="0" hangingPunct="1">
+              <a:defRPr sz="1800" kern="1200">
+                <a:solidFill>
+                  <a:schemeClr val="dk1"/>
+                </a:solidFill>
+                <a:latin typeface="+mn-lt"/>
+                <a:ea typeface="+mn-ea"/>
+                <a:cs typeface="+mn-cs"/>
+              </a:defRPr>
+            </a:lvl2pPr>
+            <a:lvl3pPr marL="914400" algn="l" defTabSz="914400" rtl="0" eaLnBrk="1" latinLnBrk="0" hangingPunct="1">
+              <a:defRPr sz="1800" kern="1200">
+                <a:solidFill>
+                  <a:schemeClr val="dk1"/>
+                </a:solidFill>
+                <a:latin typeface="+mn-lt"/>
+                <a:ea typeface="+mn-ea"/>
+                <a:cs typeface="+mn-cs"/>
+              </a:defRPr>
+            </a:lvl3pPr>
+            <a:lvl4pPr marL="1371600" algn="l" defTabSz="914400" rtl="0" eaLnBrk="1" latinLnBrk="0" hangingPunct="1">
+              <a:defRPr sz="1800" kern="1200">
+                <a:solidFill>
+                  <a:schemeClr val="dk1"/>
+                </a:solidFill>
+                <a:latin typeface="+mn-lt"/>
+                <a:ea typeface="+mn-ea"/>
+                <a:cs typeface="+mn-cs"/>
+              </a:defRPr>
+            </a:lvl4pPr>
+            <a:lvl5pPr marL="1828800" algn="l" defTabSz="914400" rtl="0" eaLnBrk="1" latinLnBrk="0" hangingPunct="1">
+              <a:defRPr sz="1800" kern="1200">
+                <a:solidFill>
+                  <a:schemeClr val="dk1"/>
+                </a:solidFill>
+                <a:latin typeface="+mn-lt"/>
+                <a:ea typeface="+mn-ea"/>
+                <a:cs typeface="+mn-cs"/>
+              </a:defRPr>
+            </a:lvl5pPr>
+            <a:lvl6pPr marL="2286000" algn="l" defTabSz="914400" rtl="0" eaLnBrk="1" latinLnBrk="0" hangingPunct="1">
+              <a:defRPr sz="1800" kern="1200">
+                <a:solidFill>
+                  <a:schemeClr val="dk1"/>
+                </a:solidFill>
+                <a:latin typeface="+mn-lt"/>
+                <a:ea typeface="+mn-ea"/>
+                <a:cs typeface="+mn-cs"/>
+              </a:defRPr>
+            </a:lvl6pPr>
+            <a:lvl7pPr marL="2743200" algn="l" defTabSz="914400" rtl="0" eaLnBrk="1" latinLnBrk="0" hangingPunct="1">
+              <a:defRPr sz="1800" kern="1200">
+                <a:solidFill>
+                  <a:schemeClr val="dk1"/>
+                </a:solidFill>
+                <a:latin typeface="+mn-lt"/>
+                <a:ea typeface="+mn-ea"/>
+                <a:cs typeface="+mn-cs"/>
+              </a:defRPr>
+            </a:lvl7pPr>
+            <a:lvl8pPr marL="3200400" algn="l" defTabSz="914400" rtl="0" eaLnBrk="1" latinLnBrk="0" hangingPunct="1">
+              <a:defRPr sz="1800" kern="1200">
+                <a:solidFill>
+                  <a:schemeClr val="dk1"/>
+                </a:solidFill>
+                <a:latin typeface="+mn-lt"/>
+                <a:ea typeface="+mn-ea"/>
+                <a:cs typeface="+mn-cs"/>
+              </a:defRPr>
+            </a:lvl8pPr>
+            <a:lvl9pPr marL="3657600" algn="l" defTabSz="914400" rtl="0" eaLnBrk="1" latinLnBrk="0" hangingPunct="1">
+              <a:defRPr sz="1800" kern="1200">
+                <a:solidFill>
+                  <a:schemeClr val="dk1"/>
+                </a:solidFill>
+                <a:latin typeface="+mn-lt"/>
+                <a:ea typeface="+mn-ea"/>
+                <a:cs typeface="+mn-cs"/>
+              </a:defRPr>
+            </a:lvl9pPr>
+          </a:lstStyle>
+          <a:p>
+            <a:pPr algn="ctr"/>
+            <a:r>
+              <a:rPr lang="en-US" sz="1600"/>
+              <a:t>3</a:t>
+            </a:r>
+          </a:p>
+        </p:txBody>
+      </p:sp>
+      <p:sp>
+        <p:nvSpPr>
+          <p:cNvPr id="42" name="Flowchart: Connector 41">
+            <a:extLst>
+              <a:ext uri="{FF2B5EF4-FFF2-40B4-BE49-F238E27FC236}">
+                <a16:creationId xmlns:a16="http://schemas.microsoft.com/office/drawing/2014/main" id="{924D63B4-71D9-DAC8-54D5-0543F2073663}"/>
+              </a:ext>
+            </a:extLst>
+          </p:cNvPr>
+          <p:cNvSpPr/>
+          <p:nvPr/>
+        </p:nvSpPr>
+        <p:spPr>
+          <a:xfrm>
+            <a:off x="10133964" y="3806045"/>
+            <a:ext cx="221952" cy="237294"/>
+          </a:xfrm>
+          <a:custGeom>
+            <a:avLst/>
+            <a:gdLst>
+              <a:gd name="csX0" fmla="*/ 0 w 221952"/>
+              <a:gd name="csY0" fmla="*/ 118647 h 237294"/>
+              <a:gd name="csX1" fmla="*/ 110976 w 221952"/>
+              <a:gd name="csY1" fmla="*/ 0 h 237294"/>
+              <a:gd name="csX2" fmla="*/ 221952 w 221952"/>
+              <a:gd name="csY2" fmla="*/ 118647 h 237294"/>
+              <a:gd name="csX3" fmla="*/ 110976 w 221952"/>
+              <a:gd name="csY3" fmla="*/ 237294 h 237294"/>
+              <a:gd name="csX4" fmla="*/ 0 w 221952"/>
+              <a:gd name="csY4" fmla="*/ 118647 h 237294"/>
+            </a:gdLst>
+            <a:ahLst/>
+            <a:cxnLst>
+              <a:cxn ang="0">
+                <a:pos x="csX0" y="csY0"/>
+              </a:cxn>
+              <a:cxn ang="0">
+                <a:pos x="csX1" y="csY1"/>
+              </a:cxn>
+              <a:cxn ang="0">
+                <a:pos x="csX2" y="csY2"/>
+              </a:cxn>
+              <a:cxn ang="0">
+                <a:pos x="csX3" y="csY3"/>
+              </a:cxn>
+              <a:cxn ang="0">
+                <a:pos x="csX4" y="csY4"/>
+              </a:cxn>
+            </a:cxnLst>
+            <a:rect l="l" t="t" r="r" b="b"/>
+            <a:pathLst>
+              <a:path w="221952" h="237294" fill="none" extrusionOk="0">
+                <a:moveTo>
+                  <a:pt x="0" y="118647"/>
+                </a:moveTo>
+                <a:cubicBezTo>
+                  <a:pt x="-1073" y="51741"/>
+                  <a:pt x="45286" y="-3941"/>
+                  <a:pt x="110976" y="0"/>
+                </a:cubicBezTo>
+                <a:cubicBezTo>
+                  <a:pt x="181556" y="-10600"/>
+                  <a:pt x="228892" y="60792"/>
+                  <a:pt x="221952" y="118647"/>
+                </a:cubicBezTo>
+                <a:cubicBezTo>
+                  <a:pt x="210669" y="188861"/>
+                  <a:pt x="176239" y="229372"/>
+                  <a:pt x="110976" y="237294"/>
+                </a:cubicBezTo>
+                <a:cubicBezTo>
+                  <a:pt x="55130" y="237772"/>
+                  <a:pt x="-374" y="186746"/>
+                  <a:pt x="0" y="118647"/>
+                </a:cubicBezTo>
+                <a:close/>
+              </a:path>
+              <a:path w="221952" h="237294" stroke="0" extrusionOk="0">
+                <a:moveTo>
+                  <a:pt x="0" y="118647"/>
+                </a:moveTo>
+                <a:cubicBezTo>
+                  <a:pt x="-2353" y="45735"/>
+                  <a:pt x="36539" y="1132"/>
+                  <a:pt x="110976" y="0"/>
+                </a:cubicBezTo>
+                <a:cubicBezTo>
+                  <a:pt x="171325" y="1311"/>
+                  <a:pt x="220694" y="51798"/>
+                  <a:pt x="221952" y="118647"/>
+                </a:cubicBezTo>
+                <a:cubicBezTo>
+                  <a:pt x="226735" y="192259"/>
+                  <a:pt x="180310" y="239462"/>
+                  <a:pt x="110976" y="237294"/>
+                </a:cubicBezTo>
+                <a:cubicBezTo>
+                  <a:pt x="47513" y="238802"/>
+                  <a:pt x="-5168" y="179523"/>
+                  <a:pt x="0" y="118647"/>
+                </a:cubicBezTo>
+                <a:close/>
+              </a:path>
+            </a:pathLst>
+          </a:custGeom>
+          <a:ln w="28575">
+            <a:solidFill>
+              <a:srgbClr val="1B55EB"/>
+            </a:solidFill>
+            <a:extLst>
+              <a:ext uri="{C807C97D-BFC1-408E-A445-0C87EB9F89A2}">
+                <ask:lineSketchStyleProps xmlns:ask="http://schemas.microsoft.com/office/drawing/2018/sketchyshapes" sd="3499211612">
+                  <a:prstGeom prst="flowChartConnector">
+                    <a:avLst/>
+                  </a:prstGeom>
+                  <ask:type>
+                    <ask:lineSketchFreehand/>
+                  </ask:type>
+                </ask:lineSketchStyleProps>
+              </a:ext>
+            </a:extLst>
+          </a:ln>
+        </p:spPr>
+        <p:style>
+          <a:lnRef idx="2">
+            <a:schemeClr val="accent5"/>
+          </a:lnRef>
+          <a:fillRef idx="1">
+            <a:schemeClr val="lt1"/>
+          </a:fillRef>
+          <a:effectRef idx="0">
+            <a:schemeClr val="accent5"/>
+          </a:effectRef>
+          <a:fontRef idx="minor">
+            <a:schemeClr val="dk1"/>
+          </a:fontRef>
+        </p:style>
+        <p:txBody>
+          <a:bodyPr lIns="91440" tIns="45720" rIns="91440" bIns="45720" rtlCol="0" anchor="ctr"/>
+          <a:lstStyle>
+            <a:defPPr>
+              <a:defRPr lang="en-US"/>
+            </a:defPPr>
+            <a:lvl1pPr marL="0" algn="l" defTabSz="914400" rtl="0" eaLnBrk="1" latinLnBrk="0" hangingPunct="1">
+              <a:defRPr sz="1800" kern="1200">
+                <a:solidFill>
+                  <a:schemeClr val="dk1"/>
+                </a:solidFill>
+                <a:latin typeface="+mn-lt"/>
+                <a:ea typeface="+mn-ea"/>
+                <a:cs typeface="+mn-cs"/>
+              </a:defRPr>
+            </a:lvl1pPr>
+            <a:lvl2pPr marL="457200" algn="l" defTabSz="914400" rtl="0" eaLnBrk="1" latinLnBrk="0" hangingPunct="1">
+              <a:defRPr sz="1800" kern="1200">
+                <a:solidFill>
+                  <a:schemeClr val="dk1"/>
+                </a:solidFill>
+                <a:latin typeface="+mn-lt"/>
+                <a:ea typeface="+mn-ea"/>
+                <a:cs typeface="+mn-cs"/>
+              </a:defRPr>
+            </a:lvl2pPr>
+            <a:lvl3pPr marL="914400" algn="l" defTabSz="914400" rtl="0" eaLnBrk="1" latinLnBrk="0" hangingPunct="1">
+              <a:defRPr sz="1800" kern="1200">
+                <a:solidFill>
+                  <a:schemeClr val="dk1"/>
+                </a:solidFill>
+                <a:latin typeface="+mn-lt"/>
+                <a:ea typeface="+mn-ea"/>
+                <a:cs typeface="+mn-cs"/>
+              </a:defRPr>
+            </a:lvl3pPr>
+            <a:lvl4pPr marL="1371600" algn="l" defTabSz="914400" rtl="0" eaLnBrk="1" latinLnBrk="0" hangingPunct="1">
+              <a:defRPr sz="1800" kern="1200">
+                <a:solidFill>
+                  <a:schemeClr val="dk1"/>
+                </a:solidFill>
+                <a:latin typeface="+mn-lt"/>
+                <a:ea typeface="+mn-ea"/>
+                <a:cs typeface="+mn-cs"/>
+              </a:defRPr>
+            </a:lvl4pPr>
+            <a:lvl5pPr marL="1828800" algn="l" defTabSz="914400" rtl="0" eaLnBrk="1" latinLnBrk="0" hangingPunct="1">
+              <a:defRPr sz="1800" kern="1200">
+                <a:solidFill>
+                  <a:schemeClr val="dk1"/>
+                </a:solidFill>
+                <a:latin typeface="+mn-lt"/>
+                <a:ea typeface="+mn-ea"/>
+                <a:cs typeface="+mn-cs"/>
+              </a:defRPr>
+            </a:lvl5pPr>
+            <a:lvl6pPr marL="2286000" algn="l" defTabSz="914400" rtl="0" eaLnBrk="1" latinLnBrk="0" hangingPunct="1">
+              <a:defRPr sz="1800" kern="1200">
+                <a:solidFill>
+                  <a:schemeClr val="dk1"/>
+                </a:solidFill>
+                <a:latin typeface="+mn-lt"/>
+                <a:ea typeface="+mn-ea"/>
+                <a:cs typeface="+mn-cs"/>
+              </a:defRPr>
+            </a:lvl6pPr>
+            <a:lvl7pPr marL="2743200" algn="l" defTabSz="914400" rtl="0" eaLnBrk="1" latinLnBrk="0" hangingPunct="1">
+              <a:defRPr sz="1800" kern="1200">
+                <a:solidFill>
+                  <a:schemeClr val="dk1"/>
+                </a:solidFill>
+                <a:latin typeface="+mn-lt"/>
+                <a:ea typeface="+mn-ea"/>
+                <a:cs typeface="+mn-cs"/>
+              </a:defRPr>
+            </a:lvl7pPr>
+            <a:lvl8pPr marL="3200400" algn="l" defTabSz="914400" rtl="0" eaLnBrk="1" latinLnBrk="0" hangingPunct="1">
+              <a:defRPr sz="1800" kern="1200">
+                <a:solidFill>
+                  <a:schemeClr val="dk1"/>
+                </a:solidFill>
+                <a:latin typeface="+mn-lt"/>
+                <a:ea typeface="+mn-ea"/>
+                <a:cs typeface="+mn-cs"/>
+              </a:defRPr>
+            </a:lvl8pPr>
+            <a:lvl9pPr marL="3657600" algn="l" defTabSz="914400" rtl="0" eaLnBrk="1" latinLnBrk="0" hangingPunct="1">
+              <a:defRPr sz="1800" kern="1200">
+                <a:solidFill>
+                  <a:schemeClr val="dk1"/>
+                </a:solidFill>
+                <a:latin typeface="+mn-lt"/>
+                <a:ea typeface="+mn-ea"/>
+                <a:cs typeface="+mn-cs"/>
+              </a:defRPr>
+            </a:lvl9pPr>
+          </a:lstStyle>
+          <a:p>
+            <a:pPr algn="ctr"/>
+            <a:r>
+              <a:rPr lang="en-US" sz="1600"/>
+              <a:t>2</a:t>
+            </a:r>
+          </a:p>
+        </p:txBody>
+      </p:sp>
+      <p:sp>
+        <p:nvSpPr>
+          <p:cNvPr id="2" name="Title 1"/>
+          <p:cNvSpPr>
+            <a:spLocks noGrp="1"/>
+          </p:cNvSpPr>
+          <p:nvPr>
+            <p:ph type="ctrTitle"/>
+          </p:nvPr>
+        </p:nvSpPr>
+        <p:spPr>
+          <a:xfrm>
+            <a:off x="801600" y="1277099"/>
+            <a:ext cx="9144000" cy="2387600"/>
+          </a:xfrm>
+        </p:spPr>
+        <p:txBody>
+          <a:bodyPr>
+            <a:normAutofit/>
+          </a:bodyPr>
+          <a:lstStyle/>
+          <a:p>
+            <a:pPr algn="l"/>
+            <a:r>
+              <a:rPr lang="en-GB" sz="4800" dirty="0">
+                <a:latin typeface="CMU Serif Roman" panose="02000603000000000000" pitchFamily="2" charset="0"/>
+                <a:ea typeface="CMU Serif Roman" panose="02000603000000000000" pitchFamily="2" charset="0"/>
+                <a:cs typeface="CMU Serif Roman" panose="02000603000000000000" pitchFamily="2" charset="0"/>
+              </a:rPr>
+              <a:t>Output &amp; Pre-training</a:t>
+            </a:r>
+            <a:endParaRPr lang="en-US" sz="4800" dirty="0">
+              <a:latin typeface="CMU Serif Roman" panose="02000603000000000000" pitchFamily="2" charset="0"/>
+              <a:ea typeface="CMU Serif Roman" panose="02000603000000000000" pitchFamily="2" charset="0"/>
+              <a:cs typeface="CMU Serif Roman" panose="02000603000000000000" pitchFamily="2" charset="0"/>
+            </a:endParaRPr>
+          </a:p>
+        </p:txBody>
+      </p:sp>
     </p:spTree>
     <p:extLst>
       <p:ext uri="{BB962C8B-B14F-4D97-AF65-F5344CB8AC3E}">
@@ -13598,7 +14005,11 @@
           <a:lstStyle/>
           <a:p>
             <a:r>
-              <a:rPr lang="en-GB" err="1"/>
+              <a:rPr lang="en-GB" err="1">
+                <a:latin typeface="CMU Serif Roman" panose="02000603000000000000" pitchFamily="2" charset="0"/>
+                <a:ea typeface="CMU Serif Roman" panose="02000603000000000000" pitchFamily="2" charset="0"/>
+                <a:cs typeface="CMU Serif Roman" panose="02000603000000000000" pitchFamily="2" charset="0"/>
+              </a:rPr>
               <a:t>Softmax</a:t>
             </a:r>
           </a:p>
@@ -13631,7 +14042,11 @@
               <a:buNone/>
             </a:pPr>
             <a:r>
-              <a:rPr lang="en-GB"/>
+              <a:rPr lang="en-GB" dirty="0">
+                <a:latin typeface="CMU Serif Roman" panose="02000603000000000000" pitchFamily="2" charset="0"/>
+                <a:ea typeface="CMU Serif Roman" panose="02000603000000000000" pitchFamily="2" charset="0"/>
+                <a:cs typeface="CMU Serif Roman" panose="02000603000000000000" pitchFamily="2" charset="0"/>
+              </a:rPr>
               <a:t>"the cat sat on the _____"</a:t>
             </a:r>
           </a:p>
@@ -13706,7 +14121,7 @@
         </p:blipFill>
         <p:spPr>
           <a:xfrm>
-            <a:off x="6718790" y="2674326"/>
+            <a:off x="6718603" y="2454885"/>
             <a:ext cx="5128846" cy="3722078"/>
           </a:xfrm>
           <a:prstGeom prst="rect">
@@ -13736,7 +14151,7 @@
         </p:blipFill>
         <p:spPr>
           <a:xfrm>
-            <a:off x="1" y="2667001"/>
+            <a:off x="1179" y="2447559"/>
             <a:ext cx="4967655" cy="3729404"/>
           </a:xfrm>
           <a:prstGeom prst="rect">
@@ -13832,7 +14247,11 @@
           <a:lstStyle/>
           <a:p>
             <a:r>
-              <a:rPr lang="en-GB" err="1"/>
+              <a:rPr lang="en-GB" err="1">
+                <a:latin typeface="CMU Serif Roman" panose="02000603000000000000" pitchFamily="2" charset="0"/>
+                <a:ea typeface="CMU Serif Roman" panose="02000603000000000000" pitchFamily="2" charset="0"/>
+                <a:cs typeface="CMU Serif Roman" panose="02000603000000000000" pitchFamily="2" charset="0"/>
+              </a:rPr>
               <a:t>Softmax</a:t>
             </a:r>
           </a:p>
@@ -13865,7 +14284,11 @@
               <a:buNone/>
             </a:pPr>
             <a:r>
-              <a:rPr lang="en-GB"/>
+              <a:rPr lang="en-GB" dirty="0">
+                <a:latin typeface="CMU Serif Roman" panose="02000603000000000000" pitchFamily="2" charset="0"/>
+                <a:ea typeface="CMU Serif Roman" panose="02000603000000000000" pitchFamily="2" charset="0"/>
+                <a:cs typeface="CMU Serif Roman" panose="02000603000000000000" pitchFamily="2" charset="0"/>
+              </a:rPr>
               <a:t>"the cat sat on the _____"</a:t>
             </a:r>
           </a:p>
@@ -13940,7 +14363,7 @@
         </p:blipFill>
         <p:spPr>
           <a:xfrm>
-            <a:off x="1" y="2667001"/>
+            <a:off x="0" y="2447559"/>
             <a:ext cx="4967655" cy="3729404"/>
           </a:xfrm>
           <a:prstGeom prst="rect">
@@ -14000,7 +14423,7 @@
         </p:blipFill>
         <p:spPr>
           <a:xfrm>
-            <a:off x="6792058" y="2674326"/>
+            <a:off x="6795535" y="2459814"/>
             <a:ext cx="4974981" cy="3722078"/>
           </a:xfrm>
           <a:prstGeom prst="rect">
@@ -14066,9 +14489,18 @@
           <a:lstStyle/>
           <a:p>
             <a:r>
-              <a:rPr lang="en-GB" err="1"/>
+              <a:rPr lang="en-GB" dirty="0" err="1">
+                <a:latin typeface="CMU Serif Roman" panose="02000603000000000000" pitchFamily="2" charset="0"/>
+                <a:ea typeface="CMU Serif Roman" panose="02000603000000000000" pitchFamily="2" charset="0"/>
+                <a:cs typeface="CMU Serif Roman" panose="02000603000000000000" pitchFamily="2" charset="0"/>
+              </a:rPr>
               <a:t>Softmax</a:t>
             </a:r>
+            <a:endParaRPr lang="en-GB" dirty="0">
+              <a:latin typeface="CMU Serif Roman" panose="02000603000000000000" pitchFamily="2" charset="0"/>
+              <a:ea typeface="CMU Serif Roman" panose="02000603000000000000" pitchFamily="2" charset="0"/>
+              <a:cs typeface="CMU Serif Roman" panose="02000603000000000000" pitchFamily="2" charset="0"/>
+            </a:endParaRPr>
           </a:p>
         </p:txBody>
       </p:sp>
@@ -14099,7 +14531,11 @@
               <a:buNone/>
             </a:pPr>
             <a:r>
-              <a:rPr lang="en-GB"/>
+              <a:rPr lang="en-GB">
+                <a:latin typeface="CMU Serif Roman" panose="02000603000000000000" pitchFamily="2" charset="0"/>
+                <a:ea typeface="CMU Serif Roman" panose="02000603000000000000" pitchFamily="2" charset="0"/>
+                <a:cs typeface="CMU Serif Roman" panose="02000603000000000000" pitchFamily="2" charset="0"/>
+              </a:rPr>
               <a:t>"the cat sat on the _____"</a:t>
             </a:r>
           </a:p>
@@ -14174,7 +14610,7 @@
         </p:blipFill>
         <p:spPr>
           <a:xfrm>
-            <a:off x="1" y="2667001"/>
+            <a:off x="1179" y="2447559"/>
             <a:ext cx="4967655" cy="3729404"/>
           </a:xfrm>
           <a:prstGeom prst="rect">
@@ -14234,7 +14670,7 @@
         </p:blipFill>
         <p:spPr>
           <a:xfrm>
-            <a:off x="6806711" y="2674326"/>
+            <a:off x="6806525" y="2454885"/>
             <a:ext cx="4953001" cy="3722078"/>
           </a:xfrm>
           <a:prstGeom prst="rect">
@@ -14294,9 +14730,18 @@
           <a:lstStyle/>
           <a:p>
             <a:r>
-              <a:rPr lang="en-GB" err="1"/>
+              <a:rPr lang="en-GB" dirty="0" err="1">
+                <a:latin typeface="CMU Serif Roman" panose="02000603000000000000" pitchFamily="2" charset="0"/>
+                <a:ea typeface="CMU Serif Roman" panose="02000603000000000000" pitchFamily="2" charset="0"/>
+                <a:cs typeface="CMU Serif Roman" panose="02000603000000000000" pitchFamily="2" charset="0"/>
+              </a:rPr>
               <a:t>Softmax</a:t>
             </a:r>
+            <a:endParaRPr lang="en-GB" dirty="0">
+              <a:latin typeface="CMU Serif Roman" panose="02000603000000000000" pitchFamily="2" charset="0"/>
+              <a:ea typeface="CMU Serif Roman" panose="02000603000000000000" pitchFamily="2" charset="0"/>
+              <a:cs typeface="CMU Serif Roman" panose="02000603000000000000" pitchFamily="2" charset="0"/>
+            </a:endParaRPr>
           </a:p>
         </p:txBody>
       </p:sp>
@@ -14324,18 +14769,34 @@
           <a:lstStyle/>
           <a:p>
             <a:r>
-              <a:rPr lang="en-GB" err="1"/>
+              <a:rPr lang="en-GB" err="1">
+                <a:latin typeface="CMU Serif Roman" panose="02000603000000000000" pitchFamily="2" charset="0"/>
+                <a:ea typeface="CMU Serif Roman" panose="02000603000000000000" pitchFamily="2" charset="0"/>
+                <a:cs typeface="CMU Serif Roman" panose="02000603000000000000" pitchFamily="2" charset="0"/>
+              </a:rPr>
               <a:t>Softmax</a:t>
             </a:r>
             <a:r>
-              <a:rPr lang="en-GB"/>
+              <a:rPr lang="en-GB">
+                <a:latin typeface="CMU Serif Roman" panose="02000603000000000000" pitchFamily="2" charset="0"/>
+                <a:ea typeface="CMU Serif Roman" panose="02000603000000000000" pitchFamily="2" charset="0"/>
+                <a:cs typeface="CMU Serif Roman" panose="02000603000000000000" pitchFamily="2" charset="0"/>
+              </a:rPr>
               <a:t> converts raw logits to a probability distribution</a:t>
             </a:r>
-            <a:endParaRPr lang="en-US"/>
-          </a:p>
-          <a:p>
-            <a:r>
-              <a:rPr lang="en-GB"/>
+            <a:endParaRPr lang="en-US">
+              <a:latin typeface="CMU Serif Roman" panose="02000603000000000000" pitchFamily="2" charset="0"/>
+              <a:ea typeface="CMU Serif Roman" panose="02000603000000000000" pitchFamily="2" charset="0"/>
+              <a:cs typeface="CMU Serif Roman" panose="02000603000000000000" pitchFamily="2" charset="0"/>
+            </a:endParaRPr>
+          </a:p>
+          <a:p>
+            <a:r>
+              <a:rPr lang="en-GB">
+                <a:latin typeface="CMU Serif Roman" panose="02000603000000000000" pitchFamily="2" charset="0"/>
+                <a:ea typeface="CMU Serif Roman" panose="02000603000000000000" pitchFamily="2" charset="0"/>
+                <a:cs typeface="CMU Serif Roman" panose="02000603000000000000" pitchFamily="2" charset="0"/>
+              </a:rPr>
               <a:t>Changing the temperature parameter alters the entropy of the distribution</a:t>
             </a:r>
           </a:p>
@@ -14423,7 +14884,11 @@
           <a:lstStyle/>
           <a:p>
             <a:r>
-              <a:rPr lang="en-GB"/>
+              <a:rPr lang="en-GB">
+                <a:latin typeface="CMU Serif Roman" panose="02000603000000000000" pitchFamily="2" charset="0"/>
+                <a:ea typeface="CMU Serif Roman" panose="02000603000000000000" pitchFamily="2" charset="0"/>
+                <a:cs typeface="CMU Serif Roman" panose="02000603000000000000" pitchFamily="2" charset="0"/>
+              </a:rPr>
               <a:t>Sampling</a:t>
             </a:r>
           </a:p>
@@ -14460,6 +14925,9 @@
                 <a:solidFill>
                   <a:srgbClr val="7030A0"/>
                 </a:solidFill>
+                <a:latin typeface="CMU SERIF ROMAN" panose="02000603000000000000" pitchFamily="2" charset="0"/>
+                <a:ea typeface="CMU SERIF ROMAN" panose="02000603000000000000" pitchFamily="2" charset="0"/>
+                <a:cs typeface="CMU SERIF ROMAN" panose="02000603000000000000" pitchFamily="2" charset="0"/>
               </a:rPr>
               <a:t>Top-p </a:t>
             </a:r>
@@ -14468,8 +14936,9 @@
                 <a:solidFill>
                   <a:srgbClr val="000000"/>
                 </a:solidFill>
-                <a:ea typeface="+mn-lt"/>
-                <a:cs typeface="+mn-lt"/>
+                <a:latin typeface="CMU Serif Roman" panose="02000603000000000000" pitchFamily="2" charset="0"/>
+                <a:ea typeface="CMU Serif Roman" panose="02000603000000000000" pitchFamily="2" charset="0"/>
+                <a:cs typeface="CMU Serif Roman" panose="02000603000000000000" pitchFamily="2" charset="0"/>
               </a:rPr>
               <a:t>The cumulative probability cutoff for token selection. Lower values mean sampling from a smaller, more top-weighted nucleus.</a:t>
             </a:r>
@@ -14483,11 +14952,18 @@
                 <a:solidFill>
                   <a:srgbClr val="7030A0"/>
                 </a:solidFill>
+                <a:latin typeface="CMU SERIF ROMAN" panose="02000603000000000000" pitchFamily="2" charset="0"/>
+                <a:ea typeface="CMU SERIF ROMAN" panose="02000603000000000000" pitchFamily="2" charset="0"/>
+                <a:cs typeface="CMU SERIF ROMAN" panose="02000603000000000000" pitchFamily="2" charset="0"/>
               </a:rPr>
               <a:t>Top-k</a:t>
             </a:r>
             <a:r>
-              <a:rPr lang="en-GB" dirty="0"/>
+              <a:rPr lang="en-GB" dirty="0">
+                <a:latin typeface="CMU Serif Roman" panose="02000603000000000000" pitchFamily="2" charset="0"/>
+                <a:ea typeface="CMU Serif Roman" panose="02000603000000000000" pitchFamily="2" charset="0"/>
+                <a:cs typeface="CMU Serif Roman" panose="02000603000000000000" pitchFamily="2" charset="0"/>
+              </a:rPr>
               <a:t> </a:t>
             </a:r>
             <a:r>
@@ -14495,8 +14971,9 @@
                 <a:solidFill>
                   <a:srgbClr val="000000"/>
                 </a:solidFill>
-                <a:ea typeface="+mn-lt"/>
-                <a:cs typeface="+mn-lt"/>
+                <a:latin typeface="CMU Serif Roman" panose="02000603000000000000" pitchFamily="2" charset="0"/>
+                <a:ea typeface="CMU Serif Roman" panose="02000603000000000000" pitchFamily="2" charset="0"/>
+                <a:cs typeface="CMU Serif Roman" panose="02000603000000000000" pitchFamily="2" charset="0"/>
               </a:rPr>
               <a:t>Sample from the k most likely next tokens at each step. Lower k focuses on higher probability tokens.</a:t>
             </a:r>
@@ -14509,38 +14986,41 @@
               <a:solidFill>
                 <a:srgbClr val="000000"/>
               </a:solidFill>
+              <a:latin typeface="CMU Serif Roman" panose="02000603000000000000" pitchFamily="2" charset="0"/>
+              <a:ea typeface="CMU Serif Roman" panose="02000603000000000000" pitchFamily="2" charset="0"/>
+              <a:cs typeface="CMU Serif Roman" panose="02000603000000000000" pitchFamily="2" charset="0"/>
             </a:endParaRPr>
           </a:p>
           <a:p>
             <a:pPr marL="0" indent="0">
               <a:buNone/>
             </a:pPr>
+            <a:r>
+              <a:rPr lang="en-GB" b="1" dirty="0">
+                <a:solidFill>
+                  <a:srgbClr val="7030A0"/>
+                </a:solidFill>
+                <a:latin typeface="CMU SERIF ROMAN" panose="02000603000000000000" pitchFamily="2" charset="0"/>
+                <a:ea typeface="CMU SERIF ROMAN" panose="02000603000000000000" pitchFamily="2" charset="0"/>
+                <a:cs typeface="CMU SERIF ROMAN" panose="02000603000000000000" pitchFamily="2" charset="0"/>
+              </a:rPr>
+              <a:t>Greedy sampling</a:t>
+            </a:r>
+            <a:r>
+              <a:rPr lang="en-GB" dirty="0">
+                <a:latin typeface="CMU Serif Roman" panose="02000603000000000000" pitchFamily="2" charset="0"/>
+                <a:ea typeface="CMU Serif Roman" panose="02000603000000000000" pitchFamily="2" charset="0"/>
+                <a:cs typeface="CMU Serif Roman" panose="02000603000000000000" pitchFamily="2" charset="0"/>
+              </a:rPr>
+              <a:t> Pick the top score</a:t>
+            </a:r>
             <a:endParaRPr lang="en-GB" dirty="0">
               <a:solidFill>
                 <a:srgbClr val="000000"/>
               </a:solidFill>
-            </a:endParaRPr>
-          </a:p>
-          <a:p>
-            <a:pPr marL="0" indent="0">
-              <a:buNone/>
-            </a:pPr>
-            <a:r>
-              <a:rPr lang="en-GB" b="1" dirty="0">
-                <a:solidFill>
-                  <a:srgbClr val="7030A0"/>
-                </a:solidFill>
-              </a:rPr>
-              <a:t>Greedy sampling</a:t>
-            </a:r>
-            <a:r>
-              <a:rPr lang="en-GB" dirty="0"/>
-              <a:t> Pick the top score</a:t>
-            </a:r>
-            <a:endParaRPr lang="en-GB" dirty="0">
-              <a:solidFill>
-                <a:srgbClr val="000000"/>
-              </a:solidFill>
+              <a:latin typeface="CMU Serif Roman" panose="02000603000000000000" pitchFamily="2" charset="0"/>
+              <a:ea typeface="CMU Serif Roman" panose="02000603000000000000" pitchFamily="2" charset="0"/>
+              <a:cs typeface="CMU Serif Roman" panose="02000603000000000000" pitchFamily="2" charset="0"/>
             </a:endParaRPr>
           </a:p>
           <a:p>
@@ -14552,6 +15032,9 @@
                 <a:solidFill>
                   <a:srgbClr val="000000"/>
                 </a:solidFill>
+                <a:latin typeface="CMU SERIF ROMAN" panose="02000603000000000000" pitchFamily="2" charset="0"/>
+                <a:ea typeface="CMU SERIF ROMAN" panose="02000603000000000000" pitchFamily="2" charset="0"/>
+                <a:cs typeface="CMU SERIF ROMAN" panose="02000603000000000000" pitchFamily="2" charset="0"/>
               </a:rPr>
               <a:t>In OpenAI models, setting T = 0 essentially does greedy sampling, and top-k is not exposed</a:t>
             </a:r>
@@ -14702,7 +15185,7 @@
                                         <p:tgtEl>
                                           <p:spTgt spid="3">
                                             <p:txEl>
-                                              <p:pRg st="4" end="4"/>
+                                              <p:pRg st="3" end="3"/>
                                             </p:txEl>
                                           </p:spTgt>
                                         </p:tgtEl>
@@ -14751,7 +15234,7 @@
                                         <p:tgtEl>
                                           <p:spTgt spid="3">
                                             <p:txEl>
-                                              <p:pRg st="5" end="5"/>
+                                              <p:pRg st="4" end="4"/>
                                             </p:txEl>
                                           </p:spTgt>
                                         </p:tgtEl>
@@ -14839,7 +15322,11 @@
           <a:lstStyle/>
           <a:p>
             <a:r>
-              <a:rPr lang="en-GB"/>
+              <a:rPr lang="en-GB" dirty="0">
+                <a:latin typeface="CMU Serif Roman" panose="02000603000000000000" pitchFamily="2" charset="0"/>
+                <a:ea typeface="CMU Serif Roman" panose="02000603000000000000" pitchFamily="2" charset="0"/>
+                <a:cs typeface="CMU Serif Roman" panose="02000603000000000000" pitchFamily="2" charset="0"/>
+              </a:rPr>
               <a:t>Training data</a:t>
             </a:r>
           </a:p>
@@ -14900,7 +15387,7 @@
           <a:noFill/>
           <a:ln w="28575">
             <a:solidFill>
-              <a:srgbClr val="C00000"/>
+              <a:srgbClr val="1B55EB"/>
             </a:solidFill>
           </a:ln>
         </p:spPr>
@@ -14952,7 +15439,7 @@
           <a:noFill/>
           <a:ln w="28575">
             <a:solidFill>
-              <a:srgbClr val="C00000"/>
+              <a:srgbClr val="1B55EB"/>
             </a:solidFill>
           </a:ln>
         </p:spPr>
@@ -14966,31 +15453,51 @@
           <a:lstStyle/>
           <a:p>
             <a:r>
-              <a:rPr lang="en-GB"/>
+              <a:rPr lang="en-GB">
+                <a:latin typeface="CMU Serif Roman" panose="02000603000000000000" pitchFamily="2" charset="0"/>
+                <a:ea typeface="CMU Serif Roman" panose="02000603000000000000" pitchFamily="2" charset="0"/>
+                <a:cs typeface="CMU Serif Roman" panose="02000603000000000000" pitchFamily="2" charset="0"/>
+              </a:rPr>
               <a:t>~200k books</a:t>
             </a:r>
           </a:p>
           <a:p>
-            <a:endParaRPr lang="en-GB"/>
-          </a:p>
-          <a:p>
-            <a:r>
-              <a:rPr lang="en-GB"/>
+            <a:endParaRPr lang="en-GB">
+              <a:latin typeface="CMU Serif Roman" panose="02000603000000000000" pitchFamily="2" charset="0"/>
+              <a:ea typeface="CMU Serif Roman" panose="02000603000000000000" pitchFamily="2" charset="0"/>
+              <a:cs typeface="CMU Serif Roman" panose="02000603000000000000" pitchFamily="2" charset="0"/>
+            </a:endParaRPr>
+          </a:p>
+          <a:p>
+            <a:r>
+              <a:rPr lang="en-GB">
+                <a:latin typeface="CMU Serif Roman" panose="02000603000000000000" pitchFamily="2" charset="0"/>
+                <a:ea typeface="CMU Serif Roman" panose="02000603000000000000" pitchFamily="2" charset="0"/>
+                <a:cs typeface="CMU Serif Roman" panose="02000603000000000000" pitchFamily="2" charset="0"/>
+              </a:rPr>
               <a:t>~27B Tokens</a:t>
             </a:r>
           </a:p>
           <a:p>
-            <a:endParaRPr lang="en-GB"/>
-          </a:p>
-          <a:p>
-            <a:r>
-              <a:rPr lang="en-GB"/>
+            <a:endParaRPr lang="en-GB">
+              <a:latin typeface="CMU Serif Roman" panose="02000603000000000000" pitchFamily="2" charset="0"/>
+              <a:ea typeface="CMU Serif Roman" panose="02000603000000000000" pitchFamily="2" charset="0"/>
+              <a:cs typeface="CMU Serif Roman" panose="02000603000000000000" pitchFamily="2" charset="0"/>
+            </a:endParaRPr>
+          </a:p>
+          <a:p>
+            <a:r>
+              <a:rPr lang="en-GB">
+                <a:latin typeface="CMU Serif Roman" panose="02000603000000000000" pitchFamily="2" charset="0"/>
+                <a:ea typeface="CMU Serif Roman" panose="02000603000000000000" pitchFamily="2" charset="0"/>
+                <a:cs typeface="CMU Serif Roman" panose="02000603000000000000" pitchFamily="2" charset="0"/>
+              </a:rPr>
               <a:t>~110GB</a:t>
             </a:r>
             <a:endParaRPr lang="en-GB" sz="1100">
-              <a:latin typeface="Calibri"/>
-              <a:ea typeface="Calibri"/>
-              <a:cs typeface="Calibri"/>
+              <a:latin typeface="CMU Serif Roman" panose="02000603000000000000" pitchFamily="2" charset="0"/>
+              <a:ea typeface="CMU Serif Roman" panose="02000603000000000000" pitchFamily="2" charset="0"/>
+              <a:cs typeface="CMU Serif Roman" panose="02000603000000000000" pitchFamily="2" charset="0"/>
             </a:endParaRPr>
           </a:p>
         </p:txBody>
@@ -15018,7 +15525,7 @@
           <a:noFill/>
           <a:ln w="28575">
             <a:solidFill>
-              <a:srgbClr val="0070C0"/>
+              <a:srgbClr val="1B55EB"/>
             </a:solidFill>
           </a:ln>
         </p:spPr>
@@ -15034,33 +15541,52 @@
             <a:r>
               <a:rPr lang="en-GB" b="1" dirty="0">
                 <a:solidFill>
-                  <a:srgbClr val="0070C0"/>
+                  <a:srgbClr val="1B55EB"/>
                 </a:solidFill>
+                <a:latin typeface="CMU SERIF ROMAN" panose="02000603000000000000" pitchFamily="2" charset="0"/>
+                <a:ea typeface="CMU SERIF ROMAN" panose="02000603000000000000" pitchFamily="2" charset="0"/>
+                <a:cs typeface="CMU SERIF ROMAN" panose="02000603000000000000" pitchFamily="2" charset="0"/>
               </a:rPr>
               <a:t>Llama 3 </a:t>
             </a:r>
           </a:p>
           <a:p>
-            <a:endParaRPr lang="en-GB" dirty="0"/>
-          </a:p>
-          <a:p>
-            <a:r>
-              <a:rPr lang="en-GB" dirty="0"/>
+            <a:endParaRPr lang="en-GB" dirty="0">
+              <a:latin typeface="CMU Serif Roman" panose="02000603000000000000" pitchFamily="2" charset="0"/>
+              <a:ea typeface="CMU Serif Roman" panose="02000603000000000000" pitchFamily="2" charset="0"/>
+              <a:cs typeface="CMU Serif Roman" panose="02000603000000000000" pitchFamily="2" charset="0"/>
+            </a:endParaRPr>
+          </a:p>
+          <a:p>
+            <a:r>
+              <a:rPr lang="en-GB" dirty="0">
+                <a:latin typeface="CMU Serif Roman" panose="02000603000000000000" pitchFamily="2" charset="0"/>
+                <a:ea typeface="CMU Serif Roman" panose="02000603000000000000" pitchFamily="2" charset="0"/>
+                <a:cs typeface="CMU Serif Roman" panose="02000603000000000000" pitchFamily="2" charset="0"/>
+              </a:rPr>
               <a:t>~15T tokens</a:t>
             </a:r>
           </a:p>
           <a:p>
-            <a:endParaRPr lang="en-GB" dirty="0"/>
-          </a:p>
-          <a:p>
-            <a:r>
-              <a:rPr lang="en-GB" dirty="0"/>
+            <a:endParaRPr lang="en-GB" dirty="0">
+              <a:latin typeface="CMU Serif Roman" panose="02000603000000000000" pitchFamily="2" charset="0"/>
+              <a:ea typeface="CMU Serif Roman" panose="02000603000000000000" pitchFamily="2" charset="0"/>
+              <a:cs typeface="CMU Serif Roman" panose="02000603000000000000" pitchFamily="2" charset="0"/>
+            </a:endParaRPr>
+          </a:p>
+          <a:p>
+            <a:r>
+              <a:rPr lang="en-GB" dirty="0">
+                <a:latin typeface="CMU Serif Roman" panose="02000603000000000000" pitchFamily="2" charset="0"/>
+                <a:ea typeface="CMU Serif Roman" panose="02000603000000000000" pitchFamily="2" charset="0"/>
+                <a:cs typeface="CMU Serif Roman" panose="02000603000000000000" pitchFamily="2" charset="0"/>
+              </a:rPr>
               <a:t>~44TB</a:t>
             </a:r>
             <a:endParaRPr lang="en-GB" sz="1100" dirty="0">
-              <a:latin typeface="Calibri"/>
-              <a:ea typeface="Calibri"/>
-              <a:cs typeface="Calibri"/>
+              <a:latin typeface="CMU Serif Roman" panose="02000603000000000000" pitchFamily="2" charset="0"/>
+              <a:ea typeface="CMU Serif Roman" panose="02000603000000000000" pitchFamily="2" charset="0"/>
+              <a:cs typeface="CMU Serif Roman" panose="02000603000000000000" pitchFamily="2" charset="0"/>
             </a:endParaRPr>
           </a:p>
         </p:txBody>
@@ -15087,7 +15613,7 @@
           </a:prstGeom>
           <a:ln w="28575">
             <a:solidFill>
-              <a:srgbClr val="C00000"/>
+              <a:srgbClr val="1B55EB"/>
             </a:solidFill>
           </a:ln>
         </p:spPr>
@@ -15130,7 +15656,7 @@
           </a:prstGeom>
           <a:ln w="28575">
             <a:solidFill>
-              <a:srgbClr val="C00000"/>
+              <a:srgbClr val="1B55EB"/>
             </a:solidFill>
           </a:ln>
         </p:spPr>
@@ -15181,10 +15707,13 @@
           <a:lstStyle/>
           <a:p>
             <a:r>
-              <a:rPr lang="en-GB" sz="2800" b="1" i="1">
+              <a:rPr lang="en-GB" sz="2800" b="1" i="1" dirty="0">
                 <a:solidFill>
-                  <a:srgbClr val="C00000"/>
+                  <a:srgbClr val="1B55EB"/>
                 </a:solidFill>
+                <a:latin typeface="CMU SERIF ROMAN" panose="02000603000000000000" pitchFamily="2" charset="0"/>
+                <a:ea typeface="CMU SERIF ROMAN" panose="02000603000000000000" pitchFamily="2" charset="0"/>
+                <a:cs typeface="CMU SERIF ROMAN" panose="02000603000000000000" pitchFamily="2" charset="0"/>
               </a:rPr>
               <a:t>&lt; 0.2%!!</a:t>
             </a:r>
@@ -15534,13 +16063,22 @@
             <p:ph type="title"/>
           </p:nvPr>
         </p:nvSpPr>
-        <p:spPr/>
+        <p:spPr>
+          <a:xfrm>
+            <a:off x="838199" y="365125"/>
+            <a:ext cx="11353801" cy="1325563"/>
+          </a:xfrm>
+        </p:spPr>
         <p:txBody>
           <a:bodyPr/>
           <a:lstStyle/>
           <a:p>
             <a:r>
-              <a:rPr lang="en-GB"/>
+              <a:rPr lang="en-GB">
+                <a:latin typeface="CMU Serif Roman" panose="02000603000000000000" pitchFamily="2" charset="0"/>
+                <a:ea typeface="CMU Serif Roman" panose="02000603000000000000" pitchFamily="2" charset="0"/>
+                <a:cs typeface="CMU Serif Roman" panose="02000603000000000000" pitchFamily="2" charset="0"/>
+              </a:rPr>
               <a:t>Scaling laws</a:t>
             </a:r>
           </a:p>
@@ -15590,8 +16128,8 @@
         </p:nvSpPr>
         <p:spPr>
           <a:xfrm>
-            <a:off x="212436" y="6003562"/>
-            <a:ext cx="8469746" cy="646331"/>
+            <a:off x="115454" y="5449381"/>
+            <a:ext cx="10607964" cy="646331"/>
           </a:xfrm>
           <a:prstGeom prst="rect">
             <a:avLst/>
@@ -15611,6 +16149,9 @@
                     <a:lumMod val="75000"/>
                   </a:schemeClr>
                 </a:solidFill>
+                <a:latin typeface="CMU Serif Roman" panose="02000603000000000000" pitchFamily="2" charset="0"/>
+                <a:ea typeface="CMU Serif Roman" panose="02000603000000000000" pitchFamily="2" charset="0"/>
+                <a:cs typeface="CMU Serif Roman" panose="02000603000000000000" pitchFamily="2" charset="0"/>
               </a:rPr>
               <a:t>Kaplan, J., McCandlish, S., Henighan, T., Brown, T. B., Chess, B., Child, R., Gray, S., Radford, A., Wu, J., &amp; Amodei, D. (2020). </a:t>
             </a:r>
@@ -15621,6 +16162,9 @@
                     <a:lumMod val="75000"/>
                   </a:schemeClr>
                 </a:solidFill>
+                <a:latin typeface="CMU SERIF ROMAN" panose="02000603000000000000" pitchFamily="2" charset="0"/>
+                <a:ea typeface="CMU SERIF ROMAN" panose="02000603000000000000" pitchFamily="2" charset="0"/>
+                <a:cs typeface="CMU SERIF ROMAN" panose="02000603000000000000" pitchFamily="2" charset="0"/>
               </a:rPr>
               <a:t>Scaling laws for neural language models</a:t>
             </a:r>
@@ -15631,6 +16175,9 @@
                     <a:lumMod val="75000"/>
                   </a:schemeClr>
                 </a:solidFill>
+                <a:latin typeface="CMU Serif Roman" panose="02000603000000000000" pitchFamily="2" charset="0"/>
+                <a:ea typeface="CMU Serif Roman" panose="02000603000000000000" pitchFamily="2" charset="0"/>
+                <a:cs typeface="CMU Serif Roman" panose="02000603000000000000" pitchFamily="2" charset="0"/>
               </a:rPr>
               <a:t>. </a:t>
             </a:r>
@@ -15640,6 +16187,9 @@
                   <a:lumMod val="75000"/>
                 </a:schemeClr>
               </a:solidFill>
+              <a:latin typeface="CMU Serif Roman" panose="02000603000000000000" pitchFamily="2" charset="0"/>
+              <a:ea typeface="CMU Serif Roman" panose="02000603000000000000" pitchFamily="2" charset="0"/>
+              <a:cs typeface="CMU Serif Roman" panose="02000603000000000000" pitchFamily="2" charset="0"/>
             </a:endParaRPr>
           </a:p>
         </p:txBody>
@@ -15697,7 +16247,7 @@
         </p:blipFill>
         <p:spPr>
           <a:xfrm>
-            <a:off x="2950658" y="1480561"/>
+            <a:off x="2950658" y="1323542"/>
             <a:ext cx="6290684" cy="4270261"/>
           </a:xfrm>
           <a:prstGeom prst="rect">
@@ -15727,7 +16277,11 @@
           <a:lstStyle/>
           <a:p>
             <a:r>
-              <a:rPr lang="en-GB" dirty="0"/>
+              <a:rPr lang="en-GB" dirty="0">
+                <a:latin typeface="CMU Serif Roman" panose="02000603000000000000" pitchFamily="2" charset="0"/>
+                <a:ea typeface="CMU Serif Roman" panose="02000603000000000000" pitchFamily="2" charset="0"/>
+                <a:cs typeface="CMU Serif Roman" panose="02000603000000000000" pitchFamily="2" charset="0"/>
+              </a:rPr>
               <a:t>Emergence</a:t>
             </a:r>
           </a:p>
@@ -15747,8 +16301,8 @@
         </p:nvSpPr>
         <p:spPr>
           <a:xfrm>
-            <a:off x="205689" y="5981731"/>
-            <a:ext cx="11780622" cy="646331"/>
+            <a:off x="205689" y="5593803"/>
+            <a:ext cx="11780622" cy="523220"/>
           </a:xfrm>
           <a:prstGeom prst="rect">
             <a:avLst/>
@@ -15762,111 +16316,144 @@
           <a:lstStyle/>
           <a:p>
             <a:r>
-              <a:rPr lang="en-GB" dirty="0">
+              <a:rPr lang="en-GB" sz="1400" dirty="0">
                 <a:solidFill>
                   <a:schemeClr val="bg2">
                     <a:lumMod val="75000"/>
                   </a:schemeClr>
                 </a:solidFill>
+                <a:latin typeface="CMU Serif Roman" panose="02000603000000000000" pitchFamily="2" charset="0"/>
+                <a:ea typeface="CMU Serif Roman" panose="02000603000000000000" pitchFamily="2" charset="0"/>
+                <a:cs typeface="CMU Serif Roman" panose="02000603000000000000" pitchFamily="2" charset="0"/>
               </a:rPr>
               <a:t>Wei, J., Tay, Y., </a:t>
             </a:r>
             <a:r>
-              <a:rPr lang="en-GB" dirty="0" err="1">
+              <a:rPr lang="en-GB" sz="1400" dirty="0" err="1">
                 <a:solidFill>
                   <a:schemeClr val="bg2">
                     <a:lumMod val="75000"/>
                   </a:schemeClr>
                 </a:solidFill>
+                <a:latin typeface="CMU Serif Roman" panose="02000603000000000000" pitchFamily="2" charset="0"/>
+                <a:ea typeface="CMU Serif Roman" panose="02000603000000000000" pitchFamily="2" charset="0"/>
+                <a:cs typeface="CMU Serif Roman" panose="02000603000000000000" pitchFamily="2" charset="0"/>
               </a:rPr>
               <a:t>Bommasani</a:t>
             </a:r>
             <a:r>
-              <a:rPr lang="en-GB" dirty="0">
+              <a:rPr lang="en-GB" sz="1400" dirty="0">
                 <a:solidFill>
                   <a:schemeClr val="bg2">
                     <a:lumMod val="75000"/>
                   </a:schemeClr>
                 </a:solidFill>
+                <a:latin typeface="CMU Serif Roman" panose="02000603000000000000" pitchFamily="2" charset="0"/>
+                <a:ea typeface="CMU Serif Roman" panose="02000603000000000000" pitchFamily="2" charset="0"/>
+                <a:cs typeface="CMU Serif Roman" panose="02000603000000000000" pitchFamily="2" charset="0"/>
               </a:rPr>
               <a:t>, R., Raffel, C., Zoph, B., Borgeaud, S., </a:t>
             </a:r>
             <a:r>
-              <a:rPr lang="en-GB" dirty="0" err="1">
+              <a:rPr lang="en-GB" sz="1400" dirty="0" err="1">
                 <a:solidFill>
                   <a:schemeClr val="bg2">
                     <a:lumMod val="75000"/>
                   </a:schemeClr>
                 </a:solidFill>
+                <a:latin typeface="CMU Serif Roman" panose="02000603000000000000" pitchFamily="2" charset="0"/>
+                <a:ea typeface="CMU Serif Roman" panose="02000603000000000000" pitchFamily="2" charset="0"/>
+                <a:cs typeface="CMU Serif Roman" panose="02000603000000000000" pitchFamily="2" charset="0"/>
               </a:rPr>
               <a:t>Yogatama</a:t>
             </a:r>
             <a:r>
-              <a:rPr lang="en-GB" dirty="0">
+              <a:rPr lang="en-GB" sz="1400" dirty="0">
                 <a:solidFill>
                   <a:schemeClr val="bg2">
                     <a:lumMod val="75000"/>
                   </a:schemeClr>
                 </a:solidFill>
+                <a:latin typeface="CMU Serif Roman" panose="02000603000000000000" pitchFamily="2" charset="0"/>
+                <a:ea typeface="CMU Serif Roman" panose="02000603000000000000" pitchFamily="2" charset="0"/>
+                <a:cs typeface="CMU Serif Roman" panose="02000603000000000000" pitchFamily="2" charset="0"/>
               </a:rPr>
               <a:t>, D., Bosma, M., Zhou, D., </a:t>
             </a:r>
             <a:r>
-              <a:rPr lang="en-GB" dirty="0" err="1">
+              <a:rPr lang="en-GB" sz="1400" dirty="0" err="1">
                 <a:solidFill>
                   <a:schemeClr val="bg2">
                     <a:lumMod val="75000"/>
                   </a:schemeClr>
                 </a:solidFill>
+                <a:latin typeface="CMU Serif Roman" panose="02000603000000000000" pitchFamily="2" charset="0"/>
+                <a:ea typeface="CMU Serif Roman" panose="02000603000000000000" pitchFamily="2" charset="0"/>
+                <a:cs typeface="CMU Serif Roman" panose="02000603000000000000" pitchFamily="2" charset="0"/>
               </a:rPr>
               <a:t>Miculivicius</a:t>
             </a:r>
             <a:r>
-              <a:rPr lang="en-GB" dirty="0">
+              <a:rPr lang="en-GB" sz="1400" dirty="0">
                 <a:solidFill>
                   <a:schemeClr val="bg2">
                     <a:lumMod val="75000"/>
                   </a:schemeClr>
                 </a:solidFill>
+                <a:latin typeface="CMU Serif Roman" panose="02000603000000000000" pitchFamily="2" charset="0"/>
+                <a:ea typeface="CMU Serif Roman" panose="02000603000000000000" pitchFamily="2" charset="0"/>
+                <a:cs typeface="CMU Serif Roman" panose="02000603000000000000" pitchFamily="2" charset="0"/>
               </a:rPr>
               <a:t>, D., Narang, S., </a:t>
             </a:r>
             <a:r>
-              <a:rPr lang="en-GB" dirty="0" err="1">
+              <a:rPr lang="en-GB" sz="1400" dirty="0" err="1">
                 <a:solidFill>
                   <a:schemeClr val="bg2">
                     <a:lumMod val="75000"/>
                   </a:schemeClr>
                 </a:solidFill>
+                <a:latin typeface="CMU Serif Roman" panose="02000603000000000000" pitchFamily="2" charset="0"/>
+                <a:ea typeface="CMU Serif Roman" panose="02000603000000000000" pitchFamily="2" charset="0"/>
+                <a:cs typeface="CMU Serif Roman" panose="02000603000000000000" pitchFamily="2" charset="0"/>
               </a:rPr>
               <a:t>Chowdhery</a:t>
             </a:r>
             <a:r>
-              <a:rPr lang="en-GB" dirty="0">
+              <a:rPr lang="en-GB" sz="1400" dirty="0">
                 <a:solidFill>
                   <a:schemeClr val="bg2">
                     <a:lumMod val="75000"/>
                   </a:schemeClr>
                 </a:solidFill>
+                <a:latin typeface="CMU Serif Roman" panose="02000603000000000000" pitchFamily="2" charset="0"/>
+                <a:ea typeface="CMU Serif Roman" panose="02000603000000000000" pitchFamily="2" charset="0"/>
+                <a:cs typeface="CMU Serif Roman" panose="02000603000000000000" pitchFamily="2" charset="0"/>
               </a:rPr>
               <a:t>, A., Le, Q. V., &amp; Dean, J. (2022). </a:t>
             </a:r>
             <a:r>
-              <a:rPr lang="en-GB" i="1" dirty="0">
+              <a:rPr lang="en-GB" sz="1400" i="1" dirty="0">
                 <a:solidFill>
                   <a:schemeClr val="bg2">
                     <a:lumMod val="75000"/>
                   </a:schemeClr>
                 </a:solidFill>
+                <a:latin typeface="CMU SERIF ROMAN" panose="02000603000000000000" pitchFamily="2" charset="0"/>
+                <a:ea typeface="CMU SERIF ROMAN" panose="02000603000000000000" pitchFamily="2" charset="0"/>
+                <a:cs typeface="CMU SERIF ROMAN" panose="02000603000000000000" pitchFamily="2" charset="0"/>
               </a:rPr>
               <a:t>Emergent abilities of large language models</a:t>
             </a:r>
-            <a:endParaRPr lang="en-US" dirty="0">
+            <a:endParaRPr lang="en-US" sz="1400" dirty="0">
               <a:solidFill>
                 <a:schemeClr val="bg2">
                   <a:lumMod val="75000"/>
                 </a:schemeClr>
               </a:solidFill>
+              <a:latin typeface="CMU Serif Roman" panose="02000603000000000000" pitchFamily="2" charset="0"/>
+              <a:ea typeface="CMU Serif Roman" panose="02000603000000000000" pitchFamily="2" charset="0"/>
+              <a:cs typeface="CMU Serif Roman" panose="02000603000000000000" pitchFamily="2" charset="0"/>
             </a:endParaRPr>
           </a:p>
         </p:txBody>
@@ -15923,7 +16510,11 @@
           <a:lstStyle/>
           <a:p>
             <a:r>
-              <a:rPr lang="en-GB"/>
+              <a:rPr lang="en-GB">
+                <a:latin typeface="CMU Serif Roman" panose="02000603000000000000" pitchFamily="2" charset="0"/>
+                <a:ea typeface="CMU Serif Roman" panose="02000603000000000000" pitchFamily="2" charset="0"/>
+                <a:cs typeface="CMU Serif Roman" panose="02000603000000000000" pitchFamily="2" charset="0"/>
+              </a:rPr>
               <a:t>Overview</a:t>
             </a:r>
           </a:p>
@@ -15956,7 +16547,11 @@
               <a:buNone/>
             </a:pPr>
             <a:r>
-              <a:rPr lang="en-GB"/>
+              <a:rPr lang="en-GB">
+                <a:latin typeface="CMU Serif Roman" panose="02000603000000000000" pitchFamily="2" charset="0"/>
+                <a:ea typeface="CMU Serif Roman" panose="02000603000000000000" pitchFamily="2" charset="0"/>
+                <a:cs typeface="CMU Serif Roman" panose="02000603000000000000" pitchFamily="2" charset="0"/>
+              </a:rPr>
               <a:t>Neural networks</a:t>
             </a:r>
           </a:p>
@@ -15965,7 +16560,11 @@
               <a:buNone/>
             </a:pPr>
             <a:r>
-              <a:rPr lang="en-GB" err="1"/>
+              <a:rPr lang="en-GB" err="1">
+                <a:latin typeface="CMU Serif Roman" panose="02000603000000000000" pitchFamily="2" charset="0"/>
+                <a:ea typeface="CMU Serif Roman" panose="02000603000000000000" pitchFamily="2" charset="0"/>
+                <a:cs typeface="CMU Serif Roman" panose="02000603000000000000" pitchFamily="2" charset="0"/>
+              </a:rPr>
               <a:t>Softmax</a:t>
             </a:r>
           </a:p>
@@ -15974,7 +16573,11 @@
               <a:buNone/>
             </a:pPr>
             <a:r>
-              <a:rPr lang="en-GB"/>
+              <a:rPr lang="en-GB">
+                <a:latin typeface="CMU Serif Roman" panose="02000603000000000000" pitchFamily="2" charset="0"/>
+                <a:ea typeface="CMU Serif Roman" panose="02000603000000000000" pitchFamily="2" charset="0"/>
+                <a:cs typeface="CMU Serif Roman" panose="02000603000000000000" pitchFamily="2" charset="0"/>
+              </a:rPr>
               <a:t>Sampling methods</a:t>
             </a:r>
           </a:p>
@@ -15983,7 +16586,11 @@
               <a:buNone/>
             </a:pPr>
             <a:r>
-              <a:rPr lang="en-GB"/>
+              <a:rPr lang="en-GB">
+                <a:latin typeface="CMU Serif Roman" panose="02000603000000000000" pitchFamily="2" charset="0"/>
+                <a:ea typeface="CMU Serif Roman" panose="02000603000000000000" pitchFamily="2" charset="0"/>
+                <a:cs typeface="CMU Serif Roman" panose="02000603000000000000" pitchFamily="2" charset="0"/>
+              </a:rPr>
               <a:t>Training data</a:t>
             </a:r>
           </a:p>
@@ -15992,7 +16599,11 @@
               <a:buNone/>
             </a:pPr>
             <a:r>
-              <a:rPr lang="en-GB"/>
+              <a:rPr lang="en-GB">
+                <a:latin typeface="CMU Serif Roman" panose="02000603000000000000" pitchFamily="2" charset="0"/>
+                <a:ea typeface="CMU Serif Roman" panose="02000603000000000000" pitchFamily="2" charset="0"/>
+                <a:cs typeface="CMU Serif Roman" panose="02000603000000000000" pitchFamily="2" charset="0"/>
+              </a:rPr>
               <a:t>Scaling laws</a:t>
             </a:r>
           </a:p>
@@ -16000,7 +16611,11 @@
             <a:pPr marL="0" indent="0">
               <a:buNone/>
             </a:pPr>
-            <a:endParaRPr lang="en-GB"/>
+            <a:endParaRPr lang="en-GB">
+              <a:latin typeface="CMU Serif Roman" panose="02000603000000000000" pitchFamily="2" charset="0"/>
+              <a:ea typeface="CMU Serif Roman" panose="02000603000000000000" pitchFamily="2" charset="0"/>
+              <a:cs typeface="CMU Serif Roman" panose="02000603000000000000" pitchFamily="2" charset="0"/>
+            </a:endParaRPr>
           </a:p>
         </p:txBody>
       </p:sp>
@@ -16056,10 +16671,34 @@
           <a:lstStyle/>
           <a:p>
             <a:r>
-              <a:rPr lang="en-GB" dirty="0"/>
-              <a:t>From the last section</a:t>
-            </a:r>
-            <a:endParaRPr lang="en-US" dirty="0"/>
+              <a:rPr lang="en-GB" dirty="0">
+                <a:latin typeface="CMU Serif Roman" panose="02000603000000000000" pitchFamily="2" charset="0"/>
+                <a:ea typeface="CMU Serif Roman" panose="02000603000000000000" pitchFamily="2" charset="0"/>
+                <a:cs typeface="CMU Serif Roman" panose="02000603000000000000" pitchFamily="2" charset="0"/>
+              </a:rPr>
+              <a:t>From </a:t>
+            </a:r>
+            <a:r>
+              <a:rPr lang="en-GB" dirty="0">
+                <a:latin typeface="CMU Serif Roman" panose="02000603000000000000" pitchFamily="2" charset="0"/>
+                <a:ea typeface="CMU Serif Roman" panose="02000603000000000000" pitchFamily="2" charset="0"/>
+                <a:cs typeface="CMU Serif Roman" panose="02000603000000000000" pitchFamily="2" charset="0"/>
+              </a:rPr>
+              <a:t>the Last S</a:t>
+            </a:r>
+            <a:r>
+              <a:rPr lang="en-GB" dirty="0">
+                <a:latin typeface="CMU Serif Roman" panose="02000603000000000000" pitchFamily="2" charset="0"/>
+                <a:ea typeface="CMU Serif Roman" panose="02000603000000000000" pitchFamily="2" charset="0"/>
+                <a:cs typeface="CMU Serif Roman" panose="02000603000000000000" pitchFamily="2" charset="0"/>
+              </a:rPr>
+              <a:t>ection</a:t>
+            </a:r>
+            <a:endParaRPr lang="en-US" dirty="0">
+              <a:latin typeface="CMU Serif Roman" panose="02000603000000000000" pitchFamily="2" charset="0"/>
+              <a:ea typeface="CMU Serif Roman" panose="02000603000000000000" pitchFamily="2" charset="0"/>
+              <a:cs typeface="CMU Serif Roman" panose="02000603000000000000" pitchFamily="2" charset="0"/>
+            </a:endParaRPr>
           </a:p>
         </p:txBody>
       </p:sp>
@@ -16090,7 +16729,11 @@
               <a:buNone/>
             </a:pPr>
             <a:r>
-              <a:rPr lang="en-GB" dirty="0"/>
+              <a:rPr lang="en-GB" dirty="0">
+                <a:latin typeface="CMU Serif Roman" panose="02000603000000000000" pitchFamily="2" charset="0"/>
+                <a:ea typeface="CMU Serif Roman" panose="02000603000000000000" pitchFamily="2" charset="0"/>
+                <a:cs typeface="CMU Serif Roman" panose="02000603000000000000" pitchFamily="2" charset="0"/>
+              </a:rPr>
               <a:t>We got out of the model:</a:t>
             </a:r>
           </a:p>
@@ -16098,7 +16741,11 @@
             <a:pPr marL="0" indent="0">
               <a:buNone/>
             </a:pPr>
-            <a:endParaRPr lang="en-GB" dirty="0"/>
+            <a:endParaRPr lang="en-GB" dirty="0">
+              <a:latin typeface="CMU Serif Roman" panose="02000603000000000000" pitchFamily="2" charset="0"/>
+              <a:ea typeface="CMU Serif Roman" panose="02000603000000000000" pitchFamily="2" charset="0"/>
+              <a:cs typeface="CMU Serif Roman" panose="02000603000000000000" pitchFamily="2" charset="0"/>
+            </a:endParaRPr>
           </a:p>
           <a:p>
             <a:pPr marL="0" indent="0" algn="ctr">
@@ -16111,7 +16758,9 @@
                     <a:lumMod val="49000"/>
                   </a:schemeClr>
                 </a:solidFill>
-                <a:latin typeface="Consolas"/>
+                <a:latin typeface="CMU Serif Roman" panose="02000603000000000000" pitchFamily="2" charset="0"/>
+                <a:ea typeface="CMU Serif Roman" panose="02000603000000000000" pitchFamily="2" charset="0"/>
+                <a:cs typeface="CMU Serif Roman" panose="02000603000000000000" pitchFamily="2" charset="0"/>
               </a:rPr>
               <a:t>[</a:t>
             </a:r>
@@ -16122,7 +16771,9 @@
                     <a:lumMod val="49000"/>
                   </a:schemeClr>
                 </a:solidFill>
-                <a:latin typeface="Consolas"/>
+                <a:latin typeface="CMU Serif Roman" panose="02000603000000000000" pitchFamily="2" charset="0"/>
+                <a:ea typeface="CMU Serif Roman" panose="02000603000000000000" pitchFamily="2" charset="0"/>
+                <a:cs typeface="CMU Serif Roman" panose="02000603000000000000" pitchFamily="2" charset="0"/>
               </a:rPr>
               <a:t>sequence_length</a:t>
             </a:r>
@@ -16133,7 +16784,9 @@
                     <a:lumMod val="49000"/>
                   </a:schemeClr>
                 </a:solidFill>
-                <a:latin typeface="Consolas"/>
+                <a:latin typeface="CMU Serif Roman" panose="02000603000000000000" pitchFamily="2" charset="0"/>
+                <a:ea typeface="CMU Serif Roman" panose="02000603000000000000" pitchFamily="2" charset="0"/>
+                <a:cs typeface="CMU Serif Roman" panose="02000603000000000000" pitchFamily="2" charset="0"/>
               </a:rPr>
               <a:t>, </a:t>
             </a:r>
@@ -16144,7 +16797,9 @@
                     <a:lumMod val="49000"/>
                   </a:schemeClr>
                 </a:solidFill>
-                <a:latin typeface="Consolas"/>
+                <a:latin typeface="CMU Serif Roman" panose="02000603000000000000" pitchFamily="2" charset="0"/>
+                <a:ea typeface="CMU Serif Roman" panose="02000603000000000000" pitchFamily="2" charset="0"/>
+                <a:cs typeface="CMU Serif Roman" panose="02000603000000000000" pitchFamily="2" charset="0"/>
               </a:rPr>
               <a:t>embedding_dim</a:t>
             </a:r>
@@ -16155,30 +16810,33 @@
                     <a:lumMod val="49000"/>
                   </a:schemeClr>
                 </a:solidFill>
-                <a:latin typeface="Consolas"/>
+                <a:latin typeface="CMU Serif Roman" panose="02000603000000000000" pitchFamily="2" charset="0"/>
+                <a:ea typeface="CMU Serif Roman" panose="02000603000000000000" pitchFamily="2" charset="0"/>
+                <a:cs typeface="CMU Serif Roman" panose="02000603000000000000" pitchFamily="2" charset="0"/>
               </a:rPr>
               <a:t>]</a:t>
             </a:r>
-            <a:endParaRPr lang="en-GB" dirty="0">
-              <a:solidFill>
-                <a:schemeClr val="bg2">
-                  <a:lumMod val="49000"/>
-                </a:schemeClr>
-              </a:solidFill>
-            </a:endParaRPr>
           </a:p>
           <a:p>
             <a:pPr marL="0" indent="0">
               <a:buNone/>
             </a:pPr>
-            <a:endParaRPr lang="en-GB" dirty="0"/>
+            <a:endParaRPr lang="en-GB" dirty="0">
+              <a:latin typeface="CMU Serif Roman" panose="02000603000000000000" pitchFamily="2" charset="0"/>
+              <a:ea typeface="CMU Serif Roman" panose="02000603000000000000" pitchFamily="2" charset="0"/>
+              <a:cs typeface="CMU Serif Roman" panose="02000603000000000000" pitchFamily="2" charset="0"/>
+            </a:endParaRPr>
           </a:p>
           <a:p>
             <a:pPr marL="0" indent="0">
               <a:buNone/>
             </a:pPr>
             <a:r>
-              <a:rPr lang="en-GB" dirty="0"/>
+              <a:rPr lang="en-GB" dirty="0">
+                <a:latin typeface="CMU Serif Roman" panose="02000603000000000000" pitchFamily="2" charset="0"/>
+                <a:ea typeface="CMU Serif Roman" panose="02000603000000000000" pitchFamily="2" charset="0"/>
+                <a:cs typeface="CMU Serif Roman" panose="02000603000000000000" pitchFamily="2" charset="0"/>
+              </a:rPr>
               <a:t>Great... now what?</a:t>
             </a:r>
           </a:p>
@@ -16266,8 +16924,12 @@
           <a:lstStyle/>
           <a:p>
             <a:r>
-              <a:rPr lang="en-GB"/>
-              <a:t>Neural networks</a:t>
+              <a:rPr lang="en-GB" dirty="0">
+                <a:latin typeface="CMU Serif Roman" panose="02000603000000000000" pitchFamily="2" charset="0"/>
+                <a:ea typeface="CMU Serif Roman" panose="02000603000000000000" pitchFamily="2" charset="0"/>
+                <a:cs typeface="CMU Serif Roman" panose="02000603000000000000" pitchFamily="2" charset="0"/>
+              </a:rPr>
+              <a:t>Neural Networks</a:t>
             </a:r>
           </a:p>
         </p:txBody>
@@ -16317,7 +16979,7 @@
           <p:nvPr>
             <p:extLst>
               <p:ext uri="{D42A27DB-BD31-4B8C-83A1-F6EECF244321}">
-                <p14:modId xmlns:p14="http://schemas.microsoft.com/office/powerpoint/2010/main" val="3532471439"/>
+                <p14:modId xmlns:p14="http://schemas.microsoft.com/office/powerpoint/2010/main" val="2081951481"/>
               </p:ext>
             </p:extLst>
           </p:nvPr>
@@ -16560,6 +17222,9 @@
               <a:solidFill>
                 <a:schemeClr val="tx1"/>
               </a:solidFill>
+              <a:latin typeface="CMU Serif Roman" panose="02000603000000000000" pitchFamily="2" charset="0"/>
+              <a:ea typeface="CMU Serif Roman" panose="02000603000000000000" pitchFamily="2" charset="0"/>
+              <a:cs typeface="CMU Serif Roman" panose="02000603000000000000" pitchFamily="2" charset="0"/>
             </a:endParaRPr>
           </a:p>
         </p:txBody>
@@ -16597,7 +17262,11 @@
           <a:p>
             <a:pPr algn="l"/>
             <a:r>
-              <a:rPr lang="en-GB"/>
+              <a:rPr lang="en-GB">
+                <a:latin typeface="CMU Serif Roman" panose="02000603000000000000" pitchFamily="2" charset="0"/>
+                <a:ea typeface="CMU Serif Roman" panose="02000603000000000000" pitchFamily="2" charset="0"/>
+                <a:cs typeface="CMU Serif Roman" panose="02000603000000000000" pitchFamily="2" charset="0"/>
+              </a:rPr>
               <a:t>Unravel</a:t>
             </a:r>
           </a:p>
@@ -16618,7 +17287,7 @@
           <p:nvPr>
             <p:extLst>
               <p:ext uri="{D42A27DB-BD31-4B8C-83A1-F6EECF244321}">
-                <p14:modId xmlns:p14="http://schemas.microsoft.com/office/powerpoint/2010/main" val="2688549014"/>
+                <p14:modId xmlns:p14="http://schemas.microsoft.com/office/powerpoint/2010/main" val="3047365025"/>
               </p:ext>
             </p:extLst>
           </p:nvPr>
@@ -16807,6 +17476,9 @@
                 <a:solidFill>
                   <a:srgbClr val="7030A0"/>
                 </a:solidFill>
+                <a:latin typeface="CMU SERIF ROMAN" panose="02000603000000000000" pitchFamily="2" charset="0"/>
+                <a:ea typeface="CMU SERIF ROMAN" panose="02000603000000000000" pitchFamily="2" charset="0"/>
+                <a:cs typeface="CMU SERIF ROMAN" panose="02000603000000000000" pitchFamily="2" charset="0"/>
               </a:rPr>
               <a:t>dog-cat-goose classifier</a:t>
             </a:r>
@@ -16828,7 +17500,7 @@
           <p:nvPr>
             <p:extLst>
               <p:ext uri="{D42A27DB-BD31-4B8C-83A1-F6EECF244321}">
-                <p14:modId xmlns:p14="http://schemas.microsoft.com/office/powerpoint/2010/main" val="1166485309"/>
+                <p14:modId xmlns:p14="http://schemas.microsoft.com/office/powerpoint/2010/main" val="3116189328"/>
               </p:ext>
             </p:extLst>
           </p:nvPr>
@@ -17083,8 +17755,8 @@
           </a:fontRef>
         </p:style>
       </p:cxnSp>
-      <mc:AlternateContent xmlns:mc="http://schemas.openxmlformats.org/markup-compatibility/2006" xmlns:a14="http://schemas.microsoft.com/office/drawing/2010/main">
-        <mc:Choice Requires="a14">
+      <mc:AlternateContent xmlns:mc="http://schemas.openxmlformats.org/markup-compatibility/2006">
+        <mc:Choice xmlns:a14="http://schemas.microsoft.com/office/drawing/2010/main" Requires="a14">
           <p:sp>
             <p:nvSpPr>
               <p:cNvPr id="13" name="TextBox 12">
@@ -17114,7 +17786,11 @@
               <a:lstStyle/>
               <a:p>
                 <a:r>
-                  <a:rPr lang="en-GB" sz="2400" dirty="0"/>
+                  <a:rPr lang="en-GB" sz="2400" dirty="0">
+                    <a:latin typeface="CMU Serif Roman" panose="02000603000000000000" pitchFamily="2" charset="0"/>
+                    <a:ea typeface="CMU Serif Roman" panose="02000603000000000000" pitchFamily="2" charset="0"/>
+                    <a:cs typeface="CMU Serif Roman" panose="02000603000000000000" pitchFamily="2" charset="0"/>
+                  </a:rPr>
                   <a:t>Loss </a:t>
                 </a:r>
                 <a14:m>
@@ -17127,15 +17803,23 @@
                     </m:r>
                   </m:oMath>
                 </a14:m>
-                <a:endParaRPr lang="en-GB" sz="2400" b="0" dirty="0"/>
+                <a:endParaRPr lang="en-GB" sz="2400" b="0" dirty="0">
+                  <a:latin typeface="CMU Serif Roman" panose="02000603000000000000" pitchFamily="2" charset="0"/>
+                  <a:ea typeface="CMU Serif Roman" panose="02000603000000000000" pitchFamily="2" charset="0"/>
+                  <a:cs typeface="CMU Serif Roman" panose="02000603000000000000" pitchFamily="2" charset="0"/>
+                </a:endParaRPr>
               </a:p>
               <a:p>
-                <a:endParaRPr lang="en-US" sz="2400" dirty="0"/>
+                <a:endParaRPr lang="en-US" sz="2400" dirty="0">
+                  <a:latin typeface="CMU Serif Roman" panose="02000603000000000000" pitchFamily="2" charset="0"/>
+                  <a:ea typeface="CMU Serif Roman" panose="02000603000000000000" pitchFamily="2" charset="0"/>
+                  <a:cs typeface="CMU Serif Roman" panose="02000603000000000000" pitchFamily="2" charset="0"/>
+                </a:endParaRPr>
               </a:p>
             </p:txBody>
           </p:sp>
         </mc:Choice>
-        <mc:Fallback xmlns="">
+        <mc:Fallback>
           <p:sp>
             <p:nvSpPr>
               <p:cNvPr id="13" name="TextBox 12">
@@ -17257,13 +17941,25 @@
           <a:lstStyle/>
           <a:p>
             <a:r>
-              <a:rPr lang="en-GB" sz="2400" dirty="0"/>
+              <a:rPr lang="en-GB" sz="2400" dirty="0">
+                <a:latin typeface="CMU Serif Roman" panose="02000603000000000000" pitchFamily="2" charset="0"/>
+                <a:ea typeface="CMU Serif Roman" panose="02000603000000000000" pitchFamily="2" charset="0"/>
+                <a:cs typeface="CMU Serif Roman" panose="02000603000000000000" pitchFamily="2" charset="0"/>
+              </a:rPr>
               <a:t>Update parameters (backpropagation)</a:t>
             </a:r>
-            <a:endParaRPr lang="en-GB" sz="2400" b="0" dirty="0"/>
-          </a:p>
-          <a:p>
-            <a:endParaRPr lang="en-US" sz="2400" dirty="0"/>
+            <a:endParaRPr lang="en-GB" sz="2400" b="0" dirty="0">
+              <a:latin typeface="CMU Serif Roman" panose="02000603000000000000" pitchFamily="2" charset="0"/>
+              <a:ea typeface="CMU Serif Roman" panose="02000603000000000000" pitchFamily="2" charset="0"/>
+              <a:cs typeface="CMU Serif Roman" panose="02000603000000000000" pitchFamily="2" charset="0"/>
+            </a:endParaRPr>
+          </a:p>
+          <a:p>
+            <a:endParaRPr lang="en-US" sz="2400" dirty="0">
+              <a:latin typeface="CMU Serif Roman" panose="02000603000000000000" pitchFamily="2" charset="0"/>
+              <a:ea typeface="CMU Serif Roman" panose="02000603000000000000" pitchFamily="2" charset="0"/>
+              <a:cs typeface="CMU Serif Roman" panose="02000603000000000000" pitchFamily="2" charset="0"/>
+            </a:endParaRPr>
           </a:p>
         </p:txBody>
       </p:sp>
@@ -17859,8 +18555,12 @@
           <a:lstStyle/>
           <a:p>
             <a:r>
-              <a:rPr lang="en-GB"/>
-              <a:t>Neural networks</a:t>
+              <a:rPr lang="en-GB" dirty="0">
+                <a:latin typeface="CMU Serif Roman" panose="02000603000000000000" pitchFamily="2" charset="0"/>
+                <a:ea typeface="CMU Serif Roman" panose="02000603000000000000" pitchFamily="2" charset="0"/>
+                <a:cs typeface="CMU Serif Roman" panose="02000603000000000000" pitchFamily="2" charset="0"/>
+              </a:rPr>
+              <a:t>Neural Networks</a:t>
             </a:r>
           </a:p>
         </p:txBody>
@@ -18147,6 +18847,9 @@
               <a:solidFill>
                 <a:schemeClr val="tx1"/>
               </a:solidFill>
+              <a:latin typeface="CMU Serif Roman" panose="02000603000000000000" pitchFamily="2" charset="0"/>
+              <a:ea typeface="CMU Serif Roman" panose="02000603000000000000" pitchFamily="2" charset="0"/>
+              <a:cs typeface="CMU Serif Roman" panose="02000603000000000000" pitchFamily="2" charset="0"/>
             </a:endParaRPr>
           </a:p>
         </p:txBody>
@@ -18184,7 +18887,11 @@
           <a:p>
             <a:pPr algn="l"/>
             <a:r>
-              <a:rPr lang="en-GB"/>
+              <a:rPr lang="en-GB">
+                <a:latin typeface="CMU Serif Roman" panose="02000603000000000000" pitchFamily="2" charset="0"/>
+                <a:ea typeface="CMU Serif Roman" panose="02000603000000000000" pitchFamily="2" charset="0"/>
+                <a:cs typeface="CMU Serif Roman" panose="02000603000000000000" pitchFamily="2" charset="0"/>
+              </a:rPr>
               <a:t>Unravel</a:t>
             </a:r>
           </a:p>
@@ -18394,6 +19101,9 @@
                 <a:solidFill>
                   <a:srgbClr val="7030A0"/>
                 </a:solidFill>
+                <a:latin typeface="CMU SERIF ROMAN" panose="02000603000000000000" pitchFamily="2" charset="0"/>
+                <a:ea typeface="CMU SERIF ROMAN" panose="02000603000000000000" pitchFamily="2" charset="0"/>
+                <a:cs typeface="CMU SERIF ROMAN" panose="02000603000000000000" pitchFamily="2" charset="0"/>
               </a:rPr>
               <a:t>dog-cat-goose classifier</a:t>
             </a:r>
@@ -18527,16 +19237,29 @@
             <p:ph type="title"/>
           </p:nvPr>
         </p:nvSpPr>
-        <p:spPr/>
+        <p:spPr>
+          <a:xfrm>
+            <a:off x="838200" y="245781"/>
+            <a:ext cx="10515600" cy="1325563"/>
+          </a:xfrm>
+        </p:spPr>
         <p:txBody>
           <a:bodyPr/>
           <a:lstStyle/>
           <a:p>
             <a:r>
-              <a:rPr lang="en-GB"/>
-              <a:t>The language model</a:t>
-            </a:r>
-            <a:endParaRPr lang="en-US"/>
+              <a:rPr lang="en-GB" dirty="0">
+                <a:latin typeface="CMU Serif Roman" panose="02000603000000000000" pitchFamily="2" charset="0"/>
+                <a:ea typeface="CMU Serif Roman" panose="02000603000000000000" pitchFamily="2" charset="0"/>
+                <a:cs typeface="CMU Serif Roman" panose="02000603000000000000" pitchFamily="2" charset="0"/>
+              </a:rPr>
+              <a:t>The Language Model</a:t>
+            </a:r>
+            <a:endParaRPr lang="en-US" dirty="0">
+              <a:latin typeface="CMU Serif Roman" panose="02000603000000000000" pitchFamily="2" charset="0"/>
+              <a:ea typeface="CMU Serif Roman" panose="02000603000000000000" pitchFamily="2" charset="0"/>
+              <a:cs typeface="CMU Serif Roman" panose="02000603000000000000" pitchFamily="2" charset="0"/>
+            </a:endParaRPr>
           </a:p>
         </p:txBody>
       </p:sp>
@@ -18692,7 +19415,7 @@
                     <a:p>
                       <a:pPr algn="ctr"/>
                       <a:r>
-                        <a:rPr lang="en-GB"/>
+                        <a:rPr lang="en-GB" dirty="0"/>
                         <a:t>mat</a:t>
                       </a:r>
                     </a:p>
@@ -18702,452 +19425,6 @@
                 <a:extLst>
                   <a:ext uri="{0D108BD9-81ED-4DB2-BD59-A6C34878D82A}">
                     <a16:rowId xmlns:a16="http://schemas.microsoft.com/office/drawing/2014/main" val="9206449"/>
-                  </a:ext>
-                </a:extLst>
-              </a:tr>
-            </a:tbl>
-          </a:graphicData>
-        </a:graphic>
-      </p:graphicFrame>
-      <p:graphicFrame>
-        <p:nvGraphicFramePr>
-          <p:cNvPr id="11" name="Table 10">
-            <a:extLst>
-              <a:ext uri="{FF2B5EF4-FFF2-40B4-BE49-F238E27FC236}">
-                <a16:creationId xmlns:a16="http://schemas.microsoft.com/office/drawing/2014/main" id="{13A001EF-15A0-974A-FD9E-2D4519354426}"/>
-              </a:ext>
-            </a:extLst>
-          </p:cNvPr>
-          <p:cNvGraphicFramePr>
-            <a:graphicFrameLocks noGrp="1"/>
-          </p:cNvGraphicFramePr>
-          <p:nvPr>
-            <p:extLst>
-              <p:ext uri="{D42A27DB-BD31-4B8C-83A1-F6EECF244321}">
-                <p14:modId xmlns:p14="http://schemas.microsoft.com/office/powerpoint/2010/main" val="1945578768"/>
-              </p:ext>
-            </p:extLst>
-          </p:nvPr>
-        </p:nvGraphicFramePr>
-        <p:xfrm>
-          <a:off x="2240279" y="1474851"/>
-          <a:ext cx="810523" cy="4856168"/>
-        </p:xfrm>
-        <a:graphic>
-          <a:graphicData uri="http://schemas.openxmlformats.org/drawingml/2006/table">
-            <a:tbl>
-              <a:tblPr firstRow="1" bandRow="1">
-                <a:tableStyleId>{5940675A-B579-460E-94D1-54222C63F5DA}</a:tableStyleId>
-              </a:tblPr>
-              <a:tblGrid>
-                <a:gridCol w="810523">
-                  <a:extLst>
-                    <a:ext uri="{9D8B030D-6E8A-4147-A177-3AD203B41FA5}">
-                      <a16:colId xmlns:a16="http://schemas.microsoft.com/office/drawing/2014/main" val="2454851643"/>
-                    </a:ext>
-                  </a:extLst>
-                </a:gridCol>
-              </a:tblGrid>
-              <a:tr h="607021">
-                <a:tc>
-                  <a:txBody>
-                    <a:bodyPr/>
-                    <a:lstStyle/>
-                    <a:p>
-                      <a:pPr lvl="0" algn="ctr">
-                        <a:buNone/>
-                      </a:pPr>
-                      <a:r>
-                        <a:rPr lang="en-GB"/>
-                        <a:t>&lt;</a:t>
-                      </a:r>
-                      <a:r>
-                        <a:rPr lang="en-GB" err="1"/>
-                        <a:t>bos</a:t>
-                      </a:r>
-                      <a:r>
-                        <a:rPr lang="en-GB"/>
-                        <a:t>&gt;</a:t>
-                      </a:r>
-                    </a:p>
-                  </a:txBody>
-                  <a:tcPr anchor="ctr"/>
-                </a:tc>
-                <a:extLst>
-                  <a:ext uri="{0D108BD9-81ED-4DB2-BD59-A6C34878D82A}">
-                    <a16:rowId xmlns:a16="http://schemas.microsoft.com/office/drawing/2014/main" val="3065243534"/>
-                  </a:ext>
-                </a:extLst>
-              </a:tr>
-              <a:tr h="607021">
-                <a:tc>
-                  <a:txBody>
-                    <a:bodyPr/>
-                    <a:lstStyle/>
-                    <a:p>
-                      <a:pPr algn="ctr"/>
-                      <a:r>
-                        <a:rPr lang="en-GB"/>
-                        <a:t>the</a:t>
-                      </a:r>
-                    </a:p>
-                  </a:txBody>
-                  <a:tcPr anchor="ctr"/>
-                </a:tc>
-                <a:extLst>
-                  <a:ext uri="{0D108BD9-81ED-4DB2-BD59-A6C34878D82A}">
-                    <a16:rowId xmlns:a16="http://schemas.microsoft.com/office/drawing/2014/main" val="2485507878"/>
-                  </a:ext>
-                </a:extLst>
-              </a:tr>
-              <a:tr h="607021">
-                <a:tc>
-                  <a:txBody>
-                    <a:bodyPr/>
-                    <a:lstStyle/>
-                    <a:p>
-                      <a:pPr algn="ctr"/>
-                      <a:r>
-                        <a:rPr lang="en-GB"/>
-                        <a:t>cat</a:t>
-                      </a:r>
-                    </a:p>
-                  </a:txBody>
-                  <a:tcPr anchor="ctr"/>
-                </a:tc>
-                <a:extLst>
-                  <a:ext uri="{0D108BD9-81ED-4DB2-BD59-A6C34878D82A}">
-                    <a16:rowId xmlns:a16="http://schemas.microsoft.com/office/drawing/2014/main" val="1085572371"/>
-                  </a:ext>
-                </a:extLst>
-              </a:tr>
-              <a:tr h="607021">
-                <a:tc>
-                  <a:txBody>
-                    <a:bodyPr/>
-                    <a:lstStyle/>
-                    <a:p>
-                      <a:pPr algn="ctr"/>
-                      <a:r>
-                        <a:rPr lang="en-GB"/>
-                        <a:t>sat</a:t>
-                      </a:r>
-                    </a:p>
-                  </a:txBody>
-                  <a:tcPr anchor="ctr"/>
-                </a:tc>
-                <a:extLst>
-                  <a:ext uri="{0D108BD9-81ED-4DB2-BD59-A6C34878D82A}">
-                    <a16:rowId xmlns:a16="http://schemas.microsoft.com/office/drawing/2014/main" val="929817489"/>
-                  </a:ext>
-                </a:extLst>
-              </a:tr>
-              <a:tr h="607021">
-                <a:tc>
-                  <a:txBody>
-                    <a:bodyPr/>
-                    <a:lstStyle/>
-                    <a:p>
-                      <a:pPr algn="ctr"/>
-                      <a:r>
-                        <a:rPr lang="en-GB"/>
-                        <a:t>on</a:t>
-                      </a:r>
-                    </a:p>
-                  </a:txBody>
-                  <a:tcPr anchor="ctr"/>
-                </a:tc>
-                <a:extLst>
-                  <a:ext uri="{0D108BD9-81ED-4DB2-BD59-A6C34878D82A}">
-                    <a16:rowId xmlns:a16="http://schemas.microsoft.com/office/drawing/2014/main" val="4126606408"/>
-                  </a:ext>
-                </a:extLst>
-              </a:tr>
-              <a:tr h="607021">
-                <a:tc>
-                  <a:txBody>
-                    <a:bodyPr/>
-                    <a:lstStyle/>
-                    <a:p>
-                      <a:pPr algn="ctr"/>
-                      <a:r>
-                        <a:rPr lang="en-GB"/>
-                        <a:t>the</a:t>
-                      </a:r>
-                    </a:p>
-                  </a:txBody>
-                  <a:tcPr anchor="ctr"/>
-                </a:tc>
-                <a:extLst>
-                  <a:ext uri="{0D108BD9-81ED-4DB2-BD59-A6C34878D82A}">
-                    <a16:rowId xmlns:a16="http://schemas.microsoft.com/office/drawing/2014/main" val="2357326629"/>
-                  </a:ext>
-                </a:extLst>
-              </a:tr>
-              <a:tr h="607021">
-                <a:tc>
-                  <a:txBody>
-                    <a:bodyPr/>
-                    <a:lstStyle/>
-                    <a:p>
-                      <a:pPr algn="ctr"/>
-                      <a:r>
-                        <a:rPr lang="en-GB"/>
-                        <a:t>mat</a:t>
-                      </a:r>
-                    </a:p>
-                  </a:txBody>
-                  <a:tcPr anchor="ctr"/>
-                </a:tc>
-                <a:extLst>
-                  <a:ext uri="{0D108BD9-81ED-4DB2-BD59-A6C34878D82A}">
-                    <a16:rowId xmlns:a16="http://schemas.microsoft.com/office/drawing/2014/main" val="9206449"/>
-                  </a:ext>
-                </a:extLst>
-              </a:tr>
-              <a:tr h="607021">
-                <a:tc>
-                  <a:txBody>
-                    <a:bodyPr/>
-                    <a:lstStyle/>
-                    <a:p>
-                      <a:pPr lvl="0" algn="ctr">
-                        <a:buNone/>
-                      </a:pPr>
-                      <a:r>
-                        <a:rPr lang="en-GB"/>
-                        <a:t>&lt;</a:t>
-                      </a:r>
-                      <a:r>
-                        <a:rPr lang="en-GB" err="1"/>
-                        <a:t>eos</a:t>
-                      </a:r>
-                      <a:r>
-                        <a:rPr lang="en-GB"/>
-                        <a:t>&gt;</a:t>
-                      </a:r>
-                    </a:p>
-                  </a:txBody>
-                  <a:tcPr anchor="ctr"/>
-                </a:tc>
-                <a:extLst>
-                  <a:ext uri="{0D108BD9-81ED-4DB2-BD59-A6C34878D82A}">
-                    <a16:rowId xmlns:a16="http://schemas.microsoft.com/office/drawing/2014/main" val="132137533"/>
-                  </a:ext>
-                </a:extLst>
-              </a:tr>
-            </a:tbl>
-          </a:graphicData>
-        </a:graphic>
-      </p:graphicFrame>
-      <p:graphicFrame>
-        <p:nvGraphicFramePr>
-          <p:cNvPr id="12" name="Table 11">
-            <a:extLst>
-              <a:ext uri="{FF2B5EF4-FFF2-40B4-BE49-F238E27FC236}">
-                <a16:creationId xmlns:a16="http://schemas.microsoft.com/office/drawing/2014/main" id="{C413DBCA-0539-3208-76EB-98F3F6BC5A4B}"/>
-              </a:ext>
-            </a:extLst>
-          </p:cNvPr>
-          <p:cNvGraphicFramePr>
-            <a:graphicFrameLocks noGrp="1"/>
-          </p:cNvGraphicFramePr>
-          <p:nvPr>
-            <p:extLst>
-              <p:ext uri="{D42A27DB-BD31-4B8C-83A1-F6EECF244321}">
-                <p14:modId xmlns:p14="http://schemas.microsoft.com/office/powerpoint/2010/main" val="2065718645"/>
-              </p:ext>
-            </p:extLst>
-          </p:nvPr>
-        </p:nvGraphicFramePr>
-        <p:xfrm>
-          <a:off x="3802379" y="1474850"/>
-          <a:ext cx="810523" cy="4856168"/>
-        </p:xfrm>
-        <a:graphic>
-          <a:graphicData uri="http://schemas.openxmlformats.org/drawingml/2006/table">
-            <a:tbl>
-              <a:tblPr firstRow="1" bandRow="1">
-                <a:tableStyleId>{5940675A-B579-460E-94D1-54222C63F5DA}</a:tableStyleId>
-              </a:tblPr>
-              <a:tblGrid>
-                <a:gridCol w="810523">
-                  <a:extLst>
-                    <a:ext uri="{9D8B030D-6E8A-4147-A177-3AD203B41FA5}">
-                      <a16:colId xmlns:a16="http://schemas.microsoft.com/office/drawing/2014/main" val="2454851643"/>
-                    </a:ext>
-                  </a:extLst>
-                </a:gridCol>
-              </a:tblGrid>
-              <a:tr h="607021">
-                <a:tc>
-                  <a:txBody>
-                    <a:bodyPr/>
-                    <a:lstStyle/>
-                    <a:p>
-                      <a:pPr lvl="0" algn="ctr">
-                        <a:buNone/>
-                      </a:pPr>
-                      <a:r>
-                        <a:rPr lang="en-GB"/>
-                        <a:t>101</a:t>
-                      </a:r>
-                    </a:p>
-                  </a:txBody>
-                  <a:tcPr anchor="ctr"/>
-                </a:tc>
-                <a:extLst>
-                  <a:ext uri="{0D108BD9-81ED-4DB2-BD59-A6C34878D82A}">
-                    <a16:rowId xmlns:a16="http://schemas.microsoft.com/office/drawing/2014/main" val="3065243534"/>
-                  </a:ext>
-                </a:extLst>
-              </a:tr>
-              <a:tr h="607021">
-                <a:tc>
-                  <a:txBody>
-                    <a:bodyPr/>
-                    <a:lstStyle/>
-                    <a:p>
-                      <a:pPr algn="ctr"/>
-                      <a:r>
-                        <a:rPr lang="en-GB"/>
-                        <a:t>1996</a:t>
-                      </a:r>
-                    </a:p>
-                  </a:txBody>
-                  <a:tcPr anchor="ctr"/>
-                </a:tc>
-                <a:extLst>
-                  <a:ext uri="{0D108BD9-81ED-4DB2-BD59-A6C34878D82A}">
-                    <a16:rowId xmlns:a16="http://schemas.microsoft.com/office/drawing/2014/main" val="2485507878"/>
-                  </a:ext>
-                </a:extLst>
-              </a:tr>
-              <a:tr h="607021">
-                <a:tc>
-                  <a:txBody>
-                    <a:bodyPr/>
-                    <a:lstStyle/>
-                    <a:p>
-                      <a:pPr algn="ctr"/>
-                      <a:r>
-                        <a:rPr lang="en-GB"/>
-                        <a:t>4937</a:t>
-                      </a:r>
-                    </a:p>
-                  </a:txBody>
-                  <a:tcPr anchor="ctr"/>
-                </a:tc>
-                <a:extLst>
-                  <a:ext uri="{0D108BD9-81ED-4DB2-BD59-A6C34878D82A}">
-                    <a16:rowId xmlns:a16="http://schemas.microsoft.com/office/drawing/2014/main" val="1085572371"/>
-                  </a:ext>
-                </a:extLst>
-              </a:tr>
-              <a:tr h="607021">
-                <a:tc>
-                  <a:txBody>
-                    <a:bodyPr/>
-                    <a:lstStyle/>
-                    <a:p>
-                      <a:pPr algn="ctr"/>
-                      <a:r>
-                        <a:rPr lang="en-GB"/>
-                        <a:t>6583</a:t>
-                      </a:r>
-                    </a:p>
-                  </a:txBody>
-                  <a:tcPr anchor="ctr"/>
-                </a:tc>
-                <a:extLst>
-                  <a:ext uri="{0D108BD9-81ED-4DB2-BD59-A6C34878D82A}">
-                    <a16:rowId xmlns:a16="http://schemas.microsoft.com/office/drawing/2014/main" val="929817489"/>
-                  </a:ext>
-                </a:extLst>
-              </a:tr>
-              <a:tr h="607021">
-                <a:tc>
-                  <a:txBody>
-                    <a:bodyPr/>
-                    <a:lstStyle/>
-                    <a:p>
-                      <a:pPr algn="ctr"/>
-                      <a:r>
-                        <a:rPr lang="en-GB"/>
-                        <a:t>2006</a:t>
-                      </a:r>
-                    </a:p>
-                  </a:txBody>
-                  <a:tcPr anchor="ctr"/>
-                </a:tc>
-                <a:extLst>
-                  <a:ext uri="{0D108BD9-81ED-4DB2-BD59-A6C34878D82A}">
-                    <a16:rowId xmlns:a16="http://schemas.microsoft.com/office/drawing/2014/main" val="4126606408"/>
-                  </a:ext>
-                </a:extLst>
-              </a:tr>
-              <a:tr h="607021">
-                <a:tc>
-                  <a:txBody>
-                    <a:bodyPr/>
-                    <a:lstStyle/>
-                    <a:p>
-                      <a:pPr algn="ctr"/>
-                      <a:r>
-                        <a:rPr lang="en-GB"/>
-                        <a:t>1996</a:t>
-                      </a:r>
-                    </a:p>
-                  </a:txBody>
-                  <a:tcPr anchor="ctr"/>
-                </a:tc>
-                <a:extLst>
-                  <a:ext uri="{0D108BD9-81ED-4DB2-BD59-A6C34878D82A}">
-                    <a16:rowId xmlns:a16="http://schemas.microsoft.com/office/drawing/2014/main" val="2357326629"/>
-                  </a:ext>
-                </a:extLst>
-              </a:tr>
-              <a:tr h="607021">
-                <a:tc>
-                  <a:txBody>
-                    <a:bodyPr/>
-                    <a:lstStyle/>
-                    <a:p>
-                      <a:pPr algn="ctr"/>
-                      <a:r>
-                        <a:rPr lang="en-GB"/>
-                        <a:t>13523</a:t>
-                      </a:r>
-                    </a:p>
-                  </a:txBody>
-                  <a:tcPr anchor="ctr"/>
-                </a:tc>
-                <a:extLst>
-                  <a:ext uri="{0D108BD9-81ED-4DB2-BD59-A6C34878D82A}">
-                    <a16:rowId xmlns:a16="http://schemas.microsoft.com/office/drawing/2014/main" val="9206449"/>
-                  </a:ext>
-                </a:extLst>
-              </a:tr>
-              <a:tr h="607021">
-                <a:tc>
-                  <a:txBody>
-                    <a:bodyPr/>
-                    <a:lstStyle/>
-                    <a:p>
-                      <a:pPr lvl="0" algn="ctr">
-                        <a:buNone/>
-                      </a:pPr>
-                      <a:r>
-                        <a:rPr lang="en-GB"/>
-                        <a:t>102</a:t>
-                      </a:r>
-                    </a:p>
-                  </a:txBody>
-                  <a:tcPr anchor="ctr"/>
-                </a:tc>
-                <a:extLst>
-                  <a:ext uri="{0D108BD9-81ED-4DB2-BD59-A6C34878D82A}">
-                    <a16:rowId xmlns:a16="http://schemas.microsoft.com/office/drawing/2014/main" val="132137533"/>
                   </a:ext>
                 </a:extLst>
               </a:tr>
@@ -19677,6 +19954,678 @@
       </p:sp>
       <p:sp>
         <p:nvSpPr>
+          <p:cNvPr id="23" name="Arrow: Right 22">
+            <a:extLst>
+              <a:ext uri="{FF2B5EF4-FFF2-40B4-BE49-F238E27FC236}">
+                <a16:creationId xmlns:a16="http://schemas.microsoft.com/office/drawing/2014/main" id="{212CE7A2-B0B9-48FA-D3A6-E3E6934B96EA}"/>
+              </a:ext>
+            </a:extLst>
+          </p:cNvPr>
+          <p:cNvSpPr/>
+          <p:nvPr/>
+        </p:nvSpPr>
+        <p:spPr>
+          <a:xfrm>
+            <a:off x="6096757" y="3725676"/>
+            <a:ext cx="748408" cy="342751"/>
+          </a:xfrm>
+          <a:prstGeom prst="rightArrow">
+            <a:avLst/>
+          </a:prstGeom>
+          <a:solidFill>
+            <a:schemeClr val="bg2">
+              <a:lumMod val="75000"/>
+            </a:schemeClr>
+          </a:solidFill>
+          <a:ln>
+            <a:solidFill>
+              <a:schemeClr val="tx1">
+                <a:lumMod val="65000"/>
+                <a:lumOff val="35000"/>
+              </a:schemeClr>
+            </a:solidFill>
+          </a:ln>
+        </p:spPr>
+        <p:style>
+          <a:lnRef idx="2">
+            <a:schemeClr val="accent1">
+              <a:shade val="15000"/>
+            </a:schemeClr>
+          </a:lnRef>
+          <a:fillRef idx="1">
+            <a:schemeClr val="accent1"/>
+          </a:fillRef>
+          <a:effectRef idx="0">
+            <a:schemeClr val="accent1"/>
+          </a:effectRef>
+          <a:fontRef idx="minor">
+            <a:schemeClr val="lt1"/>
+          </a:fontRef>
+        </p:style>
+        <p:txBody>
+          <a:bodyPr rtlCol="0" anchor="ctr"/>
+          <a:lstStyle/>
+          <a:p>
+            <a:pPr algn="ctr"/>
+            <a:endParaRPr lang="en-GB"/>
+          </a:p>
+        </p:txBody>
+      </p:sp>
+      <p:sp>
+        <p:nvSpPr>
+          <p:cNvPr id="24" name="Arrow: Right 23">
+            <a:extLst>
+              <a:ext uri="{FF2B5EF4-FFF2-40B4-BE49-F238E27FC236}">
+                <a16:creationId xmlns:a16="http://schemas.microsoft.com/office/drawing/2014/main" id="{9BFDBCF9-63F7-DD86-7695-799A77FE0427}"/>
+              </a:ext>
+            </a:extLst>
+          </p:cNvPr>
+          <p:cNvSpPr/>
+          <p:nvPr/>
+        </p:nvSpPr>
+        <p:spPr>
+          <a:xfrm>
+            <a:off x="8782807" y="3725676"/>
+            <a:ext cx="748408" cy="342751"/>
+          </a:xfrm>
+          <a:prstGeom prst="rightArrow">
+            <a:avLst/>
+          </a:prstGeom>
+          <a:solidFill>
+            <a:schemeClr val="bg2">
+              <a:lumMod val="75000"/>
+            </a:schemeClr>
+          </a:solidFill>
+          <a:ln>
+            <a:solidFill>
+              <a:schemeClr val="tx1">
+                <a:lumMod val="65000"/>
+                <a:lumOff val="35000"/>
+              </a:schemeClr>
+            </a:solidFill>
+          </a:ln>
+        </p:spPr>
+        <p:style>
+          <a:lnRef idx="2">
+            <a:schemeClr val="accent1">
+              <a:shade val="15000"/>
+            </a:schemeClr>
+          </a:lnRef>
+          <a:fillRef idx="1">
+            <a:schemeClr val="accent1"/>
+          </a:fillRef>
+          <a:effectRef idx="0">
+            <a:schemeClr val="accent1"/>
+          </a:effectRef>
+          <a:fontRef idx="minor">
+            <a:schemeClr val="lt1"/>
+          </a:fontRef>
+        </p:style>
+        <p:txBody>
+          <a:bodyPr rtlCol="0" anchor="ctr"/>
+          <a:lstStyle/>
+          <a:p>
+            <a:pPr algn="ctr"/>
+            <a:endParaRPr lang="en-GB"/>
+          </a:p>
+        </p:txBody>
+      </p:sp>
+      <p:sp>
+        <p:nvSpPr>
+          <p:cNvPr id="26" name="Rectangle 25">
+            <a:extLst>
+              <a:ext uri="{FF2B5EF4-FFF2-40B4-BE49-F238E27FC236}">
+                <a16:creationId xmlns:a16="http://schemas.microsoft.com/office/drawing/2014/main" id="{9AACDD33-AD34-E457-B435-8917F7EB2D91}"/>
+              </a:ext>
+            </a:extLst>
+          </p:cNvPr>
+          <p:cNvSpPr/>
+          <p:nvPr/>
+        </p:nvSpPr>
+        <p:spPr>
+          <a:xfrm>
+            <a:off x="9475490" y="4218232"/>
+            <a:ext cx="1910749" cy="521300"/>
+          </a:xfrm>
+          <a:prstGeom prst="rect">
+            <a:avLst/>
+          </a:prstGeom>
+          <a:noFill/>
+          <a:ln w="28575">
+            <a:solidFill>
+              <a:srgbClr val="1B55EB"/>
+            </a:solidFill>
+          </a:ln>
+        </p:spPr>
+        <p:style>
+          <a:lnRef idx="2">
+            <a:schemeClr val="accent1">
+              <a:shade val="15000"/>
+            </a:schemeClr>
+          </a:lnRef>
+          <a:fillRef idx="1">
+            <a:schemeClr val="accent1"/>
+          </a:fillRef>
+          <a:effectRef idx="0">
+            <a:schemeClr val="accent1"/>
+          </a:effectRef>
+          <a:fontRef idx="minor">
+            <a:schemeClr val="lt1"/>
+          </a:fontRef>
+        </p:style>
+        <p:txBody>
+          <a:bodyPr rtlCol="0" anchor="ctr"/>
+          <a:lstStyle/>
+          <a:p>
+            <a:pPr algn="ctr"/>
+            <a:endParaRPr lang="en-GB"/>
+          </a:p>
+        </p:txBody>
+      </p:sp>
+      <p:sp>
+        <p:nvSpPr>
+          <p:cNvPr id="28" name="Arrow: Bent 27">
+            <a:extLst>
+              <a:ext uri="{FF2B5EF4-FFF2-40B4-BE49-F238E27FC236}">
+                <a16:creationId xmlns:a16="http://schemas.microsoft.com/office/drawing/2014/main" id="{1EB94B09-A333-CE43-1B39-D30837ECA6EB}"/>
+              </a:ext>
+            </a:extLst>
+          </p:cNvPr>
+          <p:cNvSpPr/>
+          <p:nvPr/>
+        </p:nvSpPr>
+        <p:spPr>
+          <a:xfrm rot="10800000">
+            <a:off x="6182521" y="4873765"/>
+            <a:ext cx="4337923" cy="687318"/>
+          </a:xfrm>
+          <a:prstGeom prst="bentArrow">
+            <a:avLst/>
+          </a:prstGeom>
+          <a:solidFill>
+            <a:srgbClr val="1B55EB"/>
+          </a:solidFill>
+          <a:ln>
+            <a:noFill/>
+          </a:ln>
+        </p:spPr>
+        <p:style>
+          <a:lnRef idx="2">
+            <a:schemeClr val="accent1">
+              <a:shade val="15000"/>
+            </a:schemeClr>
+          </a:lnRef>
+          <a:fillRef idx="1">
+            <a:schemeClr val="accent1"/>
+          </a:fillRef>
+          <a:effectRef idx="0">
+            <a:schemeClr val="accent1"/>
+          </a:effectRef>
+          <a:fontRef idx="minor">
+            <a:schemeClr val="lt1"/>
+          </a:fontRef>
+        </p:style>
+        <p:txBody>
+          <a:bodyPr rtlCol="0" anchor="ctr"/>
+          <a:lstStyle/>
+          <a:p>
+            <a:pPr algn="ctr"/>
+            <a:endParaRPr lang="en-GB">
+              <a:solidFill>
+                <a:schemeClr val="tx1"/>
+              </a:solidFill>
+            </a:endParaRPr>
+          </a:p>
+        </p:txBody>
+      </p:sp>
+      <p:graphicFrame>
+        <p:nvGraphicFramePr>
+          <p:cNvPr id="4" name="Table 3">
+            <a:extLst>
+              <a:ext uri="{FF2B5EF4-FFF2-40B4-BE49-F238E27FC236}">
+                <a16:creationId xmlns:a16="http://schemas.microsoft.com/office/drawing/2014/main" id="{9CA3A6CE-1A5B-3246-B2F5-9573F5BA3B3F}"/>
+              </a:ext>
+            </a:extLst>
+          </p:cNvPr>
+          <p:cNvGraphicFramePr>
+            <a:graphicFrameLocks noGrp="1"/>
+          </p:cNvGraphicFramePr>
+          <p:nvPr>
+            <p:extLst>
+              <p:ext uri="{D42A27DB-BD31-4B8C-83A1-F6EECF244321}">
+                <p14:modId xmlns:p14="http://schemas.microsoft.com/office/powerpoint/2010/main" val="4191412622"/>
+              </p:ext>
+            </p:extLst>
+          </p:nvPr>
+        </p:nvGraphicFramePr>
+        <p:xfrm>
+          <a:off x="2240279" y="1474851"/>
+          <a:ext cx="810523" cy="4551880"/>
+        </p:xfrm>
+        <a:graphic>
+          <a:graphicData uri="http://schemas.openxmlformats.org/drawingml/2006/table">
+            <a:tbl>
+              <a:tblPr firstRow="1" bandRow="1">
+                <a:tableStyleId>{5940675A-B579-460E-94D1-54222C63F5DA}</a:tableStyleId>
+              </a:tblPr>
+              <a:tblGrid>
+                <a:gridCol w="810523">
+                  <a:extLst>
+                    <a:ext uri="{9D8B030D-6E8A-4147-A177-3AD203B41FA5}">
+                      <a16:colId xmlns:a16="http://schemas.microsoft.com/office/drawing/2014/main" val="2454851643"/>
+                    </a:ext>
+                  </a:extLst>
+                </a:gridCol>
+              </a:tblGrid>
+              <a:tr h="568985">
+                <a:tc>
+                  <a:txBody>
+                    <a:bodyPr/>
+                    <a:lstStyle/>
+                    <a:p>
+                      <a:pPr lvl="0" algn="ctr">
+                        <a:buNone/>
+                      </a:pPr>
+                      <a:r>
+                        <a:rPr lang="en-GB"/>
+                        <a:t>&lt;</a:t>
+                      </a:r>
+                      <a:r>
+                        <a:rPr lang="en-GB" err="1"/>
+                        <a:t>bos</a:t>
+                      </a:r>
+                      <a:r>
+                        <a:rPr lang="en-GB"/>
+                        <a:t>&gt;</a:t>
+                      </a:r>
+                    </a:p>
+                  </a:txBody>
+                  <a:tcPr anchor="ctr"/>
+                </a:tc>
+                <a:extLst>
+                  <a:ext uri="{0D108BD9-81ED-4DB2-BD59-A6C34878D82A}">
+                    <a16:rowId xmlns:a16="http://schemas.microsoft.com/office/drawing/2014/main" val="3065243534"/>
+                  </a:ext>
+                </a:extLst>
+              </a:tr>
+              <a:tr h="568985">
+                <a:tc>
+                  <a:txBody>
+                    <a:bodyPr/>
+                    <a:lstStyle/>
+                    <a:p>
+                      <a:pPr algn="ctr"/>
+                      <a:r>
+                        <a:rPr lang="en-GB"/>
+                        <a:t>the</a:t>
+                      </a:r>
+                    </a:p>
+                  </a:txBody>
+                  <a:tcPr anchor="ctr"/>
+                </a:tc>
+                <a:extLst>
+                  <a:ext uri="{0D108BD9-81ED-4DB2-BD59-A6C34878D82A}">
+                    <a16:rowId xmlns:a16="http://schemas.microsoft.com/office/drawing/2014/main" val="2485507878"/>
+                  </a:ext>
+                </a:extLst>
+              </a:tr>
+              <a:tr h="568985">
+                <a:tc>
+                  <a:txBody>
+                    <a:bodyPr/>
+                    <a:lstStyle/>
+                    <a:p>
+                      <a:pPr algn="ctr"/>
+                      <a:r>
+                        <a:rPr lang="en-GB"/>
+                        <a:t>cat</a:t>
+                      </a:r>
+                    </a:p>
+                  </a:txBody>
+                  <a:tcPr anchor="ctr"/>
+                </a:tc>
+                <a:extLst>
+                  <a:ext uri="{0D108BD9-81ED-4DB2-BD59-A6C34878D82A}">
+                    <a16:rowId xmlns:a16="http://schemas.microsoft.com/office/drawing/2014/main" val="1085572371"/>
+                  </a:ext>
+                </a:extLst>
+              </a:tr>
+              <a:tr h="568985">
+                <a:tc>
+                  <a:txBody>
+                    <a:bodyPr/>
+                    <a:lstStyle/>
+                    <a:p>
+                      <a:pPr algn="ctr"/>
+                      <a:r>
+                        <a:rPr lang="en-GB"/>
+                        <a:t>sat</a:t>
+                      </a:r>
+                    </a:p>
+                  </a:txBody>
+                  <a:tcPr anchor="ctr"/>
+                </a:tc>
+                <a:extLst>
+                  <a:ext uri="{0D108BD9-81ED-4DB2-BD59-A6C34878D82A}">
+                    <a16:rowId xmlns:a16="http://schemas.microsoft.com/office/drawing/2014/main" val="929817489"/>
+                  </a:ext>
+                </a:extLst>
+              </a:tr>
+              <a:tr h="568985">
+                <a:tc>
+                  <a:txBody>
+                    <a:bodyPr/>
+                    <a:lstStyle/>
+                    <a:p>
+                      <a:pPr algn="ctr"/>
+                      <a:r>
+                        <a:rPr lang="en-GB"/>
+                        <a:t>on</a:t>
+                      </a:r>
+                    </a:p>
+                  </a:txBody>
+                  <a:tcPr anchor="ctr"/>
+                </a:tc>
+                <a:extLst>
+                  <a:ext uri="{0D108BD9-81ED-4DB2-BD59-A6C34878D82A}">
+                    <a16:rowId xmlns:a16="http://schemas.microsoft.com/office/drawing/2014/main" val="4126606408"/>
+                  </a:ext>
+                </a:extLst>
+              </a:tr>
+              <a:tr h="568985">
+                <a:tc>
+                  <a:txBody>
+                    <a:bodyPr/>
+                    <a:lstStyle/>
+                    <a:p>
+                      <a:pPr algn="ctr"/>
+                      <a:r>
+                        <a:rPr lang="en-GB"/>
+                        <a:t>the</a:t>
+                      </a:r>
+                    </a:p>
+                  </a:txBody>
+                  <a:tcPr anchor="ctr"/>
+                </a:tc>
+                <a:extLst>
+                  <a:ext uri="{0D108BD9-81ED-4DB2-BD59-A6C34878D82A}">
+                    <a16:rowId xmlns:a16="http://schemas.microsoft.com/office/drawing/2014/main" val="2357326629"/>
+                  </a:ext>
+                </a:extLst>
+              </a:tr>
+              <a:tr h="568985">
+                <a:tc>
+                  <a:txBody>
+                    <a:bodyPr/>
+                    <a:lstStyle/>
+                    <a:p>
+                      <a:pPr algn="ctr"/>
+                      <a:r>
+                        <a:rPr lang="en-GB" dirty="0"/>
+                        <a:t>mat</a:t>
+                      </a:r>
+                    </a:p>
+                  </a:txBody>
+                  <a:tcPr anchor="ctr"/>
+                </a:tc>
+                <a:extLst>
+                  <a:ext uri="{0D108BD9-81ED-4DB2-BD59-A6C34878D82A}">
+                    <a16:rowId xmlns:a16="http://schemas.microsoft.com/office/drawing/2014/main" val="9206449"/>
+                  </a:ext>
+                </a:extLst>
+              </a:tr>
+              <a:tr h="568985">
+                <a:tc>
+                  <a:txBody>
+                    <a:bodyPr/>
+                    <a:lstStyle/>
+                    <a:p>
+                      <a:pPr lvl="0" algn="ctr">
+                        <a:buNone/>
+                      </a:pPr>
+                      <a:r>
+                        <a:rPr lang="en-GB" dirty="0"/>
+                        <a:t>&lt;</a:t>
+                      </a:r>
+                      <a:r>
+                        <a:rPr lang="en-GB" dirty="0" err="1"/>
+                        <a:t>eos</a:t>
+                      </a:r>
+                      <a:r>
+                        <a:rPr lang="en-GB" dirty="0"/>
+                        <a:t>&gt;</a:t>
+                      </a:r>
+                    </a:p>
+                  </a:txBody>
+                  <a:tcPr anchor="ctr"/>
+                </a:tc>
+                <a:extLst>
+                  <a:ext uri="{0D108BD9-81ED-4DB2-BD59-A6C34878D82A}">
+                    <a16:rowId xmlns:a16="http://schemas.microsoft.com/office/drawing/2014/main" val="132137533"/>
+                  </a:ext>
+                </a:extLst>
+              </a:tr>
+            </a:tbl>
+          </a:graphicData>
+        </a:graphic>
+      </p:graphicFrame>
+      <p:graphicFrame>
+        <p:nvGraphicFramePr>
+          <p:cNvPr id="5" name="Table 4">
+            <a:extLst>
+              <a:ext uri="{FF2B5EF4-FFF2-40B4-BE49-F238E27FC236}">
+                <a16:creationId xmlns:a16="http://schemas.microsoft.com/office/drawing/2014/main" id="{0D188A77-C0D5-525F-04DB-D7CBACD2806D}"/>
+              </a:ext>
+            </a:extLst>
+          </p:cNvPr>
+          <p:cNvGraphicFramePr>
+            <a:graphicFrameLocks noGrp="1"/>
+          </p:cNvGraphicFramePr>
+          <p:nvPr>
+            <p:extLst>
+              <p:ext uri="{D42A27DB-BD31-4B8C-83A1-F6EECF244321}">
+                <p14:modId xmlns:p14="http://schemas.microsoft.com/office/powerpoint/2010/main" val="1496271324"/>
+              </p:ext>
+            </p:extLst>
+          </p:nvPr>
+        </p:nvGraphicFramePr>
+        <p:xfrm>
+          <a:off x="3802379" y="1474850"/>
+          <a:ext cx="810523" cy="4551880"/>
+        </p:xfrm>
+        <a:graphic>
+          <a:graphicData uri="http://schemas.openxmlformats.org/drawingml/2006/table">
+            <a:tbl>
+              <a:tblPr firstRow="1" bandRow="1">
+                <a:tableStyleId>{5940675A-B579-460E-94D1-54222C63F5DA}</a:tableStyleId>
+              </a:tblPr>
+              <a:tblGrid>
+                <a:gridCol w="810523">
+                  <a:extLst>
+                    <a:ext uri="{9D8B030D-6E8A-4147-A177-3AD203B41FA5}">
+                      <a16:colId xmlns:a16="http://schemas.microsoft.com/office/drawing/2014/main" val="2454851643"/>
+                    </a:ext>
+                  </a:extLst>
+                </a:gridCol>
+              </a:tblGrid>
+              <a:tr h="568985">
+                <a:tc>
+                  <a:txBody>
+                    <a:bodyPr/>
+                    <a:lstStyle/>
+                    <a:p>
+                      <a:pPr lvl="0" algn="ctr">
+                        <a:buNone/>
+                      </a:pPr>
+                      <a:r>
+                        <a:rPr lang="en-GB"/>
+                        <a:t>101</a:t>
+                      </a:r>
+                    </a:p>
+                  </a:txBody>
+                  <a:tcPr anchor="ctr"/>
+                </a:tc>
+                <a:extLst>
+                  <a:ext uri="{0D108BD9-81ED-4DB2-BD59-A6C34878D82A}">
+                    <a16:rowId xmlns:a16="http://schemas.microsoft.com/office/drawing/2014/main" val="3065243534"/>
+                  </a:ext>
+                </a:extLst>
+              </a:tr>
+              <a:tr h="568985">
+                <a:tc>
+                  <a:txBody>
+                    <a:bodyPr/>
+                    <a:lstStyle/>
+                    <a:p>
+                      <a:pPr algn="ctr"/>
+                      <a:r>
+                        <a:rPr lang="en-GB"/>
+                        <a:t>1996</a:t>
+                      </a:r>
+                    </a:p>
+                  </a:txBody>
+                  <a:tcPr anchor="ctr"/>
+                </a:tc>
+                <a:extLst>
+                  <a:ext uri="{0D108BD9-81ED-4DB2-BD59-A6C34878D82A}">
+                    <a16:rowId xmlns:a16="http://schemas.microsoft.com/office/drawing/2014/main" val="2485507878"/>
+                  </a:ext>
+                </a:extLst>
+              </a:tr>
+              <a:tr h="568985">
+                <a:tc>
+                  <a:txBody>
+                    <a:bodyPr/>
+                    <a:lstStyle/>
+                    <a:p>
+                      <a:pPr algn="ctr"/>
+                      <a:r>
+                        <a:rPr lang="en-GB"/>
+                        <a:t>4937</a:t>
+                      </a:r>
+                    </a:p>
+                  </a:txBody>
+                  <a:tcPr anchor="ctr"/>
+                </a:tc>
+                <a:extLst>
+                  <a:ext uri="{0D108BD9-81ED-4DB2-BD59-A6C34878D82A}">
+                    <a16:rowId xmlns:a16="http://schemas.microsoft.com/office/drawing/2014/main" val="1085572371"/>
+                  </a:ext>
+                </a:extLst>
+              </a:tr>
+              <a:tr h="568985">
+                <a:tc>
+                  <a:txBody>
+                    <a:bodyPr/>
+                    <a:lstStyle/>
+                    <a:p>
+                      <a:pPr algn="ctr"/>
+                      <a:r>
+                        <a:rPr lang="en-GB"/>
+                        <a:t>6583</a:t>
+                      </a:r>
+                    </a:p>
+                  </a:txBody>
+                  <a:tcPr anchor="ctr"/>
+                </a:tc>
+                <a:extLst>
+                  <a:ext uri="{0D108BD9-81ED-4DB2-BD59-A6C34878D82A}">
+                    <a16:rowId xmlns:a16="http://schemas.microsoft.com/office/drawing/2014/main" val="929817489"/>
+                  </a:ext>
+                </a:extLst>
+              </a:tr>
+              <a:tr h="568985">
+                <a:tc>
+                  <a:txBody>
+                    <a:bodyPr/>
+                    <a:lstStyle/>
+                    <a:p>
+                      <a:pPr algn="ctr"/>
+                      <a:r>
+                        <a:rPr lang="en-GB"/>
+                        <a:t>2006</a:t>
+                      </a:r>
+                    </a:p>
+                  </a:txBody>
+                  <a:tcPr anchor="ctr"/>
+                </a:tc>
+                <a:extLst>
+                  <a:ext uri="{0D108BD9-81ED-4DB2-BD59-A6C34878D82A}">
+                    <a16:rowId xmlns:a16="http://schemas.microsoft.com/office/drawing/2014/main" val="4126606408"/>
+                  </a:ext>
+                </a:extLst>
+              </a:tr>
+              <a:tr h="568985">
+                <a:tc>
+                  <a:txBody>
+                    <a:bodyPr/>
+                    <a:lstStyle/>
+                    <a:p>
+                      <a:pPr algn="ctr"/>
+                      <a:r>
+                        <a:rPr lang="en-GB"/>
+                        <a:t>1996</a:t>
+                      </a:r>
+                    </a:p>
+                  </a:txBody>
+                  <a:tcPr anchor="ctr"/>
+                </a:tc>
+                <a:extLst>
+                  <a:ext uri="{0D108BD9-81ED-4DB2-BD59-A6C34878D82A}">
+                    <a16:rowId xmlns:a16="http://schemas.microsoft.com/office/drawing/2014/main" val="2357326629"/>
+                  </a:ext>
+                </a:extLst>
+              </a:tr>
+              <a:tr h="568985">
+                <a:tc>
+                  <a:txBody>
+                    <a:bodyPr/>
+                    <a:lstStyle/>
+                    <a:p>
+                      <a:pPr algn="ctr"/>
+                      <a:r>
+                        <a:rPr lang="en-GB" dirty="0"/>
+                        <a:t>13523</a:t>
+                      </a:r>
+                    </a:p>
+                  </a:txBody>
+                  <a:tcPr anchor="ctr"/>
+                </a:tc>
+                <a:extLst>
+                  <a:ext uri="{0D108BD9-81ED-4DB2-BD59-A6C34878D82A}">
+                    <a16:rowId xmlns:a16="http://schemas.microsoft.com/office/drawing/2014/main" val="9206449"/>
+                  </a:ext>
+                </a:extLst>
+              </a:tr>
+              <a:tr h="568985">
+                <a:tc>
+                  <a:txBody>
+                    <a:bodyPr/>
+                    <a:lstStyle/>
+                    <a:p>
+                      <a:pPr lvl="0" algn="ctr">
+                        <a:buNone/>
+                      </a:pPr>
+                      <a:r>
+                        <a:rPr lang="en-GB" dirty="0"/>
+                        <a:t>102</a:t>
+                      </a:r>
+                    </a:p>
+                  </a:txBody>
+                  <a:tcPr anchor="ctr"/>
+                </a:tc>
+                <a:extLst>
+                  <a:ext uri="{0D108BD9-81ED-4DB2-BD59-A6C34878D82A}">
+                    <a16:rowId xmlns:a16="http://schemas.microsoft.com/office/drawing/2014/main" val="132137533"/>
+                  </a:ext>
+                </a:extLst>
+              </a:tr>
+            </a:tbl>
+          </a:graphicData>
+        </a:graphic>
+      </p:graphicFrame>
+      <p:sp>
+        <p:nvSpPr>
           <p:cNvPr id="20" name="Arrow: Right 19">
             <a:extLst>
               <a:ext uri="{FF2B5EF4-FFF2-40B4-BE49-F238E27FC236}">
@@ -19852,232 +20801,6 @@
           </a:p>
         </p:txBody>
       </p:sp>
-      <p:sp>
-        <p:nvSpPr>
-          <p:cNvPr id="23" name="Arrow: Right 22">
-            <a:extLst>
-              <a:ext uri="{FF2B5EF4-FFF2-40B4-BE49-F238E27FC236}">
-                <a16:creationId xmlns:a16="http://schemas.microsoft.com/office/drawing/2014/main" id="{212CE7A2-B0B9-48FA-D3A6-E3E6934B96EA}"/>
-              </a:ext>
-            </a:extLst>
-          </p:cNvPr>
-          <p:cNvSpPr/>
-          <p:nvPr/>
-        </p:nvSpPr>
-        <p:spPr>
-          <a:xfrm>
-            <a:off x="6096757" y="3725676"/>
-            <a:ext cx="748408" cy="342751"/>
-          </a:xfrm>
-          <a:prstGeom prst="rightArrow">
-            <a:avLst/>
-          </a:prstGeom>
-          <a:solidFill>
-            <a:schemeClr val="bg2">
-              <a:lumMod val="75000"/>
-            </a:schemeClr>
-          </a:solidFill>
-          <a:ln>
-            <a:solidFill>
-              <a:schemeClr val="tx1">
-                <a:lumMod val="65000"/>
-                <a:lumOff val="35000"/>
-              </a:schemeClr>
-            </a:solidFill>
-          </a:ln>
-        </p:spPr>
-        <p:style>
-          <a:lnRef idx="2">
-            <a:schemeClr val="accent1">
-              <a:shade val="15000"/>
-            </a:schemeClr>
-          </a:lnRef>
-          <a:fillRef idx="1">
-            <a:schemeClr val="accent1"/>
-          </a:fillRef>
-          <a:effectRef idx="0">
-            <a:schemeClr val="accent1"/>
-          </a:effectRef>
-          <a:fontRef idx="minor">
-            <a:schemeClr val="lt1"/>
-          </a:fontRef>
-        </p:style>
-        <p:txBody>
-          <a:bodyPr rtlCol="0" anchor="ctr"/>
-          <a:lstStyle/>
-          <a:p>
-            <a:pPr algn="ctr"/>
-            <a:endParaRPr lang="en-GB"/>
-          </a:p>
-        </p:txBody>
-      </p:sp>
-      <p:sp>
-        <p:nvSpPr>
-          <p:cNvPr id="24" name="Arrow: Right 23">
-            <a:extLst>
-              <a:ext uri="{FF2B5EF4-FFF2-40B4-BE49-F238E27FC236}">
-                <a16:creationId xmlns:a16="http://schemas.microsoft.com/office/drawing/2014/main" id="{9BFDBCF9-63F7-DD86-7695-799A77FE0427}"/>
-              </a:ext>
-            </a:extLst>
-          </p:cNvPr>
-          <p:cNvSpPr/>
-          <p:nvPr/>
-        </p:nvSpPr>
-        <p:spPr>
-          <a:xfrm>
-            <a:off x="8782807" y="3725676"/>
-            <a:ext cx="748408" cy="342751"/>
-          </a:xfrm>
-          <a:prstGeom prst="rightArrow">
-            <a:avLst/>
-          </a:prstGeom>
-          <a:solidFill>
-            <a:schemeClr val="bg2">
-              <a:lumMod val="75000"/>
-            </a:schemeClr>
-          </a:solidFill>
-          <a:ln>
-            <a:solidFill>
-              <a:schemeClr val="tx1">
-                <a:lumMod val="65000"/>
-                <a:lumOff val="35000"/>
-              </a:schemeClr>
-            </a:solidFill>
-          </a:ln>
-        </p:spPr>
-        <p:style>
-          <a:lnRef idx="2">
-            <a:schemeClr val="accent1">
-              <a:shade val="15000"/>
-            </a:schemeClr>
-          </a:lnRef>
-          <a:fillRef idx="1">
-            <a:schemeClr val="accent1"/>
-          </a:fillRef>
-          <a:effectRef idx="0">
-            <a:schemeClr val="accent1"/>
-          </a:effectRef>
-          <a:fontRef idx="minor">
-            <a:schemeClr val="lt1"/>
-          </a:fontRef>
-        </p:style>
-        <p:txBody>
-          <a:bodyPr rtlCol="0" anchor="ctr"/>
-          <a:lstStyle/>
-          <a:p>
-            <a:pPr algn="ctr"/>
-            <a:endParaRPr lang="en-GB"/>
-          </a:p>
-        </p:txBody>
-      </p:sp>
-      <p:sp>
-        <p:nvSpPr>
-          <p:cNvPr id="26" name="Rectangle 25">
-            <a:extLst>
-              <a:ext uri="{FF2B5EF4-FFF2-40B4-BE49-F238E27FC236}">
-                <a16:creationId xmlns:a16="http://schemas.microsoft.com/office/drawing/2014/main" id="{9AACDD33-AD34-E457-B435-8917F7EB2D91}"/>
-              </a:ext>
-            </a:extLst>
-          </p:cNvPr>
-          <p:cNvSpPr/>
-          <p:nvPr/>
-        </p:nvSpPr>
-        <p:spPr>
-          <a:xfrm>
-            <a:off x="9475490" y="4218232"/>
-            <a:ext cx="1910749" cy="521300"/>
-          </a:xfrm>
-          <a:prstGeom prst="rect">
-            <a:avLst/>
-          </a:prstGeom>
-          <a:noFill/>
-          <a:ln w="28575">
-            <a:solidFill>
-              <a:srgbClr val="C00000"/>
-            </a:solidFill>
-          </a:ln>
-        </p:spPr>
-        <p:style>
-          <a:lnRef idx="2">
-            <a:schemeClr val="accent1">
-              <a:shade val="15000"/>
-            </a:schemeClr>
-          </a:lnRef>
-          <a:fillRef idx="1">
-            <a:schemeClr val="accent1"/>
-          </a:fillRef>
-          <a:effectRef idx="0">
-            <a:schemeClr val="accent1"/>
-          </a:effectRef>
-          <a:fontRef idx="minor">
-            <a:schemeClr val="lt1"/>
-          </a:fontRef>
-        </p:style>
-        <p:txBody>
-          <a:bodyPr rtlCol="0" anchor="ctr"/>
-          <a:lstStyle/>
-          <a:p>
-            <a:pPr algn="ctr"/>
-            <a:endParaRPr lang="en-GB"/>
-          </a:p>
-        </p:txBody>
-      </p:sp>
-      <p:sp>
-        <p:nvSpPr>
-          <p:cNvPr id="28" name="Arrow: Bent 27">
-            <a:extLst>
-              <a:ext uri="{FF2B5EF4-FFF2-40B4-BE49-F238E27FC236}">
-                <a16:creationId xmlns:a16="http://schemas.microsoft.com/office/drawing/2014/main" id="{1EB94B09-A333-CE43-1B39-D30837ECA6EB}"/>
-              </a:ext>
-            </a:extLst>
-          </p:cNvPr>
-          <p:cNvSpPr/>
-          <p:nvPr/>
-        </p:nvSpPr>
-        <p:spPr>
-          <a:xfrm rot="10800000">
-            <a:off x="6182521" y="4873765"/>
-            <a:ext cx="4337923" cy="687318"/>
-          </a:xfrm>
-          <a:prstGeom prst="bentArrow">
-            <a:avLst/>
-          </a:prstGeom>
-          <a:solidFill>
-            <a:srgbClr val="C00000"/>
-          </a:solidFill>
-          <a:ln>
-            <a:noFill/>
-          </a:ln>
-        </p:spPr>
-        <p:style>
-          <a:lnRef idx="2">
-            <a:schemeClr val="accent1">
-              <a:shade val="15000"/>
-            </a:schemeClr>
-          </a:lnRef>
-          <a:fillRef idx="1">
-            <a:schemeClr val="accent1"/>
-          </a:fillRef>
-          <a:effectRef idx="0">
-            <a:schemeClr val="accent1"/>
-          </a:effectRef>
-          <a:fontRef idx="minor">
-            <a:schemeClr val="lt1"/>
-          </a:fontRef>
-        </p:style>
-        <p:txBody>
-          <a:bodyPr rtlCol="0" anchor="ctr"/>
-          <a:lstStyle/>
-          <a:p>
-            <a:pPr algn="ctr"/>
-            <a:endParaRPr lang="en-GB">
-              <a:solidFill>
-                <a:schemeClr val="tx1"/>
-              </a:solidFill>
-            </a:endParaRPr>
-          </a:p>
-        </p:txBody>
-      </p:sp>
     </p:spTree>
     <p:extLst>
       <p:ext uri="{BB962C8B-B14F-4D97-AF65-F5344CB8AC3E}">
@@ -20100,6 +20823,9 @@
                     <p:cTn id="3" fill="hold">
                       <p:stCondLst>
                         <p:cond delay="indefinite"/>
+                        <p:cond evt="onBegin" delay="0">
+                          <p:tn val="2"/>
+                        </p:cond>
                       </p:stCondLst>
                       <p:childTnLst>
                         <p:par>
@@ -20109,7 +20835,7 @@
                             </p:stCondLst>
                             <p:childTnLst>
                               <p:par>
-                                <p:cTn id="5" presetID="1" presetClass="entr" presetSubtype="0" fill="hold" nodeType="clickEffect">
+                                <p:cTn id="5" presetID="1" presetClass="entr" presetSubtype="0" fill="hold" grpId="0" nodeType="withEffect">
                                   <p:stCondLst>
                                     <p:cond delay="0"/>
                                   </p:stCondLst>
@@ -20122,7 +20848,7 @@
                                           </p:stCondLst>
                                         </p:cTn>
                                         <p:tgtEl>
-                                          <p:spTgt spid="11"/>
+                                          <p:spTgt spid="20"/>
                                         </p:tgtEl>
                                         <p:attrNameLst>
                                           <p:attrName>style.visibility</p:attrName>
@@ -20149,7 +20875,7 @@
                                           </p:stCondLst>
                                         </p:cTn>
                                         <p:tgtEl>
-                                          <p:spTgt spid="20"/>
+                                          <p:spTgt spid="21"/>
                                         </p:tgtEl>
                                         <p:attrNameLst>
                                           <p:attrName>style.visibility</p:attrName>
@@ -20194,7 +20920,7 @@
                                           </p:stCondLst>
                                         </p:cTn>
                                         <p:tgtEl>
-                                          <p:spTgt spid="12"/>
+                                          <p:spTgt spid="17"/>
                                         </p:tgtEl>
                                         <p:attrNameLst>
                                           <p:attrName>style.visibility</p:attrName>
@@ -20221,7 +20947,7 @@
                                           </p:stCondLst>
                                         </p:cTn>
                                         <p:tgtEl>
-                                          <p:spTgt spid="21"/>
+                                          <p:spTgt spid="22"/>
                                         </p:tgtEl>
                                         <p:attrNameLst>
                                           <p:attrName>style.visibility</p:attrName>
@@ -20266,7 +20992,7 @@
                                           </p:stCondLst>
                                         </p:cTn>
                                         <p:tgtEl>
-                                          <p:spTgt spid="17"/>
+                                          <p:spTgt spid="16"/>
                                         </p:tgtEl>
                                         <p:attrNameLst>
                                           <p:attrName>style.visibility</p:attrName>
@@ -20293,7 +21019,7 @@
                                           </p:stCondLst>
                                         </p:cTn>
                                         <p:tgtEl>
-                                          <p:spTgt spid="22"/>
+                                          <p:spTgt spid="23"/>
                                         </p:tgtEl>
                                         <p:attrNameLst>
                                           <p:attrName>style.visibility</p:attrName>
@@ -20338,7 +21064,7 @@
                                           </p:stCondLst>
                                         </p:cTn>
                                         <p:tgtEl>
-                                          <p:spTgt spid="16"/>
+                                          <p:spTgt spid="15"/>
                                         </p:tgtEl>
                                         <p:attrNameLst>
                                           <p:attrName>style.visibility</p:attrName>
@@ -20365,78 +21091,6 @@
                                           </p:stCondLst>
                                         </p:cTn>
                                         <p:tgtEl>
-                                          <p:spTgt spid="23"/>
-                                        </p:tgtEl>
-                                        <p:attrNameLst>
-                                          <p:attrName>style.visibility</p:attrName>
-                                        </p:attrNameLst>
-                                      </p:cBhvr>
-                                      <p:to>
-                                        <p:strVal val="visible"/>
-                                      </p:to>
-                                    </p:set>
-                                  </p:childTnLst>
-                                </p:cTn>
-                              </p:par>
-                            </p:childTnLst>
-                          </p:cTn>
-                        </p:par>
-                      </p:childTnLst>
-                    </p:cTn>
-                  </p:par>
-                  <p:par>
-                    <p:cTn id="27" fill="hold">
-                      <p:stCondLst>
-                        <p:cond delay="indefinite"/>
-                      </p:stCondLst>
-                      <p:childTnLst>
-                        <p:par>
-                          <p:cTn id="28" fill="hold">
-                            <p:stCondLst>
-                              <p:cond delay="0"/>
-                            </p:stCondLst>
-                            <p:childTnLst>
-                              <p:par>
-                                <p:cTn id="29" presetID="1" presetClass="entr" presetSubtype="0" fill="hold" nodeType="clickEffect">
-                                  <p:stCondLst>
-                                    <p:cond delay="0"/>
-                                  </p:stCondLst>
-                                  <p:childTnLst>
-                                    <p:set>
-                                      <p:cBhvr>
-                                        <p:cTn id="30" dur="1" fill="hold">
-                                          <p:stCondLst>
-                                            <p:cond delay="0"/>
-                                          </p:stCondLst>
-                                        </p:cTn>
-                                        <p:tgtEl>
-                                          <p:spTgt spid="15"/>
-                                        </p:tgtEl>
-                                        <p:attrNameLst>
-                                          <p:attrName>style.visibility</p:attrName>
-                                        </p:attrNameLst>
-                                      </p:cBhvr>
-                                      <p:to>
-                                        <p:strVal val="visible"/>
-                                      </p:to>
-                                    </p:set>
-                                  </p:childTnLst>
-                                </p:cTn>
-                              </p:par>
-                              <p:par>
-                                <p:cTn id="31" presetID="1" presetClass="entr" presetSubtype="0" fill="hold" grpId="0" nodeType="withEffect">
-                                  <p:stCondLst>
-                                    <p:cond delay="0"/>
-                                  </p:stCondLst>
-                                  <p:childTnLst>
-                                    <p:set>
-                                      <p:cBhvr>
-                                        <p:cTn id="32" dur="1" fill="hold">
-                                          <p:stCondLst>
-                                            <p:cond delay="0"/>
-                                          </p:stCondLst>
-                                        </p:cTn>
-                                        <p:tgtEl>
                                           <p:spTgt spid="19"/>
                                         </p:tgtEl>
                                         <p:attrNameLst>
@@ -20451,14 +21105,14 @@
                                 </p:cTn>
                               </p:par>
                               <p:par>
-                                <p:cTn id="33" presetID="1" presetClass="entr" presetSubtype="0" fill="hold" nodeType="withEffect">
+                                <p:cTn id="27" presetID="1" presetClass="entr" presetSubtype="0" fill="hold" nodeType="withEffect">
                                   <p:stCondLst>
                                     <p:cond delay="0"/>
                                   </p:stCondLst>
                                   <p:childTnLst>
                                     <p:set>
                                       <p:cBhvr>
-                                        <p:cTn id="34" dur="1" fill="hold">
+                                        <p:cTn id="28" dur="1" fill="hold">
                                           <p:stCondLst>
                                             <p:cond delay="0"/>
                                           </p:stCondLst>
@@ -20478,14 +21132,14 @@
                                 </p:cTn>
                               </p:par>
                               <p:par>
-                                <p:cTn id="35" presetID="1" presetClass="entr" presetSubtype="0" fill="hold" grpId="0" nodeType="withEffect">
+                                <p:cTn id="29" presetID="1" presetClass="entr" presetSubtype="0" fill="hold" grpId="0" nodeType="withEffect">
                                   <p:stCondLst>
                                     <p:cond delay="0"/>
                                   </p:stCondLst>
                                   <p:childTnLst>
                                     <p:set>
                                       <p:cBhvr>
-                                        <p:cTn id="36" dur="1" fill="hold">
+                                        <p:cTn id="30" dur="1" fill="hold">
                                           <p:stCondLst>
                                             <p:cond delay="0"/>
                                           </p:stCondLst>
@@ -20511,26 +21165,26 @@
                     </p:cTn>
                   </p:par>
                   <p:par>
-                    <p:cTn id="37" fill="hold">
+                    <p:cTn id="31" fill="hold">
                       <p:stCondLst>
                         <p:cond delay="indefinite"/>
                       </p:stCondLst>
                       <p:childTnLst>
                         <p:par>
-                          <p:cTn id="38" fill="hold">
+                          <p:cTn id="32" fill="hold">
                             <p:stCondLst>
                               <p:cond delay="0"/>
                             </p:stCondLst>
                             <p:childTnLst>
                               <p:par>
-                                <p:cTn id="39" presetID="1" presetClass="entr" presetSubtype="0" fill="hold" grpId="0" nodeType="clickEffect">
+                                <p:cTn id="33" presetID="1" presetClass="entr" presetSubtype="0" fill="hold" grpId="0" nodeType="clickEffect">
                                   <p:stCondLst>
                                     <p:cond delay="0"/>
                                   </p:stCondLst>
                                   <p:childTnLst>
                                     <p:set>
                                       <p:cBhvr>
-                                        <p:cTn id="40" dur="1" fill="hold">
+                                        <p:cTn id="34" dur="1" fill="hold">
                                           <p:stCondLst>
                                             <p:cond delay="0"/>
                                           </p:stCondLst>
@@ -20550,14 +21204,14 @@
                                 </p:cTn>
                               </p:par>
                               <p:par>
-                                <p:cTn id="41" presetID="1" presetClass="entr" presetSubtype="0" fill="hold" grpId="0" nodeType="withEffect">
+                                <p:cTn id="35" presetID="1" presetClass="entr" presetSubtype="0" fill="hold" grpId="0" nodeType="withEffect">
                                   <p:stCondLst>
                                     <p:cond delay="0"/>
                                   </p:stCondLst>
                                   <p:childTnLst>
                                     <p:set>
                                       <p:cBhvr>
-                                        <p:cTn id="42" dur="1" fill="hold">
+                                        <p:cTn id="36" dur="1" fill="hold">
                                           <p:stCondLst>
                                             <p:cond delay="0"/>
                                           </p:stCondLst>
@@ -20605,13 +21259,13 @@
     </p:tnLst>
     <p:bldLst>
       <p:bldP spid="19" grpId="0"/>
-      <p:bldP spid="20" grpId="0" animBg="1"/>
-      <p:bldP spid="21" grpId="0" animBg="1"/>
-      <p:bldP spid="22" grpId="0" animBg="1"/>
       <p:bldP spid="23" grpId="0" animBg="1"/>
       <p:bldP spid="24" grpId="0" animBg="1"/>
       <p:bldP spid="26" grpId="0" animBg="1"/>
       <p:bldP spid="28" grpId="0" animBg="1"/>
+      <p:bldP spid="20" grpId="0" animBg="1"/>
+      <p:bldP spid="21" grpId="0" animBg="1"/>
+      <p:bldP spid="22" grpId="0" animBg="1"/>
     </p:bldLst>
   </p:timing>
 </p:sld>
@@ -20640,35 +21294,6 @@
           <a:chExt cx="0" cy="0"/>
         </a:xfrm>
       </p:grpSpPr>
-      <p:sp>
-        <p:nvSpPr>
-          <p:cNvPr id="2" name="Title 1">
-            <a:extLst>
-              <a:ext uri="{FF2B5EF4-FFF2-40B4-BE49-F238E27FC236}">
-                <a16:creationId xmlns:a16="http://schemas.microsoft.com/office/drawing/2014/main" id="{D5A96B15-1A80-2EFF-42A1-B82D19E34754}"/>
-              </a:ext>
-            </a:extLst>
-          </p:cNvPr>
-          <p:cNvSpPr>
-            <a:spLocks noGrp="1"/>
-          </p:cNvSpPr>
-          <p:nvPr>
-            <p:ph type="title"/>
-          </p:nvPr>
-        </p:nvSpPr>
-        <p:spPr/>
-        <p:txBody>
-          <a:bodyPr/>
-          <a:lstStyle/>
-          <a:p>
-            <a:r>
-              <a:rPr lang="en-GB"/>
-              <a:t>The language model</a:t>
-            </a:r>
-            <a:endParaRPr lang="en-US"/>
-          </a:p>
-        </p:txBody>
-      </p:sp>
       <p:graphicFrame>
         <p:nvGraphicFramePr>
           <p:cNvPr id="3" name="Table 2">
@@ -20844,11 +21469,17 @@
           <p:cNvGraphicFramePr>
             <a:graphicFrameLocks noGrp="1"/>
           </p:cNvGraphicFramePr>
-          <p:nvPr/>
+          <p:nvPr>
+            <p:extLst>
+              <p:ext uri="{D42A27DB-BD31-4B8C-83A1-F6EECF244321}">
+                <p14:modId xmlns:p14="http://schemas.microsoft.com/office/powerpoint/2010/main" val="3992695996"/>
+              </p:ext>
+            </p:extLst>
+          </p:nvPr>
         </p:nvGraphicFramePr>
         <p:xfrm>
           <a:off x="2240279" y="1474851"/>
-          <a:ext cx="810523" cy="4856168"/>
+          <a:ext cx="810523" cy="4551880"/>
         </p:xfrm>
         <a:graphic>
           <a:graphicData uri="http://schemas.openxmlformats.org/drawingml/2006/table">
@@ -20865,7 +21496,7 @@
                   </a:extLst>
                 </a:gridCol>
               </a:tblGrid>
-              <a:tr h="607021">
+              <a:tr h="568985">
                 <a:tc>
                   <a:txBody>
                     <a:bodyPr/>
@@ -20896,7 +21527,7 @@
                   </a:ext>
                 </a:extLst>
               </a:tr>
-              <a:tr h="607021">
+              <a:tr h="568985">
                 <a:tc>
                   <a:txBody>
                     <a:bodyPr/>
@@ -20917,7 +21548,7 @@
                   </a:ext>
                 </a:extLst>
               </a:tr>
-              <a:tr h="607021">
+              <a:tr h="568985">
                 <a:tc>
                   <a:txBody>
                     <a:bodyPr/>
@@ -20938,7 +21569,7 @@
                   </a:ext>
                 </a:extLst>
               </a:tr>
-              <a:tr h="607021">
+              <a:tr h="568985">
                 <a:tc>
                   <a:txBody>
                     <a:bodyPr/>
@@ -20959,7 +21590,7 @@
                   </a:ext>
                 </a:extLst>
               </a:tr>
-              <a:tr h="607021">
+              <a:tr h="568985">
                 <a:tc>
                   <a:txBody>
                     <a:bodyPr/>
@@ -20980,7 +21611,7 @@
                   </a:ext>
                 </a:extLst>
               </a:tr>
-              <a:tr h="607021">
+              <a:tr h="568985">
                 <a:tc>
                   <a:txBody>
                     <a:bodyPr/>
@@ -21001,7 +21632,7 @@
                   </a:ext>
                 </a:extLst>
               </a:tr>
-              <a:tr h="607021">
+              <a:tr h="568985">
                 <a:tc>
                   <a:txBody>
                     <a:bodyPr/>
@@ -21009,7 +21640,7 @@
                     <a:p>
                       <a:pPr algn="ctr"/>
                       <a:r>
-                        <a:rPr lang="en-GB"/>
+                        <a:rPr lang="en-GB" dirty="0"/>
                         <a:t>mat</a:t>
                       </a:r>
                     </a:p>
@@ -21022,7 +21653,7 @@
                   </a:ext>
                 </a:extLst>
               </a:tr>
-              <a:tr h="607021">
+              <a:tr h="568985">
                 <a:tc>
                   <a:txBody>
                     <a:bodyPr/>
@@ -21032,15 +21663,15 @@
                         <a:buNone/>
                       </a:pPr>
                       <a:r>
-                        <a:rPr lang="en-GB"/>
+                        <a:rPr lang="en-GB" dirty="0"/>
                         <a:t>&lt;</a:t>
                       </a:r>
                       <a:r>
-                        <a:rPr lang="en-GB" err="1"/>
+                        <a:rPr lang="en-GB" dirty="0" err="1"/>
                         <a:t>eos</a:t>
                       </a:r>
                       <a:r>
-                        <a:rPr lang="en-GB"/>
+                        <a:rPr lang="en-GB" dirty="0"/>
                         <a:t>&gt;</a:t>
                       </a:r>
                     </a:p>
@@ -21069,11 +21700,17 @@
           <p:cNvGraphicFramePr>
             <a:graphicFrameLocks noGrp="1"/>
           </p:cNvGraphicFramePr>
-          <p:nvPr/>
+          <p:nvPr>
+            <p:extLst>
+              <p:ext uri="{D42A27DB-BD31-4B8C-83A1-F6EECF244321}">
+                <p14:modId xmlns:p14="http://schemas.microsoft.com/office/powerpoint/2010/main" val="3158691457"/>
+              </p:ext>
+            </p:extLst>
+          </p:nvPr>
         </p:nvGraphicFramePr>
         <p:xfrm>
           <a:off x="3802379" y="1474850"/>
-          <a:ext cx="810523" cy="4856168"/>
+          <a:ext cx="810523" cy="4551880"/>
         </p:xfrm>
         <a:graphic>
           <a:graphicData uri="http://schemas.openxmlformats.org/drawingml/2006/table">
@@ -21090,7 +21727,7 @@
                   </a:extLst>
                 </a:gridCol>
               </a:tblGrid>
-              <a:tr h="607021">
+              <a:tr h="568985">
                 <a:tc>
                   <a:txBody>
                     <a:bodyPr/>
@@ -21113,7 +21750,7 @@
                   </a:ext>
                 </a:extLst>
               </a:tr>
-              <a:tr h="607021">
+              <a:tr h="568985">
                 <a:tc>
                   <a:txBody>
                     <a:bodyPr/>
@@ -21134,7 +21771,7 @@
                   </a:ext>
                 </a:extLst>
               </a:tr>
-              <a:tr h="607021">
+              <a:tr h="568985">
                 <a:tc>
                   <a:txBody>
                     <a:bodyPr/>
@@ -21155,7 +21792,7 @@
                   </a:ext>
                 </a:extLst>
               </a:tr>
-              <a:tr h="607021">
+              <a:tr h="568985">
                 <a:tc>
                   <a:txBody>
                     <a:bodyPr/>
@@ -21176,7 +21813,7 @@
                   </a:ext>
                 </a:extLst>
               </a:tr>
-              <a:tr h="607021">
+              <a:tr h="568985">
                 <a:tc>
                   <a:txBody>
                     <a:bodyPr/>
@@ -21197,7 +21834,7 @@
                   </a:ext>
                 </a:extLst>
               </a:tr>
-              <a:tr h="607021">
+              <a:tr h="568985">
                 <a:tc>
                   <a:txBody>
                     <a:bodyPr/>
@@ -21218,7 +21855,7 @@
                   </a:ext>
                 </a:extLst>
               </a:tr>
-              <a:tr h="607021">
+              <a:tr h="568985">
                 <a:tc>
                   <a:txBody>
                     <a:bodyPr/>
@@ -21226,7 +21863,7 @@
                     <a:p>
                       <a:pPr algn="ctr"/>
                       <a:r>
-                        <a:rPr lang="en-GB"/>
+                        <a:rPr lang="en-GB" dirty="0"/>
                         <a:t>13523</a:t>
                       </a:r>
                     </a:p>
@@ -21239,7 +21876,7 @@
                   </a:ext>
                 </a:extLst>
               </a:tr>
-              <a:tr h="607021">
+              <a:tr h="568985">
                 <a:tc>
                   <a:txBody>
                     <a:bodyPr/>
@@ -21249,7 +21886,7 @@
                         <a:buNone/>
                       </a:pPr>
                       <a:r>
-                        <a:rPr lang="en-GB"/>
+                        <a:rPr lang="en-GB" dirty="0"/>
                         <a:t>102</a:t>
                       </a:r>
                     </a:p>
@@ -21561,14 +22198,14 @@
           <p:nvPr>
             <p:extLst>
               <p:ext uri="{D42A27DB-BD31-4B8C-83A1-F6EECF244321}">
-                <p14:modId xmlns:p14="http://schemas.microsoft.com/office/powerpoint/2010/main" val="1802923423"/>
+                <p14:modId xmlns:p14="http://schemas.microsoft.com/office/powerpoint/2010/main" val="1983335042"/>
               </p:ext>
             </p:extLst>
           </p:nvPr>
         </p:nvGraphicFramePr>
         <p:xfrm>
           <a:off x="5288279" y="1474850"/>
-          <a:ext cx="810523" cy="4856168"/>
+          <a:ext cx="810523" cy="4551880"/>
         </p:xfrm>
         <a:graphic>
           <a:graphicData uri="http://schemas.openxmlformats.org/drawingml/2006/table">
@@ -21585,7 +22222,7 @@
                   </a:extLst>
                 </a:gridCol>
               </a:tblGrid>
-              <a:tr h="607021">
+              <a:tr h="568985">
                 <a:tc>
                   <a:txBody>
                     <a:bodyPr/>
@@ -21608,7 +22245,7 @@
                   </a:ext>
                 </a:extLst>
               </a:tr>
-              <a:tr h="607021">
+              <a:tr h="568985">
                 <a:tc>
                   <a:txBody>
                     <a:bodyPr/>
@@ -21629,7 +22266,7 @@
                   </a:ext>
                 </a:extLst>
               </a:tr>
-              <a:tr h="607021">
+              <a:tr h="568985">
                 <a:tc>
                   <a:txBody>
                     <a:bodyPr/>
@@ -21650,7 +22287,7 @@
                   </a:ext>
                 </a:extLst>
               </a:tr>
-              <a:tr h="607021">
+              <a:tr h="568985">
                 <a:tc>
                   <a:txBody>
                     <a:bodyPr/>
@@ -21671,7 +22308,7 @@
                   </a:ext>
                 </a:extLst>
               </a:tr>
-              <a:tr h="607021">
+              <a:tr h="568985">
                 <a:tc>
                   <a:txBody>
                     <a:bodyPr/>
@@ -21692,7 +22329,7 @@
                   </a:ext>
                 </a:extLst>
               </a:tr>
-              <a:tr h="607021">
+              <a:tr h="568985">
                 <a:tc>
                   <a:txBody>
                     <a:bodyPr/>
@@ -21713,7 +22350,7 @@
                   </a:ext>
                 </a:extLst>
               </a:tr>
-              <a:tr h="607021">
+              <a:tr h="568985">
                 <a:tc>
                   <a:txBody>
                     <a:bodyPr/>
@@ -21736,7 +22373,7 @@
                   </a:ext>
                 </a:extLst>
               </a:tr>
-              <a:tr h="607021">
+              <a:tr h="568985">
                 <a:tc>
                   <a:txBody>
                     <a:bodyPr/>
@@ -21746,7 +22383,7 @@
                         <a:buNone/>
                       </a:pPr>
                       <a:r>
-                        <a:rPr lang="en-GB"/>
+                        <a:rPr lang="en-GB" dirty="0"/>
                         <a:t>?</a:t>
                       </a:r>
                     </a:p>
@@ -22109,6 +22746,77 @@
           <a:p>
             <a:pPr algn="ctr"/>
             <a:endParaRPr lang="en-GB"/>
+          </a:p>
+        </p:txBody>
+      </p:sp>
+      <p:sp>
+        <p:nvSpPr>
+          <p:cNvPr id="6" name="Title 1">
+            <a:extLst>
+              <a:ext uri="{FF2B5EF4-FFF2-40B4-BE49-F238E27FC236}">
+                <a16:creationId xmlns:a16="http://schemas.microsoft.com/office/drawing/2014/main" id="{141720AC-A1A0-3080-0D26-D529FD2EE542}"/>
+              </a:ext>
+            </a:extLst>
+          </p:cNvPr>
+          <p:cNvSpPr txBox="1">
+            <a:spLocks/>
+          </p:cNvSpPr>
+          <p:nvPr/>
+        </p:nvSpPr>
+        <p:spPr>
+          <a:xfrm>
+            <a:off x="838200" y="245781"/>
+            <a:ext cx="10515600" cy="1325563"/>
+          </a:xfrm>
+          <a:prstGeom prst="rect">
+            <a:avLst/>
+          </a:prstGeom>
+        </p:spPr>
+        <p:txBody>
+          <a:bodyPr vert="horz" lIns="91440" tIns="45720" rIns="91440" bIns="45720" rtlCol="0" anchor="ctr">
+            <a:normAutofit/>
+          </a:bodyPr>
+          <a:lstStyle>
+            <a:lvl1pPr algn="l" defTabSz="914400" rtl="0" eaLnBrk="1" latinLnBrk="0" hangingPunct="1">
+              <a:lnSpc>
+                <a:spcPct val="90000"/>
+              </a:lnSpc>
+              <a:spcBef>
+                <a:spcPct val="0"/>
+              </a:spcBef>
+              <a:buNone/>
+              <a:defRPr sz="4400" kern="1200">
+                <a:solidFill>
+                  <a:schemeClr val="tx1"/>
+                </a:solidFill>
+                <a:latin typeface="+mj-lt"/>
+                <a:ea typeface="+mj-ea"/>
+                <a:cs typeface="+mj-cs"/>
+              </a:defRPr>
+            </a:lvl1pPr>
+          </a:lstStyle>
+          <a:p>
+            <a:r>
+              <a:rPr lang="en-GB">
+                <a:latin typeface="CMU Serif Roman" panose="02000603000000000000" pitchFamily="2" charset="0"/>
+                <a:ea typeface="CMU Serif Roman" panose="02000603000000000000" pitchFamily="2" charset="0"/>
+                <a:cs typeface="CMU Serif Roman" panose="02000603000000000000" pitchFamily="2" charset="0"/>
+              </a:rPr>
+              <a:t>The </a:t>
+            </a:r>
+            <a:r>
+              <a:rPr lang="en-GB">
+                <a:latin typeface="CMU Serif Roman" panose="02000603000000000000" pitchFamily="2" charset="0"/>
+                <a:ea typeface="CMU Serif Roman" panose="02000603000000000000" pitchFamily="2" charset="0"/>
+                <a:cs typeface="CMU Serif Roman" panose="02000603000000000000" pitchFamily="2" charset="0"/>
+              </a:rPr>
+              <a:t>Language Model</a:t>
+            </a:r>
+            <a:endParaRPr lang="en-US" dirty="0">
+              <a:latin typeface="CMU Serif Roman" panose="02000603000000000000" pitchFamily="2" charset="0"/>
+              <a:ea typeface="CMU Serif Roman" panose="02000603000000000000" pitchFamily="2" charset="0"/>
+              <a:cs typeface="CMU Serif Roman" panose="02000603000000000000" pitchFamily="2" charset="0"/>
+            </a:endParaRPr>
           </a:p>
         </p:txBody>
       </p:sp>

--- a/slides/flsg/6-sampling-flsg.pptx
+++ b/slides/flsg/6-sampling-flsg.pptx
@@ -1527,58 +1527,7 @@
           <a:bodyPr/>
           <a:lstStyle/>
           <a:p>
-            <a:r>
-              <a:rPr lang="en-US" dirty="0"/>
-              <a:t>[TIMINGS]</a:t>
-            </a:r>
-          </a:p>
-          <a:p>
             <a:endParaRPr lang="en-US" dirty="0"/>
-          </a:p>
-          <a:p>
-            <a:r>
-              <a:rPr lang="en-US" dirty="0"/>
-              <a:t>Practice: 40m</a:t>
-            </a:r>
-          </a:p>
-          <a:p>
-            <a:r>
-              <a:rPr lang="en-US" dirty="0"/>
-              <a:t>Target: 45m</a:t>
-            </a:r>
-          </a:p>
-          <a:p>
-            <a:endParaRPr lang="en-US" dirty="0"/>
-          </a:p>
-          <a:p>
-            <a:r>
-              <a:rPr lang="en-US" dirty="0"/>
-              <a:t>Start time: 14:45</a:t>
-            </a:r>
-          </a:p>
-          <a:p>
-            <a:r>
-              <a:rPr lang="en-US" dirty="0"/>
-              <a:t>End time: 15:00</a:t>
-            </a:r>
-          </a:p>
-          <a:p>
-            <a:r>
-              <a:rPr lang="en-US" dirty="0"/>
-              <a:t>(BREAK UNTIL 15:30)</a:t>
-            </a:r>
-          </a:p>
-          <a:p>
-            <a:r>
-              <a:rPr lang="en-US" dirty="0"/>
-              <a:t>Finish time: 16:00</a:t>
-            </a:r>
-          </a:p>
-          <a:p>
-            <a:r>
-              <a:rPr lang="en-US" dirty="0"/>
-              <a:t>---</a:t>
-            </a:r>
           </a:p>
         </p:txBody>
       </p:sp>
@@ -6973,11 +6922,6 @@
               </a:rPr>
               <a:t>The Final Operation</a:t>
             </a:r>
-            <a:endParaRPr lang="en-GB" dirty="0">
-              <a:latin typeface="CMU Serif Roman" panose="02000603000000000000" pitchFamily="2" charset="0"/>
-              <a:ea typeface="CMU Serif Roman" panose="02000603000000000000" pitchFamily="2" charset="0"/>
-              <a:cs typeface="CMU Serif Roman" panose="02000603000000000000" pitchFamily="2" charset="0"/>
-            </a:endParaRPr>
           </a:p>
         </p:txBody>
       </p:sp>
@@ -16676,23 +16620,7 @@
                 <a:ea typeface="CMU Serif Roman" panose="02000603000000000000" pitchFamily="2" charset="0"/>
                 <a:cs typeface="CMU Serif Roman" panose="02000603000000000000" pitchFamily="2" charset="0"/>
               </a:rPr>
-              <a:t>From </a:t>
-            </a:r>
-            <a:r>
-              <a:rPr lang="en-GB" dirty="0">
-                <a:latin typeface="CMU Serif Roman" panose="02000603000000000000" pitchFamily="2" charset="0"/>
-                <a:ea typeface="CMU Serif Roman" panose="02000603000000000000" pitchFamily="2" charset="0"/>
-                <a:cs typeface="CMU Serif Roman" panose="02000603000000000000" pitchFamily="2" charset="0"/>
-              </a:rPr>
-              <a:t>the Last S</a:t>
-            </a:r>
-            <a:r>
-              <a:rPr lang="en-GB" dirty="0">
-                <a:latin typeface="CMU Serif Roman" panose="02000603000000000000" pitchFamily="2" charset="0"/>
-                <a:ea typeface="CMU Serif Roman" panose="02000603000000000000" pitchFamily="2" charset="0"/>
-                <a:cs typeface="CMU Serif Roman" panose="02000603000000000000" pitchFamily="2" charset="0"/>
-              </a:rPr>
-              <a:t>ection</a:t>
+              <a:t>From the Last Section</a:t>
             </a:r>
             <a:endParaRPr lang="en-US" dirty="0">
               <a:latin typeface="CMU Serif Roman" panose="02000603000000000000" pitchFamily="2" charset="0"/>
@@ -16734,23 +16662,8 @@
                 <a:ea typeface="CMU Serif Roman" panose="02000603000000000000" pitchFamily="2" charset="0"/>
                 <a:cs typeface="CMU Serif Roman" panose="02000603000000000000" pitchFamily="2" charset="0"/>
               </a:rPr>
-              <a:t>We got out of the model:</a:t>
-            </a:r>
-          </a:p>
-          <a:p>
-            <a:pPr marL="0" indent="0">
-              <a:buNone/>
-            </a:pPr>
-            <a:endParaRPr lang="en-GB" dirty="0">
-              <a:latin typeface="CMU Serif Roman" panose="02000603000000000000" pitchFamily="2" charset="0"/>
-              <a:ea typeface="CMU Serif Roman" panose="02000603000000000000" pitchFamily="2" charset="0"/>
-              <a:cs typeface="CMU Serif Roman" panose="02000603000000000000" pitchFamily="2" charset="0"/>
-            </a:endParaRPr>
-          </a:p>
-          <a:p>
-            <a:pPr marL="0" indent="0" algn="ctr">
-              <a:buNone/>
-            </a:pPr>
+              <a:t>We got out of the model: </a:t>
+            </a:r>
             <a:r>
               <a:rPr lang="en-GB" dirty="0">
                 <a:solidFill>
@@ -16831,6 +16744,56 @@
             <a:pPr marL="0" indent="0">
               <a:buNone/>
             </a:pPr>
+            <a:endParaRPr lang="en-GB" dirty="0">
+              <a:latin typeface="CMU Serif Roman" panose="02000603000000000000" pitchFamily="2" charset="0"/>
+              <a:ea typeface="CMU Serif Roman" panose="02000603000000000000" pitchFamily="2" charset="0"/>
+              <a:cs typeface="CMU Serif Roman" panose="02000603000000000000" pitchFamily="2" charset="0"/>
+            </a:endParaRPr>
+          </a:p>
+          <a:p>
+            <a:pPr marL="0" indent="0">
+              <a:buNone/>
+            </a:pPr>
+            <a:endParaRPr lang="en-GB" dirty="0">
+              <a:latin typeface="CMU Serif Roman" panose="02000603000000000000" pitchFamily="2" charset="0"/>
+              <a:ea typeface="CMU Serif Roman" panose="02000603000000000000" pitchFamily="2" charset="0"/>
+              <a:cs typeface="CMU Serif Roman" panose="02000603000000000000" pitchFamily="2" charset="0"/>
+            </a:endParaRPr>
+          </a:p>
+          <a:p>
+            <a:pPr marL="0" indent="0">
+              <a:buNone/>
+            </a:pPr>
+            <a:endParaRPr lang="en-GB" dirty="0">
+              <a:latin typeface="CMU Serif Roman" panose="02000603000000000000" pitchFamily="2" charset="0"/>
+              <a:ea typeface="CMU Serif Roman" panose="02000603000000000000" pitchFamily="2" charset="0"/>
+              <a:cs typeface="CMU Serif Roman" panose="02000603000000000000" pitchFamily="2" charset="0"/>
+            </a:endParaRPr>
+          </a:p>
+          <a:p>
+            <a:pPr marL="0" indent="0">
+              <a:buNone/>
+            </a:pPr>
+            <a:endParaRPr lang="en-GB" dirty="0">
+              <a:latin typeface="CMU Serif Roman" panose="02000603000000000000" pitchFamily="2" charset="0"/>
+              <a:ea typeface="CMU Serif Roman" panose="02000603000000000000" pitchFamily="2" charset="0"/>
+              <a:cs typeface="CMU Serif Roman" panose="02000603000000000000" pitchFamily="2" charset="0"/>
+            </a:endParaRPr>
+          </a:p>
+          <a:p>
+            <a:pPr marL="0" indent="0">
+              <a:buNone/>
+            </a:pPr>
+            <a:endParaRPr lang="en-GB" dirty="0">
+              <a:latin typeface="CMU Serif Roman" panose="02000603000000000000" pitchFamily="2" charset="0"/>
+              <a:ea typeface="CMU Serif Roman" panose="02000603000000000000" pitchFamily="2" charset="0"/>
+              <a:cs typeface="CMU Serif Roman" panose="02000603000000000000" pitchFamily="2" charset="0"/>
+            </a:endParaRPr>
+          </a:p>
+          <a:p>
+            <a:pPr marL="0" indent="0">
+              <a:buNone/>
+            </a:pPr>
             <a:r>
               <a:rPr lang="en-GB" dirty="0">
                 <a:latin typeface="CMU Serif Roman" panose="02000603000000000000" pitchFamily="2" charset="0"/>
@@ -16842,6 +16805,546 @@
           </a:p>
         </p:txBody>
       </p:sp>
+      <mc:AlternateContent xmlns:mc="http://schemas.openxmlformats.org/markup-compatibility/2006">
+        <mc:Choice xmlns:a14="http://schemas.microsoft.com/office/drawing/2010/main" Requires="a14">
+          <p:sp>
+            <p:nvSpPr>
+              <p:cNvPr id="4" name="TextBox 3">
+                <a:extLst>
+                  <a:ext uri="{FF2B5EF4-FFF2-40B4-BE49-F238E27FC236}">
+                    <a16:creationId xmlns:a16="http://schemas.microsoft.com/office/drawing/2014/main" id="{9DD721F7-5D5D-31BA-BFBD-298AAA5F3AEE}"/>
+                  </a:ext>
+                </a:extLst>
+              </p:cNvPr>
+              <p:cNvSpPr txBox="1"/>
+              <p:nvPr/>
+            </p:nvSpPr>
+            <p:spPr>
+              <a:xfrm>
+                <a:off x="4526811" y="3313537"/>
+                <a:ext cx="3138378" cy="1139414"/>
+              </a:xfrm>
+              <a:prstGeom prst="rect">
+                <a:avLst/>
+              </a:prstGeom>
+              <a:noFill/>
+            </p:spPr>
+            <p:txBody>
+              <a:bodyPr wrap="square" lIns="0" tIns="0" rIns="0" bIns="0" rtlCol="0">
+                <a:spAutoFit/>
+              </a:bodyPr>
+              <a:lstStyle/>
+              <a:p>
+                <a14:m>
+                  <m:oMathPara xmlns:m="http://schemas.openxmlformats.org/officeDocument/2006/math">
+                    <m:oMathParaPr>
+                      <m:jc m:val="centerGroup"/>
+                    </m:oMathParaPr>
+                    <m:oMath xmlns:m="http://schemas.openxmlformats.org/officeDocument/2006/math">
+                      <m:d>
+                        <m:dPr>
+                          <m:begChr m:val="["/>
+                          <m:endChr m:val="]"/>
+                          <m:ctrlPr>
+                            <a:rPr lang="en-US" sz="2800" i="1" smtClean="0">
+                              <a:latin typeface="Cambria Math" panose="02040503050406030204" pitchFamily="18" charset="0"/>
+                            </a:rPr>
+                          </m:ctrlPr>
+                        </m:dPr>
+                        <m:e>
+                          <m:m>
+                            <m:mPr>
+                              <m:mcs>
+                                <m:mc>
+                                  <m:mcPr>
+                                    <m:count m:val="3"/>
+                                    <m:mcJc m:val="center"/>
+                                  </m:mcPr>
+                                </m:mc>
+                              </m:mcs>
+                              <m:ctrlPr>
+                                <a:rPr lang="en-US" sz="2800" i="1" smtClean="0">
+                                  <a:latin typeface="Cambria Math" panose="02040503050406030204" pitchFamily="18" charset="0"/>
+                                </a:rPr>
+                              </m:ctrlPr>
+                            </m:mPr>
+                            <m:mr>
+                              <m:e>
+                                <m:r>
+                                  <m:rPr>
+                                    <m:brk m:alnAt="7"/>
+                                  </m:rPr>
+                                  <a:rPr lang="en-GB" sz="2800" b="0" i="1" smtClean="0">
+                                    <a:latin typeface="Cambria Math" panose="02040503050406030204" pitchFamily="18" charset="0"/>
+                                  </a:rPr>
+                                  <m:t>2.7</m:t>
+                                </m:r>
+                              </m:e>
+                              <m:e>
+                                <m:r>
+                                  <a:rPr lang="en-US" sz="2800" i="1" smtClean="0">
+                                    <a:latin typeface="Cambria Math" panose="02040503050406030204" pitchFamily="18" charset="0"/>
+                                  </a:rPr>
+                                  <m:t>⋯</m:t>
+                                </m:r>
+                              </m:e>
+                              <m:e>
+                                <m:r>
+                                  <a:rPr lang="en-GB" sz="2800" b="0" i="1" smtClean="0">
+                                    <a:latin typeface="Cambria Math" panose="02040503050406030204" pitchFamily="18" charset="0"/>
+                                  </a:rPr>
+                                  <m:t>-1.2</m:t>
+                                </m:r>
+                              </m:e>
+                            </m:mr>
+                            <m:mr>
+                              <m:e>
+                                <m:r>
+                                  <a:rPr lang="en-US" sz="2800" i="1" smtClean="0">
+                                    <a:latin typeface="Cambria Math" panose="02040503050406030204" pitchFamily="18" charset="0"/>
+                                  </a:rPr>
+                                  <m:t>⋮</m:t>
+                                </m:r>
+                              </m:e>
+                              <m:e>
+                                <m:r>
+                                  <a:rPr lang="en-US" sz="2800" i="1" smtClean="0">
+                                    <a:latin typeface="Cambria Math" panose="02040503050406030204" pitchFamily="18" charset="0"/>
+                                  </a:rPr>
+                                  <m:t>⋱</m:t>
+                                </m:r>
+                              </m:e>
+                              <m:e>
+                                <m:r>
+                                  <a:rPr lang="en-US" sz="2800" i="1" smtClean="0">
+                                    <a:latin typeface="Cambria Math" panose="02040503050406030204" pitchFamily="18" charset="0"/>
+                                  </a:rPr>
+                                  <m:t>⋮</m:t>
+                                </m:r>
+                              </m:e>
+                            </m:mr>
+                            <m:mr>
+                              <m:e>
+                                <m:r>
+                                  <a:rPr lang="en-GB" sz="2800" b="0" i="1" smtClean="0">
+                                    <a:latin typeface="Cambria Math" panose="02040503050406030204" pitchFamily="18" charset="0"/>
+                                  </a:rPr>
+                                  <m:t>1.1</m:t>
+                                </m:r>
+                              </m:e>
+                              <m:e>
+                                <m:r>
+                                  <a:rPr lang="en-US" sz="2800" i="1" smtClean="0">
+                                    <a:latin typeface="Cambria Math" panose="02040503050406030204" pitchFamily="18" charset="0"/>
+                                  </a:rPr>
+                                  <m:t>⋯</m:t>
+                                </m:r>
+                              </m:e>
+                              <m:e>
+                                <m:r>
+                                  <a:rPr lang="en-GB" sz="2800" b="0" i="1" smtClean="0">
+                                    <a:latin typeface="Cambria Math" panose="02040503050406030204" pitchFamily="18" charset="0"/>
+                                  </a:rPr>
+                                  <m:t>0.8</m:t>
+                                </m:r>
+                              </m:e>
+                            </m:mr>
+                          </m:m>
+                        </m:e>
+                      </m:d>
+                    </m:oMath>
+                  </m:oMathPara>
+                </a14:m>
+                <a:endParaRPr lang="en-US" sz="2800" dirty="0"/>
+              </a:p>
+            </p:txBody>
+          </p:sp>
+        </mc:Choice>
+        <mc:Fallback>
+          <p:sp>
+            <p:nvSpPr>
+              <p:cNvPr id="4" name="TextBox 3">
+                <a:extLst>
+                  <a:ext uri="{FF2B5EF4-FFF2-40B4-BE49-F238E27FC236}">
+                    <a16:creationId xmlns:a16="http://schemas.microsoft.com/office/drawing/2014/main" id="{9DD721F7-5D5D-31BA-BFBD-298AAA5F3AEE}"/>
+                  </a:ext>
+                </a:extLst>
+              </p:cNvPr>
+              <p:cNvSpPr txBox="1">
+                <a:spLocks noRot="1" noChangeAspect="1" noMove="1" noResize="1" noEditPoints="1" noAdjustHandles="1" noChangeArrowheads="1" noChangeShapeType="1" noTextEdit="1"/>
+              </p:cNvSpPr>
+              <p:nvPr/>
+            </p:nvSpPr>
+            <p:spPr>
+              <a:xfrm>
+                <a:off x="4526811" y="3313537"/>
+                <a:ext cx="3138378" cy="1139414"/>
+              </a:xfrm>
+              <a:prstGeom prst="rect">
+                <a:avLst/>
+              </a:prstGeom>
+              <a:blipFill>
+                <a:blip r:embed="rId3"/>
+                <a:stretch>
+                  <a:fillRect t="-1111" b="-10000"/>
+                </a:stretch>
+              </a:blipFill>
+            </p:spPr>
+            <p:txBody>
+              <a:bodyPr/>
+              <a:lstStyle/>
+              <a:p>
+                <a:r>
+                  <a:rPr lang="en-US">
+                    <a:noFill/>
+                  </a:rPr>
+                  <a:t> </a:t>
+                </a:r>
+              </a:p>
+            </p:txBody>
+          </p:sp>
+        </mc:Fallback>
+      </mc:AlternateContent>
+      <p:sp>
+        <p:nvSpPr>
+          <p:cNvPr id="5" name="Left Brace 4">
+            <a:extLst>
+              <a:ext uri="{FF2B5EF4-FFF2-40B4-BE49-F238E27FC236}">
+                <a16:creationId xmlns:a16="http://schemas.microsoft.com/office/drawing/2014/main" id="{F1923C56-A3D7-0983-FE0C-CDCB3776E673}"/>
+              </a:ext>
+            </a:extLst>
+          </p:cNvPr>
+          <p:cNvSpPr/>
+          <p:nvPr/>
+        </p:nvSpPr>
+        <p:spPr>
+          <a:xfrm>
+            <a:off x="4526811" y="3313537"/>
+            <a:ext cx="293842" cy="1139414"/>
+          </a:xfrm>
+          <a:prstGeom prst="leftBrace">
+            <a:avLst/>
+          </a:prstGeom>
+          <a:ln>
+            <a:solidFill>
+              <a:schemeClr val="tx1"/>
+            </a:solidFill>
+          </a:ln>
+        </p:spPr>
+        <p:style>
+          <a:lnRef idx="2">
+            <a:schemeClr val="accent1"/>
+          </a:lnRef>
+          <a:fillRef idx="0">
+            <a:schemeClr val="accent1"/>
+          </a:fillRef>
+          <a:effectRef idx="1">
+            <a:schemeClr val="accent1"/>
+          </a:effectRef>
+          <a:fontRef idx="minor">
+            <a:schemeClr val="tx1"/>
+          </a:fontRef>
+        </p:style>
+        <p:txBody>
+          <a:bodyPr rtlCol="0" anchor="ctr"/>
+          <a:lstStyle/>
+          <a:p>
+            <a:pPr algn="ctr"/>
+            <a:endParaRPr lang="en-US"/>
+          </a:p>
+        </p:txBody>
+      </p:sp>
+      <p:sp>
+        <p:nvSpPr>
+          <p:cNvPr id="6" name="Left Brace 5">
+            <a:extLst>
+              <a:ext uri="{FF2B5EF4-FFF2-40B4-BE49-F238E27FC236}">
+                <a16:creationId xmlns:a16="http://schemas.microsoft.com/office/drawing/2014/main" id="{7AC38CC4-B8B9-0549-3459-8E7068101A7E}"/>
+              </a:ext>
+            </a:extLst>
+          </p:cNvPr>
+          <p:cNvSpPr/>
+          <p:nvPr/>
+        </p:nvSpPr>
+        <p:spPr>
+          <a:xfrm rot="5400000">
+            <a:off x="5932824" y="1975988"/>
+            <a:ext cx="293842" cy="2246319"/>
+          </a:xfrm>
+          <a:prstGeom prst="leftBrace">
+            <a:avLst/>
+          </a:prstGeom>
+          <a:ln>
+            <a:solidFill>
+              <a:schemeClr val="tx1"/>
+            </a:solidFill>
+          </a:ln>
+        </p:spPr>
+        <p:style>
+          <a:lnRef idx="2">
+            <a:schemeClr val="accent1"/>
+          </a:lnRef>
+          <a:fillRef idx="0">
+            <a:schemeClr val="accent1"/>
+          </a:fillRef>
+          <a:effectRef idx="1">
+            <a:schemeClr val="accent1"/>
+          </a:effectRef>
+          <a:fontRef idx="minor">
+            <a:schemeClr val="tx1"/>
+          </a:fontRef>
+        </p:style>
+        <p:txBody>
+          <a:bodyPr rtlCol="0" anchor="ctr"/>
+          <a:lstStyle/>
+          <a:p>
+            <a:pPr algn="ctr"/>
+            <a:endParaRPr lang="en-US"/>
+          </a:p>
+        </p:txBody>
+      </p:sp>
+      <p:sp>
+        <p:nvSpPr>
+          <p:cNvPr id="7" name="TextBox 6">
+            <a:extLst>
+              <a:ext uri="{FF2B5EF4-FFF2-40B4-BE49-F238E27FC236}">
+                <a16:creationId xmlns:a16="http://schemas.microsoft.com/office/drawing/2014/main" id="{302856F2-1956-E41A-2C67-6DE9B5880984}"/>
+              </a:ext>
+            </a:extLst>
+          </p:cNvPr>
+          <p:cNvSpPr txBox="1"/>
+          <p:nvPr/>
+        </p:nvSpPr>
+        <p:spPr>
+          <a:xfrm>
+            <a:off x="2630138" y="3698578"/>
+            <a:ext cx="1896673" cy="369332"/>
+          </a:xfrm>
+          <a:prstGeom prst="rect">
+            <a:avLst/>
+          </a:prstGeom>
+          <a:noFill/>
+        </p:spPr>
+        <p:txBody>
+          <a:bodyPr wrap="none" rtlCol="0">
+            <a:spAutoFit/>
+          </a:bodyPr>
+          <a:lstStyle/>
+          <a:p>
+            <a:r>
+              <a:rPr lang="en-US" dirty="0" err="1">
+                <a:latin typeface="CMU Serif Roman" panose="02000603000000000000" pitchFamily="2" charset="0"/>
+                <a:ea typeface="CMU Serif Roman" panose="02000603000000000000" pitchFamily="2" charset="0"/>
+                <a:cs typeface="CMU Serif Roman" panose="02000603000000000000" pitchFamily="2" charset="0"/>
+              </a:rPr>
+              <a:t>sequence_length</a:t>
+            </a:r>
+            <a:endParaRPr lang="en-US" dirty="0">
+              <a:latin typeface="CMU Serif Roman" panose="02000603000000000000" pitchFamily="2" charset="0"/>
+              <a:ea typeface="CMU Serif Roman" panose="02000603000000000000" pitchFamily="2" charset="0"/>
+              <a:cs typeface="CMU Serif Roman" panose="02000603000000000000" pitchFamily="2" charset="0"/>
+            </a:endParaRPr>
+          </a:p>
+        </p:txBody>
+      </p:sp>
+      <p:sp>
+        <p:nvSpPr>
+          <p:cNvPr id="8" name="TextBox 7">
+            <a:extLst>
+              <a:ext uri="{FF2B5EF4-FFF2-40B4-BE49-F238E27FC236}">
+                <a16:creationId xmlns:a16="http://schemas.microsoft.com/office/drawing/2014/main" id="{1952DE53-07FD-283E-5275-3C7E119F7CCF}"/>
+              </a:ext>
+            </a:extLst>
+          </p:cNvPr>
+          <p:cNvSpPr txBox="1"/>
+          <p:nvPr/>
+        </p:nvSpPr>
+        <p:spPr>
+          <a:xfrm>
+            <a:off x="5160262" y="2582894"/>
+            <a:ext cx="1838965" cy="369332"/>
+          </a:xfrm>
+          <a:prstGeom prst="rect">
+            <a:avLst/>
+          </a:prstGeom>
+          <a:noFill/>
+        </p:spPr>
+        <p:txBody>
+          <a:bodyPr wrap="none" rtlCol="0">
+            <a:spAutoFit/>
+          </a:bodyPr>
+          <a:lstStyle/>
+          <a:p>
+            <a:r>
+              <a:rPr lang="en-US" dirty="0" err="1">
+                <a:latin typeface="CMU Serif Roman" panose="02000603000000000000" pitchFamily="2" charset="0"/>
+                <a:ea typeface="CMU Serif Roman" panose="02000603000000000000" pitchFamily="2" charset="0"/>
+                <a:cs typeface="CMU Serif Roman" panose="02000603000000000000" pitchFamily="2" charset="0"/>
+              </a:rPr>
+              <a:t>embedding_dim</a:t>
+            </a:r>
+            <a:endParaRPr lang="en-US" dirty="0">
+              <a:latin typeface="CMU Serif Roman" panose="02000603000000000000" pitchFamily="2" charset="0"/>
+              <a:ea typeface="CMU Serif Roman" panose="02000603000000000000" pitchFamily="2" charset="0"/>
+              <a:cs typeface="CMU Serif Roman" panose="02000603000000000000" pitchFamily="2" charset="0"/>
+            </a:endParaRPr>
+          </a:p>
+        </p:txBody>
+      </p:sp>
+      <p:sp>
+        <p:nvSpPr>
+          <p:cNvPr id="9" name="Rectangle 8">
+            <a:extLst>
+              <a:ext uri="{FF2B5EF4-FFF2-40B4-BE49-F238E27FC236}">
+                <a16:creationId xmlns:a16="http://schemas.microsoft.com/office/drawing/2014/main" id="{1155574E-BA21-C271-5D42-D6619493BEDE}"/>
+              </a:ext>
+            </a:extLst>
+          </p:cNvPr>
+          <p:cNvSpPr/>
+          <p:nvPr/>
+        </p:nvSpPr>
+        <p:spPr>
+          <a:xfrm>
+            <a:off x="5061284" y="3246069"/>
+            <a:ext cx="2085474" cy="452509"/>
+          </a:xfrm>
+          <a:prstGeom prst="rect">
+            <a:avLst/>
+          </a:prstGeom>
+          <a:solidFill>
+            <a:srgbClr val="1B55EB">
+              <a:alpha val="32000"/>
+            </a:srgbClr>
+          </a:solidFill>
+          <a:ln>
+            <a:noFill/>
+          </a:ln>
+          <a:effectLst>
+            <a:softEdge rad="57129"/>
+          </a:effectLst>
+        </p:spPr>
+        <p:style>
+          <a:lnRef idx="2">
+            <a:schemeClr val="accent1">
+              <a:shade val="15000"/>
+            </a:schemeClr>
+          </a:lnRef>
+          <a:fillRef idx="1">
+            <a:schemeClr val="accent1"/>
+          </a:fillRef>
+          <a:effectRef idx="0">
+            <a:schemeClr val="accent1"/>
+          </a:effectRef>
+          <a:fontRef idx="minor">
+            <a:schemeClr val="lt1"/>
+          </a:fontRef>
+        </p:style>
+        <p:txBody>
+          <a:bodyPr rtlCol="0" anchor="ctr"/>
+          <a:lstStyle/>
+          <a:p>
+            <a:pPr algn="ctr"/>
+            <a:endParaRPr lang="en-US"/>
+          </a:p>
+        </p:txBody>
+      </p:sp>
+      <p:sp>
+        <p:nvSpPr>
+          <p:cNvPr id="10" name="TextBox 9">
+            <a:extLst>
+              <a:ext uri="{FF2B5EF4-FFF2-40B4-BE49-F238E27FC236}">
+                <a16:creationId xmlns:a16="http://schemas.microsoft.com/office/drawing/2014/main" id="{13A22498-D9C3-2FA5-4C1B-D9D0CE806423}"/>
+              </a:ext>
+            </a:extLst>
+          </p:cNvPr>
+          <p:cNvSpPr txBox="1"/>
+          <p:nvPr/>
+        </p:nvSpPr>
+        <p:spPr>
+          <a:xfrm>
+            <a:off x="7905820" y="3246069"/>
+            <a:ext cx="3594647" cy="1200329"/>
+          </a:xfrm>
+          <a:prstGeom prst="rect">
+            <a:avLst/>
+          </a:prstGeom>
+          <a:noFill/>
+        </p:spPr>
+        <p:txBody>
+          <a:bodyPr wrap="square" rtlCol="0">
+            <a:spAutoFit/>
+          </a:bodyPr>
+          <a:lstStyle/>
+          <a:p>
+            <a:r>
+              <a:rPr lang="en-US" dirty="0">
+                <a:solidFill>
+                  <a:srgbClr val="1B55EB"/>
+                </a:solidFill>
+                <a:latin typeface="CMU Serif Roman" panose="02000603000000000000" pitchFamily="2" charset="0"/>
+                <a:ea typeface="CMU Serif Roman" panose="02000603000000000000" pitchFamily="2" charset="0"/>
+                <a:cs typeface="CMU Serif Roman" panose="02000603000000000000" pitchFamily="2" charset="0"/>
+              </a:rPr>
+              <a:t>Context-adjusted embedding vector for a single token</a:t>
+            </a:r>
+          </a:p>
+          <a:p>
+            <a:r>
+              <a:rPr lang="en-US" dirty="0">
+                <a:solidFill>
+                  <a:srgbClr val="1B55EB"/>
+                </a:solidFill>
+                <a:latin typeface="CMU Serif Roman" panose="02000603000000000000" pitchFamily="2" charset="0"/>
+                <a:ea typeface="CMU Serif Roman" panose="02000603000000000000" pitchFamily="2" charset="0"/>
+                <a:cs typeface="CMU Serif Roman" panose="02000603000000000000" pitchFamily="2" charset="0"/>
+              </a:rPr>
+              <a:t>e.g. “the” in “the cat sat on the mat”</a:t>
+            </a:r>
+          </a:p>
+        </p:txBody>
+      </p:sp>
+      <p:cxnSp>
+        <p:nvCxnSpPr>
+          <p:cNvPr id="12" name="Curved Connector 11">
+            <a:extLst>
+              <a:ext uri="{FF2B5EF4-FFF2-40B4-BE49-F238E27FC236}">
+                <a16:creationId xmlns:a16="http://schemas.microsoft.com/office/drawing/2014/main" id="{E002630D-6168-3A23-EF9F-48395C40895B}"/>
+              </a:ext>
+            </a:extLst>
+          </p:cNvPr>
+          <p:cNvCxnSpPr/>
+          <p:nvPr/>
+        </p:nvCxnSpPr>
+        <p:spPr>
+          <a:xfrm rot="10800000">
+            <a:off x="7269018" y="3472323"/>
+            <a:ext cx="636802" cy="373910"/>
+          </a:xfrm>
+          <a:prstGeom prst="curvedConnector3">
+            <a:avLst/>
+          </a:prstGeom>
+          <a:ln>
+            <a:solidFill>
+              <a:srgbClr val="1B55EB"/>
+            </a:solidFill>
+            <a:tailEnd type="triangle"/>
+          </a:ln>
+        </p:spPr>
+        <p:style>
+          <a:lnRef idx="2">
+            <a:schemeClr val="accent1"/>
+          </a:lnRef>
+          <a:fillRef idx="0">
+            <a:schemeClr val="accent1"/>
+          </a:fillRef>
+          <a:effectRef idx="1">
+            <a:schemeClr val="accent1"/>
+          </a:effectRef>
+          <a:fontRef idx="minor">
+            <a:schemeClr val="tx1"/>
+          </a:fontRef>
+        </p:style>
+      </p:cxnSp>
     </p:spTree>
     <p:extLst>
       <p:ext uri="{BB962C8B-B14F-4D97-AF65-F5344CB8AC3E}">
@@ -16852,6 +17355,139 @@
   <p:clrMapOvr>
     <a:masterClrMapping/>
   </p:clrMapOvr>
+  <p:timing>
+    <p:tnLst>
+      <p:par>
+        <p:cTn id="1" dur="indefinite" restart="never" nodeType="tmRoot">
+          <p:childTnLst>
+            <p:seq concurrent="1" nextAc="seek">
+              <p:cTn id="2" dur="indefinite" nodeType="mainSeq">
+                <p:childTnLst>
+                  <p:par>
+                    <p:cTn id="3" fill="hold">
+                      <p:stCondLst>
+                        <p:cond delay="indefinite"/>
+                      </p:stCondLst>
+                      <p:childTnLst>
+                        <p:par>
+                          <p:cTn id="4" fill="hold">
+                            <p:stCondLst>
+                              <p:cond delay="0"/>
+                            </p:stCondLst>
+                            <p:childTnLst>
+                              <p:par>
+                                <p:cTn id="5" presetID="1" presetClass="entr" presetSubtype="0" fill="hold" grpId="0" nodeType="clickEffect">
+                                  <p:stCondLst>
+                                    <p:cond delay="0"/>
+                                  </p:stCondLst>
+                                  <p:childTnLst>
+                                    <p:set>
+                                      <p:cBhvr>
+                                        <p:cTn id="6" dur="1" fill="hold">
+                                          <p:stCondLst>
+                                            <p:cond delay="0"/>
+                                          </p:stCondLst>
+                                        </p:cTn>
+                                        <p:tgtEl>
+                                          <p:spTgt spid="10"/>
+                                        </p:tgtEl>
+                                        <p:attrNameLst>
+                                          <p:attrName>style.visibility</p:attrName>
+                                        </p:attrNameLst>
+                                      </p:cBhvr>
+                                      <p:to>
+                                        <p:strVal val="visible"/>
+                                      </p:to>
+                                    </p:set>
+                                  </p:childTnLst>
+                                </p:cTn>
+                              </p:par>
+                              <p:par>
+                                <p:cTn id="7" presetID="1" presetClass="entr" presetSubtype="0" fill="hold" nodeType="withEffect">
+                                  <p:stCondLst>
+                                    <p:cond delay="0"/>
+                                  </p:stCondLst>
+                                  <p:childTnLst>
+                                    <p:set>
+                                      <p:cBhvr>
+                                        <p:cTn id="8" dur="1" fill="hold">
+                                          <p:stCondLst>
+                                            <p:cond delay="0"/>
+                                          </p:stCondLst>
+                                        </p:cTn>
+                                        <p:tgtEl>
+                                          <p:spTgt spid="12"/>
+                                        </p:tgtEl>
+                                        <p:attrNameLst>
+                                          <p:attrName>style.visibility</p:attrName>
+                                        </p:attrNameLst>
+                                      </p:cBhvr>
+                                      <p:to>
+                                        <p:strVal val="visible"/>
+                                      </p:to>
+                                    </p:set>
+                                  </p:childTnLst>
+                                </p:cTn>
+                              </p:par>
+                              <p:par>
+                                <p:cTn id="9" presetID="1" presetClass="entr" presetSubtype="0" fill="hold" grpId="0" nodeType="withEffect">
+                                  <p:stCondLst>
+                                    <p:cond delay="0"/>
+                                  </p:stCondLst>
+                                  <p:childTnLst>
+                                    <p:set>
+                                      <p:cBhvr>
+                                        <p:cTn id="10" dur="1" fill="hold">
+                                          <p:stCondLst>
+                                            <p:cond delay="0"/>
+                                          </p:stCondLst>
+                                        </p:cTn>
+                                        <p:tgtEl>
+                                          <p:spTgt spid="9"/>
+                                        </p:tgtEl>
+                                        <p:attrNameLst>
+                                          <p:attrName>style.visibility</p:attrName>
+                                        </p:attrNameLst>
+                                      </p:cBhvr>
+                                      <p:to>
+                                        <p:strVal val="visible"/>
+                                      </p:to>
+                                    </p:set>
+                                  </p:childTnLst>
+                                </p:cTn>
+                              </p:par>
+                            </p:childTnLst>
+                          </p:cTn>
+                        </p:par>
+                      </p:childTnLst>
+                    </p:cTn>
+                  </p:par>
+                </p:childTnLst>
+              </p:cTn>
+              <p:prevCondLst>
+                <p:cond evt="onPrev" delay="0">
+                  <p:tgtEl>
+                    <p:sldTgt/>
+                  </p:tgtEl>
+                </p:cond>
+              </p:prevCondLst>
+              <p:nextCondLst>
+                <p:cond evt="onNext" delay="0">
+                  <p:tgtEl>
+                    <p:sldTgt/>
+                  </p:tgtEl>
+                </p:cond>
+              </p:nextCondLst>
+            </p:seq>
+          </p:childTnLst>
+        </p:cTn>
+      </p:par>
+    </p:tnLst>
+    <p:bldLst>
+      <p:bldP spid="9" grpId="0" animBg="1"/>
+      <p:bldP spid="10" grpId="0"/>
+    </p:bldLst>
+  </p:timing>
 </p:sld>
 </file>
 
@@ -17755,8 +18391,8 @@
           </a:fontRef>
         </p:style>
       </p:cxnSp>
-      <mc:AlternateContent xmlns:mc="http://schemas.openxmlformats.org/markup-compatibility/2006">
-        <mc:Choice xmlns:a14="http://schemas.microsoft.com/office/drawing/2010/main" Requires="a14">
+      <mc:AlternateContent xmlns:mc="http://schemas.openxmlformats.org/markup-compatibility/2006" xmlns:a14="http://schemas.microsoft.com/office/drawing/2010/main">
+        <mc:Choice Requires="a14">
           <p:sp>
             <p:nvSpPr>
               <p:cNvPr id="13" name="TextBox 12">
@@ -17819,7 +18455,7 @@
             </p:txBody>
           </p:sp>
         </mc:Choice>
-        <mc:Fallback>
+        <mc:Fallback xmlns="">
           <p:sp>
             <p:nvSpPr>
               <p:cNvPr id="13" name="TextBox 12">
@@ -22802,15 +23438,7 @@
                 <a:ea typeface="CMU Serif Roman" panose="02000603000000000000" pitchFamily="2" charset="0"/>
                 <a:cs typeface="CMU Serif Roman" panose="02000603000000000000" pitchFamily="2" charset="0"/>
               </a:rPr>
-              <a:t>The </a:t>
-            </a:r>
-            <a:r>
-              <a:rPr lang="en-GB">
-                <a:latin typeface="CMU Serif Roman" panose="02000603000000000000" pitchFamily="2" charset="0"/>
-                <a:ea typeface="CMU Serif Roman" panose="02000603000000000000" pitchFamily="2" charset="0"/>
-                <a:cs typeface="CMU Serif Roman" panose="02000603000000000000" pitchFamily="2" charset="0"/>
-              </a:rPr>
-              <a:t>Language Model</a:t>
+              <a:t>The Language Model</a:t>
             </a:r>
             <a:endParaRPr lang="en-US" dirty="0">
               <a:latin typeface="CMU Serif Roman" panose="02000603000000000000" pitchFamily="2" charset="0"/>

--- a/slides/flsg/6-sampling-flsg.pptx
+++ b/slides/flsg/6-sampling-flsg.pptx
@@ -16805,8 +16805,8 @@
           </a:p>
         </p:txBody>
       </p:sp>
-      <mc:AlternateContent xmlns:mc="http://schemas.openxmlformats.org/markup-compatibility/2006">
-        <mc:Choice xmlns:a14="http://schemas.microsoft.com/office/drawing/2010/main" Requires="a14">
+      <mc:AlternateContent xmlns:mc="http://schemas.openxmlformats.org/markup-compatibility/2006" xmlns:a14="http://schemas.microsoft.com/office/drawing/2010/main">
+        <mc:Choice Requires="a14">
           <p:sp>
             <p:nvSpPr>
               <p:cNvPr id="4" name="TextBox 3">
@@ -16835,6 +16835,7 @@
               </a:bodyPr>
               <a:lstStyle/>
               <a:p>
+                <a:pPr/>
                 <a14:m>
                   <m:oMathPara xmlns:m="http://schemas.openxmlformats.org/officeDocument/2006/math">
                     <m:oMathParaPr>
@@ -16877,7 +16878,13 @@
                                   <a:rPr lang="en-GB" sz="2800" b="0" i="1" smtClean="0">
                                     <a:latin typeface="Cambria Math" panose="02040503050406030204" pitchFamily="18" charset="0"/>
                                   </a:rPr>
-                                  <m:t>2.7</m:t>
+                                  <m:t>2</m:t>
+                                </m:r>
+                                <m:r>
+                                  <a:rPr lang="en-GB" sz="2800" b="0" i="1" smtClean="0">
+                                    <a:latin typeface="Cambria Math" panose="02040503050406030204" pitchFamily="18" charset="0"/>
+                                  </a:rPr>
+                                  <m:t>.7</m:t>
                                 </m:r>
                               </m:e>
                               <m:e>
@@ -16893,7 +16900,7 @@
                                   <a:rPr lang="en-GB" sz="2800" b="0" i="1" smtClean="0">
                                     <a:latin typeface="Cambria Math" panose="02040503050406030204" pitchFamily="18" charset="0"/>
                                   </a:rPr>
-                                  <m:t>-1.2</m:t>
+                                  <m:t>−1.2</m:t>
                                 </m:r>
                               </m:e>
                             </m:mr>
@@ -16960,7 +16967,7 @@
             </p:txBody>
           </p:sp>
         </mc:Choice>
-        <mc:Fallback>
+        <mc:Fallback xmlns="">
           <p:sp>
             <p:nvSpPr>
               <p:cNvPr id="4" name="TextBox 3">
